--- a/Curso Gas B/16 - UNE 60670 - Instalaciones en servicio y control periodico/16 - UNE 60670 - Instalaciones en servicio y control periodico - Vídeo 4.pptx
+++ b/Curso Gas B/16 - UNE 60670 - Instalaciones en servicio y control periodico/16 - UNE 60670 - Instalaciones en servicio y control periodico - Vídeo 4.pptx
@@ -5044,7 +5044,7 @@
             <a:r>
               <a:rPr sz="1400" b="1" i="0">
                 <a:solidFill>
-                  <a:srgbClr val="CADCFC"/>
+                  <a:srgbClr val="F4A24C"/>
                 </a:solidFill>
                 <a:latin typeface="Montserrat"/>
               </a:rPr>
@@ -5055,13 +5055,57 @@
       </p:sp>
       <p:sp>
         <p:nvSpPr>
-          <p:cNvPr id="4" name="TextBox 3"/>
+          <p:cNvPr id="4" name="Rounded Rectangle 3"/>
+          <p:cNvSpPr/>
+          <p:nvPr/>
+        </p:nvSpPr>
+        <p:spPr>
+          <a:xfrm>
+            <a:off x="868680" y="2057400"/>
+            <a:ext cx="1463040" cy="82296"/>
+          </a:xfrm>
+          <a:prstGeom prst="roundRect">
+            <a:avLst/>
+          </a:prstGeom>
+          <a:solidFill>
+            <a:srgbClr val="E8801A"/>
+          </a:solidFill>
+          <a:ln>
+            <a:noFill/>
+          </a:ln>
+          <a:effectLst/>
+        </p:spPr>
+        <p:style>
+          <a:lnRef idx="1">
+            <a:schemeClr val="accent1"/>
+          </a:lnRef>
+          <a:fillRef idx="3">
+            <a:schemeClr val="accent1"/>
+          </a:fillRef>
+          <a:effectRef idx="2">
+            <a:schemeClr val="accent1"/>
+          </a:effectRef>
+          <a:fontRef idx="minor">
+            <a:schemeClr val="lt1"/>
+          </a:fontRef>
+        </p:style>
+        <p:txBody>
+          <a:bodyPr rtlCol="0" anchor="ctr"/>
+          <a:lstStyle/>
+          <a:p>
+            <a:pPr algn="ctr"/>
+          </a:p>
+        </p:txBody>
+      </p:sp>
+      <p:sp>
+        <p:nvSpPr>
+          <p:cNvPr id="5" name="TextBox 4"/>
           <p:cNvSpPr txBox="1"/>
           <p:nvPr/>
         </p:nvSpPr>
         <p:spPr>
           <a:xfrm>
-            <a:off x="822960" y="2194560"/>
+            <a:off x="822960" y="2286000"/>
             <a:ext cx="10515600" cy="2011680"/>
           </a:xfrm>
           <a:prstGeom prst="rect">
@@ -5100,7 +5144,7 @@
       </p:sp>
       <p:sp>
         <p:nvSpPr>
-          <p:cNvPr id="5" name="TextBox 4"/>
+          <p:cNvPr id="6" name="TextBox 5"/>
           <p:cNvSpPr txBox="1"/>
           <p:nvPr/>
         </p:nvSpPr>
@@ -5272,7 +5316,7 @@
         <p:spPr>
           <a:xfrm>
             <a:off x="822960" y="457200"/>
-            <a:ext cx="8229600" cy="365760"/>
+            <a:ext cx="10058400" cy="365760"/>
           </a:xfrm>
           <a:prstGeom prst="rect">
             <a:avLst/>
@@ -5286,9 +5330,9 @@
           <a:lstStyle/>
           <a:p>
             <a:r>
-              <a:rPr sz="1200" b="1" i="0">
-                <a:solidFill>
-                  <a:srgbClr val="64748B"/>
+              <a:rPr sz="1300" b="1" i="0">
+                <a:solidFill>
+                  <a:srgbClr val="E8801A"/>
                 </a:solidFill>
                 <a:latin typeface="Montserrat"/>
               </a:rPr>
@@ -5320,7 +5364,7 @@
           <a:lstStyle/>
           <a:p>
             <a:r>
-              <a:rPr sz="2700" b="1" i="0">
+              <a:rPr sz="2800" b="1" i="0">
                 <a:solidFill>
                   <a:srgbClr val="1E2761"/>
                 </a:solidFill>
@@ -5333,13 +5377,57 @@
       </p:sp>
       <p:sp>
         <p:nvSpPr>
-          <p:cNvPr id="7" name="TextBox 6"/>
+          <p:cNvPr id="7" name="Rounded Rectangle 6"/>
+          <p:cNvSpPr/>
+          <p:nvPr/>
+        </p:nvSpPr>
+        <p:spPr>
+          <a:xfrm>
+            <a:off x="868680" y="1627632"/>
+            <a:ext cx="2011680" cy="73152"/>
+          </a:xfrm>
+          <a:prstGeom prst="roundRect">
+            <a:avLst/>
+          </a:prstGeom>
+          <a:solidFill>
+            <a:srgbClr val="E8801A"/>
+          </a:solidFill>
+          <a:ln>
+            <a:noFill/>
+          </a:ln>
+          <a:effectLst/>
+        </p:spPr>
+        <p:style>
+          <a:lnRef idx="1">
+            <a:schemeClr val="accent1"/>
+          </a:lnRef>
+          <a:fillRef idx="3">
+            <a:schemeClr val="accent1"/>
+          </a:fillRef>
+          <a:effectRef idx="2">
+            <a:schemeClr val="accent1"/>
+          </a:effectRef>
+          <a:fontRef idx="minor">
+            <a:schemeClr val="lt1"/>
+          </a:fontRef>
+        </p:style>
+        <p:txBody>
+          <a:bodyPr rtlCol="0" anchor="ctr"/>
+          <a:lstStyle/>
+          <a:p>
+            <a:pPr algn="ctr"/>
+          </a:p>
+        </p:txBody>
+      </p:sp>
+      <p:sp>
+        <p:nvSpPr>
+          <p:cNvPr id="8" name="TextBox 7"/>
           <p:cNvSpPr txBox="1"/>
           <p:nvPr/>
         </p:nvSpPr>
         <p:spPr>
           <a:xfrm>
-            <a:off x="822960" y="1920240"/>
+            <a:off x="822960" y="1965960"/>
             <a:ext cx="4983480" cy="4206240"/>
           </a:xfrm>
           <a:prstGeom prst="rect">
@@ -5355,17 +5443,17 @@
           <a:p>
             <a:pPr>
               <a:spcAft>
-                <a:spcPts val="1000"/>
+                <a:spcPts val="1100"/>
               </a:spcAft>
             </a:pPr>
             <a:r>
               <a:rPr sz="1600" b="1" i="0">
                 <a:solidFill>
-                  <a:srgbClr val="2E3A80"/>
-                </a:solidFill>
-                <a:latin typeface="Montserrat"/>
-              </a:rPr>
-              <a:t>•  </a:t>
+                  <a:srgbClr val="E8801A"/>
+                </a:solidFill>
+                <a:latin typeface="Montserrat"/>
+              </a:rPr>
+              <a:t>▸  </a:t>
             </a:r>
             <a:r>
               <a:rPr sz="1600" b="0" i="0">
@@ -5380,17 +5468,17 @@
           <a:p>
             <a:pPr>
               <a:spcAft>
-                <a:spcPts val="1000"/>
+                <a:spcPts val="1100"/>
               </a:spcAft>
             </a:pPr>
             <a:r>
               <a:rPr sz="1600" b="1" i="0">
                 <a:solidFill>
-                  <a:srgbClr val="2E3A80"/>
-                </a:solidFill>
-                <a:latin typeface="Montserrat"/>
-              </a:rPr>
-              <a:t>•  </a:t>
+                  <a:srgbClr val="E8801A"/>
+                </a:solidFill>
+                <a:latin typeface="Montserrat"/>
+              </a:rPr>
+              <a:t>▸  </a:t>
             </a:r>
             <a:r>
               <a:rPr sz="1600" b="0" i="0">
@@ -5405,17 +5493,17 @@
           <a:p>
             <a:pPr>
               <a:spcAft>
-                <a:spcPts val="1000"/>
+                <a:spcPts val="1100"/>
               </a:spcAft>
             </a:pPr>
             <a:r>
               <a:rPr sz="1600" b="1" i="0">
                 <a:solidFill>
-                  <a:srgbClr val="2E3A80"/>
-                </a:solidFill>
-                <a:latin typeface="Montserrat"/>
-              </a:rPr>
-              <a:t>•  </a:t>
+                  <a:srgbClr val="E8801A"/>
+                </a:solidFill>
+                <a:latin typeface="Montserrat"/>
+              </a:rPr>
+              <a:t>▸  </a:t>
             </a:r>
             <a:r>
               <a:rPr sz="1600" b="0" i="0">
@@ -5430,17 +5518,17 @@
           <a:p>
             <a:pPr>
               <a:spcAft>
-                <a:spcPts val="1000"/>
+                <a:spcPts val="1100"/>
               </a:spcAft>
             </a:pPr>
             <a:r>
               <a:rPr sz="1600" b="1" i="0">
                 <a:solidFill>
-                  <a:srgbClr val="2E3A80"/>
-                </a:solidFill>
-                <a:latin typeface="Montserrat"/>
-              </a:rPr>
-              <a:t>•  </a:t>
+                  <a:srgbClr val="E8801A"/>
+                </a:solidFill>
+                <a:latin typeface="Montserrat"/>
+              </a:rPr>
+              <a:t>▸  </a:t>
             </a:r>
             <a:r>
               <a:rPr sz="1600" b="0" i="0">
@@ -5456,7 +5544,7 @@
       </p:sp>
       <p:sp>
         <p:nvSpPr>
-          <p:cNvPr id="8" name="imgph" descr="IMGQ:digital gas analyzer display ppm reading"/>
+          <p:cNvPr id="9" name="imgph" descr="IMGQ:digital gas analyzer display ppm reading"/>
           <p:cNvSpPr/>
           <p:nvPr/>
         </p:nvSpPr>
@@ -5502,7 +5590,7 @@
       </p:sp>
       <p:sp>
         <p:nvSpPr>
-          <p:cNvPr id="9" name="TextBox 8"/>
+          <p:cNvPr id="10" name="TextBox 9"/>
           <p:cNvSpPr txBox="1"/>
           <p:nvPr/>
         </p:nvSpPr>
@@ -5687,7 +5775,7 @@
         <p:spPr>
           <a:xfrm>
             <a:off x="822960" y="457200"/>
-            <a:ext cx="8229600" cy="365760"/>
+            <a:ext cx="10058400" cy="365760"/>
           </a:xfrm>
           <a:prstGeom prst="rect">
             <a:avLst/>
@@ -5701,9 +5789,9 @@
           <a:lstStyle/>
           <a:p>
             <a:r>
-              <a:rPr sz="1200" b="1" i="0">
-                <a:solidFill>
-                  <a:srgbClr val="64748B"/>
+              <a:rPr sz="1300" b="1" i="0">
+                <a:solidFill>
+                  <a:srgbClr val="E8801A"/>
                 </a:solidFill>
                 <a:latin typeface="Montserrat"/>
               </a:rPr>
@@ -5735,7 +5823,7 @@
           <a:lstStyle/>
           <a:p>
             <a:r>
-              <a:rPr sz="2700" b="1" i="0">
+              <a:rPr sz="2800" b="1" i="0">
                 <a:solidFill>
                   <a:srgbClr val="1E2761"/>
                 </a:solidFill>
@@ -5748,13 +5836,57 @@
       </p:sp>
       <p:sp>
         <p:nvSpPr>
-          <p:cNvPr id="7" name="TextBox 6"/>
+          <p:cNvPr id="7" name="Rounded Rectangle 6"/>
+          <p:cNvSpPr/>
+          <p:nvPr/>
+        </p:nvSpPr>
+        <p:spPr>
+          <a:xfrm>
+            <a:off x="868680" y="1627632"/>
+            <a:ext cx="2011680" cy="73152"/>
+          </a:xfrm>
+          <a:prstGeom prst="roundRect">
+            <a:avLst/>
+          </a:prstGeom>
+          <a:solidFill>
+            <a:srgbClr val="E8801A"/>
+          </a:solidFill>
+          <a:ln>
+            <a:noFill/>
+          </a:ln>
+          <a:effectLst/>
+        </p:spPr>
+        <p:style>
+          <a:lnRef idx="1">
+            <a:schemeClr val="accent1"/>
+          </a:lnRef>
+          <a:fillRef idx="3">
+            <a:schemeClr val="accent1"/>
+          </a:fillRef>
+          <a:effectRef idx="2">
+            <a:schemeClr val="accent1"/>
+          </a:effectRef>
+          <a:fontRef idx="minor">
+            <a:schemeClr val="lt1"/>
+          </a:fontRef>
+        </p:style>
+        <p:txBody>
+          <a:bodyPr rtlCol="0" anchor="ctr"/>
+          <a:lstStyle/>
+          <a:p>
+            <a:pPr algn="ctr"/>
+          </a:p>
+        </p:txBody>
+      </p:sp>
+      <p:sp>
+        <p:nvSpPr>
+          <p:cNvPr id="8" name="TextBox 7"/>
           <p:cNvSpPr txBox="1"/>
           <p:nvPr/>
         </p:nvSpPr>
         <p:spPr>
           <a:xfrm>
-            <a:off x="822960" y="1920240"/>
+            <a:off x="822960" y="1965960"/>
             <a:ext cx="4983480" cy="4206240"/>
           </a:xfrm>
           <a:prstGeom prst="rect">
@@ -5770,17 +5902,17 @@
           <a:p>
             <a:pPr>
               <a:spcAft>
-                <a:spcPts val="1000"/>
+                <a:spcPts val="1100"/>
               </a:spcAft>
             </a:pPr>
             <a:r>
               <a:rPr sz="1600" b="1" i="0">
                 <a:solidFill>
-                  <a:srgbClr val="2E3A80"/>
-                </a:solidFill>
-                <a:latin typeface="Montserrat"/>
-              </a:rPr>
-              <a:t>•  </a:t>
+                  <a:srgbClr val="E8801A"/>
+                </a:solidFill>
+                <a:latin typeface="Montserrat"/>
+              </a:rPr>
+              <a:t>▸  </a:t>
             </a:r>
             <a:r>
               <a:rPr sz="1600" b="0" i="0">
@@ -5795,17 +5927,17 @@
           <a:p>
             <a:pPr>
               <a:spcAft>
-                <a:spcPts val="1000"/>
+                <a:spcPts val="1100"/>
               </a:spcAft>
             </a:pPr>
             <a:r>
               <a:rPr sz="1600" b="1" i="0">
                 <a:solidFill>
-                  <a:srgbClr val="2E3A80"/>
-                </a:solidFill>
-                <a:latin typeface="Montserrat"/>
-              </a:rPr>
-              <a:t>•  </a:t>
+                  <a:srgbClr val="E8801A"/>
+                </a:solidFill>
+                <a:latin typeface="Montserrat"/>
+              </a:rPr>
+              <a:t>▸  </a:t>
             </a:r>
             <a:r>
               <a:rPr sz="1600" b="0" i="0">
@@ -5820,17 +5952,17 @@
           <a:p>
             <a:pPr>
               <a:spcAft>
-                <a:spcPts val="1000"/>
+                <a:spcPts val="1100"/>
               </a:spcAft>
             </a:pPr>
             <a:r>
               <a:rPr sz="1600" b="1" i="0">
                 <a:solidFill>
-                  <a:srgbClr val="2E3A80"/>
-                </a:solidFill>
-                <a:latin typeface="Montserrat"/>
-              </a:rPr>
-              <a:t>•  </a:t>
+                  <a:srgbClr val="E8801A"/>
+                </a:solidFill>
+                <a:latin typeface="Montserrat"/>
+              </a:rPr>
+              <a:t>▸  </a:t>
             </a:r>
             <a:r>
               <a:rPr sz="1600" b="0" i="0">
@@ -5845,17 +5977,17 @@
           <a:p>
             <a:pPr>
               <a:spcAft>
-                <a:spcPts val="1000"/>
+                <a:spcPts val="1100"/>
               </a:spcAft>
             </a:pPr>
             <a:r>
               <a:rPr sz="1600" b="1" i="0">
                 <a:solidFill>
-                  <a:srgbClr val="2E3A80"/>
-                </a:solidFill>
-                <a:latin typeface="Montserrat"/>
-              </a:rPr>
-              <a:t>•  </a:t>
+                  <a:srgbClr val="E8801A"/>
+                </a:solidFill>
+                <a:latin typeface="Montserrat"/>
+              </a:rPr>
+              <a:t>▸  </a:t>
             </a:r>
             <a:r>
               <a:rPr sz="1600" b="0" i="0">
@@ -5871,7 +6003,7 @@
       </p:sp>
       <p:sp>
         <p:nvSpPr>
-          <p:cNvPr id="8" name="imgph" descr="IMGQ:gas burner flame sensor thermocouple"/>
+          <p:cNvPr id="9" name="imgph" descr="IMGQ:gas burner flame sensor thermocouple"/>
           <p:cNvSpPr/>
           <p:nvPr/>
         </p:nvSpPr>
@@ -5917,7 +6049,7 @@
       </p:sp>
       <p:sp>
         <p:nvSpPr>
-          <p:cNvPr id="9" name="TextBox 8"/>
+          <p:cNvPr id="10" name="TextBox 9"/>
           <p:cNvSpPr txBox="1"/>
           <p:nvPr/>
         </p:nvSpPr>
@@ -6102,7 +6234,7 @@
         <p:spPr>
           <a:xfrm>
             <a:off x="822960" y="457200"/>
-            <a:ext cx="8229600" cy="365760"/>
+            <a:ext cx="10058400" cy="365760"/>
           </a:xfrm>
           <a:prstGeom prst="rect">
             <a:avLst/>
@@ -6116,9 +6248,9 @@
           <a:lstStyle/>
           <a:p>
             <a:r>
-              <a:rPr sz="1200" b="1" i="0">
-                <a:solidFill>
-                  <a:srgbClr val="64748B"/>
+              <a:rPr sz="1300" b="1" i="0">
+                <a:solidFill>
+                  <a:srgbClr val="E8801A"/>
                 </a:solidFill>
                 <a:latin typeface="Montserrat"/>
               </a:rPr>
@@ -6150,7 +6282,7 @@
           <a:lstStyle/>
           <a:p>
             <a:r>
-              <a:rPr sz="2700" b="1" i="0">
+              <a:rPr sz="2800" b="1" i="0">
                 <a:solidFill>
                   <a:srgbClr val="1E2761"/>
                 </a:solidFill>
@@ -6163,13 +6295,57 @@
       </p:sp>
       <p:sp>
         <p:nvSpPr>
-          <p:cNvPr id="7" name="TextBox 6"/>
+          <p:cNvPr id="7" name="Rounded Rectangle 6"/>
+          <p:cNvSpPr/>
+          <p:nvPr/>
+        </p:nvSpPr>
+        <p:spPr>
+          <a:xfrm>
+            <a:off x="868680" y="1627632"/>
+            <a:ext cx="2011680" cy="73152"/>
+          </a:xfrm>
+          <a:prstGeom prst="roundRect">
+            <a:avLst/>
+          </a:prstGeom>
+          <a:solidFill>
+            <a:srgbClr val="E8801A"/>
+          </a:solidFill>
+          <a:ln>
+            <a:noFill/>
+          </a:ln>
+          <a:effectLst/>
+        </p:spPr>
+        <p:style>
+          <a:lnRef idx="1">
+            <a:schemeClr val="accent1"/>
+          </a:lnRef>
+          <a:fillRef idx="3">
+            <a:schemeClr val="accent1"/>
+          </a:fillRef>
+          <a:effectRef idx="2">
+            <a:schemeClr val="accent1"/>
+          </a:effectRef>
+          <a:fontRef idx="minor">
+            <a:schemeClr val="lt1"/>
+          </a:fontRef>
+        </p:style>
+        <p:txBody>
+          <a:bodyPr rtlCol="0" anchor="ctr"/>
+          <a:lstStyle/>
+          <a:p>
+            <a:pPr algn="ctr"/>
+          </a:p>
+        </p:txBody>
+      </p:sp>
+      <p:sp>
+        <p:nvSpPr>
+          <p:cNvPr id="8" name="TextBox 7"/>
           <p:cNvSpPr txBox="1"/>
           <p:nvPr/>
         </p:nvSpPr>
         <p:spPr>
           <a:xfrm>
-            <a:off x="822960" y="1920240"/>
+            <a:off x="822960" y="1965960"/>
             <a:ext cx="4983480" cy="4206240"/>
           </a:xfrm>
           <a:prstGeom prst="rect">
@@ -6185,17 +6361,17 @@
           <a:p>
             <a:pPr>
               <a:spcAft>
-                <a:spcPts val="1000"/>
+                <a:spcPts val="1100"/>
               </a:spcAft>
             </a:pPr>
             <a:r>
               <a:rPr sz="1600" b="1" i="0">
                 <a:solidFill>
-                  <a:srgbClr val="2E3A80"/>
-                </a:solidFill>
-                <a:latin typeface="Montserrat"/>
-              </a:rPr>
-              <a:t>•  </a:t>
+                  <a:srgbClr val="E8801A"/>
+                </a:solidFill>
+                <a:latin typeface="Montserrat"/>
+              </a:rPr>
+              <a:t>▸  </a:t>
             </a:r>
             <a:r>
               <a:rPr sz="1600" b="0" i="0">
@@ -6210,17 +6386,17 @@
           <a:p>
             <a:pPr>
               <a:spcAft>
-                <a:spcPts val="1000"/>
+                <a:spcPts val="1100"/>
               </a:spcAft>
             </a:pPr>
             <a:r>
               <a:rPr sz="1600" b="1" i="0">
                 <a:solidFill>
-                  <a:srgbClr val="2E3A80"/>
-                </a:solidFill>
-                <a:latin typeface="Montserrat"/>
-              </a:rPr>
-              <a:t>•  </a:t>
+                  <a:srgbClr val="E8801A"/>
+                </a:solidFill>
+                <a:latin typeface="Montserrat"/>
+              </a:rPr>
+              <a:t>▸  </a:t>
             </a:r>
             <a:r>
               <a:rPr sz="1600" b="0" i="0">
@@ -6235,17 +6411,17 @@
           <a:p>
             <a:pPr>
               <a:spcAft>
-                <a:spcPts val="1000"/>
+                <a:spcPts val="1100"/>
               </a:spcAft>
             </a:pPr>
             <a:r>
               <a:rPr sz="1600" b="1" i="0">
                 <a:solidFill>
-                  <a:srgbClr val="2E3A80"/>
-                </a:solidFill>
-                <a:latin typeface="Montserrat"/>
-              </a:rPr>
-              <a:t>•  </a:t>
+                  <a:srgbClr val="E8801A"/>
+                </a:solidFill>
+                <a:latin typeface="Montserrat"/>
+              </a:rPr>
+              <a:t>▸  </a:t>
             </a:r>
             <a:r>
               <a:rPr sz="1600" b="0" i="0">
@@ -6261,7 +6437,7 @@
       </p:sp>
       <p:sp>
         <p:nvSpPr>
-          <p:cNvPr id="8" name="imgph" descr="IMGQ:gas stove burner blue flame cooktop"/>
+          <p:cNvPr id="9" name="imgph" descr="IMGQ:gas stove burner blue flame cooktop"/>
           <p:cNvSpPr/>
           <p:nvPr/>
         </p:nvSpPr>
@@ -6307,7 +6483,7 @@
       </p:sp>
       <p:sp>
         <p:nvSpPr>
-          <p:cNvPr id="9" name="TextBox 8"/>
+          <p:cNvPr id="10" name="TextBox 9"/>
           <p:cNvSpPr txBox="1"/>
           <p:nvPr/>
         </p:nvSpPr>
@@ -6492,7 +6668,7 @@
         <p:spPr>
           <a:xfrm>
             <a:off x="822960" y="457200"/>
-            <a:ext cx="8229600" cy="365760"/>
+            <a:ext cx="10058400" cy="365760"/>
           </a:xfrm>
           <a:prstGeom prst="rect">
             <a:avLst/>
@@ -6506,9 +6682,9 @@
           <a:lstStyle/>
           <a:p>
             <a:r>
-              <a:rPr sz="1200" b="1" i="0">
-                <a:solidFill>
-                  <a:srgbClr val="64748B"/>
+              <a:rPr sz="1300" b="1" i="0">
+                <a:solidFill>
+                  <a:srgbClr val="E8801A"/>
                 </a:solidFill>
                 <a:latin typeface="Montserrat"/>
               </a:rPr>
@@ -6540,7 +6716,7 @@
           <a:lstStyle/>
           <a:p>
             <a:r>
-              <a:rPr sz="2700" b="1" i="0">
+              <a:rPr sz="2800" b="1" i="0">
                 <a:solidFill>
                   <a:srgbClr val="1E2761"/>
                 </a:solidFill>
@@ -6553,13 +6729,57 @@
       </p:sp>
       <p:sp>
         <p:nvSpPr>
-          <p:cNvPr id="7" name="TextBox 6"/>
+          <p:cNvPr id="7" name="Rounded Rectangle 6"/>
+          <p:cNvSpPr/>
+          <p:nvPr/>
+        </p:nvSpPr>
+        <p:spPr>
+          <a:xfrm>
+            <a:off x="868680" y="1627632"/>
+            <a:ext cx="2011680" cy="73152"/>
+          </a:xfrm>
+          <a:prstGeom prst="roundRect">
+            <a:avLst/>
+          </a:prstGeom>
+          <a:solidFill>
+            <a:srgbClr val="E8801A"/>
+          </a:solidFill>
+          <a:ln>
+            <a:noFill/>
+          </a:ln>
+          <a:effectLst/>
+        </p:spPr>
+        <p:style>
+          <a:lnRef idx="1">
+            <a:schemeClr val="accent1"/>
+          </a:lnRef>
+          <a:fillRef idx="3">
+            <a:schemeClr val="accent1"/>
+          </a:fillRef>
+          <a:effectRef idx="2">
+            <a:schemeClr val="accent1"/>
+          </a:effectRef>
+          <a:fontRef idx="minor">
+            <a:schemeClr val="lt1"/>
+          </a:fontRef>
+        </p:style>
+        <p:txBody>
+          <a:bodyPr rtlCol="0" anchor="ctr"/>
+          <a:lstStyle/>
+          <a:p>
+            <a:pPr algn="ctr"/>
+          </a:p>
+        </p:txBody>
+      </p:sp>
+      <p:sp>
+        <p:nvSpPr>
+          <p:cNvPr id="8" name="TextBox 7"/>
           <p:cNvSpPr txBox="1"/>
           <p:nvPr/>
         </p:nvSpPr>
         <p:spPr>
           <a:xfrm>
-            <a:off x="822960" y="1920240"/>
+            <a:off x="822960" y="1965960"/>
             <a:ext cx="4983480" cy="4206240"/>
           </a:xfrm>
           <a:prstGeom prst="rect">
@@ -6575,17 +6795,17 @@
           <a:p>
             <a:pPr>
               <a:spcAft>
-                <a:spcPts val="1000"/>
+                <a:spcPts val="1100"/>
               </a:spcAft>
             </a:pPr>
             <a:r>
               <a:rPr sz="1600" b="1" i="0">
                 <a:solidFill>
-                  <a:srgbClr val="2E3A80"/>
-                </a:solidFill>
-                <a:latin typeface="Montserrat"/>
-              </a:rPr>
-              <a:t>•  </a:t>
+                  <a:srgbClr val="E8801A"/>
+                </a:solidFill>
+                <a:latin typeface="Montserrat"/>
+              </a:rPr>
+              <a:t>▸  </a:t>
             </a:r>
             <a:r>
               <a:rPr sz="1600" b="0" i="0">
@@ -6600,17 +6820,17 @@
           <a:p>
             <a:pPr>
               <a:spcAft>
-                <a:spcPts val="1000"/>
+                <a:spcPts val="1100"/>
               </a:spcAft>
             </a:pPr>
             <a:r>
               <a:rPr sz="1600" b="1" i="0">
                 <a:solidFill>
-                  <a:srgbClr val="2E3A80"/>
-                </a:solidFill>
-                <a:latin typeface="Montserrat"/>
-              </a:rPr>
-              <a:t>•  </a:t>
+                  <a:srgbClr val="E8801A"/>
+                </a:solidFill>
+                <a:latin typeface="Montserrat"/>
+              </a:rPr>
+              <a:t>▸  </a:t>
             </a:r>
             <a:r>
               <a:rPr sz="1600" b="0" i="0">
@@ -6625,17 +6845,17 @@
           <a:p>
             <a:pPr>
               <a:spcAft>
-                <a:spcPts val="1000"/>
+                <a:spcPts val="1100"/>
               </a:spcAft>
             </a:pPr>
             <a:r>
               <a:rPr sz="1600" b="1" i="0">
                 <a:solidFill>
-                  <a:srgbClr val="2E3A80"/>
-                </a:solidFill>
-                <a:latin typeface="Montserrat"/>
-              </a:rPr>
-              <a:t>•  </a:t>
+                  <a:srgbClr val="E8801A"/>
+                </a:solidFill>
+                <a:latin typeface="Montserrat"/>
+              </a:rPr>
+              <a:t>▸  </a:t>
             </a:r>
             <a:r>
               <a:rPr sz="1600" b="0" i="0">
@@ -6650,17 +6870,17 @@
           <a:p>
             <a:pPr>
               <a:spcAft>
-                <a:spcPts val="1000"/>
+                <a:spcPts val="1100"/>
               </a:spcAft>
             </a:pPr>
             <a:r>
               <a:rPr sz="1600" b="1" i="0">
                 <a:solidFill>
-                  <a:srgbClr val="2E3A80"/>
-                </a:solidFill>
-                <a:latin typeface="Montserrat"/>
-              </a:rPr>
-              <a:t>•  </a:t>
+                  <a:srgbClr val="E8801A"/>
+                </a:solidFill>
+                <a:latin typeface="Montserrat"/>
+              </a:rPr>
+              <a:t>▸  </a:t>
             </a:r>
             <a:r>
               <a:rPr sz="1600" b="0" i="0">
@@ -6676,7 +6896,7 @@
       </p:sp>
       <p:sp>
         <p:nvSpPr>
-          <p:cNvPr id="8" name="imgph" descr="IMGQ:sampling hole drilled in flue pipe probe"/>
+          <p:cNvPr id="9" name="imgph" descr="IMGQ:sampling hole drilled in flue pipe probe"/>
           <p:cNvSpPr/>
           <p:nvPr/>
         </p:nvSpPr>
@@ -6722,7 +6942,7 @@
       </p:sp>
       <p:sp>
         <p:nvSpPr>
-          <p:cNvPr id="9" name="TextBox 8"/>
+          <p:cNvPr id="10" name="TextBox 9"/>
           <p:cNvSpPr txBox="1"/>
           <p:nvPr/>
         </p:nvSpPr>
@@ -6907,7 +7127,7 @@
         <p:spPr>
           <a:xfrm>
             <a:off x="822960" y="457200"/>
-            <a:ext cx="8229600" cy="365760"/>
+            <a:ext cx="10058400" cy="365760"/>
           </a:xfrm>
           <a:prstGeom prst="rect">
             <a:avLst/>
@@ -6921,9 +7141,9 @@
           <a:lstStyle/>
           <a:p>
             <a:r>
-              <a:rPr sz="1200" b="1" i="0">
-                <a:solidFill>
-                  <a:srgbClr val="64748B"/>
+              <a:rPr sz="1300" b="1" i="0">
+                <a:solidFill>
+                  <a:srgbClr val="E8801A"/>
                 </a:solidFill>
                 <a:latin typeface="Montserrat"/>
               </a:rPr>
@@ -6955,7 +7175,7 @@
           <a:lstStyle/>
           <a:p>
             <a:r>
-              <a:rPr sz="2700" b="1" i="0">
+              <a:rPr sz="2800" b="1" i="0">
                 <a:solidFill>
                   <a:srgbClr val="1E2761"/>
                 </a:solidFill>
@@ -6968,13 +7188,57 @@
       </p:sp>
       <p:sp>
         <p:nvSpPr>
-          <p:cNvPr id="7" name="TextBox 6"/>
+          <p:cNvPr id="7" name="Rounded Rectangle 6"/>
+          <p:cNvSpPr/>
+          <p:nvPr/>
+        </p:nvSpPr>
+        <p:spPr>
+          <a:xfrm>
+            <a:off x="868680" y="1627632"/>
+            <a:ext cx="2011680" cy="73152"/>
+          </a:xfrm>
+          <a:prstGeom prst="roundRect">
+            <a:avLst/>
+          </a:prstGeom>
+          <a:solidFill>
+            <a:srgbClr val="E8801A"/>
+          </a:solidFill>
+          <a:ln>
+            <a:noFill/>
+          </a:ln>
+          <a:effectLst/>
+        </p:spPr>
+        <p:style>
+          <a:lnRef idx="1">
+            <a:schemeClr val="accent1"/>
+          </a:lnRef>
+          <a:fillRef idx="3">
+            <a:schemeClr val="accent1"/>
+          </a:fillRef>
+          <a:effectRef idx="2">
+            <a:schemeClr val="accent1"/>
+          </a:effectRef>
+          <a:fontRef idx="minor">
+            <a:schemeClr val="lt1"/>
+          </a:fontRef>
+        </p:style>
+        <p:txBody>
+          <a:bodyPr rtlCol="0" anchor="ctr"/>
+          <a:lstStyle/>
+          <a:p>
+            <a:pPr algn="ctr"/>
+          </a:p>
+        </p:txBody>
+      </p:sp>
+      <p:sp>
+        <p:nvSpPr>
+          <p:cNvPr id="8" name="TextBox 7"/>
           <p:cNvSpPr txBox="1"/>
           <p:nvPr/>
         </p:nvSpPr>
         <p:spPr>
           <a:xfrm>
-            <a:off x="822960" y="1920240"/>
+            <a:off x="822960" y="1965960"/>
             <a:ext cx="4983480" cy="4206240"/>
           </a:xfrm>
           <a:prstGeom prst="rect">
@@ -6990,17 +7254,17 @@
           <a:p>
             <a:pPr>
               <a:spcAft>
-                <a:spcPts val="1000"/>
+                <a:spcPts val="1100"/>
               </a:spcAft>
             </a:pPr>
             <a:r>
               <a:rPr sz="1600" b="1" i="0">
                 <a:solidFill>
-                  <a:srgbClr val="2E3A80"/>
-                </a:solidFill>
-                <a:latin typeface="Montserrat"/>
-              </a:rPr>
-              <a:t>•  </a:t>
+                  <a:srgbClr val="E8801A"/>
+                </a:solidFill>
+                <a:latin typeface="Montserrat"/>
+              </a:rPr>
+              <a:t>▸  </a:t>
             </a:r>
             <a:r>
               <a:rPr sz="1600" b="0" i="0">
@@ -7015,17 +7279,17 @@
           <a:p>
             <a:pPr>
               <a:spcAft>
-                <a:spcPts val="1000"/>
+                <a:spcPts val="1100"/>
               </a:spcAft>
             </a:pPr>
             <a:r>
               <a:rPr sz="1600" b="1" i="0">
                 <a:solidFill>
-                  <a:srgbClr val="2E3A80"/>
-                </a:solidFill>
-                <a:latin typeface="Montserrat"/>
-              </a:rPr>
-              <a:t>•  </a:t>
+                  <a:srgbClr val="E8801A"/>
+                </a:solidFill>
+                <a:latin typeface="Montserrat"/>
+              </a:rPr>
+              <a:t>▸  </a:t>
             </a:r>
             <a:r>
               <a:rPr sz="1600" b="0" i="0">
@@ -7040,17 +7304,17 @@
           <a:p>
             <a:pPr>
               <a:spcAft>
-                <a:spcPts val="1000"/>
+                <a:spcPts val="1100"/>
               </a:spcAft>
             </a:pPr>
             <a:r>
               <a:rPr sz="1600" b="1" i="0">
                 <a:solidFill>
-                  <a:srgbClr val="2E3A80"/>
-                </a:solidFill>
-                <a:latin typeface="Montserrat"/>
-              </a:rPr>
-              <a:t>•  </a:t>
+                  <a:srgbClr val="E8801A"/>
+                </a:solidFill>
+                <a:latin typeface="Montserrat"/>
+              </a:rPr>
+              <a:t>▸  </a:t>
             </a:r>
             <a:r>
               <a:rPr sz="1600" b="0" i="0">
@@ -7065,17 +7329,17 @@
           <a:p>
             <a:pPr>
               <a:spcAft>
-                <a:spcPts val="1000"/>
+                <a:spcPts val="1100"/>
               </a:spcAft>
             </a:pPr>
             <a:r>
               <a:rPr sz="1600" b="1" i="0">
                 <a:solidFill>
-                  <a:srgbClr val="2E3A80"/>
-                </a:solidFill>
-                <a:latin typeface="Montserrat"/>
-              </a:rPr>
-              <a:t>•  </a:t>
+                  <a:srgbClr val="E8801A"/>
+                </a:solidFill>
+                <a:latin typeface="Montserrat"/>
+              </a:rPr>
+              <a:t>▸  </a:t>
             </a:r>
             <a:r>
               <a:rPr sz="1600" b="0" i="0">
@@ -7091,7 +7355,7 @@
       </p:sp>
       <p:sp>
         <p:nvSpPr>
-          <p:cNvPr id="8" name="imgph" descr="IMGQ:technician reading oxygen level flue gas analyzer"/>
+          <p:cNvPr id="9" name="imgph" descr="IMGQ:technician reading oxygen level flue gas analyzer"/>
           <p:cNvSpPr/>
           <p:nvPr/>
         </p:nvSpPr>
@@ -7137,7 +7401,7 @@
       </p:sp>
       <p:sp>
         <p:nvSpPr>
-          <p:cNvPr id="9" name="TextBox 8"/>
+          <p:cNvPr id="10" name="TextBox 9"/>
           <p:cNvSpPr txBox="1"/>
           <p:nvPr/>
         </p:nvSpPr>
@@ -7322,7 +7586,7 @@
         <p:spPr>
           <a:xfrm>
             <a:off x="822960" y="457200"/>
-            <a:ext cx="8229600" cy="365760"/>
+            <a:ext cx="10058400" cy="365760"/>
           </a:xfrm>
           <a:prstGeom prst="rect">
             <a:avLst/>
@@ -7336,9 +7600,9 @@
           <a:lstStyle/>
           <a:p>
             <a:r>
-              <a:rPr sz="1200" b="1" i="0">
-                <a:solidFill>
-                  <a:srgbClr val="64748B"/>
+              <a:rPr sz="1300" b="1" i="0">
+                <a:solidFill>
+                  <a:srgbClr val="E8801A"/>
                 </a:solidFill>
                 <a:latin typeface="Montserrat"/>
               </a:rPr>
@@ -7370,7 +7634,7 @@
           <a:lstStyle/>
           <a:p>
             <a:r>
-              <a:rPr sz="2700" b="1" i="0">
+              <a:rPr sz="2800" b="1" i="0">
                 <a:solidFill>
                   <a:srgbClr val="1E2761"/>
                 </a:solidFill>
@@ -7383,13 +7647,57 @@
       </p:sp>
       <p:sp>
         <p:nvSpPr>
-          <p:cNvPr id="7" name="TextBox 6"/>
+          <p:cNvPr id="7" name="Rounded Rectangle 6"/>
+          <p:cNvSpPr/>
+          <p:nvPr/>
+        </p:nvSpPr>
+        <p:spPr>
+          <a:xfrm>
+            <a:off x="868680" y="1627632"/>
+            <a:ext cx="2011680" cy="73152"/>
+          </a:xfrm>
+          <a:prstGeom prst="roundRect">
+            <a:avLst/>
+          </a:prstGeom>
+          <a:solidFill>
+            <a:srgbClr val="E8801A"/>
+          </a:solidFill>
+          <a:ln>
+            <a:noFill/>
+          </a:ln>
+          <a:effectLst/>
+        </p:spPr>
+        <p:style>
+          <a:lnRef idx="1">
+            <a:schemeClr val="accent1"/>
+          </a:lnRef>
+          <a:fillRef idx="3">
+            <a:schemeClr val="accent1"/>
+          </a:fillRef>
+          <a:effectRef idx="2">
+            <a:schemeClr val="accent1"/>
+          </a:effectRef>
+          <a:fontRef idx="minor">
+            <a:schemeClr val="lt1"/>
+          </a:fontRef>
+        </p:style>
+        <p:txBody>
+          <a:bodyPr rtlCol="0" anchor="ctr"/>
+          <a:lstStyle/>
+          <a:p>
+            <a:pPr algn="ctr"/>
+          </a:p>
+        </p:txBody>
+      </p:sp>
+      <p:sp>
+        <p:nvSpPr>
+          <p:cNvPr id="8" name="TextBox 7"/>
           <p:cNvSpPr txBox="1"/>
           <p:nvPr/>
         </p:nvSpPr>
         <p:spPr>
           <a:xfrm>
-            <a:off x="822960" y="1920240"/>
+            <a:off x="822960" y="1965960"/>
             <a:ext cx="4983480" cy="4206240"/>
           </a:xfrm>
           <a:prstGeom prst="rect">
@@ -7405,17 +7713,17 @@
           <a:p>
             <a:pPr>
               <a:spcAft>
-                <a:spcPts val="1000"/>
+                <a:spcPts val="1100"/>
               </a:spcAft>
             </a:pPr>
             <a:r>
               <a:rPr sz="1600" b="1" i="0">
                 <a:solidFill>
-                  <a:srgbClr val="2E3A80"/>
-                </a:solidFill>
-                <a:latin typeface="Montserrat"/>
-              </a:rPr>
-              <a:t>•  </a:t>
+                  <a:srgbClr val="E8801A"/>
+                </a:solidFill>
+                <a:latin typeface="Montserrat"/>
+              </a:rPr>
+              <a:t>▸  </a:t>
             </a:r>
             <a:r>
               <a:rPr sz="1600" b="0" i="0">
@@ -7430,17 +7738,17 @@
           <a:p>
             <a:pPr>
               <a:spcAft>
-                <a:spcPts val="1000"/>
+                <a:spcPts val="1100"/>
               </a:spcAft>
             </a:pPr>
             <a:r>
               <a:rPr sz="1600" b="1" i="0">
                 <a:solidFill>
-                  <a:srgbClr val="2E3A80"/>
-                </a:solidFill>
-                <a:latin typeface="Montserrat"/>
-              </a:rPr>
-              <a:t>•  </a:t>
+                  <a:srgbClr val="E8801A"/>
+                </a:solidFill>
+                <a:latin typeface="Montserrat"/>
+              </a:rPr>
+              <a:t>▸  </a:t>
             </a:r>
             <a:r>
               <a:rPr sz="1600" b="0" i="0">
@@ -7455,17 +7763,17 @@
           <a:p>
             <a:pPr>
               <a:spcAft>
-                <a:spcPts val="1000"/>
+                <a:spcPts val="1100"/>
               </a:spcAft>
             </a:pPr>
             <a:r>
               <a:rPr sz="1600" b="1" i="0">
                 <a:solidFill>
-                  <a:srgbClr val="2E3A80"/>
-                </a:solidFill>
-                <a:latin typeface="Montserrat"/>
-              </a:rPr>
-              <a:t>•  </a:t>
+                  <a:srgbClr val="E8801A"/>
+                </a:solidFill>
+                <a:latin typeface="Montserrat"/>
+              </a:rPr>
+              <a:t>▸  </a:t>
             </a:r>
             <a:r>
               <a:rPr sz="1600" b="0" i="0">
@@ -7480,17 +7788,17 @@
           <a:p>
             <a:pPr>
               <a:spcAft>
-                <a:spcPts val="1000"/>
+                <a:spcPts val="1100"/>
               </a:spcAft>
             </a:pPr>
             <a:r>
               <a:rPr sz="1600" b="1" i="0">
                 <a:solidFill>
-                  <a:srgbClr val="2E3A80"/>
-                </a:solidFill>
-                <a:latin typeface="Montserrat"/>
-              </a:rPr>
-              <a:t>•  </a:t>
+                  <a:srgbClr val="E8801A"/>
+                </a:solidFill>
+                <a:latin typeface="Montserrat"/>
+              </a:rPr>
+              <a:t>▸  </a:t>
             </a:r>
             <a:r>
               <a:rPr sz="1600" b="0" i="0">
@@ -7506,7 +7814,7 @@
       </p:sp>
       <p:sp>
         <p:nvSpPr>
-          <p:cNvPr id="8" name="imgph" descr="IMGQ:combustion analyzer calibration laboratory certificate"/>
+          <p:cNvPr id="9" name="imgph" descr="IMGQ:combustion analyzer calibration laboratory certificate"/>
           <p:cNvSpPr/>
           <p:nvPr/>
         </p:nvSpPr>
@@ -7552,7 +7860,7 @@
       </p:sp>
       <p:sp>
         <p:nvSpPr>
-          <p:cNvPr id="9" name="TextBox 8"/>
+          <p:cNvPr id="10" name="TextBox 9"/>
           <p:cNvSpPr txBox="1"/>
           <p:nvPr/>
         </p:nvSpPr>
@@ -7737,7 +8045,7 @@
         <p:spPr>
           <a:xfrm>
             <a:off x="822960" y="457200"/>
-            <a:ext cx="8229600" cy="365760"/>
+            <a:ext cx="10058400" cy="365760"/>
           </a:xfrm>
           <a:prstGeom prst="rect">
             <a:avLst/>
@@ -7751,9 +8059,9 @@
           <a:lstStyle/>
           <a:p>
             <a:r>
-              <a:rPr sz="1200" b="1" i="0">
-                <a:solidFill>
-                  <a:srgbClr val="64748B"/>
+              <a:rPr sz="1300" b="1" i="0">
+                <a:solidFill>
+                  <a:srgbClr val="E8801A"/>
                 </a:solidFill>
                 <a:latin typeface="Montserrat"/>
               </a:rPr>
@@ -7785,7 +8093,7 @@
           <a:lstStyle/>
           <a:p>
             <a:r>
-              <a:rPr sz="2700" b="1" i="0">
+              <a:rPr sz="2800" b="1" i="0">
                 <a:solidFill>
                   <a:srgbClr val="1E2761"/>
                 </a:solidFill>
@@ -7798,13 +8106,57 @@
       </p:sp>
       <p:sp>
         <p:nvSpPr>
-          <p:cNvPr id="7" name="TextBox 6"/>
+          <p:cNvPr id="7" name="Rounded Rectangle 6"/>
+          <p:cNvSpPr/>
+          <p:nvPr/>
+        </p:nvSpPr>
+        <p:spPr>
+          <a:xfrm>
+            <a:off x="868680" y="1627632"/>
+            <a:ext cx="2011680" cy="73152"/>
+          </a:xfrm>
+          <a:prstGeom prst="roundRect">
+            <a:avLst/>
+          </a:prstGeom>
+          <a:solidFill>
+            <a:srgbClr val="E8801A"/>
+          </a:solidFill>
+          <a:ln>
+            <a:noFill/>
+          </a:ln>
+          <a:effectLst/>
+        </p:spPr>
+        <p:style>
+          <a:lnRef idx="1">
+            <a:schemeClr val="accent1"/>
+          </a:lnRef>
+          <a:fillRef idx="3">
+            <a:schemeClr val="accent1"/>
+          </a:fillRef>
+          <a:effectRef idx="2">
+            <a:schemeClr val="accent1"/>
+          </a:effectRef>
+          <a:fontRef idx="minor">
+            <a:schemeClr val="lt1"/>
+          </a:fontRef>
+        </p:style>
+        <p:txBody>
+          <a:bodyPr rtlCol="0" anchor="ctr"/>
+          <a:lstStyle/>
+          <a:p>
+            <a:pPr algn="ctr"/>
+          </a:p>
+        </p:txBody>
+      </p:sp>
+      <p:sp>
+        <p:nvSpPr>
+          <p:cNvPr id="8" name="TextBox 7"/>
           <p:cNvSpPr txBox="1"/>
           <p:nvPr/>
         </p:nvSpPr>
         <p:spPr>
           <a:xfrm>
-            <a:off x="822960" y="1920240"/>
+            <a:off x="822960" y="1965960"/>
             <a:ext cx="4983480" cy="4206240"/>
           </a:xfrm>
           <a:prstGeom prst="rect">
@@ -7820,17 +8172,17 @@
           <a:p>
             <a:pPr>
               <a:spcAft>
-                <a:spcPts val="1000"/>
+                <a:spcPts val="1100"/>
               </a:spcAft>
             </a:pPr>
             <a:r>
               <a:rPr sz="1600" b="1" i="0">
                 <a:solidFill>
-                  <a:srgbClr val="2E3A80"/>
-                </a:solidFill>
-                <a:latin typeface="Montserrat"/>
-              </a:rPr>
-              <a:t>•  </a:t>
+                  <a:srgbClr val="E8801A"/>
+                </a:solidFill>
+                <a:latin typeface="Montserrat"/>
+              </a:rPr>
+              <a:t>▸  </a:t>
             </a:r>
             <a:r>
               <a:rPr sz="1600" b="0" i="0">
@@ -7845,17 +8197,17 @@
           <a:p>
             <a:pPr>
               <a:spcAft>
-                <a:spcPts val="1000"/>
+                <a:spcPts val="1100"/>
               </a:spcAft>
             </a:pPr>
             <a:r>
               <a:rPr sz="1600" b="1" i="0">
                 <a:solidFill>
-                  <a:srgbClr val="2E3A80"/>
-                </a:solidFill>
-                <a:latin typeface="Montserrat"/>
-              </a:rPr>
-              <a:t>•  </a:t>
+                  <a:srgbClr val="E8801A"/>
+                </a:solidFill>
+                <a:latin typeface="Montserrat"/>
+              </a:rPr>
+              <a:t>▸  </a:t>
             </a:r>
             <a:r>
               <a:rPr sz="1600" b="0" i="0">
@@ -7870,17 +8222,17 @@
           <a:p>
             <a:pPr>
               <a:spcAft>
-                <a:spcPts val="1000"/>
+                <a:spcPts val="1100"/>
               </a:spcAft>
             </a:pPr>
             <a:r>
               <a:rPr sz="1600" b="1" i="0">
                 <a:solidFill>
-                  <a:srgbClr val="2E3A80"/>
-                </a:solidFill>
-                <a:latin typeface="Montserrat"/>
-              </a:rPr>
-              <a:t>•  </a:t>
+                  <a:srgbClr val="E8801A"/>
+                </a:solidFill>
+                <a:latin typeface="Montserrat"/>
+              </a:rPr>
+              <a:t>▸  </a:t>
             </a:r>
             <a:r>
               <a:rPr sz="1600" b="0" i="0">
@@ -7895,17 +8247,17 @@
           <a:p>
             <a:pPr>
               <a:spcAft>
-                <a:spcPts val="1000"/>
+                <a:spcPts val="1100"/>
               </a:spcAft>
             </a:pPr>
             <a:r>
               <a:rPr sz="1600" b="1" i="0">
                 <a:solidFill>
-                  <a:srgbClr val="2E3A80"/>
-                </a:solidFill>
-                <a:latin typeface="Montserrat"/>
-              </a:rPr>
-              <a:t>•  </a:t>
+                  <a:srgbClr val="E8801A"/>
+                </a:solidFill>
+                <a:latin typeface="Montserrat"/>
+              </a:rPr>
+              <a:t>▸  </a:t>
             </a:r>
             <a:r>
               <a:rPr sz="1600" b="0" i="0">
@@ -7921,7 +8273,7 @@
       </p:sp>
       <p:sp>
         <p:nvSpPr>
-          <p:cNvPr id="8" name="imgph" descr="IMGQ:radiant heater suspended warehouse ceiling"/>
+          <p:cNvPr id="9" name="imgph" descr="IMGQ:radiant heater suspended warehouse ceiling"/>
           <p:cNvSpPr/>
           <p:nvPr/>
         </p:nvSpPr>
@@ -7967,7 +8319,7 @@
       </p:sp>
       <p:sp>
         <p:nvSpPr>
-          <p:cNvPr id="9" name="TextBox 8"/>
+          <p:cNvPr id="10" name="TextBox 9"/>
           <p:cNvSpPr txBox="1"/>
           <p:nvPr/>
         </p:nvSpPr>
@@ -8152,7 +8504,7 @@
         <p:spPr>
           <a:xfrm>
             <a:off x="822960" y="457200"/>
-            <a:ext cx="8229600" cy="365760"/>
+            <a:ext cx="10058400" cy="365760"/>
           </a:xfrm>
           <a:prstGeom prst="rect">
             <a:avLst/>
@@ -8166,9 +8518,9 @@
           <a:lstStyle/>
           <a:p>
             <a:r>
-              <a:rPr sz="1200" b="1" i="0">
-                <a:solidFill>
-                  <a:srgbClr val="64748B"/>
+              <a:rPr sz="1300" b="1" i="0">
+                <a:solidFill>
+                  <a:srgbClr val="E8801A"/>
                 </a:solidFill>
                 <a:latin typeface="Montserrat"/>
               </a:rPr>
@@ -8200,7 +8552,7 @@
           <a:lstStyle/>
           <a:p>
             <a:r>
-              <a:rPr sz="2700" b="1" i="0">
+              <a:rPr sz="2800" b="1" i="0">
                 <a:solidFill>
                   <a:srgbClr val="1E2761"/>
                 </a:solidFill>
@@ -8213,13 +8565,57 @@
       </p:sp>
       <p:sp>
         <p:nvSpPr>
-          <p:cNvPr id="7" name="TextBox 6"/>
+          <p:cNvPr id="7" name="Rounded Rectangle 6"/>
+          <p:cNvSpPr/>
+          <p:nvPr/>
+        </p:nvSpPr>
+        <p:spPr>
+          <a:xfrm>
+            <a:off x="868680" y="1627632"/>
+            <a:ext cx="2011680" cy="73152"/>
+          </a:xfrm>
+          <a:prstGeom prst="roundRect">
+            <a:avLst/>
+          </a:prstGeom>
+          <a:solidFill>
+            <a:srgbClr val="E8801A"/>
+          </a:solidFill>
+          <a:ln>
+            <a:noFill/>
+          </a:ln>
+          <a:effectLst/>
+        </p:spPr>
+        <p:style>
+          <a:lnRef idx="1">
+            <a:schemeClr val="accent1"/>
+          </a:lnRef>
+          <a:fillRef idx="3">
+            <a:schemeClr val="accent1"/>
+          </a:fillRef>
+          <a:effectRef idx="2">
+            <a:schemeClr val="accent1"/>
+          </a:effectRef>
+          <a:fontRef idx="minor">
+            <a:schemeClr val="lt1"/>
+          </a:fontRef>
+        </p:style>
+        <p:txBody>
+          <a:bodyPr rtlCol="0" anchor="ctr"/>
+          <a:lstStyle/>
+          <a:p>
+            <a:pPr algn="ctr"/>
+          </a:p>
+        </p:txBody>
+      </p:sp>
+      <p:sp>
+        <p:nvSpPr>
+          <p:cNvPr id="8" name="TextBox 7"/>
           <p:cNvSpPr txBox="1"/>
           <p:nvPr/>
         </p:nvSpPr>
         <p:spPr>
           <a:xfrm>
-            <a:off x="822960" y="1920240"/>
+            <a:off x="822960" y="1965960"/>
             <a:ext cx="4983480" cy="4206240"/>
           </a:xfrm>
           <a:prstGeom prst="rect">
@@ -8235,17 +8631,17 @@
           <a:p>
             <a:pPr>
               <a:spcAft>
-                <a:spcPts val="1000"/>
+                <a:spcPts val="1100"/>
               </a:spcAft>
             </a:pPr>
             <a:r>
               <a:rPr sz="1600" b="1" i="0">
                 <a:solidFill>
-                  <a:srgbClr val="2E3A80"/>
-                </a:solidFill>
-                <a:latin typeface="Montserrat"/>
-              </a:rPr>
-              <a:t>•  </a:t>
+                  <a:srgbClr val="E8801A"/>
+                </a:solidFill>
+                <a:latin typeface="Montserrat"/>
+              </a:rPr>
+              <a:t>▸  </a:t>
             </a:r>
             <a:r>
               <a:rPr sz="1600" b="0" i="0">
@@ -8260,17 +8656,17 @@
           <a:p>
             <a:pPr>
               <a:spcAft>
-                <a:spcPts val="1000"/>
+                <a:spcPts val="1100"/>
               </a:spcAft>
             </a:pPr>
             <a:r>
               <a:rPr sz="1600" b="1" i="0">
                 <a:solidFill>
-                  <a:srgbClr val="2E3A80"/>
-                </a:solidFill>
-                <a:latin typeface="Montserrat"/>
-              </a:rPr>
-              <a:t>•  </a:t>
+                  <a:srgbClr val="E8801A"/>
+                </a:solidFill>
+                <a:latin typeface="Montserrat"/>
+              </a:rPr>
+              <a:t>▸  </a:t>
             </a:r>
             <a:r>
               <a:rPr sz="1600" b="0" i="0">
@@ -8285,17 +8681,17 @@
           <a:p>
             <a:pPr>
               <a:spcAft>
-                <a:spcPts val="1000"/>
+                <a:spcPts val="1100"/>
               </a:spcAft>
             </a:pPr>
             <a:r>
               <a:rPr sz="1600" b="1" i="0">
                 <a:solidFill>
-                  <a:srgbClr val="2E3A80"/>
-                </a:solidFill>
-                <a:latin typeface="Montserrat"/>
-              </a:rPr>
-              <a:t>•  </a:t>
+                  <a:srgbClr val="E8801A"/>
+                </a:solidFill>
+                <a:latin typeface="Montserrat"/>
+              </a:rPr>
+              <a:t>▸  </a:t>
             </a:r>
             <a:r>
               <a:rPr sz="1600" b="0" i="0">
@@ -8311,7 +8707,7 @@
       </p:sp>
       <p:sp>
         <p:nvSpPr>
-          <p:cNvPr id="8" name="imgph" descr="IMGQ:gas installer paperwork report boiler room"/>
+          <p:cNvPr id="9" name="imgph" descr="IMGQ:gas installer paperwork report boiler room"/>
           <p:cNvSpPr/>
           <p:nvPr/>
         </p:nvSpPr>
@@ -8357,7 +8753,7 @@
       </p:sp>
       <p:sp>
         <p:nvSpPr>
-          <p:cNvPr id="9" name="TextBox 8"/>
+          <p:cNvPr id="10" name="TextBox 9"/>
           <p:cNvSpPr txBox="1"/>
           <p:nvPr/>
         </p:nvSpPr>
@@ -8489,7 +8885,7 @@
             <a:r>
               <a:rPr sz="1400" b="1" i="0">
                 <a:solidFill>
-                  <a:srgbClr val="CADCFC"/>
+                  <a:srgbClr val="F4A24C"/>
                 </a:solidFill>
                 <a:latin typeface="Montserrat"/>
               </a:rPr>
@@ -8500,13 +8896,57 @@
       </p:sp>
       <p:sp>
         <p:nvSpPr>
-          <p:cNvPr id="4" name="TextBox 3"/>
+          <p:cNvPr id="4" name="Rounded Rectangle 3"/>
+          <p:cNvSpPr/>
+          <p:nvPr/>
+        </p:nvSpPr>
+        <p:spPr>
+          <a:xfrm>
+            <a:off x="868680" y="1051560"/>
+            <a:ext cx="1463040" cy="82296"/>
+          </a:xfrm>
+          <a:prstGeom prst="roundRect">
+            <a:avLst/>
+          </a:prstGeom>
+          <a:solidFill>
+            <a:srgbClr val="E8801A"/>
+          </a:solidFill>
+          <a:ln>
+            <a:noFill/>
+          </a:ln>
+          <a:effectLst/>
+        </p:spPr>
+        <p:style>
+          <a:lnRef idx="1">
+            <a:schemeClr val="accent1"/>
+          </a:lnRef>
+          <a:fillRef idx="3">
+            <a:schemeClr val="accent1"/>
+          </a:fillRef>
+          <a:effectRef idx="2">
+            <a:schemeClr val="accent1"/>
+          </a:effectRef>
+          <a:fontRef idx="minor">
+            <a:schemeClr val="lt1"/>
+          </a:fontRef>
+        </p:style>
+        <p:txBody>
+          <a:bodyPr rtlCol="0" anchor="ctr"/>
+          <a:lstStyle/>
+          <a:p>
+            <a:pPr algn="ctr"/>
+          </a:p>
+        </p:txBody>
+      </p:sp>
+      <p:sp>
+        <p:nvSpPr>
+          <p:cNvPr id="5" name="TextBox 4"/>
           <p:cNvSpPr txBox="1"/>
           <p:nvPr/>
         </p:nvSpPr>
         <p:spPr>
           <a:xfrm>
-            <a:off x="822960" y="1143000"/>
+            <a:off x="822960" y="1234440"/>
             <a:ext cx="10515600" cy="1097280"/>
           </a:xfrm>
           <a:prstGeom prst="rect">
@@ -8534,14 +8974,14 @@
       </p:sp>
       <p:sp>
         <p:nvSpPr>
-          <p:cNvPr id="5" name="TextBox 4"/>
+          <p:cNvPr id="6" name="TextBox 5"/>
           <p:cNvSpPr txBox="1"/>
           <p:nvPr/>
         </p:nvSpPr>
         <p:spPr>
           <a:xfrm>
-            <a:off x="822960" y="2514600"/>
-            <a:ext cx="10515600" cy="2834640"/>
+            <a:off x="822960" y="2606040"/>
+            <a:ext cx="10515600" cy="2743200"/>
           </a:xfrm>
           <a:prstGeom prst="rect">
             <a:avLst/>
@@ -8562,7 +9002,7 @@
             <a:r>
               <a:rPr sz="2000" b="1" i="0">
                 <a:solidFill>
-                  <a:srgbClr val="CADCFC"/>
+                  <a:srgbClr val="F4A24C"/>
                 </a:solidFill>
                 <a:latin typeface="Montserrat"/>
               </a:rPr>
@@ -8587,7 +9027,7 @@
             <a:r>
               <a:rPr sz="2000" b="1" i="0">
                 <a:solidFill>
-                  <a:srgbClr val="CADCFC"/>
+                  <a:srgbClr val="F4A24C"/>
                 </a:solidFill>
                 <a:latin typeface="Montserrat"/>
               </a:rPr>
@@ -8612,7 +9052,7 @@
             <a:r>
               <a:rPr sz="2000" b="1" i="0">
                 <a:solidFill>
-                  <a:srgbClr val="CADCFC"/>
+                  <a:srgbClr val="F4A24C"/>
                 </a:solidFill>
                 <a:latin typeface="Montserrat"/>
               </a:rPr>
@@ -8637,7 +9077,7 @@
             <a:r>
               <a:rPr sz="2000" b="1" i="0">
                 <a:solidFill>
-                  <a:srgbClr val="CADCFC"/>
+                  <a:srgbClr val="F4A24C"/>
                 </a:solidFill>
                 <a:latin typeface="Montserrat"/>
               </a:rPr>
@@ -8657,20 +9097,20 @@
       </p:sp>
       <p:sp>
         <p:nvSpPr>
-          <p:cNvPr id="6" name="Rounded Rectangle 5"/>
+          <p:cNvPr id="7" name="Rounded Rectangle 6"/>
           <p:cNvSpPr/>
           <p:nvPr/>
         </p:nvSpPr>
         <p:spPr>
           <a:xfrm>
             <a:off x="822960" y="5532120"/>
-            <a:ext cx="10515600" cy="777240"/>
+            <a:ext cx="10515600" cy="822960"/>
           </a:xfrm>
           <a:prstGeom prst="roundRect">
             <a:avLst/>
           </a:prstGeom>
           <a:solidFill>
-            <a:srgbClr val="2E3A80"/>
+            <a:srgbClr val="E8801A"/>
           </a:solidFill>
           <a:ln>
             <a:noFill/>
@@ -8701,13 +9141,13 @@
       </p:sp>
       <p:sp>
         <p:nvSpPr>
-          <p:cNvPr id="7" name="TextBox 6"/>
+          <p:cNvPr id="8" name="TextBox 7"/>
           <p:cNvSpPr txBox="1"/>
           <p:nvPr/>
         </p:nvSpPr>
         <p:spPr>
           <a:xfrm>
-            <a:off x="1051560" y="5605272"/>
+            <a:off x="1051560" y="5623560"/>
             <a:ext cx="10058400" cy="640080"/>
           </a:xfrm>
           <a:prstGeom prst="rect">
@@ -8724,7 +9164,7 @@
             <a:r>
               <a:rPr sz="1500" b="1" i="1">
                 <a:solidFill>
-                  <a:srgbClr val="CADCFC"/>
+                  <a:srgbClr val="1E2761"/>
                 </a:solidFill>
                 <a:latin typeface="Montserrat"/>
               </a:rPr>
@@ -8889,7 +9329,7 @@
             <a:r>
               <a:rPr sz="2700" b="1" i="0">
                 <a:solidFill>
-                  <a:srgbClr val="1E2761"/>
+                  <a:srgbClr val="E8801A"/>
                 </a:solidFill>
                 <a:latin typeface="Montserrat"/>
               </a:rPr>
@@ -8901,6 +9341,50 @@
       <p:sp>
         <p:nvSpPr>
           <p:cNvPr id="6" name="Rounded Rectangle 5"/>
+          <p:cNvSpPr/>
+          <p:nvPr/>
+        </p:nvSpPr>
+        <p:spPr>
+          <a:xfrm>
+            <a:off x="868680" y="1234440"/>
+            <a:ext cx="1463040" cy="73152"/>
+          </a:xfrm>
+          <a:prstGeom prst="roundRect">
+            <a:avLst/>
+          </a:prstGeom>
+          <a:solidFill>
+            <a:srgbClr val="1E2761"/>
+          </a:solidFill>
+          <a:ln>
+            <a:noFill/>
+          </a:ln>
+          <a:effectLst/>
+        </p:spPr>
+        <p:style>
+          <a:lnRef idx="1">
+            <a:schemeClr val="accent1"/>
+          </a:lnRef>
+          <a:fillRef idx="3">
+            <a:schemeClr val="accent1"/>
+          </a:fillRef>
+          <a:effectRef idx="2">
+            <a:schemeClr val="accent1"/>
+          </a:effectRef>
+          <a:fontRef idx="minor">
+            <a:schemeClr val="lt1"/>
+          </a:fontRef>
+        </p:style>
+        <p:txBody>
+          <a:bodyPr rtlCol="0" anchor="ctr"/>
+          <a:lstStyle/>
+          <a:p>
+            <a:pPr algn="ctr"/>
+          </a:p>
+        </p:txBody>
+      </p:sp>
+      <p:sp>
+        <p:nvSpPr>
+          <p:cNvPr id="7" name="Rounded Rectangle 6"/>
           <p:cNvSpPr/>
           <p:nvPr/>
         </p:nvSpPr>
@@ -8946,7 +9430,7 @@
       </p:sp>
       <p:sp>
         <p:nvSpPr>
-          <p:cNvPr id="7" name="TextBox 6"/>
+          <p:cNvPr id="8" name="TextBox 7"/>
           <p:cNvSpPr txBox="1"/>
           <p:nvPr/>
         </p:nvSpPr>
@@ -8981,7 +9465,7 @@
       </p:sp>
       <p:sp>
         <p:nvSpPr>
-          <p:cNvPr id="8" name="TextBox 7"/>
+          <p:cNvPr id="9" name="TextBox 8"/>
           <p:cNvSpPr txBox="1"/>
           <p:nvPr/>
         </p:nvSpPr>
@@ -9016,7 +9500,7 @@
       </p:sp>
       <p:sp>
         <p:nvSpPr>
-          <p:cNvPr id="9" name="Rounded Rectangle 8"/>
+          <p:cNvPr id="10" name="Rounded Rectangle 9"/>
           <p:cNvSpPr/>
           <p:nvPr/>
         </p:nvSpPr>
@@ -9062,7 +9546,7 @@
       </p:sp>
       <p:sp>
         <p:nvSpPr>
-          <p:cNvPr id="10" name="TextBox 9"/>
+          <p:cNvPr id="11" name="TextBox 10"/>
           <p:cNvSpPr txBox="1"/>
           <p:nvPr/>
         </p:nvSpPr>
@@ -9097,7 +9581,7 @@
       </p:sp>
       <p:sp>
         <p:nvSpPr>
-          <p:cNvPr id="11" name="TextBox 10"/>
+          <p:cNvPr id="12" name="TextBox 11"/>
           <p:cNvSpPr txBox="1"/>
           <p:nvPr/>
         </p:nvSpPr>
@@ -9132,7 +9616,7 @@
       </p:sp>
       <p:sp>
         <p:nvSpPr>
-          <p:cNvPr id="12" name="Rounded Rectangle 11"/>
+          <p:cNvPr id="13" name="Rounded Rectangle 12"/>
           <p:cNvSpPr/>
           <p:nvPr/>
         </p:nvSpPr>
@@ -9178,7 +9662,7 @@
       </p:sp>
       <p:sp>
         <p:nvSpPr>
-          <p:cNvPr id="13" name="TextBox 12"/>
+          <p:cNvPr id="14" name="TextBox 13"/>
           <p:cNvSpPr txBox="1"/>
           <p:nvPr/>
         </p:nvSpPr>
@@ -9213,7 +9697,7 @@
       </p:sp>
       <p:sp>
         <p:nvSpPr>
-          <p:cNvPr id="14" name="TextBox 13"/>
+          <p:cNvPr id="15" name="TextBox 14"/>
           <p:cNvSpPr txBox="1"/>
           <p:nvPr/>
         </p:nvSpPr>
@@ -9386,7 +9870,7 @@
         <p:spPr>
           <a:xfrm>
             <a:off x="822960" y="457200"/>
-            <a:ext cx="8229600" cy="365760"/>
+            <a:ext cx="10058400" cy="365760"/>
           </a:xfrm>
           <a:prstGeom prst="rect">
             <a:avLst/>
@@ -9400,9 +9884,9 @@
           <a:lstStyle/>
           <a:p>
             <a:r>
-              <a:rPr sz="1200" b="1" i="0">
-                <a:solidFill>
-                  <a:srgbClr val="64748B"/>
+              <a:rPr sz="1300" b="1" i="0">
+                <a:solidFill>
+                  <a:srgbClr val="E8801A"/>
                 </a:solidFill>
                 <a:latin typeface="Montserrat"/>
               </a:rPr>
@@ -9434,7 +9918,7 @@
           <a:lstStyle/>
           <a:p>
             <a:r>
-              <a:rPr sz="2700" b="1" i="0">
+              <a:rPr sz="2800" b="1" i="0">
                 <a:solidFill>
                   <a:srgbClr val="1E2761"/>
                 </a:solidFill>
@@ -9447,13 +9931,57 @@
       </p:sp>
       <p:sp>
         <p:nvSpPr>
-          <p:cNvPr id="7" name="TextBox 6"/>
+          <p:cNvPr id="7" name="Rounded Rectangle 6"/>
+          <p:cNvSpPr/>
+          <p:nvPr/>
+        </p:nvSpPr>
+        <p:spPr>
+          <a:xfrm>
+            <a:off x="868680" y="1627632"/>
+            <a:ext cx="2011680" cy="73152"/>
+          </a:xfrm>
+          <a:prstGeom prst="roundRect">
+            <a:avLst/>
+          </a:prstGeom>
+          <a:solidFill>
+            <a:srgbClr val="E8801A"/>
+          </a:solidFill>
+          <a:ln>
+            <a:noFill/>
+          </a:ln>
+          <a:effectLst/>
+        </p:spPr>
+        <p:style>
+          <a:lnRef idx="1">
+            <a:schemeClr val="accent1"/>
+          </a:lnRef>
+          <a:fillRef idx="3">
+            <a:schemeClr val="accent1"/>
+          </a:fillRef>
+          <a:effectRef idx="2">
+            <a:schemeClr val="accent1"/>
+          </a:effectRef>
+          <a:fontRef idx="minor">
+            <a:schemeClr val="lt1"/>
+          </a:fontRef>
+        </p:style>
+        <p:txBody>
+          <a:bodyPr rtlCol="0" anchor="ctr"/>
+          <a:lstStyle/>
+          <a:p>
+            <a:pPr algn="ctr"/>
+          </a:p>
+        </p:txBody>
+      </p:sp>
+      <p:sp>
+        <p:nvSpPr>
+          <p:cNvPr id="8" name="TextBox 7"/>
           <p:cNvSpPr txBox="1"/>
           <p:nvPr/>
         </p:nvSpPr>
         <p:spPr>
           <a:xfrm>
-            <a:off x="822960" y="1920240"/>
+            <a:off x="822960" y="1965960"/>
             <a:ext cx="4983480" cy="4206240"/>
           </a:xfrm>
           <a:prstGeom prst="rect">
@@ -9469,17 +9997,17 @@
           <a:p>
             <a:pPr>
               <a:spcAft>
-                <a:spcPts val="1000"/>
+                <a:spcPts val="1100"/>
               </a:spcAft>
             </a:pPr>
             <a:r>
               <a:rPr sz="1600" b="1" i="0">
                 <a:solidFill>
-                  <a:srgbClr val="2E3A80"/>
-                </a:solidFill>
-                <a:latin typeface="Montserrat"/>
-              </a:rPr>
-              <a:t>•  </a:t>
+                  <a:srgbClr val="E8801A"/>
+                </a:solidFill>
+                <a:latin typeface="Montserrat"/>
+              </a:rPr>
+              <a:t>▸  </a:t>
             </a:r>
             <a:r>
               <a:rPr sz="1600" b="0" i="0">
@@ -9494,17 +10022,17 @@
           <a:p>
             <a:pPr>
               <a:spcAft>
-                <a:spcPts val="1000"/>
+                <a:spcPts val="1100"/>
               </a:spcAft>
             </a:pPr>
             <a:r>
               <a:rPr sz="1600" b="1" i="0">
                 <a:solidFill>
-                  <a:srgbClr val="2E3A80"/>
-                </a:solidFill>
-                <a:latin typeface="Montserrat"/>
-              </a:rPr>
-              <a:t>•  </a:t>
+                  <a:srgbClr val="E8801A"/>
+                </a:solidFill>
+                <a:latin typeface="Montserrat"/>
+              </a:rPr>
+              <a:t>▸  </a:t>
             </a:r>
             <a:r>
               <a:rPr sz="1600" b="0" i="0">
@@ -9519,17 +10047,17 @@
           <a:p>
             <a:pPr>
               <a:spcAft>
-                <a:spcPts val="1000"/>
+                <a:spcPts val="1100"/>
               </a:spcAft>
             </a:pPr>
             <a:r>
               <a:rPr sz="1600" b="1" i="0">
                 <a:solidFill>
-                  <a:srgbClr val="2E3A80"/>
-                </a:solidFill>
-                <a:latin typeface="Montserrat"/>
-              </a:rPr>
-              <a:t>•  </a:t>
+                  <a:srgbClr val="E8801A"/>
+                </a:solidFill>
+                <a:latin typeface="Montserrat"/>
+              </a:rPr>
+              <a:t>▸  </a:t>
             </a:r>
             <a:r>
               <a:rPr sz="1600" b="0" i="0">
@@ -9544,17 +10072,17 @@
           <a:p>
             <a:pPr>
               <a:spcAft>
-                <a:spcPts val="1000"/>
+                <a:spcPts val="1100"/>
               </a:spcAft>
             </a:pPr>
             <a:r>
               <a:rPr sz="1600" b="1" i="0">
                 <a:solidFill>
-                  <a:srgbClr val="2E3A80"/>
-                </a:solidFill>
-                <a:latin typeface="Montserrat"/>
-              </a:rPr>
-              <a:t>•  </a:t>
+                  <a:srgbClr val="E8801A"/>
+                </a:solidFill>
+                <a:latin typeface="Montserrat"/>
+              </a:rPr>
+              <a:t>▸  </a:t>
             </a:r>
             <a:r>
               <a:rPr sz="1600" b="0" i="0">
@@ -9570,7 +10098,7 @@
       </p:sp>
       <p:sp>
         <p:nvSpPr>
-          <p:cNvPr id="8" name="imgph" descr="IMGQ:technician checking gas boiler combustion"/>
+          <p:cNvPr id="9" name="imgph" descr="IMGQ:technician checking gas boiler combustion"/>
           <p:cNvSpPr/>
           <p:nvPr/>
         </p:nvSpPr>
@@ -9616,7 +10144,7 @@
       </p:sp>
       <p:sp>
         <p:nvSpPr>
-          <p:cNvPr id="9" name="TextBox 8"/>
+          <p:cNvPr id="10" name="TextBox 9"/>
           <p:cNvSpPr txBox="1"/>
           <p:nvPr/>
         </p:nvSpPr>
@@ -9801,7 +10329,7 @@
         <p:spPr>
           <a:xfrm>
             <a:off x="822960" y="457200"/>
-            <a:ext cx="8229600" cy="365760"/>
+            <a:ext cx="10058400" cy="365760"/>
           </a:xfrm>
           <a:prstGeom prst="rect">
             <a:avLst/>
@@ -9815,9 +10343,9 @@
           <a:lstStyle/>
           <a:p>
             <a:r>
-              <a:rPr sz="1200" b="1" i="0">
-                <a:solidFill>
-                  <a:srgbClr val="64748B"/>
+              <a:rPr sz="1300" b="1" i="0">
+                <a:solidFill>
+                  <a:srgbClr val="E8801A"/>
                 </a:solidFill>
                 <a:latin typeface="Montserrat"/>
               </a:rPr>
@@ -9849,7 +10377,7 @@
           <a:lstStyle/>
           <a:p>
             <a:r>
-              <a:rPr sz="2700" b="1" i="0">
+              <a:rPr sz="2800" b="1" i="0">
                 <a:solidFill>
                   <a:srgbClr val="1E2761"/>
                 </a:solidFill>
@@ -9862,13 +10390,57 @@
       </p:sp>
       <p:sp>
         <p:nvSpPr>
-          <p:cNvPr id="7" name="TextBox 6"/>
+          <p:cNvPr id="7" name="Rounded Rectangle 6"/>
+          <p:cNvSpPr/>
+          <p:nvPr/>
+        </p:nvSpPr>
+        <p:spPr>
+          <a:xfrm>
+            <a:off x="868680" y="1627632"/>
+            <a:ext cx="2011680" cy="73152"/>
+          </a:xfrm>
+          <a:prstGeom prst="roundRect">
+            <a:avLst/>
+          </a:prstGeom>
+          <a:solidFill>
+            <a:srgbClr val="E8801A"/>
+          </a:solidFill>
+          <a:ln>
+            <a:noFill/>
+          </a:ln>
+          <a:effectLst/>
+        </p:spPr>
+        <p:style>
+          <a:lnRef idx="1">
+            <a:schemeClr val="accent1"/>
+          </a:lnRef>
+          <a:fillRef idx="3">
+            <a:schemeClr val="accent1"/>
+          </a:fillRef>
+          <a:effectRef idx="2">
+            <a:schemeClr val="accent1"/>
+          </a:effectRef>
+          <a:fontRef idx="minor">
+            <a:schemeClr val="lt1"/>
+          </a:fontRef>
+        </p:style>
+        <p:txBody>
+          <a:bodyPr rtlCol="0" anchor="ctr"/>
+          <a:lstStyle/>
+          <a:p>
+            <a:pPr algn="ctr"/>
+          </a:p>
+        </p:txBody>
+      </p:sp>
+      <p:sp>
+        <p:nvSpPr>
+          <p:cNvPr id="8" name="TextBox 7"/>
           <p:cNvSpPr txBox="1"/>
           <p:nvPr/>
         </p:nvSpPr>
         <p:spPr>
           <a:xfrm>
-            <a:off x="822960" y="1920240"/>
+            <a:off x="822960" y="1965960"/>
             <a:ext cx="4983480" cy="4206240"/>
           </a:xfrm>
           <a:prstGeom prst="rect">
@@ -9884,17 +10456,17 @@
           <a:p>
             <a:pPr>
               <a:spcAft>
-                <a:spcPts val="1000"/>
+                <a:spcPts val="1100"/>
               </a:spcAft>
             </a:pPr>
             <a:r>
               <a:rPr sz="1600" b="1" i="0">
                 <a:solidFill>
-                  <a:srgbClr val="2E3A80"/>
-                </a:solidFill>
-                <a:latin typeface="Montserrat"/>
-              </a:rPr>
-              <a:t>•  </a:t>
+                  <a:srgbClr val="E8801A"/>
+                </a:solidFill>
+                <a:latin typeface="Montserrat"/>
+              </a:rPr>
+              <a:t>▸  </a:t>
             </a:r>
             <a:r>
               <a:rPr sz="1600" b="0" i="0">
@@ -9909,17 +10481,17 @@
           <a:p>
             <a:pPr>
               <a:spcAft>
-                <a:spcPts val="1000"/>
+                <a:spcPts val="1100"/>
               </a:spcAft>
             </a:pPr>
             <a:r>
               <a:rPr sz="1600" b="1" i="0">
                 <a:solidFill>
-                  <a:srgbClr val="2E3A80"/>
-                </a:solidFill>
-                <a:latin typeface="Montserrat"/>
-              </a:rPr>
-              <a:t>•  </a:t>
+                  <a:srgbClr val="E8801A"/>
+                </a:solidFill>
+                <a:latin typeface="Montserrat"/>
+              </a:rPr>
+              <a:t>▸  </a:t>
             </a:r>
             <a:r>
               <a:rPr sz="1600" b="0" i="0">
@@ -9934,17 +10506,17 @@
           <a:p>
             <a:pPr>
               <a:spcAft>
-                <a:spcPts val="1000"/>
+                <a:spcPts val="1100"/>
               </a:spcAft>
             </a:pPr>
             <a:r>
               <a:rPr sz="1600" b="1" i="0">
                 <a:solidFill>
-                  <a:srgbClr val="2E3A80"/>
-                </a:solidFill>
-                <a:latin typeface="Montserrat"/>
-              </a:rPr>
-              <a:t>•  </a:t>
+                  <a:srgbClr val="E8801A"/>
+                </a:solidFill>
+                <a:latin typeface="Montserrat"/>
+              </a:rPr>
+              <a:t>▸  </a:t>
             </a:r>
             <a:r>
               <a:rPr sz="1600" b="0" i="0">
@@ -9959,17 +10531,17 @@
           <a:p>
             <a:pPr>
               <a:spcAft>
-                <a:spcPts val="1000"/>
+                <a:spcPts val="1100"/>
               </a:spcAft>
             </a:pPr>
             <a:r>
               <a:rPr sz="1600" b="1" i="0">
                 <a:solidFill>
-                  <a:srgbClr val="2E3A80"/>
-                </a:solidFill>
-                <a:latin typeface="Montserrat"/>
-              </a:rPr>
-              <a:t>•  </a:t>
+                  <a:srgbClr val="E8801A"/>
+                </a:solidFill>
+                <a:latin typeface="Montserrat"/>
+              </a:rPr>
+              <a:t>▸  </a:t>
             </a:r>
             <a:r>
               <a:rPr sz="1600" b="0" i="0">
@@ -9985,7 +10557,7 @@
       </p:sp>
       <p:sp>
         <p:nvSpPr>
-          <p:cNvPr id="8" name="imgph" descr="IMGQ:gas appliance inspection certificate document"/>
+          <p:cNvPr id="9" name="imgph" descr="IMGQ:gas appliance inspection certificate document"/>
           <p:cNvSpPr/>
           <p:nvPr/>
         </p:nvSpPr>
@@ -10031,7 +10603,7 @@
       </p:sp>
       <p:sp>
         <p:nvSpPr>
-          <p:cNvPr id="9" name="TextBox 8"/>
+          <p:cNvPr id="10" name="TextBox 9"/>
           <p:cNvSpPr txBox="1"/>
           <p:nvPr/>
         </p:nvSpPr>
@@ -10216,7 +10788,7 @@
         <p:spPr>
           <a:xfrm>
             <a:off x="822960" y="457200"/>
-            <a:ext cx="8229600" cy="365760"/>
+            <a:ext cx="10058400" cy="365760"/>
           </a:xfrm>
           <a:prstGeom prst="rect">
             <a:avLst/>
@@ -10230,9 +10802,9 @@
           <a:lstStyle/>
           <a:p>
             <a:r>
-              <a:rPr sz="1200" b="1" i="0">
-                <a:solidFill>
-                  <a:srgbClr val="64748B"/>
+              <a:rPr sz="1300" b="1" i="0">
+                <a:solidFill>
+                  <a:srgbClr val="E8801A"/>
                 </a:solidFill>
                 <a:latin typeface="Montserrat"/>
               </a:rPr>
@@ -10264,7 +10836,7 @@
           <a:lstStyle/>
           <a:p>
             <a:r>
-              <a:rPr sz="2700" b="1" i="0">
+              <a:rPr sz="2800" b="1" i="0">
                 <a:solidFill>
                   <a:srgbClr val="1E2761"/>
                 </a:solidFill>
@@ -10277,13 +10849,57 @@
       </p:sp>
       <p:sp>
         <p:nvSpPr>
-          <p:cNvPr id="7" name="TextBox 6"/>
+          <p:cNvPr id="7" name="Rounded Rectangle 6"/>
+          <p:cNvSpPr/>
+          <p:nvPr/>
+        </p:nvSpPr>
+        <p:spPr>
+          <a:xfrm>
+            <a:off x="868680" y="1627632"/>
+            <a:ext cx="2011680" cy="73152"/>
+          </a:xfrm>
+          <a:prstGeom prst="roundRect">
+            <a:avLst/>
+          </a:prstGeom>
+          <a:solidFill>
+            <a:srgbClr val="E8801A"/>
+          </a:solidFill>
+          <a:ln>
+            <a:noFill/>
+          </a:ln>
+          <a:effectLst/>
+        </p:spPr>
+        <p:style>
+          <a:lnRef idx="1">
+            <a:schemeClr val="accent1"/>
+          </a:lnRef>
+          <a:fillRef idx="3">
+            <a:schemeClr val="accent1"/>
+          </a:fillRef>
+          <a:effectRef idx="2">
+            <a:schemeClr val="accent1"/>
+          </a:effectRef>
+          <a:fontRef idx="minor">
+            <a:schemeClr val="lt1"/>
+          </a:fontRef>
+        </p:style>
+        <p:txBody>
+          <a:bodyPr rtlCol="0" anchor="ctr"/>
+          <a:lstStyle/>
+          <a:p>
+            <a:pPr algn="ctr"/>
+          </a:p>
+        </p:txBody>
+      </p:sp>
+      <p:sp>
+        <p:nvSpPr>
+          <p:cNvPr id="8" name="TextBox 7"/>
           <p:cNvSpPr txBox="1"/>
           <p:nvPr/>
         </p:nvSpPr>
         <p:spPr>
           <a:xfrm>
-            <a:off x="822960" y="1920240"/>
+            <a:off x="822960" y="1965960"/>
             <a:ext cx="4983480" cy="4206240"/>
           </a:xfrm>
           <a:prstGeom prst="rect">
@@ -10299,17 +10915,17 @@
           <a:p>
             <a:pPr>
               <a:spcAft>
-                <a:spcPts val="1000"/>
+                <a:spcPts val="1100"/>
               </a:spcAft>
             </a:pPr>
             <a:r>
               <a:rPr sz="1600" b="1" i="0">
                 <a:solidFill>
-                  <a:srgbClr val="2E3A80"/>
-                </a:solidFill>
-                <a:latin typeface="Montserrat"/>
-              </a:rPr>
-              <a:t>•  </a:t>
+                  <a:srgbClr val="E8801A"/>
+                </a:solidFill>
+                <a:latin typeface="Montserrat"/>
+              </a:rPr>
+              <a:t>▸  </a:t>
             </a:r>
             <a:r>
               <a:rPr sz="1600" b="0" i="0">
@@ -10324,17 +10940,17 @@
           <a:p>
             <a:pPr>
               <a:spcAft>
-                <a:spcPts val="1000"/>
+                <a:spcPts val="1100"/>
               </a:spcAft>
             </a:pPr>
             <a:r>
               <a:rPr sz="1600" b="1" i="0">
                 <a:solidFill>
-                  <a:srgbClr val="2E3A80"/>
-                </a:solidFill>
-                <a:latin typeface="Montserrat"/>
-              </a:rPr>
-              <a:t>•  </a:t>
+                  <a:srgbClr val="E8801A"/>
+                </a:solidFill>
+                <a:latin typeface="Montserrat"/>
+              </a:rPr>
+              <a:t>▸  </a:t>
             </a:r>
             <a:r>
               <a:rPr sz="1600" b="0" i="0">
@@ -10349,17 +10965,17 @@
           <a:p>
             <a:pPr>
               <a:spcAft>
-                <a:spcPts val="1000"/>
+                <a:spcPts val="1100"/>
               </a:spcAft>
             </a:pPr>
             <a:r>
               <a:rPr sz="1600" b="1" i="0">
                 <a:solidFill>
-                  <a:srgbClr val="2E3A80"/>
-                </a:solidFill>
-                <a:latin typeface="Montserrat"/>
-              </a:rPr>
-              <a:t>•  </a:t>
+                  <a:srgbClr val="E8801A"/>
+                </a:solidFill>
+                <a:latin typeface="Montserrat"/>
+              </a:rPr>
+              <a:t>▸  </a:t>
             </a:r>
             <a:r>
               <a:rPr sz="1600" b="0" i="0">
@@ -10374,17 +10990,17 @@
           <a:p>
             <a:pPr>
               <a:spcAft>
-                <a:spcPts val="1000"/>
+                <a:spcPts val="1100"/>
               </a:spcAft>
             </a:pPr>
             <a:r>
               <a:rPr sz="1600" b="1" i="0">
                 <a:solidFill>
-                  <a:srgbClr val="2E3A80"/>
-                </a:solidFill>
-                <a:latin typeface="Montserrat"/>
-              </a:rPr>
-              <a:t>•  </a:t>
+                  <a:srgbClr val="E8801A"/>
+                </a:solidFill>
+                <a:latin typeface="Montserrat"/>
+              </a:rPr>
+              <a:t>▸  </a:t>
             </a:r>
             <a:r>
               <a:rPr sz="1600" b="0" i="0">
@@ -10400,7 +11016,7 @@
       </p:sp>
       <p:sp>
         <p:nvSpPr>
-          <p:cNvPr id="8" name="imgph" descr="IMGQ:carbon monoxide alarm detector kitchen"/>
+          <p:cNvPr id="9" name="imgph" descr="IMGQ:carbon monoxide alarm detector kitchen"/>
           <p:cNvSpPr/>
           <p:nvPr/>
         </p:nvSpPr>
@@ -10446,7 +11062,7 @@
       </p:sp>
       <p:sp>
         <p:nvSpPr>
-          <p:cNvPr id="9" name="TextBox 8"/>
+          <p:cNvPr id="10" name="TextBox 9"/>
           <p:cNvSpPr txBox="1"/>
           <p:nvPr/>
         </p:nvSpPr>
@@ -10631,7 +11247,7 @@
         <p:spPr>
           <a:xfrm>
             <a:off x="822960" y="457200"/>
-            <a:ext cx="8229600" cy="365760"/>
+            <a:ext cx="10058400" cy="365760"/>
           </a:xfrm>
           <a:prstGeom prst="rect">
             <a:avLst/>
@@ -10645,9 +11261,9 @@
           <a:lstStyle/>
           <a:p>
             <a:r>
-              <a:rPr sz="1200" b="1" i="0">
-                <a:solidFill>
-                  <a:srgbClr val="64748B"/>
+              <a:rPr sz="1300" b="1" i="0">
+                <a:solidFill>
+                  <a:srgbClr val="E8801A"/>
                 </a:solidFill>
                 <a:latin typeface="Montserrat"/>
               </a:rPr>
@@ -10679,7 +11295,7 @@
           <a:lstStyle/>
           <a:p>
             <a:r>
-              <a:rPr sz="2700" b="1" i="0">
+              <a:rPr sz="2800" b="1" i="0">
                 <a:solidFill>
                   <a:srgbClr val="1E2761"/>
                 </a:solidFill>
@@ -10692,13 +11308,57 @@
       </p:sp>
       <p:sp>
         <p:nvSpPr>
-          <p:cNvPr id="7" name="TextBox 6"/>
+          <p:cNvPr id="7" name="Rounded Rectangle 6"/>
+          <p:cNvSpPr/>
+          <p:nvPr/>
+        </p:nvSpPr>
+        <p:spPr>
+          <a:xfrm>
+            <a:off x="868680" y="1627632"/>
+            <a:ext cx="2011680" cy="73152"/>
+          </a:xfrm>
+          <a:prstGeom prst="roundRect">
+            <a:avLst/>
+          </a:prstGeom>
+          <a:solidFill>
+            <a:srgbClr val="E8801A"/>
+          </a:solidFill>
+          <a:ln>
+            <a:noFill/>
+          </a:ln>
+          <a:effectLst/>
+        </p:spPr>
+        <p:style>
+          <a:lnRef idx="1">
+            <a:schemeClr val="accent1"/>
+          </a:lnRef>
+          <a:fillRef idx="3">
+            <a:schemeClr val="accent1"/>
+          </a:fillRef>
+          <a:effectRef idx="2">
+            <a:schemeClr val="accent1"/>
+          </a:effectRef>
+          <a:fontRef idx="minor">
+            <a:schemeClr val="lt1"/>
+          </a:fontRef>
+        </p:style>
+        <p:txBody>
+          <a:bodyPr rtlCol="0" anchor="ctr"/>
+          <a:lstStyle/>
+          <a:p>
+            <a:pPr algn="ctr"/>
+          </a:p>
+        </p:txBody>
+      </p:sp>
+      <p:sp>
+        <p:nvSpPr>
+          <p:cNvPr id="8" name="TextBox 7"/>
           <p:cNvSpPr txBox="1"/>
           <p:nvPr/>
         </p:nvSpPr>
         <p:spPr>
           <a:xfrm>
-            <a:off x="822960" y="1920240"/>
+            <a:off x="822960" y="1965960"/>
             <a:ext cx="4983480" cy="4206240"/>
           </a:xfrm>
           <a:prstGeom prst="rect">
@@ -10714,17 +11374,17 @@
           <a:p>
             <a:pPr>
               <a:spcAft>
-                <a:spcPts val="1000"/>
+                <a:spcPts val="1100"/>
               </a:spcAft>
             </a:pPr>
             <a:r>
               <a:rPr sz="1600" b="1" i="0">
                 <a:solidFill>
-                  <a:srgbClr val="2E3A80"/>
-                </a:solidFill>
-                <a:latin typeface="Montserrat"/>
-              </a:rPr>
-              <a:t>•  </a:t>
+                  <a:srgbClr val="E8801A"/>
+                </a:solidFill>
+                <a:latin typeface="Montserrat"/>
+              </a:rPr>
+              <a:t>▸  </a:t>
             </a:r>
             <a:r>
               <a:rPr sz="1600" b="0" i="0">
@@ -10739,17 +11399,17 @@
           <a:p>
             <a:pPr>
               <a:spcAft>
-                <a:spcPts val="1000"/>
+                <a:spcPts val="1100"/>
               </a:spcAft>
             </a:pPr>
             <a:r>
               <a:rPr sz="1600" b="1" i="0">
                 <a:solidFill>
-                  <a:srgbClr val="2E3A80"/>
-                </a:solidFill>
-                <a:latin typeface="Montserrat"/>
-              </a:rPr>
-              <a:t>•  </a:t>
+                  <a:srgbClr val="E8801A"/>
+                </a:solidFill>
+                <a:latin typeface="Montserrat"/>
+              </a:rPr>
+              <a:t>▸  </a:t>
             </a:r>
             <a:r>
               <a:rPr sz="1600" b="0" i="0">
@@ -10764,17 +11424,17 @@
           <a:p>
             <a:pPr>
               <a:spcAft>
-                <a:spcPts val="1000"/>
+                <a:spcPts val="1100"/>
               </a:spcAft>
             </a:pPr>
             <a:r>
               <a:rPr sz="1600" b="1" i="0">
                 <a:solidFill>
-                  <a:srgbClr val="2E3A80"/>
-                </a:solidFill>
-                <a:latin typeface="Montserrat"/>
-              </a:rPr>
-              <a:t>•  </a:t>
+                  <a:srgbClr val="E8801A"/>
+                </a:solidFill>
+                <a:latin typeface="Montserrat"/>
+              </a:rPr>
+              <a:t>▸  </a:t>
             </a:r>
             <a:r>
               <a:rPr sz="1600" b="0" i="0">
@@ -10789,17 +11449,17 @@
           <a:p>
             <a:pPr>
               <a:spcAft>
-                <a:spcPts val="1000"/>
+                <a:spcPts val="1100"/>
               </a:spcAft>
             </a:pPr>
             <a:r>
               <a:rPr sz="1600" b="1" i="0">
                 <a:solidFill>
-                  <a:srgbClr val="2E3A80"/>
-                </a:solidFill>
-                <a:latin typeface="Montserrat"/>
-              </a:rPr>
-              <a:t>•  </a:t>
+                  <a:srgbClr val="E8801A"/>
+                </a:solidFill>
+                <a:latin typeface="Montserrat"/>
+              </a:rPr>
+              <a:t>▸  </a:t>
             </a:r>
             <a:r>
               <a:rPr sz="1600" b="0" i="0">
@@ -10815,7 +11475,7 @@
       </p:sp>
       <p:sp>
         <p:nvSpPr>
-          <p:cNvPr id="8" name="imgph" descr="IMGQ:combustion analyzer probe near gas heater"/>
+          <p:cNvPr id="9" name="imgph" descr="IMGQ:combustion analyzer probe near gas heater"/>
           <p:cNvSpPr/>
           <p:nvPr/>
         </p:nvSpPr>
@@ -10861,7 +11521,7 @@
       </p:sp>
       <p:sp>
         <p:nvSpPr>
-          <p:cNvPr id="9" name="TextBox 8"/>
+          <p:cNvPr id="10" name="TextBox 9"/>
           <p:cNvSpPr txBox="1"/>
           <p:nvPr/>
         </p:nvSpPr>
@@ -11046,7 +11706,7 @@
         <p:spPr>
           <a:xfrm>
             <a:off x="822960" y="457200"/>
-            <a:ext cx="8229600" cy="365760"/>
+            <a:ext cx="10058400" cy="365760"/>
           </a:xfrm>
           <a:prstGeom prst="rect">
             <a:avLst/>
@@ -11060,9 +11720,9 @@
           <a:lstStyle/>
           <a:p>
             <a:r>
-              <a:rPr sz="1200" b="1" i="0">
-                <a:solidFill>
-                  <a:srgbClr val="64748B"/>
+              <a:rPr sz="1300" b="1" i="0">
+                <a:solidFill>
+                  <a:srgbClr val="E8801A"/>
                 </a:solidFill>
                 <a:latin typeface="Montserrat"/>
               </a:rPr>
@@ -11094,7 +11754,7 @@
           <a:lstStyle/>
           <a:p>
             <a:r>
-              <a:rPr sz="2700" b="1" i="0">
+              <a:rPr sz="2800" b="1" i="0">
                 <a:solidFill>
                   <a:srgbClr val="1E2761"/>
                 </a:solidFill>
@@ -11107,13 +11767,57 @@
       </p:sp>
       <p:sp>
         <p:nvSpPr>
-          <p:cNvPr id="7" name="TextBox 6"/>
+          <p:cNvPr id="7" name="Rounded Rectangle 6"/>
+          <p:cNvSpPr/>
+          <p:nvPr/>
+        </p:nvSpPr>
+        <p:spPr>
+          <a:xfrm>
+            <a:off x="868680" y="1627632"/>
+            <a:ext cx="2011680" cy="73152"/>
+          </a:xfrm>
+          <a:prstGeom prst="roundRect">
+            <a:avLst/>
+          </a:prstGeom>
+          <a:solidFill>
+            <a:srgbClr val="E8801A"/>
+          </a:solidFill>
+          <a:ln>
+            <a:noFill/>
+          </a:ln>
+          <a:effectLst/>
+        </p:spPr>
+        <p:style>
+          <a:lnRef idx="1">
+            <a:schemeClr val="accent1"/>
+          </a:lnRef>
+          <a:fillRef idx="3">
+            <a:schemeClr val="accent1"/>
+          </a:fillRef>
+          <a:effectRef idx="2">
+            <a:schemeClr val="accent1"/>
+          </a:effectRef>
+          <a:fontRef idx="minor">
+            <a:schemeClr val="lt1"/>
+          </a:fontRef>
+        </p:style>
+        <p:txBody>
+          <a:bodyPr rtlCol="0" anchor="ctr"/>
+          <a:lstStyle/>
+          <a:p>
+            <a:pPr algn="ctr"/>
+          </a:p>
+        </p:txBody>
+      </p:sp>
+      <p:sp>
+        <p:nvSpPr>
+          <p:cNvPr id="8" name="TextBox 7"/>
           <p:cNvSpPr txBox="1"/>
           <p:nvPr/>
         </p:nvSpPr>
         <p:spPr>
           <a:xfrm>
-            <a:off x="822960" y="1920240"/>
+            <a:off x="822960" y="1965960"/>
             <a:ext cx="4983480" cy="4206240"/>
           </a:xfrm>
           <a:prstGeom prst="rect">
@@ -11129,17 +11833,17 @@
           <a:p>
             <a:pPr>
               <a:spcAft>
-                <a:spcPts val="1000"/>
+                <a:spcPts val="1100"/>
               </a:spcAft>
             </a:pPr>
             <a:r>
               <a:rPr sz="1600" b="1" i="0">
                 <a:solidFill>
-                  <a:srgbClr val="2E3A80"/>
-                </a:solidFill>
-                <a:latin typeface="Montserrat"/>
-              </a:rPr>
-              <a:t>•  </a:t>
+                  <a:srgbClr val="E8801A"/>
+                </a:solidFill>
+                <a:latin typeface="Montserrat"/>
+              </a:rPr>
+              <a:t>▸  </a:t>
             </a:r>
             <a:r>
               <a:rPr sz="1600" b="0" i="0">
@@ -11154,17 +11858,17 @@
           <a:p>
             <a:pPr>
               <a:spcAft>
-                <a:spcPts val="1000"/>
+                <a:spcPts val="1100"/>
               </a:spcAft>
             </a:pPr>
             <a:r>
               <a:rPr sz="1600" b="1" i="0">
                 <a:solidFill>
-                  <a:srgbClr val="2E3A80"/>
-                </a:solidFill>
-                <a:latin typeface="Montserrat"/>
-              </a:rPr>
-              <a:t>•  </a:t>
+                  <a:srgbClr val="E8801A"/>
+                </a:solidFill>
+                <a:latin typeface="Montserrat"/>
+              </a:rPr>
+              <a:t>▸  </a:t>
             </a:r>
             <a:r>
               <a:rPr sz="1600" b="0" i="0">
@@ -11179,17 +11883,17 @@
           <a:p>
             <a:pPr>
               <a:spcAft>
-                <a:spcPts val="1000"/>
+                <a:spcPts val="1100"/>
               </a:spcAft>
             </a:pPr>
             <a:r>
               <a:rPr sz="1600" b="1" i="0">
                 <a:solidFill>
-                  <a:srgbClr val="2E3A80"/>
-                </a:solidFill>
-                <a:latin typeface="Montserrat"/>
-              </a:rPr>
-              <a:t>•  </a:t>
+                  <a:srgbClr val="E8801A"/>
+                </a:solidFill>
+                <a:latin typeface="Montserrat"/>
+              </a:rPr>
+              <a:t>▸  </a:t>
             </a:r>
             <a:r>
               <a:rPr sz="1600" b="0" i="0">
@@ -11204,17 +11908,17 @@
           <a:p>
             <a:pPr>
               <a:spcAft>
-                <a:spcPts val="1000"/>
+                <a:spcPts val="1100"/>
               </a:spcAft>
             </a:pPr>
             <a:r>
               <a:rPr sz="1600" b="1" i="0">
                 <a:solidFill>
-                  <a:srgbClr val="2E3A80"/>
-                </a:solidFill>
-                <a:latin typeface="Montserrat"/>
-              </a:rPr>
-              <a:t>•  </a:t>
+                  <a:srgbClr val="E8801A"/>
+                </a:solidFill>
+                <a:latin typeface="Montserrat"/>
+              </a:rPr>
+              <a:t>▸  </a:t>
             </a:r>
             <a:r>
               <a:rPr sz="1600" b="0" i="0">
@@ -11230,7 +11934,7 @@
       </p:sp>
       <p:sp>
         <p:nvSpPr>
-          <p:cNvPr id="8" name="imgph" descr="IMGQ:flue gas analyzer measuring boiler exhaust"/>
+          <p:cNvPr id="9" name="imgph" descr="IMGQ:flue gas analyzer measuring boiler exhaust"/>
           <p:cNvSpPr/>
           <p:nvPr/>
         </p:nvSpPr>
@@ -11276,7 +11980,7 @@
       </p:sp>
       <p:sp>
         <p:nvSpPr>
-          <p:cNvPr id="9" name="TextBox 8"/>
+          <p:cNvPr id="10" name="TextBox 9"/>
           <p:cNvSpPr txBox="1"/>
           <p:nvPr/>
         </p:nvSpPr>
@@ -11461,7 +12165,7 @@
         <p:spPr>
           <a:xfrm>
             <a:off x="822960" y="457200"/>
-            <a:ext cx="8229600" cy="365760"/>
+            <a:ext cx="10058400" cy="365760"/>
           </a:xfrm>
           <a:prstGeom prst="rect">
             <a:avLst/>
@@ -11475,9 +12179,9 @@
           <a:lstStyle/>
           <a:p>
             <a:r>
-              <a:rPr sz="1200" b="1" i="0">
-                <a:solidFill>
-                  <a:srgbClr val="64748B"/>
+              <a:rPr sz="1300" b="1" i="0">
+                <a:solidFill>
+                  <a:srgbClr val="E8801A"/>
                 </a:solidFill>
                 <a:latin typeface="Montserrat"/>
               </a:rPr>
@@ -11509,7 +12213,7 @@
           <a:lstStyle/>
           <a:p>
             <a:r>
-              <a:rPr sz="2700" b="1" i="0">
+              <a:rPr sz="2800" b="1" i="0">
                 <a:solidFill>
                   <a:srgbClr val="1E2761"/>
                 </a:solidFill>
@@ -11522,13 +12226,57 @@
       </p:sp>
       <p:sp>
         <p:nvSpPr>
-          <p:cNvPr id="7" name="TextBox 6"/>
+          <p:cNvPr id="7" name="Rounded Rectangle 6"/>
+          <p:cNvSpPr/>
+          <p:nvPr/>
+        </p:nvSpPr>
+        <p:spPr>
+          <a:xfrm>
+            <a:off x="868680" y="1627632"/>
+            <a:ext cx="2011680" cy="73152"/>
+          </a:xfrm>
+          <a:prstGeom prst="roundRect">
+            <a:avLst/>
+          </a:prstGeom>
+          <a:solidFill>
+            <a:srgbClr val="E8801A"/>
+          </a:solidFill>
+          <a:ln>
+            <a:noFill/>
+          </a:ln>
+          <a:effectLst/>
+        </p:spPr>
+        <p:style>
+          <a:lnRef idx="1">
+            <a:schemeClr val="accent1"/>
+          </a:lnRef>
+          <a:fillRef idx="3">
+            <a:schemeClr val="accent1"/>
+          </a:fillRef>
+          <a:effectRef idx="2">
+            <a:schemeClr val="accent1"/>
+          </a:effectRef>
+          <a:fontRef idx="minor">
+            <a:schemeClr val="lt1"/>
+          </a:fontRef>
+        </p:style>
+        <p:txBody>
+          <a:bodyPr rtlCol="0" anchor="ctr"/>
+          <a:lstStyle/>
+          <a:p>
+            <a:pPr algn="ctr"/>
+          </a:p>
+        </p:txBody>
+      </p:sp>
+      <p:sp>
+        <p:nvSpPr>
+          <p:cNvPr id="8" name="TextBox 7"/>
           <p:cNvSpPr txBox="1"/>
           <p:nvPr/>
         </p:nvSpPr>
         <p:spPr>
           <a:xfrm>
-            <a:off x="822960" y="1920240"/>
+            <a:off x="822960" y="1965960"/>
             <a:ext cx="4983480" cy="4206240"/>
           </a:xfrm>
           <a:prstGeom prst="rect">
@@ -11544,17 +12292,17 @@
           <a:p>
             <a:pPr>
               <a:spcAft>
-                <a:spcPts val="1000"/>
+                <a:spcPts val="1100"/>
               </a:spcAft>
             </a:pPr>
             <a:r>
               <a:rPr sz="1600" b="1" i="0">
                 <a:solidFill>
-                  <a:srgbClr val="2E3A80"/>
-                </a:solidFill>
-                <a:latin typeface="Montserrat"/>
-              </a:rPr>
-              <a:t>•  </a:t>
+                  <a:srgbClr val="E8801A"/>
+                </a:solidFill>
+                <a:latin typeface="Montserrat"/>
+              </a:rPr>
+              <a:t>▸  </a:t>
             </a:r>
             <a:r>
               <a:rPr sz="1600" b="0" i="0">
@@ -11569,17 +12317,17 @@
           <a:p>
             <a:pPr>
               <a:spcAft>
-                <a:spcPts val="1000"/>
+                <a:spcPts val="1100"/>
               </a:spcAft>
             </a:pPr>
             <a:r>
               <a:rPr sz="1600" b="1" i="0">
                 <a:solidFill>
-                  <a:srgbClr val="2E3A80"/>
-                </a:solidFill>
-                <a:latin typeface="Montserrat"/>
-              </a:rPr>
-              <a:t>•  </a:t>
+                  <a:srgbClr val="E8801A"/>
+                </a:solidFill>
+                <a:latin typeface="Montserrat"/>
+              </a:rPr>
+              <a:t>▸  </a:t>
             </a:r>
             <a:r>
               <a:rPr sz="1600" b="0" i="0">
@@ -11594,17 +12342,17 @@
           <a:p>
             <a:pPr>
               <a:spcAft>
-                <a:spcPts val="1000"/>
+                <a:spcPts val="1100"/>
               </a:spcAft>
             </a:pPr>
             <a:r>
               <a:rPr sz="1600" b="1" i="0">
                 <a:solidFill>
-                  <a:srgbClr val="2E3A80"/>
-                </a:solidFill>
-                <a:latin typeface="Montserrat"/>
-              </a:rPr>
-              <a:t>•  </a:t>
+                  <a:srgbClr val="E8801A"/>
+                </a:solidFill>
+                <a:latin typeface="Montserrat"/>
+              </a:rPr>
+              <a:t>▸  </a:t>
             </a:r>
             <a:r>
               <a:rPr sz="1600" b="0" i="0">
@@ -11619,17 +12367,17 @@
           <a:p>
             <a:pPr>
               <a:spcAft>
-                <a:spcPts val="1000"/>
+                <a:spcPts val="1100"/>
               </a:spcAft>
             </a:pPr>
             <a:r>
               <a:rPr sz="1600" b="1" i="0">
                 <a:solidFill>
-                  <a:srgbClr val="2E3A80"/>
-                </a:solidFill>
-                <a:latin typeface="Montserrat"/>
-              </a:rPr>
-              <a:t>•  </a:t>
+                  <a:srgbClr val="E8801A"/>
+                </a:solidFill>
+                <a:latin typeface="Montserrat"/>
+              </a:rPr>
+              <a:t>▸  </a:t>
             </a:r>
             <a:r>
               <a:rPr sz="1600" b="0" i="0">
@@ -11645,7 +12393,7 @@
       </p:sp>
       <p:sp>
         <p:nvSpPr>
-          <p:cNvPr id="8" name="imgph" descr="IMGQ:kitchen extractor hood over gas cooktop"/>
+          <p:cNvPr id="9" name="imgph" descr="IMGQ:kitchen extractor hood over gas cooktop"/>
           <p:cNvSpPr/>
           <p:nvPr/>
         </p:nvSpPr>
@@ -11691,7 +12439,7 @@
       </p:sp>
       <p:sp>
         <p:nvSpPr>
-          <p:cNvPr id="9" name="TextBox 8"/>
+          <p:cNvPr id="10" name="TextBox 9"/>
           <p:cNvSpPr txBox="1"/>
           <p:nvPr/>
         </p:nvSpPr>
@@ -11876,7 +12624,7 @@
         <p:spPr>
           <a:xfrm>
             <a:off x="822960" y="457200"/>
-            <a:ext cx="8229600" cy="365760"/>
+            <a:ext cx="10058400" cy="365760"/>
           </a:xfrm>
           <a:prstGeom prst="rect">
             <a:avLst/>
@@ -11890,9 +12638,9 @@
           <a:lstStyle/>
           <a:p>
             <a:r>
-              <a:rPr sz="1200" b="1" i="0">
-                <a:solidFill>
-                  <a:srgbClr val="64748B"/>
+              <a:rPr sz="1300" b="1" i="0">
+                <a:solidFill>
+                  <a:srgbClr val="E8801A"/>
                 </a:solidFill>
                 <a:latin typeface="Montserrat"/>
               </a:rPr>
@@ -11924,7 +12672,7 @@
           <a:lstStyle/>
           <a:p>
             <a:r>
-              <a:rPr sz="2700" b="1" i="0">
+              <a:rPr sz="2800" b="1" i="0">
                 <a:solidFill>
                   <a:srgbClr val="1E2761"/>
                 </a:solidFill>
@@ -11937,13 +12685,57 @@
       </p:sp>
       <p:sp>
         <p:nvSpPr>
-          <p:cNvPr id="7" name="TextBox 6"/>
+          <p:cNvPr id="7" name="Rounded Rectangle 6"/>
+          <p:cNvSpPr/>
+          <p:nvPr/>
+        </p:nvSpPr>
+        <p:spPr>
+          <a:xfrm>
+            <a:off x="868680" y="1627632"/>
+            <a:ext cx="2011680" cy="73152"/>
+          </a:xfrm>
+          <a:prstGeom prst="roundRect">
+            <a:avLst/>
+          </a:prstGeom>
+          <a:solidFill>
+            <a:srgbClr val="E8801A"/>
+          </a:solidFill>
+          <a:ln>
+            <a:noFill/>
+          </a:ln>
+          <a:effectLst/>
+        </p:spPr>
+        <p:style>
+          <a:lnRef idx="1">
+            <a:schemeClr val="accent1"/>
+          </a:lnRef>
+          <a:fillRef idx="3">
+            <a:schemeClr val="accent1"/>
+          </a:fillRef>
+          <a:effectRef idx="2">
+            <a:schemeClr val="accent1"/>
+          </a:effectRef>
+          <a:fontRef idx="minor">
+            <a:schemeClr val="lt1"/>
+          </a:fontRef>
+        </p:style>
+        <p:txBody>
+          <a:bodyPr rtlCol="0" anchor="ctr"/>
+          <a:lstStyle/>
+          <a:p>
+            <a:pPr algn="ctr"/>
+          </a:p>
+        </p:txBody>
+      </p:sp>
+      <p:sp>
+        <p:nvSpPr>
+          <p:cNvPr id="8" name="TextBox 7"/>
           <p:cNvSpPr txBox="1"/>
           <p:nvPr/>
         </p:nvSpPr>
         <p:spPr>
           <a:xfrm>
-            <a:off x="822960" y="1920240"/>
+            <a:off x="822960" y="1965960"/>
             <a:ext cx="4983480" cy="4206240"/>
           </a:xfrm>
           <a:prstGeom prst="rect">
@@ -11959,17 +12751,17 @@
           <a:p>
             <a:pPr>
               <a:spcAft>
-                <a:spcPts val="1000"/>
+                <a:spcPts val="1100"/>
               </a:spcAft>
             </a:pPr>
             <a:r>
               <a:rPr sz="1600" b="1" i="0">
                 <a:solidFill>
-                  <a:srgbClr val="2E3A80"/>
-                </a:solidFill>
-                <a:latin typeface="Montserrat"/>
-              </a:rPr>
-              <a:t>•  </a:t>
+                  <a:srgbClr val="E8801A"/>
+                </a:solidFill>
+                <a:latin typeface="Montserrat"/>
+              </a:rPr>
+              <a:t>▸  </a:t>
             </a:r>
             <a:r>
               <a:rPr sz="1600" b="0" i="0">
@@ -11984,17 +12776,17 @@
           <a:p>
             <a:pPr>
               <a:spcAft>
-                <a:spcPts val="1000"/>
+                <a:spcPts val="1100"/>
               </a:spcAft>
             </a:pPr>
             <a:r>
               <a:rPr sz="1600" b="1" i="0">
                 <a:solidFill>
-                  <a:srgbClr val="2E3A80"/>
-                </a:solidFill>
-                <a:latin typeface="Montserrat"/>
-              </a:rPr>
-              <a:t>•  </a:t>
+                  <a:srgbClr val="E8801A"/>
+                </a:solidFill>
+                <a:latin typeface="Montserrat"/>
+              </a:rPr>
+              <a:t>▸  </a:t>
             </a:r>
             <a:r>
               <a:rPr sz="1600" b="0" i="0">
@@ -12009,17 +12801,17 @@
           <a:p>
             <a:pPr>
               <a:spcAft>
-                <a:spcPts val="1000"/>
+                <a:spcPts val="1100"/>
               </a:spcAft>
             </a:pPr>
             <a:r>
               <a:rPr sz="1600" b="1" i="0">
                 <a:solidFill>
-                  <a:srgbClr val="2E3A80"/>
-                </a:solidFill>
-                <a:latin typeface="Montserrat"/>
-              </a:rPr>
-              <a:t>•  </a:t>
+                  <a:srgbClr val="E8801A"/>
+                </a:solidFill>
+                <a:latin typeface="Montserrat"/>
+              </a:rPr>
+              <a:t>▸  </a:t>
             </a:r>
             <a:r>
               <a:rPr sz="1600" b="0" i="0">
@@ -12034,17 +12826,17 @@
           <a:p>
             <a:pPr>
               <a:spcAft>
-                <a:spcPts val="1000"/>
+                <a:spcPts val="1100"/>
               </a:spcAft>
             </a:pPr>
             <a:r>
               <a:rPr sz="1600" b="1" i="0">
                 <a:solidFill>
-                  <a:srgbClr val="2E3A80"/>
-                </a:solidFill>
-                <a:latin typeface="Montserrat"/>
-              </a:rPr>
-              <a:t>•  </a:t>
+                  <a:srgbClr val="E8801A"/>
+                </a:solidFill>
+                <a:latin typeface="Montserrat"/>
+              </a:rPr>
+              <a:t>▸  </a:t>
             </a:r>
             <a:r>
               <a:rPr sz="1600" b="0" i="0">
@@ -12060,7 +12852,7 @@
       </p:sp>
       <p:sp>
         <p:nvSpPr>
-          <p:cNvPr id="8" name="imgph" descr="IMGQ:written safety instructions note kitchen appliance"/>
+          <p:cNvPr id="9" name="imgph" descr="IMGQ:written safety instructions note kitchen appliance"/>
           <p:cNvSpPr/>
           <p:nvPr/>
         </p:nvSpPr>
@@ -12106,7 +12898,7 @@
       </p:sp>
       <p:sp>
         <p:nvSpPr>
-          <p:cNvPr id="9" name="TextBox 8"/>
+          <p:cNvPr id="10" name="TextBox 9"/>
           <p:cNvSpPr txBox="1"/>
           <p:nvPr/>
         </p:nvSpPr>

--- a/Curso Gas B/16 - UNE 60670 - Instalaciones en servicio y control periodico/16 - UNE 60670 - Instalaciones en servicio y control periodico - Vídeo 4.pptx
+++ b/Curso Gas B/16 - UNE 60670 - Instalaciones en servicio y control periodico/16 - UNE 60670 - Instalaciones en servicio y control periodico - Vídeo 4.pptx
@@ -23,6 +23,12 @@
     <p:sldId id="271" r:id="rId23"/>
     <p:sldId id="272" r:id="rId24"/>
     <p:sldId id="273" r:id="rId25"/>
+    <p:sldId id="274" r:id="rId26"/>
+    <p:sldId id="275" r:id="rId27"/>
+    <p:sldId id="276" r:id="rId28"/>
+    <p:sldId id="277" r:id="rId29"/>
+    <p:sldId id="278" r:id="rId30"/>
+    <p:sldId id="279" r:id="rId31"/>
   </p:sldIdLst>
   <p:sldSz cx="12191695" cy="6858000" type="screen4x3"/>
   <p:notesSz cx="6858000" cy="9144000"/>
@@ -604,22 +610,22 @@
           <a:lstStyle/>
           <a:p>
             <a:r>
-              <a:t>N1: Se me juntan los números. ¿Me los ordenas?</a:t>
-            </a:r>
-          </a:p>
-          <a:p>
-            <a:r>
-              <a:t>N2: Vamos a poner orden, que son dos escaleras que no puedes mezclar. Primera, el CO-ambiente, el del aire del local: hasta quince partes por millón está bien; entre quince y cincuenta es moderado, secundario, la AS uno o la AS dos; y por encima de cincuenta es grave, principal, la AP uno o la AP cuatro. Si en vez de monóxido mides dióxido de carbono ambiente, la misma escalera con otras cifras: hasta dos mil quinientos bien, entre dos mil quinientos y cinco mil moderado, más de cinco mil grave.</a:t>
-            </a:r>
-          </a:p>
-          <a:p>
-            <a:r>
-              <a:t>N1: ¿Y la del conducto?</a:t>
-            </a:r>
-          </a:p>
-          <a:p>
-            <a:r>
-              <a:t>N2: Esa es la segunda escalera, el CO en los productos de la combustión, medido dentro del conducto: hasta quinientas partes por millón es correcto; entre quinientas y mil es combustión deficiente, secundaria, la AS seis; y por encima de mil es combustión no higiénica, principal, la AP dos. La chuleta que lo resume todo: cincuenta es la del aire del local; quinientas y mil son las del conducto. Si tienes esos tres números, cincuenta, quinientas y mil, colocas cualquier medida en su sitio.</a:t>
+              <a:t>N1: ¿Cómo puede una campana ser peligrosa?</a:t>
+            </a:r>
+          </a:p>
+          <a:p>
+            <a:r>
+              <a:t>N2: Es un caso muy real de cocina. Tienes un calentador o caldera de tipo B de tiro natural y, al lado, una campana extractora o un extractor potente. Cuando la campana tira fuerte, puede succionar hacia el local los humos del calentador en vez de dejarlos subir por su conducto. A eso se le llama interferencia. Si no hay un dispositivo que evite esa interacción, como un enclavamiento, que apague uno cuando funciona el otro, o un detector de CO, entonces hay que comprobarlo.</a:t>
+            </a:r>
+          </a:p>
+          <a:p>
+            <a:r>
+              <a:t>N1: ¿Y cómo se comprueba?</a:t>
+            </a:r>
+          </a:p>
+          <a:p>
+            <a:r>
+              <a:t>N2: Con las puertas y ventanas cerradas y la campana funcionando a su máxima potencia, que es cuando más roba. Si en esas condiciones aparece revoco continuado o el CO-ambiente supera cincuenta partes por millón, o el dióxido de carbono ambiente supera cinco mil, es interferencia grave, anomalía principal AP cuatro. Fíjate que los umbrales son exactamente los mismos que en la AP uno; lo que cambia es la causa, la campana. Un truco práctico: si ya existe el enclavamiento o el detector entre la campana y el aparato, ni siquiera hace falta medir esto. Primero miras si está el dispositivo; si está, listo.</a:t>
             </a:r>
           </a:p>
         </p:txBody>
@@ -689,22 +695,22 @@
           <a:lstStyle/>
           <a:p>
             <a:r>
-              <a:t>N1: ¿Qué más anomalías secundarias hay?</a:t>
-            </a:r>
-          </a:p>
-          <a:p>
-            <a:r>
-              <a:t>N2: Un grupo importante. La AS tres: que los dispositivos de seguridad por extinción o detección de llama no funcionen correctamente; esos dispositivos son los que cortan el gas si la llama se apaga, así que tienen que responder. La AS cuatro: la imposibilidad de comprobar los productos de la combustión en un aparato de tipo B o C, porque no hay una toma de muestras accesible en el conducto sin desmontar la carcasa; esto no se aplica a los radiadores murales de tipo C ni a las secadoras. La AS cinco: que no se acredite el mantenimiento obligatorio del aparato en las salas de máquinas de potencia instalada superior a setenta kilovatios.</a:t>
-            </a:r>
-          </a:p>
-          <a:p>
-            <a:r>
-              <a:t>N1: ¿Y la AS-6?</a:t>
-            </a:r>
-          </a:p>
-          <a:p>
-            <a:r>
-              <a:t>N2: La AS seis es la combustión deficiente: cuando el CO en los productos de la combustión, el del conducto, está por encima de quinientas y hasta mil partes por millón. Es el peldaño intermedio de la escalera del conducto: todavía no llega a las mil de la combustión no higiénica principal, pero ya no es correcta. Por eso es secundaria, seis meses. Fíjate cómo encaja con lo que acabamos de ordenar: quinientas y mil son las dos fronteras del CO dentro del conducto.</a:t>
+              <a:t>N1: ¿Y si el revoco o la interferencia son pequeños?</a:t>
+            </a:r>
+          </a:p>
+          <a:p>
+            <a:r>
+              <a:t>N2: Entonces bajamos a la franja moderada, que es secundaria. La AS uno es el revoco moderado: cuando el CO-ambiente está por encima de quince y hasta cincuenta partes por millón, o el dióxido de carbono ambiente entre dos mil quinientos y cinco mil. La AS dos es la interferencia moderada de la campana, con esos mismos valores intermedios. No obligan a cortar, pero hay que corregirlas en seis meses.</a:t>
+            </a:r>
+          </a:p>
+          <a:p>
+            <a:r>
+              <a:t>N1: En la interferencia moderada, ¿el usuario puede seguir usándolo todo?</a:t>
+            </a:r>
+          </a:p>
+          <a:p>
+            <a:r>
+              <a:t>N2: Ahí hay una medida muy concreta que debes dejar. En la AS dos, la interferencia moderada, dejas instrucciones por escrito de no utilizar simultáneamente el aparato y la campana extractora hasta que se corrija la anomalía. Es decir, mientras no lo arreglen, o usan el calentador, o usan la campana, pero no los dos a la vez, porque juntos es cuando la campana roba el tiro. Fíjate en la escalera que se va formando: hasta quince, bien; de quince a cincuenta, moderado y secundario; más de cincuenta, grave y principal. Vamos a ordenarla del todo en el siguiente slide.</a:t>
             </a:r>
           </a:p>
         </p:txBody>
@@ -774,22 +780,22 @@
           <a:lstStyle/>
           <a:p>
             <a:r>
-              <a:t>N1: ¿Cómo se prueban los fuegos de la cocina?</a:t>
-            </a:r>
-          </a:p>
-          <a:p>
-            <a:r>
-              <a:t>N2: Con dos pruebas de taller muy clásicas que caen y que salvan vidas. La AS siete comprueba los mínimos: enciendes un fuego, lo pones al máximo y giras rápidamente el mando de golpe hasta el mínimo. Si la llama de alguno se apaga, el mínimo está mal regulado, y eso es la anomalía AS siete. ¿Por qué es peligroso? Porque una llama que se apaga sola deja salir gas sin quemar, y ese gas se acumula en la cocina.</a:t>
-            </a:r>
-          </a:p>
-          <a:p>
-            <a:r>
-              <a:t>N1: ¿Y la AS-8 en qué se diferencia?</a:t>
-            </a:r>
-          </a:p>
-          <a:p>
-            <a:r>
-              <a:t>N2: La AS ocho es más básica: el quemador directamente no funciona bien. No sale gas, está bloqueado, roto o desprendido, o el mando no responde. No es que se apague al mínimo como en la AS siete, es que el quemador o su mando están averiados. Las dos son secundarias, seis meses. La forma fácil de distinguirlas: AS siete, se apaga al bajar al mínimo; AS ocho, no va de ninguna manera. Son comprobaciones sencillas, sin aparatos, que cualquier gasista hace en dos minutos y que evitan sustos.</a:t>
+              <a:t>N1: Se me juntan los números. ¿Me los ordenas?</a:t>
+            </a:r>
+          </a:p>
+          <a:p>
+            <a:r>
+              <a:t>N2: Vamos a poner orden, que son dos escaleras que no puedes mezclar. Primera, el CO-ambiente, el del aire del local: hasta quince partes por millón está bien; entre quince y cincuenta es moderado, secundario, la AS uno o la AS dos; y por encima de cincuenta es grave, principal, la AP uno o la AP cuatro. Si en vez de monóxido mides dióxido de carbono ambiente, la misma escalera con otras cifras: hasta dos mil quinientos bien, entre dos mil quinientos y cinco mil moderado, más de cinco mil grave.</a:t>
+            </a:r>
+          </a:p>
+          <a:p>
+            <a:r>
+              <a:t>N1: ¿Y la del conducto?</a:t>
+            </a:r>
+          </a:p>
+          <a:p>
+            <a:r>
+              <a:t>N2: Esa es la segunda escalera, el CO en los productos de la combustión, medido dentro del conducto: hasta quinientas partes por millón es correcto; entre quinientas y mil es combustión deficiente, secundaria, la AS seis; y por encima de mil es combustión no higiénica, principal, la AP dos. La chuleta que lo resume todo: cincuenta es la del aire del local; quinientas y mil son las del conducto. Si tienes esos tres números, cincuenta, quinientas y mil, colocas cualquier medida en su sitio.</a:t>
             </a:r>
           </a:p>
         </p:txBody>
@@ -859,22 +865,12 @@
           <a:lstStyle/>
           <a:p>
             <a:r>
-              <a:t>N1: ¿Cómo se toma bien la muestra de los humos?</a:t>
-            </a:r>
-          </a:p>
-          <a:p>
-            <a:r>
-              <a:t>N2: El anexo A es el procedimiento normativo, el «cómo hacerlo bien». Pones el aparato en régimen estacionario y a la máxima potencia alcanzable. La toma se hace en el punto preparado a tal efecto; si no existe, se practica un orificio de diámetro mínimo de once milímetros lo más cerca posible del aparato, con útiles adecuados. La sonda se introduce perpendicular al conducto, de manera que su extremo quede en el eje de la vena de los productos de la combustión, es decir, en el centro del chorro de humos, que es donde la medida es representativa.</a:t>
-            </a:r>
-          </a:p>
-          <a:p>
-            <a:r>
-              <a:t>N1: ¿Y qué hago con el agujero después?</a:t>
-            </a:r>
-          </a:p>
-          <a:p>
-            <a:r>
-              <a:t>N2: Muy importante: una vez hecha la medición, tienes que obturar el orificio con un taponamiento que garantice la estanquidad en el tiempo, resistente a la temperatura de los humos, y que se pueda montar y desmontar cuantas veces haga falta para las próximas revisiones. No vale taparlo de cualquier forma: si no queda estanco, ese mismo agujero que hiciste para medir se convierte en una fuga de humos al local. La cifra que cae del anexo A es el diámetro: once milímetros.</a:t>
+              <a:t>N1: La trampa estrella del vídeo. Mil partes por millón de monóxido: ¿de dónde es ese número?</a:t>
+            </a:r>
+          </a:p>
+          <a:p>
+            <a:r>
+              <a:t>N2: No confundas el aire del local con lo que hay dentro del tubo de humos.</a:t>
             </a:r>
           </a:p>
         </p:txBody>
@@ -944,22 +940,12 @@
           <a:lstStyle/>
           <a:p>
             <a:r>
-              <a:t>N1: ¿Para qué sirve medir el oxígeno además del CO?</a:t>
-            </a:r>
-          </a:p>
-          <a:p>
-            <a:r>
-              <a:t>N2: El oxígeno es tu chivato de calidad: te dice si la medida que estás tomando es fiable. Salvo en generadores de aire caliente, se mide también el valor simultáneo de O dos. Si ese oxígeno sale por encima del diez por ciento, medido en la parte superior del cortatiros en aparatos de tipo B, sospecha: seguramente la sonda está mal colocada o se ha producido una inversión de tiro, es decir, que entra aire de fuera y diluye los humos, dándote una lectura de CO más baja de la real.</a:t>
-            </a:r>
-          </a:p>
-          <a:p>
-            <a:r>
-              <a:t>N1: ¿Y qué hago si me pasa eso?</a:t>
-            </a:r>
-          </a:p>
-          <a:p>
-            <a:r>
-              <a:t>N2: No das por buena esa medida. Repites, recolocando la sonda; y si confirmas que hay inversión de tiro, colocas la sonda en la parte inferior del cortatiros, para captar los humos antes de que se mezclen con el aire ambiente. Una excepción: las calderas de condensación van por su cuenta, sus valores se ajustan a lo que indique el fabricante, así que ahí no aplica la regla del diez por ciento. En resumen: un oxígeno alto es una bandera roja que dice «no te fíes de esta lectura, algo va mal en la toma».</a:t>
+              <a:t>N1: ¿Por qué del conducto y no del aire del local?</a:t>
+            </a:r>
+          </a:p>
+          <a:p>
+            <a:r>
+              <a:t>N2: Porque son dos escaleras distintas que no puedes mezclar. Cincuenta es el CO-ambiente, el del aire del local. Quinientas y mil son el CO dentro del conducto de humos: por encima de mil, combustión no higiénica, principal. Ten clavados los tres números y colocas cualquier medida en su sitio.</a:t>
             </a:r>
           </a:p>
         </p:txBody>
@@ -1029,22 +1015,22 @@
           <a:lstStyle/>
           <a:p>
             <a:r>
-              <a:t>N1: ¿Cada cuánto hay que revisar el analizador?</a:t>
-            </a:r>
-          </a:p>
-          <a:p>
-            <a:r>
-              <a:t>N2: Aquí vuelven los dieciocho meses, igual que el detector de fugas de la Parte once. El analizador de combustión debe someterse a una comprobación periódica por el fabricante o por un laboratorio acreditado según la Norma UNE-EN ISO/IEC diecisiete mil veinticinco, en ningún caso en periodos superiores a dieciocho meses. De esa comprobación se deja evidencia mediante un certificado en el que figuran las botellas patrón utilizadas, esos gases de referencia con concentración conocida con los que se ajusta el aparato.</a:t>
-            </a:r>
-          </a:p>
-          <a:p>
-            <a:r>
-              <a:t>N1: ¿Y cuánto guardo esos papeles?</a:t>
-            </a:r>
-          </a:p>
-          <a:p>
-            <a:r>
-              <a:t>N2: La empresa responsable del personal que hace el control debe guardar registro documental de esas comprobaciones durante cinco años. Y hay un requisito más de precisión: la incertidumbre de la calibración no debe superar el más menos cinco por ciento. Junta las cuatro cifras del anexo A, que caen tal cual: dieciocho meses de calibración, cinco años de registro, más menos cinco por ciento de incertidumbre y once milímetros del orificio de toma. Un analizador descalibrado te da una medida falsa y firmas como bueno un aparato peligroso; por eso es, literalmente, tu testigo, y hay que cuidarlo.</a:t>
+              <a:t>N1: ¿Qué más anomalías secundarias hay?</a:t>
+            </a:r>
+          </a:p>
+          <a:p>
+            <a:r>
+              <a:t>N2: Un grupo importante. La AS tres: que los dispositivos de seguridad por extinción o detección de llama no funcionen correctamente; esos dispositivos son los que cortan el gas si la llama se apaga, así que tienen que responder. La AS cuatro: la imposibilidad de comprobar los productos de la combustión en un aparato de tipo B o C, porque no hay una toma de muestras accesible en el conducto sin desmontar la carcasa; esto no se aplica a los radiadores murales de tipo C ni a las secadoras. La AS cinco: que no se acredite el mantenimiento obligatorio del aparato en las salas de máquinas de potencia instalada superior a setenta kilovatios.</a:t>
+            </a:r>
+          </a:p>
+          <a:p>
+            <a:r>
+              <a:t>N1: ¿Y la AS-6?</a:t>
+            </a:r>
+          </a:p>
+          <a:p>
+            <a:r>
+              <a:t>N2: La AS seis es la combustión deficiente: cuando el CO en los productos de la combustión, el del conducto, está por encima de quinientas y hasta mil partes por millón. Es el peldaño intermedio de la escalera del conducto: todavía no llega a las mil de la combustión no higiénica principal, pero ya no es correcta. Por eso es secundaria, seis meses. Fíjate cómo encaja con lo que acabamos de ordenar: quinientas y mil son las dos fronteras del CO dentro del conducto.</a:t>
             </a:r>
           </a:p>
         </p:txBody>
@@ -1114,22 +1100,22 @@
           <a:lstStyle/>
           <a:p>
             <a:r>
-              <a:t>N1: ¿Por qué hay un anexo aparte para estos aparatos?</a:t>
-            </a:r>
-          </a:p>
-          <a:p>
-            <a:r>
-              <a:t>N2: Porque los aparatos suspendidos de calefacción por radiación de tipo A, típicos de naves y locales grandes, son distintos: no tienen conducto de evacuación. Calientan por radiación y sueltan los humos directamente al local. Como no hay conducto donde meter la sonda, no puedes medir el CO en un conducto; lo que se mide es el CO en el aire del propio local, y para eso está el anexo B.</a:t>
-            </a:r>
-          </a:p>
-          <a:p>
-            <a:r>
-              <a:t>N1: ¿Y cómo se mide en un espacio tan grande?</a:t>
-            </a:r>
-          </a:p>
-          <a:p>
-            <a:r>
-              <a:t>N2: Pones todos los aparatos del local en marcha, en régimen estacionario y a máxima potencia, y los dejas calentar quince minutos antes de empezar. Luego recorres el local con la sonda a un metro con ochenta de altura, que es la altura de las personas, tomando medidas en puntos representativos, al menos cada veinticinco metros cuadrados, porque el monóxido no se reparte igual por todo el espacio. En cada punto dejas la sonda al menos cinco minutos. Los equipos, igual que en el anexo A: calibración cada dieciocho meses, registro cinco años, incertidumbre más menos cinco por ciento. Cifras del anexo B: veinticinco metros cuadrados, uno con ochenta de altura, quince minutos de calentamiento y cinco minutos por punto.</a:t>
+              <a:t>N1: ¿Cómo se prueban los fuegos de la cocina?</a:t>
+            </a:r>
+          </a:p>
+          <a:p>
+            <a:r>
+              <a:t>N2: Con dos pruebas de taller muy clásicas que caen y que salvan vidas. La AS siete comprueba los mínimos: enciendes un fuego, lo pones al máximo y giras rápidamente el mando de golpe hasta el mínimo. Si la llama de alguno se apaga, el mínimo está mal regulado, y eso es la anomalía AS siete. ¿Por qué es peligroso? Porque una llama que se apaga sola deja salir gas sin quemar, y ese gas se acumula en la cocina.</a:t>
+            </a:r>
+          </a:p>
+          <a:p>
+            <a:r>
+              <a:t>N1: ¿Y la AS-8 en qué se diferencia?</a:t>
+            </a:r>
+          </a:p>
+          <a:p>
+            <a:r>
+              <a:t>N2: La AS ocho es más básica: el quemador directamente no funciona bien. No sale gas, está bloqueado, roto o desprendido, o el mando no responde. No es que se apague al mínimo como en la AS siete, es que el quemador o su mando están averiados. Las dos son secundarias, seis meses. La forma fácil de distinguirlas: AS siete, se apaga al bajar al mínimo; AS ocho, no va de ninguna manera. Son comprobaciones sencillas, sin aparatos, que cualquier gasista hace en dos minutos y que evitan sustos.</a:t>
             </a:r>
           </a:p>
         </p:txBody>
@@ -1199,22 +1185,22 @@
           <a:lstStyle/>
           <a:p>
             <a:r>
-              <a:t>N1: ¿El papeleo es el mismo de siempre?</a:t>
-            </a:r>
-          </a:p>
-          <a:p>
-            <a:r>
-              <a:t>N2: Sí, el circuito no cambia. Resultado favorable, certificado. Con defectos, informe de anomalías con el alcance, la situación y el plazo, siempre con recomendaciones de seguridad, entregado al usuario. Y las anomalías principales se comunican a la empresa distribuidora. Es el mismo esquema de las partes once y doce, así que a estas alturas ya te sale solo.</a:t>
-            </a:r>
-          </a:p>
-          <a:p>
-            <a:r>
-              <a:t>N1: ¿Hay algo específico del aparato que no deba olvidar?</a:t>
-            </a:r>
-          </a:p>
-          <a:p>
-            <a:r>
-              <a:t>N2: No olvides la AS cinco, que es muy de estas instalaciones: en las salas de máquinas de más de setenta kilovatios hay que acreditar el mantenimiento obligatorio del aparato, ese que hace el fabricante. Si no hay justificante de ese mantenimiento, es anomalía secundaria. Fíjate cómo se cierra el círculo: el mantenimiento no lo cubre esta norma, pero el control periódico sí comprueba que se haya hecho donde es obligatorio. Sin ese papel, y sin el certificado o informe, la revisión del aparato no existe.</a:t>
+              <a:t>N1: ¿Cómo se toma bien la muestra de los humos?</a:t>
+            </a:r>
+          </a:p>
+          <a:p>
+            <a:r>
+              <a:t>N2: El anexo A es el procedimiento normativo, el «cómo hacerlo bien». Pones el aparato en régimen estacionario y a la máxima potencia alcanzable. La toma se hace en el punto preparado a tal efecto; si no existe, se practica un orificio de diámetro mínimo de once milímetros lo más cerca posible del aparato, con útiles adecuados. La sonda se introduce perpendicular al conducto, de manera que su extremo quede en el eje de la vena de los productos de la combustión, es decir, en el centro del chorro de humos, que es donde la medida es representativa.</a:t>
+            </a:r>
+          </a:p>
+          <a:p>
+            <a:r>
+              <a:t>N1: ¿Y qué hago con el agujero después?</a:t>
+            </a:r>
+          </a:p>
+          <a:p>
+            <a:r>
+              <a:t>N2: Muy importante: una vez hecha la medición, tienes que obturar el orificio con un taponamiento que garantice la estanquidad en el tiempo, resistente a la temperatura de los humos, y que se pueda montar y desmontar cuantas veces haga falta para las próximas revisiones. No vale taparlo de cualquier forma: si no queda estanco, ese mismo agujero que hiciste para medir se convierte en una fuga de humos al local. La cifra que cae del anexo A es el diámetro: once milímetros.</a:t>
             </a:r>
           </a:p>
         </p:txBody>
@@ -1284,22 +1270,107 @@
           <a:lstStyle/>
           <a:p>
             <a:r>
-              <a:t>N1: Último resumen del tema. ¿Qué me llevo de la Parte trece?</a:t>
-            </a:r>
-          </a:p>
-          <a:p>
-            <a:r>
-              <a:t>N2: Reconstruyamos el hilo y cerremos a lo grande. La Parte trece revisa el aparato: cómo quema, si devuelve humos y si sus seguridades funcionan; no la confundas con el mantenimiento, que lo marca el fabricante. El protagonista es el monóxido de carbono, el enemigo invisible que mata sin avisar. Y todo gira en torno a dos escaleras que no puedes mezclar: el CO en el aire del local, el CO-ambiente, con fronteras en quince y cincuenta partes por millón; y el CO dentro del conducto, con fronteras en quinientas y mil. Revoco es el humo que se devuelve al local en un tipo B de tiro natural, principal si es continuado. La campana puede robar el tiro, la AP cuatro. Y las pruebas de taller de la cocina: el mínimo que se apaga, AS siete, y el quemador que no va, AS ocho. Todo se mide con el analizador, tu testigo, que se calibra cada dieciocho meses, se guarda registro cinco años, tiene incertidumbre de más menos cinco por ciento y usa un orificio de once milímetros; el oxígeno por encima del diez por ciento te avisa de que la toma va mal.</a:t>
-            </a:r>
-          </a:p>
-          <a:p>
-            <a:r>
-              <a:t>N1: ¿Y cómo cae, y qué me llevo del tema entero?</a:t>
-            </a:r>
-          </a:p>
-          <a:p>
-            <a:r>
-              <a:t>N2: En el examen te van a dar valores de CO y tendrás que decir correcto, deficiente o no higiénico, y colocar cada número en su escalera; caerán el revoco, la campana, los dieciocho meses y las cifras del anexo B. En la obra, esto es lo que detecta el calentador que está intoxicando a una familia antes de que sea tarde. Y ahora mira atrás: en cuatro vídeos has recorrido las tres últimas partes de la UNE 60670. Sabes tocar una instalación en servicio sin liarla, la Parte once; sabes inspeccionar las tuberías y ponerles nota, en vivienda y en el edificio, la Parte doce; y sabes revisar el aparato y medir su combustión, la Parte trece. Has cerrado el Tema dieciséis completo. Ya no solo apruebas: piensas como un gasista con oficio, de los que dejan las casas seguras. Enhorabuena, y a por el siguiente tema con esa confianza.</a:t>
+              <a:t>N1: ¿Para qué sirve medir el oxígeno además del CO?</a:t>
+            </a:r>
+          </a:p>
+          <a:p>
+            <a:r>
+              <a:t>N2: El oxígeno es tu chivato de calidad: te dice si la medida que estás tomando es fiable. Salvo en generadores de aire caliente, se mide también el valor simultáneo de O dos. Si ese oxígeno sale por encima del diez por ciento, medido en la parte superior del cortatiros en aparatos de tipo B, sospecha: seguramente la sonda está mal colocada o se ha producido una inversión de tiro, es decir, que entra aire de fuera y diluye los humos, dándote una lectura de CO más baja de la real.</a:t>
+            </a:r>
+          </a:p>
+          <a:p>
+            <a:r>
+              <a:t>N1: ¿Y qué hago si me pasa eso?</a:t>
+            </a:r>
+          </a:p>
+          <a:p>
+            <a:r>
+              <a:t>N2: No das por buena esa medida. Repites, recolocando la sonda; y si confirmas que hay inversión de tiro, colocas la sonda en la parte inferior del cortatiros, para captar los humos antes de que se mezclen con el aire ambiente. Una excepción: las calderas de condensación van por su cuenta, sus valores se ajustan a lo que indique el fabricante, así que ahí no aplica la regla del diez por ciento. En resumen: un oxígeno alto es una bandera roja que dice «no te fíes de esta lectura, algo va mal en la toma».</a:t>
+            </a:r>
+          </a:p>
+        </p:txBody>
+      </p:sp>
+      <p:sp>
+        <p:nvSpPr>
+          <p:cNvPr id="4" name="Slide Number Placeholder 3"/>
+          <p:cNvSpPr>
+            <a:spLocks noGrp="1"/>
+          </p:cNvSpPr>
+          <p:nvPr>
+            <p:ph type="sldNum" idx="5" sz="quarter"/>
+          </p:nvPr>
+        </p:nvSpPr>
+        <p:spPr/>
+      </p:sp>
+    </p:spTree>
+  </p:cSld>
+  <p:clrMapOvr>
+    <a:masterClrMapping/>
+  </p:clrMapOvr>
+</p:notes>
+</file>
+
+<file path=ppt/notesSlides/notesSlide19.xml><?xml version="1.0" encoding="utf-8"?>
+<p:notes xmlns:a="http://schemas.openxmlformats.org/drawingml/2006/main" xmlns:p="http://schemas.openxmlformats.org/presentationml/2006/main" xmlns:r="http://schemas.openxmlformats.org/officeDocument/2006/relationships">
+  <p:cSld>
+    <p:spTree>
+      <p:nvGrpSpPr>
+        <p:cNvPr id="1" name=""/>
+        <p:cNvGrpSpPr/>
+        <p:nvPr/>
+      </p:nvGrpSpPr>
+      <p:grpSpPr>
+        <a:xfrm>
+          <a:off x="0" y="0"/>
+          <a:ext cx="0" cy="0"/>
+          <a:chOff x="0" y="0"/>
+          <a:chExt cx="0" cy="0"/>
+        </a:xfrm>
+      </p:grpSpPr>
+      <p:sp>
+        <p:nvSpPr>
+          <p:cNvPr id="2" name="Slide Image Placeholder 1"/>
+          <p:cNvSpPr>
+            <a:spLocks noGrp="1"/>
+          </p:cNvSpPr>
+          <p:nvPr>
+            <p:ph type="sldImg" idx="2"/>
+          </p:nvPr>
+        </p:nvSpPr>
+        <p:spPr/>
+      </p:sp>
+      <p:sp>
+        <p:nvSpPr>
+          <p:cNvPr id="3" name="Notes Placeholder 2"/>
+          <p:cNvSpPr>
+            <a:spLocks noGrp="1"/>
+          </p:cNvSpPr>
+          <p:nvPr>
+            <p:ph type="body" idx="3" sz="quarter"/>
+          </p:nvPr>
+        </p:nvSpPr>
+        <p:spPr/>
+        <p:txBody>
+          <a:bodyPr/>
+          <a:lstStyle/>
+          <a:p>
+            <a:r>
+              <a:t>N1: ¿Cada cuánto hay que revisar el analizador?</a:t>
+            </a:r>
+          </a:p>
+          <a:p>
+            <a:r>
+              <a:t>N2: Aquí vuelven los dieciocho meses, igual que el detector de fugas de la Parte once. El analizador de combustión debe someterse a una comprobación periódica por el fabricante o por un laboratorio acreditado según la Norma UNE-EN ISO/IEC diecisiete mil veinticinco, en ningún caso en periodos superiores a dieciocho meses. De esa comprobación se deja evidencia mediante un certificado en el que figuran las botellas patrón utilizadas, esos gases de referencia con concentración conocida con los que se ajusta el aparato.</a:t>
+            </a:r>
+          </a:p>
+          <a:p>
+            <a:r>
+              <a:t>N1: ¿Y cuánto guardo esos papeles?</a:t>
+            </a:r>
+          </a:p>
+          <a:p>
+            <a:r>
+              <a:t>N2: La empresa responsable del personal que hace el control debe guardar registro documental de esas comprobaciones durante cinco años. Y hay un requisito más de precisión: la incertidumbre de la calibración no debe superar el más menos cinco por ciento. Junta las cuatro cifras del anexo A, que caen tal cual: dieciocho meses de calibración, cinco años de registro, más menos cinco por ciento de incertidumbre y once milímetros del orificio de toma. Un analizador descalibrado te da una medida falsa y firmas como bueno un aparato peligroso; por eso es, literalmente, tu testigo, y hay que cuidarlo.</a:t>
             </a:r>
           </a:p>
         </p:txBody>
@@ -1399,6 +1470,411 @@
 </p:notes>
 </file>
 
+<file path=ppt/notesSlides/notesSlide20.xml><?xml version="1.0" encoding="utf-8"?>
+<p:notes xmlns:a="http://schemas.openxmlformats.org/drawingml/2006/main" xmlns:p="http://schemas.openxmlformats.org/presentationml/2006/main" xmlns:r="http://schemas.openxmlformats.org/officeDocument/2006/relationships">
+  <p:cSld>
+    <p:spTree>
+      <p:nvGrpSpPr>
+        <p:cNvPr id="1" name=""/>
+        <p:cNvGrpSpPr/>
+        <p:nvPr/>
+      </p:nvGrpSpPr>
+      <p:grpSpPr>
+        <a:xfrm>
+          <a:off x="0" y="0"/>
+          <a:ext cx="0" cy="0"/>
+          <a:chOff x="0" y="0"/>
+          <a:chExt cx="0" cy="0"/>
+        </a:xfrm>
+      </p:grpSpPr>
+      <p:sp>
+        <p:nvSpPr>
+          <p:cNvPr id="2" name="Slide Image Placeholder 1"/>
+          <p:cNvSpPr>
+            <a:spLocks noGrp="1"/>
+          </p:cNvSpPr>
+          <p:nvPr>
+            <p:ph type="sldImg" idx="2"/>
+          </p:nvPr>
+        </p:nvSpPr>
+        <p:spPr/>
+      </p:sp>
+      <p:sp>
+        <p:nvSpPr>
+          <p:cNvPr id="3" name="Notes Placeholder 2"/>
+          <p:cNvSpPr>
+            <a:spLocks noGrp="1"/>
+          </p:cNvSpPr>
+          <p:nvPr>
+            <p:ph type="body" idx="3" sz="quarter"/>
+          </p:nvPr>
+        </p:nvSpPr>
+        <p:spPr/>
+        <p:txBody>
+          <a:bodyPr/>
+          <a:lstStyle/>
+          <a:p>
+            <a:r>
+              <a:t>N1: De cifras del anexo, que caen tal cual. ¿Cada cuánto se calibra el analizador de combustión?</a:t>
+            </a:r>
+          </a:p>
+          <a:p>
+            <a:r>
+              <a:t>N2: Es el mismo plazo que ya viste para el detector de fugas de la parte once.</a:t>
+            </a:r>
+          </a:p>
+        </p:txBody>
+      </p:sp>
+      <p:sp>
+        <p:nvSpPr>
+          <p:cNvPr id="4" name="Slide Number Placeholder 3"/>
+          <p:cNvSpPr>
+            <a:spLocks noGrp="1"/>
+          </p:cNvSpPr>
+          <p:nvPr>
+            <p:ph type="sldNum" idx="5" sz="quarter"/>
+          </p:nvPr>
+        </p:nvSpPr>
+        <p:spPr/>
+      </p:sp>
+    </p:spTree>
+  </p:cSld>
+  <p:clrMapOvr>
+    <a:masterClrMapping/>
+  </p:clrMapOvr>
+</p:notes>
+</file>
+
+<file path=ppt/notesSlides/notesSlide21.xml><?xml version="1.0" encoding="utf-8"?>
+<p:notes xmlns:a="http://schemas.openxmlformats.org/drawingml/2006/main" xmlns:p="http://schemas.openxmlformats.org/presentationml/2006/main" xmlns:r="http://schemas.openxmlformats.org/officeDocument/2006/relationships">
+  <p:cSld>
+    <p:spTree>
+      <p:nvGrpSpPr>
+        <p:cNvPr id="1" name=""/>
+        <p:cNvGrpSpPr/>
+        <p:nvPr/>
+      </p:nvGrpSpPr>
+      <p:grpSpPr>
+        <a:xfrm>
+          <a:off x="0" y="0"/>
+          <a:ext cx="0" cy="0"/>
+          <a:chOff x="0" y="0"/>
+          <a:chExt cx="0" cy="0"/>
+        </a:xfrm>
+      </p:grpSpPr>
+      <p:sp>
+        <p:nvSpPr>
+          <p:cNvPr id="2" name="Slide Image Placeholder 1"/>
+          <p:cNvSpPr>
+            <a:spLocks noGrp="1"/>
+          </p:cNvSpPr>
+          <p:nvPr>
+            <p:ph type="sldImg" idx="2"/>
+          </p:nvPr>
+        </p:nvSpPr>
+        <p:spPr/>
+      </p:sp>
+      <p:sp>
+        <p:nvSpPr>
+          <p:cNvPr id="3" name="Notes Placeholder 2"/>
+          <p:cNvSpPr>
+            <a:spLocks noGrp="1"/>
+          </p:cNvSpPr>
+          <p:nvPr>
+            <p:ph type="body" idx="3" sz="quarter"/>
+          </p:nvPr>
+        </p:nvSpPr>
+        <p:spPr/>
+        <p:txBody>
+          <a:bodyPr/>
+          <a:lstStyle/>
+          <a:p>
+            <a:r>
+              <a:t>N1: ¿Por qué dieciocho meses?</a:t>
+            </a:r>
+          </a:p>
+          <a:p>
+            <a:r>
+              <a:t>N2: Porque un analizador descalibrado te da una medida falsa y firmarías como bueno un aparato peligroso. Por eso se comprueba, por el fabricante o por un laboratorio acreditado, en periodos que nunca superen los dieciocho meses. No lo confundas con los cinco años, que es cuánto se guarda el registro documental.</a:t>
+            </a:r>
+          </a:p>
+        </p:txBody>
+      </p:sp>
+      <p:sp>
+        <p:nvSpPr>
+          <p:cNvPr id="4" name="Slide Number Placeholder 3"/>
+          <p:cNvSpPr>
+            <a:spLocks noGrp="1"/>
+          </p:cNvSpPr>
+          <p:nvPr>
+            <p:ph type="sldNum" idx="5" sz="quarter"/>
+          </p:nvPr>
+        </p:nvSpPr>
+        <p:spPr/>
+      </p:sp>
+    </p:spTree>
+  </p:cSld>
+  <p:clrMapOvr>
+    <a:masterClrMapping/>
+  </p:clrMapOvr>
+</p:notes>
+</file>
+
+<file path=ppt/notesSlides/notesSlide22.xml><?xml version="1.0" encoding="utf-8"?>
+<p:notes xmlns:a="http://schemas.openxmlformats.org/drawingml/2006/main" xmlns:p="http://schemas.openxmlformats.org/presentationml/2006/main" xmlns:r="http://schemas.openxmlformats.org/officeDocument/2006/relationships">
+  <p:cSld>
+    <p:spTree>
+      <p:nvGrpSpPr>
+        <p:cNvPr id="1" name=""/>
+        <p:cNvGrpSpPr/>
+        <p:nvPr/>
+      </p:nvGrpSpPr>
+      <p:grpSpPr>
+        <a:xfrm>
+          <a:off x="0" y="0"/>
+          <a:ext cx="0" cy="0"/>
+          <a:chOff x="0" y="0"/>
+          <a:chExt cx="0" cy="0"/>
+        </a:xfrm>
+      </p:grpSpPr>
+      <p:sp>
+        <p:nvSpPr>
+          <p:cNvPr id="2" name="Slide Image Placeholder 1"/>
+          <p:cNvSpPr>
+            <a:spLocks noGrp="1"/>
+          </p:cNvSpPr>
+          <p:nvPr>
+            <p:ph type="sldImg" idx="2"/>
+          </p:nvPr>
+        </p:nvSpPr>
+        <p:spPr/>
+      </p:sp>
+      <p:sp>
+        <p:nvSpPr>
+          <p:cNvPr id="3" name="Notes Placeholder 2"/>
+          <p:cNvSpPr>
+            <a:spLocks noGrp="1"/>
+          </p:cNvSpPr>
+          <p:nvPr>
+            <p:ph type="body" idx="3" sz="quarter"/>
+          </p:nvPr>
+        </p:nvSpPr>
+        <p:spPr/>
+        <p:txBody>
+          <a:bodyPr/>
+          <a:lstStyle/>
+          <a:p>
+            <a:r>
+              <a:t>N1: ¿Por qué hay un anexo aparte para estos aparatos?</a:t>
+            </a:r>
+          </a:p>
+          <a:p>
+            <a:r>
+              <a:t>N2: Porque los aparatos suspendidos de calefacción por radiación de tipo A, típicos de naves y locales grandes, son distintos: no tienen conducto de evacuación. Calientan por radiación y sueltan los humos directamente al local. Como no hay conducto donde meter la sonda, no puedes medir el CO en un conducto; lo que se mide es el CO en el aire del propio local, y para eso está el anexo B.</a:t>
+            </a:r>
+          </a:p>
+          <a:p>
+            <a:r>
+              <a:t>N1: ¿Y cómo se mide en un espacio tan grande?</a:t>
+            </a:r>
+          </a:p>
+          <a:p>
+            <a:r>
+              <a:t>N2: Pones todos los aparatos del local en marcha, en régimen estacionario y a máxima potencia, y los dejas calentar quince minutos antes de empezar. Luego recorres el local con la sonda a un metro con ochenta de altura, que es la altura de las personas, tomando medidas en puntos representativos, al menos cada veinticinco metros cuadrados, porque el monóxido no se reparte igual por todo el espacio. En cada punto dejas la sonda al menos cinco minutos. Los equipos, igual que en el anexo A: calibración cada dieciocho meses, registro cinco años, incertidumbre más menos cinco por ciento. Cifras del anexo B: veinticinco metros cuadrados, uno con ochenta de altura, quince minutos de calentamiento y cinco minutos por punto.</a:t>
+            </a:r>
+          </a:p>
+        </p:txBody>
+      </p:sp>
+      <p:sp>
+        <p:nvSpPr>
+          <p:cNvPr id="4" name="Slide Number Placeholder 3"/>
+          <p:cNvSpPr>
+            <a:spLocks noGrp="1"/>
+          </p:cNvSpPr>
+          <p:nvPr>
+            <p:ph type="sldNum" idx="5" sz="quarter"/>
+          </p:nvPr>
+        </p:nvSpPr>
+        <p:spPr/>
+      </p:sp>
+    </p:spTree>
+  </p:cSld>
+  <p:clrMapOvr>
+    <a:masterClrMapping/>
+  </p:clrMapOvr>
+</p:notes>
+</file>
+
+<file path=ppt/notesSlides/notesSlide23.xml><?xml version="1.0" encoding="utf-8"?>
+<p:notes xmlns:a="http://schemas.openxmlformats.org/drawingml/2006/main" xmlns:p="http://schemas.openxmlformats.org/presentationml/2006/main" xmlns:r="http://schemas.openxmlformats.org/officeDocument/2006/relationships">
+  <p:cSld>
+    <p:spTree>
+      <p:nvGrpSpPr>
+        <p:cNvPr id="1" name=""/>
+        <p:cNvGrpSpPr/>
+        <p:nvPr/>
+      </p:nvGrpSpPr>
+      <p:grpSpPr>
+        <a:xfrm>
+          <a:off x="0" y="0"/>
+          <a:ext cx="0" cy="0"/>
+          <a:chOff x="0" y="0"/>
+          <a:chExt cx="0" cy="0"/>
+        </a:xfrm>
+      </p:grpSpPr>
+      <p:sp>
+        <p:nvSpPr>
+          <p:cNvPr id="2" name="Slide Image Placeholder 1"/>
+          <p:cNvSpPr>
+            <a:spLocks noGrp="1"/>
+          </p:cNvSpPr>
+          <p:nvPr>
+            <p:ph type="sldImg" idx="2"/>
+          </p:nvPr>
+        </p:nvSpPr>
+        <p:spPr/>
+      </p:sp>
+      <p:sp>
+        <p:nvSpPr>
+          <p:cNvPr id="3" name="Notes Placeholder 2"/>
+          <p:cNvSpPr>
+            <a:spLocks noGrp="1"/>
+          </p:cNvSpPr>
+          <p:nvPr>
+            <p:ph type="body" idx="3" sz="quarter"/>
+          </p:nvPr>
+        </p:nvSpPr>
+        <p:spPr/>
+        <p:txBody>
+          <a:bodyPr/>
+          <a:lstStyle/>
+          <a:p>
+            <a:r>
+              <a:t>N1: ¿El papeleo es el mismo de siempre?</a:t>
+            </a:r>
+          </a:p>
+          <a:p>
+            <a:r>
+              <a:t>N2: Sí, el circuito no cambia. Resultado favorable, certificado. Con defectos, informe de anomalías con el alcance, la situación y el plazo, siempre con recomendaciones de seguridad, entregado al usuario. Y las anomalías principales se comunican a la empresa distribuidora. Es el mismo esquema de las partes once y doce, así que a estas alturas ya te sale solo.</a:t>
+            </a:r>
+          </a:p>
+          <a:p>
+            <a:r>
+              <a:t>N1: ¿Hay algo específico del aparato que no deba olvidar?</a:t>
+            </a:r>
+          </a:p>
+          <a:p>
+            <a:r>
+              <a:t>N2: No olvides la AS cinco, que es muy de estas instalaciones: en las salas de máquinas de más de setenta kilovatios hay que acreditar el mantenimiento obligatorio del aparato, ese que hace el fabricante. Si no hay justificante de ese mantenimiento, es anomalía secundaria. Fíjate cómo se cierra el círculo: el mantenimiento no lo cubre esta norma, pero el control periódico sí comprueba que se haya hecho donde es obligatorio. Sin ese papel, y sin el certificado o informe, la revisión del aparato no existe.</a:t>
+            </a:r>
+          </a:p>
+        </p:txBody>
+      </p:sp>
+      <p:sp>
+        <p:nvSpPr>
+          <p:cNvPr id="4" name="Slide Number Placeholder 3"/>
+          <p:cNvSpPr>
+            <a:spLocks noGrp="1"/>
+          </p:cNvSpPr>
+          <p:nvPr>
+            <p:ph type="sldNum" idx="5" sz="quarter"/>
+          </p:nvPr>
+        </p:nvSpPr>
+        <p:spPr/>
+      </p:sp>
+    </p:spTree>
+  </p:cSld>
+  <p:clrMapOvr>
+    <a:masterClrMapping/>
+  </p:clrMapOvr>
+</p:notes>
+</file>
+
+<file path=ppt/notesSlides/notesSlide24.xml><?xml version="1.0" encoding="utf-8"?>
+<p:notes xmlns:a="http://schemas.openxmlformats.org/drawingml/2006/main" xmlns:p="http://schemas.openxmlformats.org/presentationml/2006/main" xmlns:r="http://schemas.openxmlformats.org/officeDocument/2006/relationships">
+  <p:cSld>
+    <p:spTree>
+      <p:nvGrpSpPr>
+        <p:cNvPr id="1" name=""/>
+        <p:cNvGrpSpPr/>
+        <p:nvPr/>
+      </p:nvGrpSpPr>
+      <p:grpSpPr>
+        <a:xfrm>
+          <a:off x="0" y="0"/>
+          <a:ext cx="0" cy="0"/>
+          <a:chOff x="0" y="0"/>
+          <a:chExt cx="0" cy="0"/>
+        </a:xfrm>
+      </p:grpSpPr>
+      <p:sp>
+        <p:nvSpPr>
+          <p:cNvPr id="2" name="Slide Image Placeholder 1"/>
+          <p:cNvSpPr>
+            <a:spLocks noGrp="1"/>
+          </p:cNvSpPr>
+          <p:nvPr>
+            <p:ph type="sldImg" idx="2"/>
+          </p:nvPr>
+        </p:nvSpPr>
+        <p:spPr/>
+      </p:sp>
+      <p:sp>
+        <p:nvSpPr>
+          <p:cNvPr id="3" name="Notes Placeholder 2"/>
+          <p:cNvSpPr>
+            <a:spLocks noGrp="1"/>
+          </p:cNvSpPr>
+          <p:nvPr>
+            <p:ph type="body" idx="3" sz="quarter"/>
+          </p:nvPr>
+        </p:nvSpPr>
+        <p:spPr/>
+        <p:txBody>
+          <a:bodyPr/>
+          <a:lstStyle/>
+          <a:p>
+            <a:r>
+              <a:t>N1: Último resumen del tema. ¿Qué me llevo de la Parte trece?</a:t>
+            </a:r>
+          </a:p>
+          <a:p>
+            <a:r>
+              <a:t>N2: Reconstruyamos el hilo y cerremos a lo grande. La Parte trece revisa el aparato: cómo quema, si devuelve humos y si sus seguridades funcionan; no la confundas con el mantenimiento, que lo marca el fabricante. El protagonista es el monóxido de carbono, el enemigo invisible que mata sin avisar. Y todo gira en torno a dos escaleras que no puedes mezclar: el CO en el aire del local, el CO-ambiente, con fronteras en quince y cincuenta partes por millón; y el CO dentro del conducto, con fronteras en quinientas y mil. Revoco es el humo que se devuelve al local en un tipo B de tiro natural, principal si es continuado. La campana puede robar el tiro, la AP cuatro. Y las pruebas de taller de la cocina: el mínimo que se apaga, AS siete, y el quemador que no va, AS ocho. Todo se mide con el analizador, tu testigo, que se calibra cada dieciocho meses, se guarda registro cinco años, tiene incertidumbre de más menos cinco por ciento y usa un orificio de once milímetros; el oxígeno por encima del diez por ciento te avisa de que la toma va mal.</a:t>
+            </a:r>
+          </a:p>
+          <a:p>
+            <a:r>
+              <a:t>N1: ¿Y cómo cae, y qué me llevo del tema entero?</a:t>
+            </a:r>
+          </a:p>
+          <a:p>
+            <a:r>
+              <a:t>N2: En el examen te van a dar valores de CO y tendrás que decir correcto, deficiente o no higiénico, y colocar cada número en su escalera; caerán el revoco, la campana, los dieciocho meses y las cifras del anexo B. En la obra, esto es lo que detecta el calentador que está intoxicando a una familia antes de que sea tarde. Y ahora mira atrás: en cuatro vídeos has recorrido las tres últimas partes de la UNE 60670. Sabes tocar una instalación en servicio sin liarla, la Parte once; sabes inspeccionar las tuberías y ponerles nota, en vivienda y en el edificio, la Parte doce; y sabes revisar el aparato y medir su combustión, la Parte trece. Has cerrado el Tema dieciséis completo. Ya no solo apruebas: piensas como un gasista con oficio, de los que dejan las casas seguras. Enhorabuena, y a por el siguiente tema con esa confianza.</a:t>
+            </a:r>
+          </a:p>
+        </p:txBody>
+      </p:sp>
+      <p:sp>
+        <p:nvSpPr>
+          <p:cNvPr id="4" name="Slide Number Placeholder 3"/>
+          <p:cNvSpPr>
+            <a:spLocks noGrp="1"/>
+          </p:cNvSpPr>
+          <p:nvPr>
+            <p:ph type="sldNum" idx="5" sz="quarter"/>
+          </p:nvPr>
+        </p:nvSpPr>
+        <p:spPr/>
+      </p:sp>
+    </p:spTree>
+  </p:cSld>
+  <p:clrMapOvr>
+    <a:masterClrMapping/>
+  </p:clrMapOvr>
+</p:notes>
+</file>
+
 <file path=ppt/notesSlides/notesSlide3.xml><?xml version="1.0" encoding="utf-8"?>
 <p:notes xmlns:a="http://schemas.openxmlformats.org/drawingml/2006/main" xmlns:p="http://schemas.openxmlformats.org/presentationml/2006/main" xmlns:r="http://schemas.openxmlformats.org/officeDocument/2006/relationships">
   <p:cSld>
@@ -1784,22 +2260,12 @@
           <a:lstStyle/>
           <a:p>
             <a:r>
-              <a:t>N1: ¿Qué es la combustión no higiénica?</a:t>
-            </a:r>
-          </a:p>
-          <a:p>
-            <a:r>
-              <a:t>N2: Es cuando el aparato quema tan mal que produce demasiado monóxido. Para verlo, se hace una comprobación de la combustión de los quemadores con un analizador, midiendo el CO corregido no diluido en los productos de la combustión, lo que llamamos CO de los productos de la combustión o CO-PdC. Esa medida se hace dentro del conducto, siguiendo el procedimiento del anexo A, con puertas y ventanas cerradas. Se considera combustión no higiénica, anomalía principal AP dos, cuando ese CO en los productos de la combustión supera las mil partes por millón.</a:t>
-            </a:r>
-          </a:p>
-          <a:p>
-            <a:r>
-              <a:t>N1: Cuidado, ¿este mil no es el mismo cincuenta de antes?</a:t>
-            </a:r>
-          </a:p>
-          <a:p>
-            <a:r>
-              <a:t>N2: Muy buena pregunta, y no: son medidas distintas. El cincuenta era CO-ambiente, en el aire del local. El mil es CO dentro del conducto de humos del aparato. No los mezcles nunca. Y una anomalía más, la AP tres: la inexistencia del dispositivo de control de contaminación de la atmósfera, el llamado dispositivo AS, en los aparatos que reglamentariamente deben llevarlo. Ese dispositivo corta el aparato si el ambiente se contamina; si falta donde es obligatorio, es principal.</a:t>
+              <a:t>N1: De procedimiento fino. ¿Con qué condiciones de puertas, ventanas y campana se mide el CO del aire del local?</a:t>
+            </a:r>
+          </a:p>
+          <a:p>
+            <a:r>
+              <a:t>N2: Piensa en cuándo hay de verdad riesgo: ¿con la casa abierta o cerrada?</a:t>
             </a:r>
           </a:p>
         </p:txBody>
@@ -1869,22 +2335,12 @@
           <a:lstStyle/>
           <a:p>
             <a:r>
-              <a:t>N1: ¿Cómo puede una campana ser peligrosa?</a:t>
-            </a:r>
-          </a:p>
-          <a:p>
-            <a:r>
-              <a:t>N2: Es un caso muy real de cocina. Tienes un calentador o caldera de tipo B de tiro natural y, al lado, una campana extractora o un extractor potente. Cuando la campana tira fuerte, puede succionar hacia el local los humos del calentador en vez de dejarlos subir por su conducto. A eso se le llama interferencia. Si no hay un dispositivo que evite esa interacción, como un enclavamiento, que apague uno cuando funciona el otro, o un detector de CO, entonces hay que comprobarlo.</a:t>
-            </a:r>
-          </a:p>
-          <a:p>
-            <a:r>
-              <a:t>N1: ¿Y cómo se comprueba?</a:t>
-            </a:r>
-          </a:p>
-          <a:p>
-            <a:r>
-              <a:t>N2: Con las puertas y ventanas cerradas y la campana funcionando a su máxima potencia, que es cuando más roba. Si en esas condiciones aparece revoco continuado o el CO-ambiente supera cincuenta partes por millón, o el dióxido de carbono ambiente supera cinco mil, es interferencia grave, anomalía principal AP cuatro. Fíjate que los umbrales son exactamente los mismos que en la AP uno; lo que cambia es la causa, la campana. Un truco práctico: si ya existe el enclavamiento o el detector entre la campana y el aparato, ni siquiera hace falta medir esto. Primero miras si está el dispositivo; si está, listo.</a:t>
+              <a:t>N1: ¿Por qué con todo cerrado?</a:t>
+            </a:r>
+          </a:p>
+          <a:p>
+            <a:r>
+              <a:t>N2: Porque queremos el peor escenario. Con las ventanas abiertas, el aire limpio diluiría el monóxido y te daría una lectura falsamente buena. Cerrado y con la campana apagada compruebas qué pasa cuando la familia tiene la cocina cerrada en invierno, que es cuando hay riesgo de verdad.</a:t>
             </a:r>
           </a:p>
         </p:txBody>
@@ -1954,22 +2410,22 @@
           <a:lstStyle/>
           <a:p>
             <a:r>
-              <a:t>N1: ¿Y si el revoco o la interferencia son pequeños?</a:t>
-            </a:r>
-          </a:p>
-          <a:p>
-            <a:r>
-              <a:t>N2: Entonces bajamos a la franja moderada, que es secundaria. La AS uno es el revoco moderado: cuando el CO-ambiente está por encima de quince y hasta cincuenta partes por millón, o el dióxido de carbono ambiente entre dos mil quinientos y cinco mil. La AS dos es la interferencia moderada de la campana, con esos mismos valores intermedios. No obligan a cortar, pero hay que corregirlas en seis meses.</a:t>
-            </a:r>
-          </a:p>
-          <a:p>
-            <a:r>
-              <a:t>N1: En la interferencia moderada, ¿el usuario puede seguir usándolo todo?</a:t>
-            </a:r>
-          </a:p>
-          <a:p>
-            <a:r>
-              <a:t>N2: Ahí hay una medida muy concreta que debes dejar. En la AS dos, la interferencia moderada, dejas instrucciones por escrito de no utilizar simultáneamente el aparato y la campana extractora hasta que se corrija la anomalía. Es decir, mientras no lo arreglen, o usan el calentador, o usan la campana, pero no los dos a la vez, porque juntos es cuando la campana roba el tiro. Fíjate en la escalera que se va formando: hasta quince, bien; de quince a cincuenta, moderado y secundario; más de cincuenta, grave y principal. Vamos a ordenarla del todo en el siguiente slide.</a:t>
+              <a:t>N1: ¿Qué es la combustión no higiénica?</a:t>
+            </a:r>
+          </a:p>
+          <a:p>
+            <a:r>
+              <a:t>N2: Es cuando el aparato quema tan mal que produce demasiado monóxido. Para verlo, se hace una comprobación de la combustión de los quemadores con un analizador, midiendo el CO corregido no diluido en los productos de la combustión, lo que llamamos CO de los productos de la combustión o CO-PdC. Esa medida se hace dentro del conducto, siguiendo el procedimiento del anexo A, con puertas y ventanas cerradas. Se considera combustión no higiénica, anomalía principal AP dos, cuando ese CO en los productos de la combustión supera las mil partes por millón.</a:t>
+            </a:r>
+          </a:p>
+          <a:p>
+            <a:r>
+              <a:t>N1: Cuidado, ¿este mil no es el mismo cincuenta de antes?</a:t>
+            </a:r>
+          </a:p>
+          <a:p>
+            <a:r>
+              <a:t>N2: Muy buena pregunta, y no: son medidas distintas. El cincuenta era CO-ambiente, en el aire del local. El mil es CO dentro del conducto de humos del aparato. No los mezcles nunca. Y una anomalía más, la AP tres: la inexistencia del dispositivo de control de contaminación de la atmósfera, el llamado dispositivo AS, en los aparatos que reglamentariamente deben llevarlo. Ese dispositivo corta el aparato si el ambiente se contamina; si falta donde es obligatorio, es principal.</a:t>
             </a:r>
           </a:p>
         </p:txBody>
@@ -5055,7 +5511,7 @@
       </p:sp>
       <p:sp>
         <p:nvSpPr>
-          <p:cNvPr id="4" name="Rounded Rectangle 3"/>
+          <p:cNvPr id="4" name="Rectangle 3"/>
           <p:cNvSpPr/>
           <p:nvPr/>
         </p:nvSpPr>
@@ -5064,7 +5520,7 @@
             <a:off x="868680" y="2057400"/>
             <a:ext cx="1463040" cy="82296"/>
           </a:xfrm>
-          <a:prstGeom prst="roundRect">
+          <a:prstGeom prst="rect">
             <a:avLst/>
           </a:prstGeom>
           <a:solidFill>
@@ -5181,6 +5637,18 @@
   <p:clrMapOvr>
     <a:masterClrMapping/>
   </p:clrMapOvr>
+  <mc:AlternateContent xmlns:mc="http://schemas.openxmlformats.org/markup-compatibility/2006">
+    <mc:Choice xmlns:p14="http://schemas.microsoft.com/office/powerpoint/2010/main" Requires="p14">
+      <p:transition spd="med" p14:dur="700">
+        <p14:cube dir="l"/>
+      </p:transition>
+    </mc:Choice>
+    <mc:Fallback>
+      <p:transition spd="med">
+        <p:push dir="l"/>
+      </p:transition>
+    </mc:Fallback>
+  </mc:AlternateContent>
 </p:sld>
 </file>
 
@@ -5268,7 +5736,7 @@
                 </a:solidFill>
                 <a:latin typeface="Montserrat"/>
               </a:rPr>
-              <a:t>010 / 018</a:t>
+              <a:t>010 / 024</a:t>
             </a:r>
           </a:p>
         </p:txBody>
@@ -5336,7 +5804,7 @@
                 </a:solidFill>
                 <a:latin typeface="Montserrat"/>
               </a:rPr>
-              <a:t>PARTE 13 · RESUMEN DE UMBRALES</a:t>
+              <a:t>PARTE 13 · AP-4</a:t>
             </a:r>
           </a:p>
         </p:txBody>
@@ -5370,14 +5838,14 @@
                 </a:solidFill>
                 <a:latin typeface="Montserrat"/>
               </a:rPr>
-              <a:t>Las dos escaleras del CO</a:t>
-            </a:r>
-          </a:p>
-        </p:txBody>
-      </p:sp>
-      <p:sp>
-        <p:nvSpPr>
-          <p:cNvPr id="7" name="Rounded Rectangle 6"/>
+              <a:t>La campana que roba el tiro</a:t>
+            </a:r>
+          </a:p>
+        </p:txBody>
+      </p:sp>
+      <p:sp>
+        <p:nvSpPr>
+          <p:cNvPr id="7" name="Rectangle 6"/>
           <p:cNvSpPr/>
           <p:nvPr/>
         </p:nvSpPr>
@@ -5386,7 +5854,7 @@
             <a:off x="868680" y="1627632"/>
             <a:ext cx="2011680" cy="73152"/>
           </a:xfrm>
-          <a:prstGeom prst="roundRect">
+          <a:prstGeom prst="rect">
             <a:avLst/>
           </a:prstGeom>
           <a:solidFill>
@@ -5427,8 +5895,8 @@
         </p:nvSpPr>
         <p:spPr>
           <a:xfrm>
-            <a:off x="822960" y="1965960"/>
-            <a:ext cx="4983480" cy="4206240"/>
+            <a:off x="6355080" y="1965960"/>
+            <a:ext cx="5029200" cy="4206240"/>
           </a:xfrm>
           <a:prstGeom prst="rect">
             <a:avLst/>
@@ -5462,7 +5930,7 @@
                 </a:solidFill>
                 <a:latin typeface="Montserrat"/>
               </a:rPr>
-              <a:t>CO-ambiente: 15 y 50 ppm</a:t>
+              <a:t>Tipo B tiro natural junto a campana potente</a:t>
             </a:r>
           </a:p>
           <a:p>
@@ -5487,7 +5955,7 @@
                 </a:solidFill>
                 <a:latin typeface="Montserrat"/>
               </a:rPr>
-              <a:t>CO₂-ambiente: 2500 y 5000 ppm</a:t>
+              <a:t>Sin enclavamiento ni detector de CO</a:t>
             </a:r>
           </a:p>
           <a:p>
@@ -5512,7 +5980,7 @@
                 </a:solidFill>
                 <a:latin typeface="Montserrat"/>
               </a:rPr>
-              <a:t>CO en conducto: 500 y 1000 ppm</a:t>
+              <a:t>Con campana a tope: revoco o CO &gt; 50 ppm</a:t>
             </a:r>
           </a:p>
           <a:p>
@@ -5537,21 +6005,21 @@
                 </a:solidFill>
                 <a:latin typeface="Montserrat"/>
               </a:rPr>
-              <a:t>50 es del aire; 500 y 1000, del conducto</a:t>
-            </a:r>
-          </a:p>
-        </p:txBody>
-      </p:sp>
-      <p:sp>
-        <p:nvSpPr>
-          <p:cNvPr id="9" name="imgph" descr="IMGQ:digital gas analyzer display ppm reading"/>
+              <a:t>Interferencia grave: principal AP-4</a:t>
+            </a:r>
+          </a:p>
+        </p:txBody>
+      </p:sp>
+      <p:sp>
+        <p:nvSpPr>
+          <p:cNvPr id="9" name="imgph" descr="IMGQ:kitchen extractor hood over gas cooktop"/>
           <p:cNvSpPr/>
           <p:nvPr/>
         </p:nvSpPr>
         <p:spPr>
           <a:xfrm>
-            <a:off x="5806440" y="1051560"/>
-            <a:ext cx="5298947" cy="4629150"/>
+            <a:off x="822960" y="1965960"/>
+            <a:ext cx="5303520" cy="4572000"/>
           </a:xfrm>
           <a:prstGeom prst="roundRect">
             <a:avLst/>
@@ -5596,8 +6064,8 @@
         </p:nvSpPr>
         <p:spPr>
           <a:xfrm>
-            <a:off x="6080760" y="2726055"/>
-            <a:ext cx="4750307" cy="1280160"/>
+            <a:off x="1097280" y="3611880"/>
+            <a:ext cx="4754880" cy="1280160"/>
           </a:xfrm>
           <a:prstGeom prst="rect">
             <a:avLst/>
@@ -5618,7 +6086,7 @@
                 </a:solidFill>
                 <a:latin typeface="Montserrat"/>
               </a:rPr>
-              <a:t>IMAGEN REALISTA</a:t>
+              <a:t>IMAGEN</a:t>
             </a:r>
           </a:p>
           <a:p>
@@ -5630,7 +6098,7 @@
                 </a:solidFill>
                 <a:latin typeface="Montserrat"/>
               </a:rPr>
-              <a:t>digital gas analyzer display ppm reading</a:t>
+              <a:t>kitchen extractor hood over gas cooktop</a:t>
             </a:r>
           </a:p>
         </p:txBody>
@@ -5640,6 +6108,18 @@
   <p:clrMapOvr>
     <a:masterClrMapping/>
   </p:clrMapOvr>
+  <mc:AlternateContent xmlns:mc="http://schemas.openxmlformats.org/markup-compatibility/2006">
+    <mc:Choice xmlns:p14="http://schemas.microsoft.com/office/powerpoint/2010/main" Requires="p14">
+      <p:transition spd="med" p14:dur="700">
+        <p14:cube dir="r"/>
+      </p:transition>
+    </mc:Choice>
+    <mc:Fallback>
+      <p:transition spd="med">
+        <p:push dir="r"/>
+      </p:transition>
+    </mc:Fallback>
+  </mc:AlternateContent>
 </p:sld>
 </file>
 
@@ -5727,7 +6207,7 @@
                 </a:solidFill>
                 <a:latin typeface="Montserrat"/>
               </a:rPr>
-              <a:t>011 / 018</a:t>
+              <a:t>011 / 024</a:t>
             </a:r>
           </a:p>
         </p:txBody>
@@ -5795,7 +6275,7 @@
                 </a:solidFill>
                 <a:latin typeface="Montserrat"/>
               </a:rPr>
-              <a:t>PARTE 13 · AS-3, AS-4, AS-5, AS-6</a:t>
+              <a:t>PARTE 13 · AS-1 Y AS-2</a:t>
             </a:r>
           </a:p>
         </p:txBody>
@@ -5829,14 +6309,14 @@
                 </a:solidFill>
                 <a:latin typeface="Montserrat"/>
               </a:rPr>
-              <a:t>Seguridades, acceso y combustión deficiente</a:t>
-            </a:r>
-          </a:p>
-        </p:txBody>
-      </p:sp>
-      <p:sp>
-        <p:nvSpPr>
-          <p:cNvPr id="7" name="Rounded Rectangle 6"/>
+              <a:t>Revoco e interferencia moderados</a:t>
+            </a:r>
+          </a:p>
+        </p:txBody>
+      </p:sp>
+      <p:sp>
+        <p:nvSpPr>
+          <p:cNvPr id="7" name="Rectangle 6"/>
           <p:cNvSpPr/>
           <p:nvPr/>
         </p:nvSpPr>
@@ -5845,7 +6325,7 @@
             <a:off x="868680" y="1627632"/>
             <a:ext cx="2011680" cy="73152"/>
           </a:xfrm>
-          <a:prstGeom prst="roundRect">
+          <a:prstGeom prst="rect">
             <a:avLst/>
           </a:prstGeom>
           <a:solidFill>
@@ -5887,7 +6367,7 @@
         <p:spPr>
           <a:xfrm>
             <a:off x="822960" y="1965960"/>
-            <a:ext cx="4983480" cy="4206240"/>
+            <a:ext cx="5029200" cy="4206240"/>
           </a:xfrm>
           <a:prstGeom prst="rect">
             <a:avLst/>
@@ -5921,7 +6401,7 @@
                 </a:solidFill>
                 <a:latin typeface="Montserrat"/>
               </a:rPr>
-              <a:t>AS-3: seguridad de llama no funciona</a:t>
+              <a:t>CO-ambiente entre 15 y 50 ppm: moderado</a:t>
             </a:r>
           </a:p>
           <a:p>
@@ -5946,7 +6426,7 @@
                 </a:solidFill>
                 <a:latin typeface="Montserrat"/>
               </a:rPr>
-              <a:t>AS-4: no se puede tomar muestra de humos</a:t>
+              <a:t>Por CO₂: entre 2500 y 5000 ppm</a:t>
             </a:r>
           </a:p>
           <a:p>
@@ -5971,7 +6451,7 @@
                 </a:solidFill>
                 <a:latin typeface="Montserrat"/>
               </a:rPr>
-              <a:t>AS-5: sin acreditar mantenimiento (&gt; 70 kW)</a:t>
+              <a:t>AS-1 revoco; AS-2 campana</a:t>
             </a:r>
           </a:p>
           <a:p>
@@ -5996,21 +6476,21 @@
                 </a:solidFill>
                 <a:latin typeface="Montserrat"/>
               </a:rPr>
-              <a:t>AS-6: CO en conducto entre 500 y 1000 ppm</a:t>
-            </a:r>
-          </a:p>
-        </p:txBody>
-      </p:sp>
-      <p:sp>
-        <p:nvSpPr>
-          <p:cNvPr id="9" name="imgph" descr="IMGQ:gas burner flame sensor thermocouple"/>
+              <a:t>AS-2: instrucciones escritas de no usar a la vez</a:t>
+            </a:r>
+          </a:p>
+        </p:txBody>
+      </p:sp>
+      <p:sp>
+        <p:nvSpPr>
+          <p:cNvPr id="9" name="imgph" descr="IMGQ:written safety instructions note kitchen appliance"/>
           <p:cNvSpPr/>
           <p:nvPr/>
         </p:nvSpPr>
         <p:spPr>
           <a:xfrm>
-            <a:off x="5806440" y="1051560"/>
-            <a:ext cx="5298947" cy="4629150"/>
+            <a:off x="6080760" y="1965960"/>
+            <a:ext cx="5303520" cy="4572000"/>
           </a:xfrm>
           <a:prstGeom prst="roundRect">
             <a:avLst/>
@@ -6055,8 +6535,8 @@
         </p:nvSpPr>
         <p:spPr>
           <a:xfrm>
-            <a:off x="6080760" y="2726055"/>
-            <a:ext cx="4750307" cy="1280160"/>
+            <a:off x="6355080" y="3611880"/>
+            <a:ext cx="4754880" cy="1280160"/>
           </a:xfrm>
           <a:prstGeom prst="rect">
             <a:avLst/>
@@ -6077,7 +6557,7 @@
                 </a:solidFill>
                 <a:latin typeface="Montserrat"/>
               </a:rPr>
-              <a:t>IMAGEN REALISTA</a:t>
+              <a:t>IMAGEN</a:t>
             </a:r>
           </a:p>
           <a:p>
@@ -6089,7 +6569,7 @@
                 </a:solidFill>
                 <a:latin typeface="Montserrat"/>
               </a:rPr>
-              <a:t>gas burner flame sensor thermocouple</a:t>
+              <a:t>written safety instructions note kitchen appliance</a:t>
             </a:r>
           </a:p>
         </p:txBody>
@@ -6099,6 +6579,18 @@
   <p:clrMapOvr>
     <a:masterClrMapping/>
   </p:clrMapOvr>
+  <mc:AlternateContent xmlns:mc="http://schemas.openxmlformats.org/markup-compatibility/2006">
+    <mc:Choice xmlns:p14="http://schemas.microsoft.com/office/powerpoint/2010/main" Requires="p14">
+      <p:transition spd="med" p14:dur="700">
+        <p14:cube dir="l"/>
+      </p:transition>
+    </mc:Choice>
+    <mc:Fallback>
+      <p:transition spd="med">
+        <p:push dir="l"/>
+      </p:transition>
+    </mc:Fallback>
+  </mc:AlternateContent>
 </p:sld>
 </file>
 
@@ -6186,7 +6678,7 @@
                 </a:solidFill>
                 <a:latin typeface="Montserrat"/>
               </a:rPr>
-              <a:t>012 / 018</a:t>
+              <a:t>012 / 024</a:t>
             </a:r>
           </a:p>
         </p:txBody>
@@ -6254,7 +6746,7 @@
                 </a:solidFill>
                 <a:latin typeface="Montserrat"/>
               </a:rPr>
-              <a:t>PARTE 13 · AS-7 Y AS-8</a:t>
+              <a:t>PARTE 13 · RESUMEN DE UMBRALES</a:t>
             </a:r>
           </a:p>
         </p:txBody>
@@ -6288,14 +6780,14 @@
                 </a:solidFill>
                 <a:latin typeface="Montserrat"/>
               </a:rPr>
-              <a:t>Los quemadores de la cocina</a:t>
-            </a:r>
-          </a:p>
-        </p:txBody>
-      </p:sp>
-      <p:sp>
-        <p:nvSpPr>
-          <p:cNvPr id="7" name="Rounded Rectangle 6"/>
+              <a:t>Las dos escaleras del CO</a:t>
+            </a:r>
+          </a:p>
+        </p:txBody>
+      </p:sp>
+      <p:sp>
+        <p:nvSpPr>
+          <p:cNvPr id="7" name="Rectangle 6"/>
           <p:cNvSpPr/>
           <p:nvPr/>
         </p:nvSpPr>
@@ -6304,7 +6796,7 @@
             <a:off x="868680" y="1627632"/>
             <a:ext cx="2011680" cy="73152"/>
           </a:xfrm>
-          <a:prstGeom prst="roundRect">
+          <a:prstGeom prst="rect">
             <a:avLst/>
           </a:prstGeom>
           <a:solidFill>
@@ -6345,8 +6837,8 @@
         </p:nvSpPr>
         <p:spPr>
           <a:xfrm>
-            <a:off x="822960" y="1965960"/>
-            <a:ext cx="4983480" cy="4206240"/>
+            <a:off x="6355080" y="1965960"/>
+            <a:ext cx="5029200" cy="4206240"/>
           </a:xfrm>
           <a:prstGeom prst="rect">
             <a:avLst/>
@@ -6380,7 +6872,7 @@
                 </a:solidFill>
                 <a:latin typeface="Montserrat"/>
               </a:rPr>
-              <a:t>AS-7: al pasar de máximo a mínimo, se apaga</a:t>
+              <a:t>CO-ambiente: 15 y 50 ppm</a:t>
             </a:r>
           </a:p>
           <a:p>
@@ -6405,7 +6897,7 @@
                 </a:solidFill>
                 <a:latin typeface="Montserrat"/>
               </a:rPr>
-              <a:t>Mínimo mal regulado deja salir gas</a:t>
+              <a:t>CO₂-ambiente: 2500 y 5000 ppm</a:t>
             </a:r>
           </a:p>
           <a:p>
@@ -6430,21 +6922,46 @@
                 </a:solidFill>
                 <a:latin typeface="Montserrat"/>
               </a:rPr>
-              <a:t>AS-8: el quemador no va (roto, bloqueado)</a:t>
-            </a:r>
-          </a:p>
-        </p:txBody>
-      </p:sp>
-      <p:sp>
-        <p:nvSpPr>
-          <p:cNvPr id="9" name="imgph" descr="IMGQ:gas stove burner blue flame cooktop"/>
+              <a:t>CO en conducto: 500 y 1000 ppm</a:t>
+            </a:r>
+          </a:p>
+          <a:p>
+            <a:pPr>
+              <a:spcAft>
+                <a:spcPts val="1100"/>
+              </a:spcAft>
+            </a:pPr>
+            <a:r>
+              <a:rPr sz="1600" b="1" i="0">
+                <a:solidFill>
+                  <a:srgbClr val="E8801A"/>
+                </a:solidFill>
+                <a:latin typeface="Montserrat"/>
+              </a:rPr>
+              <a:t>▸  </a:t>
+            </a:r>
+            <a:r>
+              <a:rPr sz="1600" b="0" i="0">
+                <a:solidFill>
+                  <a:srgbClr val="1B2330"/>
+                </a:solidFill>
+                <a:latin typeface="Montserrat"/>
+              </a:rPr>
+              <a:t>50 es del aire; 500 y 1000, del conducto</a:t>
+            </a:r>
+          </a:p>
+        </p:txBody>
+      </p:sp>
+      <p:sp>
+        <p:nvSpPr>
+          <p:cNvPr id="9" name="imgph" descr="IMGQ:digital gas analyzer display ppm reading"/>
           <p:cNvSpPr/>
           <p:nvPr/>
         </p:nvSpPr>
         <p:spPr>
           <a:xfrm>
-            <a:off x="5806440" y="1051560"/>
-            <a:ext cx="5298947" cy="4629150"/>
+            <a:off x="822960" y="1965960"/>
+            <a:ext cx="5303520" cy="4572000"/>
           </a:xfrm>
           <a:prstGeom prst="roundRect">
             <a:avLst/>
@@ -6489,8 +7006,8 @@
         </p:nvSpPr>
         <p:spPr>
           <a:xfrm>
-            <a:off x="6080760" y="2726055"/>
-            <a:ext cx="4750307" cy="1280160"/>
+            <a:off x="1097280" y="3611880"/>
+            <a:ext cx="4754880" cy="1280160"/>
           </a:xfrm>
           <a:prstGeom prst="rect">
             <a:avLst/>
@@ -6511,7 +7028,7 @@
                 </a:solidFill>
                 <a:latin typeface="Montserrat"/>
               </a:rPr>
-              <a:t>IMAGEN REALISTA</a:t>
+              <a:t>IMAGEN</a:t>
             </a:r>
           </a:p>
           <a:p>
@@ -6523,7 +7040,7 @@
                 </a:solidFill>
                 <a:latin typeface="Montserrat"/>
               </a:rPr>
-              <a:t>gas stove burner blue flame cooktop</a:t>
+              <a:t>digital gas analyzer display ppm reading</a:t>
             </a:r>
           </a:p>
         </p:txBody>
@@ -6533,6 +7050,18 @@
   <p:clrMapOvr>
     <a:masterClrMapping/>
   </p:clrMapOvr>
+  <mc:AlternateContent xmlns:mc="http://schemas.openxmlformats.org/markup-compatibility/2006">
+    <mc:Choice xmlns:p14="http://schemas.microsoft.com/office/powerpoint/2010/main" Requires="p14">
+      <p:transition spd="med" p14:dur="700">
+        <p14:cube dir="r"/>
+      </p:transition>
+    </mc:Choice>
+    <mc:Fallback>
+      <p:transition spd="med">
+        <p:push dir="r"/>
+      </p:transition>
+    </mc:Fallback>
+  </mc:AlternateContent>
 </p:sld>
 </file>
 
@@ -6620,7 +7149,7 @@
                 </a:solidFill>
                 <a:latin typeface="Montserrat"/>
               </a:rPr>
-              <a:t>013 / 018</a:t>
+              <a:t>013 / 024</a:t>
             </a:r>
           </a:p>
         </p:txBody>
@@ -6661,84 +7190,16 @@
       </p:sp>
       <p:sp>
         <p:nvSpPr>
-          <p:cNvPr id="5" name="TextBox 4"/>
-          <p:cNvSpPr txBox="1"/>
-          <p:nvPr/>
-        </p:nvSpPr>
-        <p:spPr>
-          <a:xfrm>
-            <a:off x="822960" y="457200"/>
-            <a:ext cx="10058400" cy="365760"/>
-          </a:xfrm>
-          <a:prstGeom prst="rect">
-            <a:avLst/>
-          </a:prstGeom>
-          <a:noFill/>
-        </p:spPr>
-        <p:txBody>
-          <a:bodyPr wrap="square">
-            <a:spAutoFit/>
-          </a:bodyPr>
-          <a:lstStyle/>
-          <a:p>
-            <a:r>
-              <a:rPr sz="1300" b="1" i="0">
-                <a:solidFill>
-                  <a:srgbClr val="E8801A"/>
-                </a:solidFill>
-                <a:latin typeface="Montserrat"/>
-              </a:rPr>
-              <a:t>PARTE 13 · ANEXO A</a:t>
-            </a:r>
-          </a:p>
-        </p:txBody>
-      </p:sp>
-      <p:sp>
-        <p:nvSpPr>
-          <p:cNvPr id="6" name="TextBox 5"/>
-          <p:cNvSpPr txBox="1"/>
-          <p:nvPr/>
-        </p:nvSpPr>
-        <p:spPr>
-          <a:xfrm>
-            <a:off x="822960" y="868680"/>
-            <a:ext cx="10515600" cy="914400"/>
-          </a:xfrm>
-          <a:prstGeom prst="rect">
-            <a:avLst/>
-          </a:prstGeom>
-          <a:noFill/>
-        </p:spPr>
-        <p:txBody>
-          <a:bodyPr wrap="square">
-            <a:spAutoFit/>
-          </a:bodyPr>
-          <a:lstStyle/>
-          <a:p>
-            <a:r>
-              <a:rPr sz="2800" b="1" i="0">
-                <a:solidFill>
-                  <a:srgbClr val="1E2761"/>
-                </a:solidFill>
-                <a:latin typeface="Montserrat"/>
-              </a:rPr>
-              <a:t>Toma de muestras de la combustión</a:t>
-            </a:r>
-          </a:p>
-        </p:txBody>
-      </p:sp>
-      <p:sp>
-        <p:nvSpPr>
-          <p:cNvPr id="7" name="Rounded Rectangle 6"/>
+          <p:cNvPr id="5" name="Rectangle 4"/>
           <p:cNvSpPr/>
           <p:nvPr/>
         </p:nvSpPr>
         <p:spPr>
           <a:xfrm>
-            <a:off x="868680" y="1627632"/>
-            <a:ext cx="2011680" cy="73152"/>
-          </a:xfrm>
-          <a:prstGeom prst="roundRect">
+            <a:off x="0" y="0"/>
+            <a:ext cx="12191695" cy="1143000"/>
+          </a:xfrm>
+          <a:prstGeom prst="rect">
             <a:avLst/>
           </a:prstGeom>
           <a:solidFill>
@@ -6773,14 +7234,14 @@
       </p:sp>
       <p:sp>
         <p:nvSpPr>
-          <p:cNvPr id="8" name="TextBox 7"/>
+          <p:cNvPr id="6" name="TextBox 5"/>
           <p:cNvSpPr txBox="1"/>
           <p:nvPr/>
         </p:nvSpPr>
         <p:spPr>
           <a:xfrm>
-            <a:off x="822960" y="1965960"/>
-            <a:ext cx="4983480" cy="4206240"/>
+            <a:off x="822960" y="274320"/>
+            <a:ext cx="10515600" cy="640080"/>
           </a:xfrm>
           <a:prstGeom prst="rect">
             <a:avLst/>
@@ -6793,117 +7254,62 @@
           </a:bodyPr>
           <a:lstStyle/>
           <a:p>
-            <a:pPr>
-              <a:spcAft>
-                <a:spcPts val="1100"/>
-              </a:spcAft>
-            </a:pPr>
-            <a:r>
-              <a:rPr sz="1600" b="1" i="0">
-                <a:solidFill>
-                  <a:srgbClr val="E8801A"/>
-                </a:solidFill>
-                <a:latin typeface="Montserrat"/>
-              </a:rPr>
-              <a:t>▸  </a:t>
-            </a:r>
-            <a:r>
-              <a:rPr sz="1600" b="0" i="0">
-                <a:solidFill>
-                  <a:srgbClr val="1B2330"/>
-                </a:solidFill>
-                <a:latin typeface="Montserrat"/>
-              </a:rPr>
-              <a:t>Régimen estacionario, máxima potencia</a:t>
-            </a:r>
-          </a:p>
-          <a:p>
-            <a:pPr>
-              <a:spcAft>
-                <a:spcPts val="1100"/>
-              </a:spcAft>
-            </a:pPr>
-            <a:r>
-              <a:rPr sz="1600" b="1" i="0">
-                <a:solidFill>
-                  <a:srgbClr val="E8801A"/>
-                </a:solidFill>
-                <a:latin typeface="Montserrat"/>
-              </a:rPr>
-              <a:t>▸  </a:t>
-            </a:r>
-            <a:r>
-              <a:rPr sz="1600" b="0" i="0">
-                <a:solidFill>
-                  <a:srgbClr val="1B2330"/>
-                </a:solidFill>
-                <a:latin typeface="Montserrat"/>
-              </a:rPr>
-              <a:t>Orificio de diámetro mínimo 11 mm</a:t>
-            </a:r>
-          </a:p>
-          <a:p>
-            <a:pPr>
-              <a:spcAft>
-                <a:spcPts val="1100"/>
-              </a:spcAft>
-            </a:pPr>
-            <a:r>
-              <a:rPr sz="1600" b="1" i="0">
-                <a:solidFill>
-                  <a:srgbClr val="E8801A"/>
-                </a:solidFill>
-                <a:latin typeface="Montserrat"/>
-              </a:rPr>
-              <a:t>▸  </a:t>
-            </a:r>
-            <a:r>
-              <a:rPr sz="1600" b="0" i="0">
-                <a:solidFill>
-                  <a:srgbClr val="1B2330"/>
-                </a:solidFill>
-                <a:latin typeface="Montserrat"/>
-              </a:rPr>
-              <a:t>Sonda perpendicular, en el eje del humo</a:t>
-            </a:r>
-          </a:p>
-          <a:p>
-            <a:pPr>
-              <a:spcAft>
-                <a:spcPts val="1100"/>
-              </a:spcAft>
-            </a:pPr>
-            <a:r>
-              <a:rPr sz="1600" b="1" i="0">
-                <a:solidFill>
-                  <a:srgbClr val="E8801A"/>
-                </a:solidFill>
-                <a:latin typeface="Montserrat"/>
-              </a:rPr>
-              <a:t>▸  </a:t>
-            </a:r>
-            <a:r>
-              <a:rPr sz="1600" b="0" i="0">
-                <a:solidFill>
-                  <a:srgbClr val="1B2330"/>
-                </a:solidFill>
-                <a:latin typeface="Montserrat"/>
-              </a:rPr>
-              <a:t>Al acabar, obturar con estanquidad</a:t>
-            </a:r>
-          </a:p>
-        </p:txBody>
-      </p:sp>
-      <p:sp>
-        <p:nvSpPr>
-          <p:cNvPr id="9" name="imgph" descr="IMGQ:sampling hole drilled in flue pipe probe"/>
+            <a:r>
+              <a:rPr sz="2400" b="1" i="0">
+                <a:solidFill>
+                  <a:srgbClr val="FFFFFF"/>
+                </a:solidFill>
+                <a:latin typeface="Montserrat"/>
+              </a:rPr>
+              <a:t>⚡  PREGUNTA RÁPIDA</a:t>
+            </a:r>
+          </a:p>
+        </p:txBody>
+      </p:sp>
+      <p:sp>
+        <p:nvSpPr>
+          <p:cNvPr id="7" name="TextBox 6"/>
+          <p:cNvSpPr txBox="1"/>
+          <p:nvPr/>
+        </p:nvSpPr>
+        <p:spPr>
+          <a:xfrm>
+            <a:off x="822960" y="1508760"/>
+            <a:ext cx="10515600" cy="1371600"/>
+          </a:xfrm>
+          <a:prstGeom prst="rect">
+            <a:avLst/>
+          </a:prstGeom>
+          <a:noFill/>
+        </p:spPr>
+        <p:txBody>
+          <a:bodyPr wrap="square">
+            <a:spAutoFit/>
+          </a:bodyPr>
+          <a:lstStyle/>
+          <a:p>
+            <a:r>
+              <a:rPr sz="2400" b="1" i="0">
+                <a:solidFill>
+                  <a:srgbClr val="1E2761"/>
+                </a:solidFill>
+                <a:latin typeface="Montserrat"/>
+              </a:rPr>
+              <a:t>Mil partes por millón de CO. ¿A qué medida corresponde ese límite?</a:t>
+            </a:r>
+          </a:p>
+        </p:txBody>
+      </p:sp>
+      <p:sp>
+        <p:nvSpPr>
+          <p:cNvPr id="8" name="Rounded Rectangle 7"/>
           <p:cNvSpPr/>
           <p:nvPr/>
         </p:nvSpPr>
         <p:spPr>
           <a:xfrm>
-            <a:off x="5806440" y="1051560"/>
-            <a:ext cx="5298947" cy="4629150"/>
+            <a:off x="822960" y="3291840"/>
+            <a:ext cx="4983480" cy="1143000"/>
           </a:xfrm>
           <a:prstGeom prst="roundRect">
             <a:avLst/>
@@ -6942,14 +7348,58 @@
       </p:sp>
       <p:sp>
         <p:nvSpPr>
+          <p:cNvPr id="9" name="Rectangle 8"/>
+          <p:cNvSpPr/>
+          <p:nvPr/>
+        </p:nvSpPr>
+        <p:spPr>
+          <a:xfrm>
+            <a:off x="822960" y="3291840"/>
+            <a:ext cx="640080" cy="1143000"/>
+          </a:xfrm>
+          <a:prstGeom prst="rect">
+            <a:avLst/>
+          </a:prstGeom>
+          <a:solidFill>
+            <a:srgbClr val="1E2761"/>
+          </a:solidFill>
+          <a:ln>
+            <a:noFill/>
+          </a:ln>
+          <a:effectLst/>
+        </p:spPr>
+        <p:style>
+          <a:lnRef idx="1">
+            <a:schemeClr val="accent1"/>
+          </a:lnRef>
+          <a:fillRef idx="3">
+            <a:schemeClr val="accent1"/>
+          </a:fillRef>
+          <a:effectRef idx="2">
+            <a:schemeClr val="accent1"/>
+          </a:effectRef>
+          <a:fontRef idx="minor">
+            <a:schemeClr val="lt1"/>
+          </a:fontRef>
+        </p:style>
+        <p:txBody>
+          <a:bodyPr rtlCol="0" anchor="ctr"/>
+          <a:lstStyle/>
+          <a:p>
+            <a:pPr algn="ctr"/>
+          </a:p>
+        </p:txBody>
+      </p:sp>
+      <p:sp>
+        <p:nvSpPr>
           <p:cNvPr id="10" name="TextBox 9"/>
           <p:cNvSpPr txBox="1"/>
           <p:nvPr/>
         </p:nvSpPr>
         <p:spPr>
           <a:xfrm>
-            <a:off x="6080760" y="2726055"/>
-            <a:ext cx="4750307" cy="1280160"/>
+            <a:off x="822960" y="3611880"/>
+            <a:ext cx="640080" cy="548640"/>
           </a:xfrm>
           <a:prstGeom prst="rect">
             <a:avLst/>
@@ -6964,25 +7414,524 @@
           <a:p>
             <a:pPr algn="ctr"/>
             <a:r>
-              <a:rPr sz="1400" b="1" i="0">
-                <a:solidFill>
-                  <a:srgbClr val="64748B"/>
-                </a:solidFill>
-                <a:latin typeface="Montserrat"/>
-              </a:rPr>
-              <a:t>IMAGEN REALISTA</a:t>
-            </a:r>
-          </a:p>
+              <a:rPr sz="2200" b="1" i="0">
+                <a:solidFill>
+                  <a:srgbClr val="FFFFFF"/>
+                </a:solidFill>
+                <a:latin typeface="Montserrat"/>
+              </a:rPr>
+              <a:t>A</a:t>
+            </a:r>
+          </a:p>
+        </p:txBody>
+      </p:sp>
+      <p:sp>
+        <p:nvSpPr>
+          <p:cNvPr id="11" name="TextBox 10"/>
+          <p:cNvSpPr txBox="1"/>
+          <p:nvPr/>
+        </p:nvSpPr>
+        <p:spPr>
+          <a:xfrm>
+            <a:off x="1600200" y="3474720"/>
+            <a:ext cx="4114800" cy="868680"/>
+          </a:xfrm>
+          <a:prstGeom prst="rect">
+            <a:avLst/>
+          </a:prstGeom>
+          <a:noFill/>
+        </p:spPr>
+        <p:txBody>
+          <a:bodyPr wrap="square">
+            <a:spAutoFit/>
+          </a:bodyPr>
+          <a:lstStyle/>
+          <a:p>
+            <a:r>
+              <a:rPr sz="1400" b="0" i="0">
+                <a:solidFill>
+                  <a:srgbClr val="1B2330"/>
+                </a:solidFill>
+                <a:latin typeface="Montserrat"/>
+              </a:rPr>
+              <a:t>Al CO del aire del local (CO-ambiente)</a:t>
+            </a:r>
+          </a:p>
+        </p:txBody>
+      </p:sp>
+      <p:sp>
+        <p:nvSpPr>
+          <p:cNvPr id="12" name="Rounded Rectangle 11"/>
+          <p:cNvSpPr/>
+          <p:nvPr/>
+        </p:nvSpPr>
+        <p:spPr>
+          <a:xfrm>
+            <a:off x="6355080" y="3291840"/>
+            <a:ext cx="4983480" cy="1143000"/>
+          </a:xfrm>
+          <a:prstGeom prst="roundRect">
+            <a:avLst/>
+          </a:prstGeom>
+          <a:solidFill>
+            <a:srgbClr val="F3F6FB"/>
+          </a:solidFill>
+          <a:ln w="12700">
+            <a:solidFill>
+              <a:srgbClr val="C7D2E6"/>
+            </a:solidFill>
+          </a:ln>
+          <a:effectLst/>
+        </p:spPr>
+        <p:style>
+          <a:lnRef idx="1">
+            <a:schemeClr val="accent1"/>
+          </a:lnRef>
+          <a:fillRef idx="3">
+            <a:schemeClr val="accent1"/>
+          </a:fillRef>
+          <a:effectRef idx="2">
+            <a:schemeClr val="accent1"/>
+          </a:effectRef>
+          <a:fontRef idx="minor">
+            <a:schemeClr val="lt1"/>
+          </a:fontRef>
+        </p:style>
+        <p:txBody>
+          <a:bodyPr rtlCol="0" anchor="ctr"/>
+          <a:lstStyle/>
           <a:p>
             <a:pPr algn="ctr"/>
-            <a:r>
-              <a:rPr sz="1100" b="0" i="1">
-                <a:solidFill>
-                  <a:srgbClr val="64748B"/>
-                </a:solidFill>
-                <a:latin typeface="Montserrat"/>
-              </a:rPr>
-              <a:t>sampling hole drilled in flue pipe probe</a:t>
+          </a:p>
+        </p:txBody>
+      </p:sp>
+      <p:sp>
+        <p:nvSpPr>
+          <p:cNvPr id="13" name="Rectangle 12"/>
+          <p:cNvSpPr/>
+          <p:nvPr/>
+        </p:nvSpPr>
+        <p:spPr>
+          <a:xfrm>
+            <a:off x="6355080" y="3291840"/>
+            <a:ext cx="640080" cy="1143000"/>
+          </a:xfrm>
+          <a:prstGeom prst="rect">
+            <a:avLst/>
+          </a:prstGeom>
+          <a:solidFill>
+            <a:srgbClr val="1E2761"/>
+          </a:solidFill>
+          <a:ln>
+            <a:noFill/>
+          </a:ln>
+          <a:effectLst/>
+        </p:spPr>
+        <p:style>
+          <a:lnRef idx="1">
+            <a:schemeClr val="accent1"/>
+          </a:lnRef>
+          <a:fillRef idx="3">
+            <a:schemeClr val="accent1"/>
+          </a:fillRef>
+          <a:effectRef idx="2">
+            <a:schemeClr val="accent1"/>
+          </a:effectRef>
+          <a:fontRef idx="minor">
+            <a:schemeClr val="lt1"/>
+          </a:fontRef>
+        </p:style>
+        <p:txBody>
+          <a:bodyPr rtlCol="0" anchor="ctr"/>
+          <a:lstStyle/>
+          <a:p>
+            <a:pPr algn="ctr"/>
+          </a:p>
+        </p:txBody>
+      </p:sp>
+      <p:sp>
+        <p:nvSpPr>
+          <p:cNvPr id="14" name="TextBox 13"/>
+          <p:cNvSpPr txBox="1"/>
+          <p:nvPr/>
+        </p:nvSpPr>
+        <p:spPr>
+          <a:xfrm>
+            <a:off x="6355080" y="3611880"/>
+            <a:ext cx="640080" cy="548640"/>
+          </a:xfrm>
+          <a:prstGeom prst="rect">
+            <a:avLst/>
+          </a:prstGeom>
+          <a:noFill/>
+        </p:spPr>
+        <p:txBody>
+          <a:bodyPr wrap="square">
+            <a:spAutoFit/>
+          </a:bodyPr>
+          <a:lstStyle/>
+          <a:p>
+            <a:pPr algn="ctr"/>
+            <a:r>
+              <a:rPr sz="2200" b="1" i="0">
+                <a:solidFill>
+                  <a:srgbClr val="FFFFFF"/>
+                </a:solidFill>
+                <a:latin typeface="Montserrat"/>
+              </a:rPr>
+              <a:t>B</a:t>
+            </a:r>
+          </a:p>
+        </p:txBody>
+      </p:sp>
+      <p:sp>
+        <p:nvSpPr>
+          <p:cNvPr id="15" name="TextBox 14"/>
+          <p:cNvSpPr txBox="1"/>
+          <p:nvPr/>
+        </p:nvSpPr>
+        <p:spPr>
+          <a:xfrm>
+            <a:off x="7132320" y="3474720"/>
+            <a:ext cx="4114800" cy="868680"/>
+          </a:xfrm>
+          <a:prstGeom prst="rect">
+            <a:avLst/>
+          </a:prstGeom>
+          <a:noFill/>
+        </p:spPr>
+        <p:txBody>
+          <a:bodyPr wrap="square">
+            <a:spAutoFit/>
+          </a:bodyPr>
+          <a:lstStyle/>
+          <a:p>
+            <a:r>
+              <a:rPr sz="1400" b="0" i="0">
+                <a:solidFill>
+                  <a:srgbClr val="1B2330"/>
+                </a:solidFill>
+                <a:latin typeface="Montserrat"/>
+              </a:rPr>
+              <a:t>Al CO medido dentro del conducto de humos</a:t>
+            </a:r>
+          </a:p>
+        </p:txBody>
+      </p:sp>
+      <p:sp>
+        <p:nvSpPr>
+          <p:cNvPr id="16" name="Rounded Rectangle 15"/>
+          <p:cNvSpPr/>
+          <p:nvPr/>
+        </p:nvSpPr>
+        <p:spPr>
+          <a:xfrm>
+            <a:off x="822960" y="4617720"/>
+            <a:ext cx="4983480" cy="1143000"/>
+          </a:xfrm>
+          <a:prstGeom prst="roundRect">
+            <a:avLst/>
+          </a:prstGeom>
+          <a:solidFill>
+            <a:srgbClr val="F3F6FB"/>
+          </a:solidFill>
+          <a:ln w="12700">
+            <a:solidFill>
+              <a:srgbClr val="C7D2E6"/>
+            </a:solidFill>
+          </a:ln>
+          <a:effectLst/>
+        </p:spPr>
+        <p:style>
+          <a:lnRef idx="1">
+            <a:schemeClr val="accent1"/>
+          </a:lnRef>
+          <a:fillRef idx="3">
+            <a:schemeClr val="accent1"/>
+          </a:fillRef>
+          <a:effectRef idx="2">
+            <a:schemeClr val="accent1"/>
+          </a:effectRef>
+          <a:fontRef idx="minor">
+            <a:schemeClr val="lt1"/>
+          </a:fontRef>
+        </p:style>
+        <p:txBody>
+          <a:bodyPr rtlCol="0" anchor="ctr"/>
+          <a:lstStyle/>
+          <a:p>
+            <a:pPr algn="ctr"/>
+          </a:p>
+        </p:txBody>
+      </p:sp>
+      <p:sp>
+        <p:nvSpPr>
+          <p:cNvPr id="17" name="Rectangle 16"/>
+          <p:cNvSpPr/>
+          <p:nvPr/>
+        </p:nvSpPr>
+        <p:spPr>
+          <a:xfrm>
+            <a:off x="822960" y="4617720"/>
+            <a:ext cx="640080" cy="1143000"/>
+          </a:xfrm>
+          <a:prstGeom prst="rect">
+            <a:avLst/>
+          </a:prstGeom>
+          <a:solidFill>
+            <a:srgbClr val="1E2761"/>
+          </a:solidFill>
+          <a:ln>
+            <a:noFill/>
+          </a:ln>
+          <a:effectLst/>
+        </p:spPr>
+        <p:style>
+          <a:lnRef idx="1">
+            <a:schemeClr val="accent1"/>
+          </a:lnRef>
+          <a:fillRef idx="3">
+            <a:schemeClr val="accent1"/>
+          </a:fillRef>
+          <a:effectRef idx="2">
+            <a:schemeClr val="accent1"/>
+          </a:effectRef>
+          <a:fontRef idx="minor">
+            <a:schemeClr val="lt1"/>
+          </a:fontRef>
+        </p:style>
+        <p:txBody>
+          <a:bodyPr rtlCol="0" anchor="ctr"/>
+          <a:lstStyle/>
+          <a:p>
+            <a:pPr algn="ctr"/>
+          </a:p>
+        </p:txBody>
+      </p:sp>
+      <p:sp>
+        <p:nvSpPr>
+          <p:cNvPr id="18" name="TextBox 17"/>
+          <p:cNvSpPr txBox="1"/>
+          <p:nvPr/>
+        </p:nvSpPr>
+        <p:spPr>
+          <a:xfrm>
+            <a:off x="822960" y="4937760"/>
+            <a:ext cx="640080" cy="548640"/>
+          </a:xfrm>
+          <a:prstGeom prst="rect">
+            <a:avLst/>
+          </a:prstGeom>
+          <a:noFill/>
+        </p:spPr>
+        <p:txBody>
+          <a:bodyPr wrap="square">
+            <a:spAutoFit/>
+          </a:bodyPr>
+          <a:lstStyle/>
+          <a:p>
+            <a:pPr algn="ctr"/>
+            <a:r>
+              <a:rPr sz="2200" b="1" i="0">
+                <a:solidFill>
+                  <a:srgbClr val="FFFFFF"/>
+                </a:solidFill>
+                <a:latin typeface="Montserrat"/>
+              </a:rPr>
+              <a:t>C</a:t>
+            </a:r>
+          </a:p>
+        </p:txBody>
+      </p:sp>
+      <p:sp>
+        <p:nvSpPr>
+          <p:cNvPr id="19" name="TextBox 18"/>
+          <p:cNvSpPr txBox="1"/>
+          <p:nvPr/>
+        </p:nvSpPr>
+        <p:spPr>
+          <a:xfrm>
+            <a:off x="1600200" y="4800600"/>
+            <a:ext cx="4114800" cy="868680"/>
+          </a:xfrm>
+          <a:prstGeom prst="rect">
+            <a:avLst/>
+          </a:prstGeom>
+          <a:noFill/>
+        </p:spPr>
+        <p:txBody>
+          <a:bodyPr wrap="square">
+            <a:spAutoFit/>
+          </a:bodyPr>
+          <a:lstStyle/>
+          <a:p>
+            <a:r>
+              <a:rPr sz="1400" b="0" i="0">
+                <a:solidFill>
+                  <a:srgbClr val="1B2330"/>
+                </a:solidFill>
+                <a:latin typeface="Montserrat"/>
+              </a:rPr>
+              <a:t>Al dióxido de carbono ambiente</a:t>
+            </a:r>
+          </a:p>
+        </p:txBody>
+      </p:sp>
+      <p:sp>
+        <p:nvSpPr>
+          <p:cNvPr id="20" name="Rounded Rectangle 19"/>
+          <p:cNvSpPr/>
+          <p:nvPr/>
+        </p:nvSpPr>
+        <p:spPr>
+          <a:xfrm>
+            <a:off x="6355080" y="4617720"/>
+            <a:ext cx="4983480" cy="1143000"/>
+          </a:xfrm>
+          <a:prstGeom prst="roundRect">
+            <a:avLst/>
+          </a:prstGeom>
+          <a:solidFill>
+            <a:srgbClr val="F3F6FB"/>
+          </a:solidFill>
+          <a:ln w="12700">
+            <a:solidFill>
+              <a:srgbClr val="C7D2E6"/>
+            </a:solidFill>
+          </a:ln>
+          <a:effectLst/>
+        </p:spPr>
+        <p:style>
+          <a:lnRef idx="1">
+            <a:schemeClr val="accent1"/>
+          </a:lnRef>
+          <a:fillRef idx="3">
+            <a:schemeClr val="accent1"/>
+          </a:fillRef>
+          <a:effectRef idx="2">
+            <a:schemeClr val="accent1"/>
+          </a:effectRef>
+          <a:fontRef idx="minor">
+            <a:schemeClr val="lt1"/>
+          </a:fontRef>
+        </p:style>
+        <p:txBody>
+          <a:bodyPr rtlCol="0" anchor="ctr"/>
+          <a:lstStyle/>
+          <a:p>
+            <a:pPr algn="ctr"/>
+          </a:p>
+        </p:txBody>
+      </p:sp>
+      <p:sp>
+        <p:nvSpPr>
+          <p:cNvPr id="21" name="Rectangle 20"/>
+          <p:cNvSpPr/>
+          <p:nvPr/>
+        </p:nvSpPr>
+        <p:spPr>
+          <a:xfrm>
+            <a:off x="6355080" y="4617720"/>
+            <a:ext cx="640080" cy="1143000"/>
+          </a:xfrm>
+          <a:prstGeom prst="rect">
+            <a:avLst/>
+          </a:prstGeom>
+          <a:solidFill>
+            <a:srgbClr val="1E2761"/>
+          </a:solidFill>
+          <a:ln>
+            <a:noFill/>
+          </a:ln>
+          <a:effectLst/>
+        </p:spPr>
+        <p:style>
+          <a:lnRef idx="1">
+            <a:schemeClr val="accent1"/>
+          </a:lnRef>
+          <a:fillRef idx="3">
+            <a:schemeClr val="accent1"/>
+          </a:fillRef>
+          <a:effectRef idx="2">
+            <a:schemeClr val="accent1"/>
+          </a:effectRef>
+          <a:fontRef idx="minor">
+            <a:schemeClr val="lt1"/>
+          </a:fontRef>
+        </p:style>
+        <p:txBody>
+          <a:bodyPr rtlCol="0" anchor="ctr"/>
+          <a:lstStyle/>
+          <a:p>
+            <a:pPr algn="ctr"/>
+          </a:p>
+        </p:txBody>
+      </p:sp>
+      <p:sp>
+        <p:nvSpPr>
+          <p:cNvPr id="22" name="TextBox 21"/>
+          <p:cNvSpPr txBox="1"/>
+          <p:nvPr/>
+        </p:nvSpPr>
+        <p:spPr>
+          <a:xfrm>
+            <a:off x="6355080" y="4937760"/>
+            <a:ext cx="640080" cy="548640"/>
+          </a:xfrm>
+          <a:prstGeom prst="rect">
+            <a:avLst/>
+          </a:prstGeom>
+          <a:noFill/>
+        </p:spPr>
+        <p:txBody>
+          <a:bodyPr wrap="square">
+            <a:spAutoFit/>
+          </a:bodyPr>
+          <a:lstStyle/>
+          <a:p>
+            <a:pPr algn="ctr"/>
+            <a:r>
+              <a:rPr sz="2200" b="1" i="0">
+                <a:solidFill>
+                  <a:srgbClr val="FFFFFF"/>
+                </a:solidFill>
+                <a:latin typeface="Montserrat"/>
+              </a:rPr>
+              <a:t>D</a:t>
+            </a:r>
+          </a:p>
+        </p:txBody>
+      </p:sp>
+      <p:sp>
+        <p:nvSpPr>
+          <p:cNvPr id="23" name="TextBox 22"/>
+          <p:cNvSpPr txBox="1"/>
+          <p:nvPr/>
+        </p:nvSpPr>
+        <p:spPr>
+          <a:xfrm>
+            <a:off x="7132320" y="4800600"/>
+            <a:ext cx="4114800" cy="868680"/>
+          </a:xfrm>
+          <a:prstGeom prst="rect">
+            <a:avLst/>
+          </a:prstGeom>
+          <a:noFill/>
+        </p:spPr>
+        <p:txBody>
+          <a:bodyPr wrap="square">
+            <a:spAutoFit/>
+          </a:bodyPr>
+          <a:lstStyle/>
+          <a:p>
+            <a:r>
+              <a:rPr sz="1400" b="0" i="0">
+                <a:solidFill>
+                  <a:srgbClr val="1B2330"/>
+                </a:solidFill>
+                <a:latin typeface="Montserrat"/>
+              </a:rPr>
+              <a:t>Al oxígeno de la vena de humos</a:t>
             </a:r>
           </a:p>
         </p:txBody>
@@ -6992,6 +7941,18 @@
   <p:clrMapOvr>
     <a:masterClrMapping/>
   </p:clrMapOvr>
+  <mc:AlternateContent xmlns:mc="http://schemas.openxmlformats.org/markup-compatibility/2006">
+    <mc:Choice xmlns:p14="http://schemas.microsoft.com/office/powerpoint/2010/main" Requires="p14">
+      <p:transition spd="med" p14:dur="700">
+        <p14:cube dir="l"/>
+      </p:transition>
+    </mc:Choice>
+    <mc:Fallback>
+      <p:transition spd="med">
+        <p:push dir="l"/>
+      </p:transition>
+    </mc:Fallback>
+  </mc:AlternateContent>
 </p:sld>
 </file>
 
@@ -7079,7 +8040,7 @@
                 </a:solidFill>
                 <a:latin typeface="Montserrat"/>
               </a:rPr>
-              <a:t>014 / 018</a:t>
+              <a:t>014 / 024</a:t>
             </a:r>
           </a:p>
         </p:txBody>
@@ -7120,88 +8081,20 @@
       </p:sp>
       <p:sp>
         <p:nvSpPr>
-          <p:cNvPr id="5" name="TextBox 4"/>
-          <p:cNvSpPr txBox="1"/>
-          <p:nvPr/>
-        </p:nvSpPr>
-        <p:spPr>
-          <a:xfrm>
-            <a:off x="822960" y="457200"/>
-            <a:ext cx="10058400" cy="365760"/>
-          </a:xfrm>
-          <a:prstGeom prst="rect">
-            <a:avLst/>
-          </a:prstGeom>
-          <a:noFill/>
-        </p:spPr>
-        <p:txBody>
-          <a:bodyPr wrap="square">
-            <a:spAutoFit/>
-          </a:bodyPr>
-          <a:lstStyle/>
-          <a:p>
-            <a:r>
-              <a:rPr sz="1300" b="1" i="0">
-                <a:solidFill>
-                  <a:srgbClr val="E8801A"/>
-                </a:solidFill>
-                <a:latin typeface="Montserrat"/>
-              </a:rPr>
-              <a:t>PARTE 13 · ANEXO A</a:t>
-            </a:r>
-          </a:p>
-        </p:txBody>
-      </p:sp>
-      <p:sp>
-        <p:nvSpPr>
-          <p:cNvPr id="6" name="TextBox 5"/>
-          <p:cNvSpPr txBox="1"/>
-          <p:nvPr/>
-        </p:nvSpPr>
-        <p:spPr>
-          <a:xfrm>
-            <a:off x="822960" y="868680"/>
-            <a:ext cx="10515600" cy="914400"/>
-          </a:xfrm>
-          <a:prstGeom prst="rect">
-            <a:avLst/>
-          </a:prstGeom>
-          <a:noFill/>
-        </p:spPr>
-        <p:txBody>
-          <a:bodyPr wrap="square">
-            <a:spAutoFit/>
-          </a:bodyPr>
-          <a:lstStyle/>
-          <a:p>
-            <a:r>
-              <a:rPr sz="2800" b="1" i="0">
-                <a:solidFill>
-                  <a:srgbClr val="1E2761"/>
-                </a:solidFill>
-                <a:latin typeface="Montserrat"/>
-              </a:rPr>
-              <a:t>El O₂ te chiva si la medida es fiable</a:t>
-            </a:r>
-          </a:p>
-        </p:txBody>
-      </p:sp>
-      <p:sp>
-        <p:nvSpPr>
-          <p:cNvPr id="7" name="Rounded Rectangle 6"/>
+          <p:cNvPr id="5" name="Rectangle 4"/>
           <p:cNvSpPr/>
           <p:nvPr/>
         </p:nvSpPr>
         <p:spPr>
           <a:xfrm>
-            <a:off x="868680" y="1627632"/>
-            <a:ext cx="2011680" cy="73152"/>
-          </a:xfrm>
-          <a:prstGeom prst="roundRect">
+            <a:off x="0" y="0"/>
+            <a:ext cx="12191695" cy="1143000"/>
+          </a:xfrm>
+          <a:prstGeom prst="rect">
             <a:avLst/>
           </a:prstGeom>
           <a:solidFill>
-            <a:srgbClr val="E8801A"/>
+            <a:srgbClr val="1E8E4B"/>
           </a:solidFill>
           <a:ln>
             <a:noFill/>
@@ -7232,14 +8125,14 @@
       </p:sp>
       <p:sp>
         <p:nvSpPr>
-          <p:cNvPr id="8" name="TextBox 7"/>
+          <p:cNvPr id="6" name="TextBox 5"/>
           <p:cNvSpPr txBox="1"/>
           <p:nvPr/>
         </p:nvSpPr>
         <p:spPr>
           <a:xfrm>
-            <a:off x="822960" y="1965960"/>
-            <a:ext cx="4983480" cy="4206240"/>
+            <a:off x="822960" y="274320"/>
+            <a:ext cx="10515600" cy="640080"/>
           </a:xfrm>
           <a:prstGeom prst="rect">
             <a:avLst/>
@@ -7252,127 +8145,72 @@
           </a:bodyPr>
           <a:lstStyle/>
           <a:p>
-            <a:pPr>
-              <a:spcAft>
-                <a:spcPts val="1100"/>
-              </a:spcAft>
-            </a:pPr>
-            <a:r>
-              <a:rPr sz="1600" b="1" i="0">
-                <a:solidFill>
-                  <a:srgbClr val="E8801A"/>
-                </a:solidFill>
-                <a:latin typeface="Montserrat"/>
-              </a:rPr>
-              <a:t>▸  </a:t>
-            </a:r>
-            <a:r>
-              <a:rPr sz="1600" b="0" i="0">
-                <a:solidFill>
-                  <a:srgbClr val="1B2330"/>
-                </a:solidFill>
-                <a:latin typeface="Montserrat"/>
-              </a:rPr>
-              <a:t>Se mide también el O₂ simultáneo</a:t>
-            </a:r>
-          </a:p>
-          <a:p>
-            <a:pPr>
-              <a:spcAft>
-                <a:spcPts val="1100"/>
-              </a:spcAft>
-            </a:pPr>
-            <a:r>
-              <a:rPr sz="1600" b="1" i="0">
-                <a:solidFill>
-                  <a:srgbClr val="E8801A"/>
-                </a:solidFill>
-                <a:latin typeface="Montserrat"/>
-              </a:rPr>
-              <a:t>▸  </a:t>
-            </a:r>
-            <a:r>
-              <a:rPr sz="1600" b="0" i="0">
-                <a:solidFill>
-                  <a:srgbClr val="1B2330"/>
-                </a:solidFill>
-                <a:latin typeface="Montserrat"/>
-              </a:rPr>
-              <a:t>O₂ &gt; 10 %: sonda mal o tiro invertido</a:t>
-            </a:r>
-          </a:p>
-          <a:p>
-            <a:pPr>
-              <a:spcAft>
-                <a:spcPts val="1100"/>
-              </a:spcAft>
-            </a:pPr>
-            <a:r>
-              <a:rPr sz="1600" b="1" i="0">
-                <a:solidFill>
-                  <a:srgbClr val="E8801A"/>
-                </a:solidFill>
-                <a:latin typeface="Montserrat"/>
-              </a:rPr>
-              <a:t>▸  </a:t>
-            </a:r>
-            <a:r>
-              <a:rPr sz="1600" b="0" i="0">
-                <a:solidFill>
-                  <a:srgbClr val="1B2330"/>
-                </a:solidFill>
-                <a:latin typeface="Montserrat"/>
-              </a:rPr>
-              <a:t>Repetir; si hay inversión, medir más abajo</a:t>
-            </a:r>
-          </a:p>
-          <a:p>
-            <a:pPr>
-              <a:spcAft>
-                <a:spcPts val="1100"/>
-              </a:spcAft>
-            </a:pPr>
-            <a:r>
-              <a:rPr sz="1600" b="1" i="0">
-                <a:solidFill>
-                  <a:srgbClr val="E8801A"/>
-                </a:solidFill>
-                <a:latin typeface="Montserrat"/>
-              </a:rPr>
-              <a:t>▸  </a:t>
-            </a:r>
-            <a:r>
-              <a:rPr sz="1600" b="0" i="0">
-                <a:solidFill>
-                  <a:srgbClr val="1B2330"/>
-                </a:solidFill>
-                <a:latin typeface="Montserrat"/>
-              </a:rPr>
-              <a:t>Condensación: seguir al fabricante</a:t>
-            </a:r>
-          </a:p>
-        </p:txBody>
-      </p:sp>
-      <p:sp>
-        <p:nvSpPr>
-          <p:cNvPr id="9" name="imgph" descr="IMGQ:technician reading oxygen level flue gas analyzer"/>
+            <a:r>
+              <a:rPr sz="2400" b="1" i="0">
+                <a:solidFill>
+                  <a:srgbClr val="FFFFFF"/>
+                </a:solidFill>
+                <a:latin typeface="Montserrat"/>
+              </a:rPr>
+              <a:t>✔  RESPUESTA:  B</a:t>
+            </a:r>
+          </a:p>
+        </p:txBody>
+      </p:sp>
+      <p:sp>
+        <p:nvSpPr>
+          <p:cNvPr id="7" name="TextBox 6"/>
+          <p:cNvSpPr txBox="1"/>
+          <p:nvPr/>
+        </p:nvSpPr>
+        <p:spPr>
+          <a:xfrm>
+            <a:off x="822960" y="1417320"/>
+            <a:ext cx="10515600" cy="914400"/>
+          </a:xfrm>
+          <a:prstGeom prst="rect">
+            <a:avLst/>
+          </a:prstGeom>
+          <a:noFill/>
+        </p:spPr>
+        <p:txBody>
+          <a:bodyPr wrap="square">
+            <a:spAutoFit/>
+          </a:bodyPr>
+          <a:lstStyle/>
+          <a:p>
+            <a:r>
+              <a:rPr sz="1800" b="1" i="0">
+                <a:solidFill>
+                  <a:srgbClr val="64748B"/>
+                </a:solidFill>
+                <a:latin typeface="Montserrat"/>
+              </a:rPr>
+              <a:t>Mil partes por millón de CO. ¿A qué medida corresponde ese límite?</a:t>
+            </a:r>
+          </a:p>
+        </p:txBody>
+      </p:sp>
+      <p:sp>
+        <p:nvSpPr>
+          <p:cNvPr id="8" name="Rounded Rectangle 7"/>
           <p:cNvSpPr/>
           <p:nvPr/>
         </p:nvSpPr>
         <p:spPr>
           <a:xfrm>
-            <a:off x="5806440" y="1051560"/>
-            <a:ext cx="5298947" cy="4629150"/>
+            <a:off x="822960" y="2514600"/>
+            <a:ext cx="10515600" cy="914400"/>
           </a:xfrm>
           <a:prstGeom prst="roundRect">
             <a:avLst/>
           </a:prstGeom>
           <a:solidFill>
-            <a:srgbClr val="F3F6FB"/>
+            <a:srgbClr val="E9F6EE"/>
           </a:solidFill>
           <a:ln w="12700">
             <a:solidFill>
-              <a:srgbClr val="C7D2E6"/>
+              <a:srgbClr val="1E8E4B"/>
             </a:solidFill>
           </a:ln>
           <a:effectLst/>
@@ -7401,14 +8239,14 @@
       </p:sp>
       <p:sp>
         <p:nvSpPr>
-          <p:cNvPr id="10" name="TextBox 9"/>
+          <p:cNvPr id="9" name="TextBox 8"/>
           <p:cNvSpPr txBox="1"/>
           <p:nvPr/>
         </p:nvSpPr>
         <p:spPr>
           <a:xfrm>
-            <a:off x="6080760" y="2726055"/>
-            <a:ext cx="4750307" cy="1280160"/>
+            <a:off x="1097280" y="2697480"/>
+            <a:ext cx="10058400" cy="640080"/>
           </a:xfrm>
           <a:prstGeom prst="rect">
             <a:avLst/>
@@ -7421,27 +8259,66 @@
           </a:bodyPr>
           <a:lstStyle/>
           <a:p>
-            <a:pPr algn="ctr"/>
-            <a:r>
-              <a:rPr sz="1400" b="1" i="0">
-                <a:solidFill>
-                  <a:srgbClr val="64748B"/>
-                </a:solidFill>
-                <a:latin typeface="Montserrat"/>
-              </a:rPr>
-              <a:t>IMAGEN REALISTA</a:t>
-            </a:r>
-          </a:p>
-          <a:p>
-            <a:pPr algn="ctr"/>
-            <a:r>
-              <a:rPr sz="1100" b="0" i="1">
-                <a:solidFill>
-                  <a:srgbClr val="64748B"/>
-                </a:solidFill>
-                <a:latin typeface="Montserrat"/>
-              </a:rPr>
-              <a:t>technician reading oxygen level flue gas analyzer</a:t>
+            <a:r>
+              <a:rPr sz="1800" b="1" i="0">
+                <a:solidFill>
+                  <a:srgbClr val="1E8E4B"/>
+                </a:solidFill>
+                <a:latin typeface="Montserrat"/>
+              </a:rPr>
+              <a:t>B.  </a:t>
+            </a:r>
+            <a:r>
+              <a:rPr sz="1800" b="1" i="0">
+                <a:solidFill>
+                  <a:srgbClr val="1E2761"/>
+                </a:solidFill>
+                <a:latin typeface="Montserrat"/>
+              </a:rPr>
+              <a:t>Al CO medido dentro del conducto de humos</a:t>
+            </a:r>
+          </a:p>
+        </p:txBody>
+      </p:sp>
+      <p:sp>
+        <p:nvSpPr>
+          <p:cNvPr id="10" name="TextBox 9"/>
+          <p:cNvSpPr txBox="1"/>
+          <p:nvPr/>
+        </p:nvSpPr>
+        <p:spPr>
+          <a:xfrm>
+            <a:off x="822960" y="3749039"/>
+            <a:ext cx="10515600" cy="2194560"/>
+          </a:xfrm>
+          <a:prstGeom prst="rect">
+            <a:avLst/>
+          </a:prstGeom>
+          <a:noFill/>
+        </p:spPr>
+        <p:txBody>
+          <a:bodyPr wrap="square">
+            <a:spAutoFit/>
+          </a:bodyPr>
+          <a:lstStyle/>
+          <a:p>
+            <a:r>
+              <a:rPr sz="1500" b="1" i="0">
+                <a:solidFill>
+                  <a:srgbClr val="E8801A"/>
+                </a:solidFill>
+                <a:latin typeface="Montserrat"/>
+              </a:rPr>
+              <a:t>Por qué:  </a:t>
+            </a:r>
+            <a:r>
+              <a:rPr sz="1500" b="0" i="0">
+                <a:solidFill>
+                  <a:srgbClr val="1B2330"/>
+                </a:solidFill>
+                <a:latin typeface="Montserrat"/>
+              </a:rPr>
+              <a:t>Mil partes por millón es el límite del CO dentro del conducto (combustión no higiénica); en el aire del local la frontera grave es cincuenta.</a:t>
             </a:r>
           </a:p>
         </p:txBody>
@@ -7451,6 +8328,18 @@
   <p:clrMapOvr>
     <a:masterClrMapping/>
   </p:clrMapOvr>
+  <mc:AlternateContent xmlns:mc="http://schemas.openxmlformats.org/markup-compatibility/2006">
+    <mc:Choice xmlns:p14="http://schemas.microsoft.com/office/powerpoint/2010/main" Requires="p14">
+      <p:transition spd="med" p14:dur="700">
+        <p14:cube dir="r"/>
+      </p:transition>
+    </mc:Choice>
+    <mc:Fallback>
+      <p:transition spd="med">
+        <p:push dir="r"/>
+      </p:transition>
+    </mc:Fallback>
+  </mc:AlternateContent>
 </p:sld>
 </file>
 
@@ -7538,7 +8427,7 @@
                 </a:solidFill>
                 <a:latin typeface="Montserrat"/>
               </a:rPr>
-              <a:t>015 / 018</a:t>
+              <a:t>015 / 024</a:t>
             </a:r>
           </a:p>
         </p:txBody>
@@ -7606,7 +8495,7 @@
                 </a:solidFill>
                 <a:latin typeface="Montserrat"/>
               </a:rPr>
-              <a:t>PARTE 13 · ANEXO A · EQUIPOS</a:t>
+              <a:t>PARTE 13 · AS-3, AS-4, AS-5, AS-6</a:t>
             </a:r>
           </a:p>
         </p:txBody>
@@ -7640,14 +8529,14 @@
                 </a:solidFill>
                 <a:latin typeface="Montserrat"/>
               </a:rPr>
-              <a:t>El analizador es tu testigo</a:t>
-            </a:r>
-          </a:p>
-        </p:txBody>
-      </p:sp>
-      <p:sp>
-        <p:nvSpPr>
-          <p:cNvPr id="7" name="Rounded Rectangle 6"/>
+              <a:t>Seguridades, acceso y combustión deficiente</a:t>
+            </a:r>
+          </a:p>
+        </p:txBody>
+      </p:sp>
+      <p:sp>
+        <p:nvSpPr>
+          <p:cNvPr id="7" name="Rectangle 6"/>
           <p:cNvSpPr/>
           <p:nvPr/>
         </p:nvSpPr>
@@ -7656,7 +8545,7 @@
             <a:off x="868680" y="1627632"/>
             <a:ext cx="2011680" cy="73152"/>
           </a:xfrm>
-          <a:prstGeom prst="roundRect">
+          <a:prstGeom prst="rect">
             <a:avLst/>
           </a:prstGeom>
           <a:solidFill>
@@ -7698,7 +8587,7 @@
         <p:spPr>
           <a:xfrm>
             <a:off x="822960" y="1965960"/>
-            <a:ext cx="4983480" cy="4206240"/>
+            <a:ext cx="5029200" cy="4206240"/>
           </a:xfrm>
           <a:prstGeom prst="rect">
             <a:avLst/>
@@ -7732,7 +8621,7 @@
                 </a:solidFill>
                 <a:latin typeface="Montserrat"/>
               </a:rPr>
-              <a:t>Calibrar cada 18 meses como máximo</a:t>
+              <a:t>AS-3: seguridad de llama no funciona</a:t>
             </a:r>
           </a:p>
           <a:p>
@@ -7757,7 +8646,7 @@
                 </a:solidFill>
                 <a:latin typeface="Montserrat"/>
               </a:rPr>
-              <a:t>Laboratorio acreditado UNE-EN ISO/IEC 17025</a:t>
+              <a:t>AS-4: no se puede tomar muestra de humos</a:t>
             </a:r>
           </a:p>
           <a:p>
@@ -7782,7 +8671,7 @@
                 </a:solidFill>
                 <a:latin typeface="Montserrat"/>
               </a:rPr>
-              <a:t>Registro documental 5 años</a:t>
+              <a:t>AS-5: sin acreditar mantenimiento (&gt; 70 kW)</a:t>
             </a:r>
           </a:p>
           <a:p>
@@ -7807,21 +8696,21 @@
                 </a:solidFill>
                 <a:latin typeface="Montserrat"/>
               </a:rPr>
-              <a:t>Incertidumbre no mayor de ± 5 %</a:t>
-            </a:r>
-          </a:p>
-        </p:txBody>
-      </p:sp>
-      <p:sp>
-        <p:nvSpPr>
-          <p:cNvPr id="9" name="imgph" descr="IMGQ:combustion analyzer calibration laboratory certificate"/>
+              <a:t>AS-6: CO en conducto entre 500 y 1000 ppm</a:t>
+            </a:r>
+          </a:p>
+        </p:txBody>
+      </p:sp>
+      <p:sp>
+        <p:nvSpPr>
+          <p:cNvPr id="9" name="imgph" descr="IMGQ:gas burner flame sensor thermocouple"/>
           <p:cNvSpPr/>
           <p:nvPr/>
         </p:nvSpPr>
         <p:spPr>
           <a:xfrm>
-            <a:off x="5806440" y="1051560"/>
-            <a:ext cx="5298947" cy="4629150"/>
+            <a:off x="6080760" y="1965960"/>
+            <a:ext cx="5303520" cy="4572000"/>
           </a:xfrm>
           <a:prstGeom prst="roundRect">
             <a:avLst/>
@@ -7866,8 +8755,8 @@
         </p:nvSpPr>
         <p:spPr>
           <a:xfrm>
-            <a:off x="6080760" y="2726055"/>
-            <a:ext cx="4750307" cy="1280160"/>
+            <a:off x="6355080" y="3611880"/>
+            <a:ext cx="4754880" cy="1280160"/>
           </a:xfrm>
           <a:prstGeom prst="rect">
             <a:avLst/>
@@ -7888,7 +8777,7 @@
                 </a:solidFill>
                 <a:latin typeface="Montserrat"/>
               </a:rPr>
-              <a:t>IMAGEN REALISTA</a:t>
+              <a:t>IMAGEN</a:t>
             </a:r>
           </a:p>
           <a:p>
@@ -7900,7 +8789,7 @@
                 </a:solidFill>
                 <a:latin typeface="Montserrat"/>
               </a:rPr>
-              <a:t>combustion analyzer calibration laboratory certificate</a:t>
+              <a:t>gas burner flame sensor thermocouple</a:t>
             </a:r>
           </a:p>
         </p:txBody>
@@ -7910,6 +8799,18 @@
   <p:clrMapOvr>
     <a:masterClrMapping/>
   </p:clrMapOvr>
+  <mc:AlternateContent xmlns:mc="http://schemas.openxmlformats.org/markup-compatibility/2006">
+    <mc:Choice xmlns:p14="http://schemas.microsoft.com/office/powerpoint/2010/main" Requires="p14">
+      <p:transition spd="med" p14:dur="700">
+        <p14:cube dir="l"/>
+      </p:transition>
+    </mc:Choice>
+    <mc:Fallback>
+      <p:transition spd="med">
+        <p:push dir="l"/>
+      </p:transition>
+    </mc:Fallback>
+  </mc:AlternateContent>
 </p:sld>
 </file>
 
@@ -7997,7 +8898,7 @@
                 </a:solidFill>
                 <a:latin typeface="Montserrat"/>
               </a:rPr>
-              <a:t>016 / 018</a:t>
+              <a:t>016 / 024</a:t>
             </a:r>
           </a:p>
         </p:txBody>
@@ -8065,7 +8966,7 @@
                 </a:solidFill>
                 <a:latin typeface="Montserrat"/>
               </a:rPr>
-              <a:t>PARTE 13 · ANEXO B</a:t>
+              <a:t>PARTE 13 · AS-7 Y AS-8</a:t>
             </a:r>
           </a:p>
         </p:txBody>
@@ -8099,14 +9000,14 @@
                 </a:solidFill>
                 <a:latin typeface="Montserrat"/>
               </a:rPr>
-              <a:t>Aparatos de radiación tipo A (naves)</a:t>
-            </a:r>
-          </a:p>
-        </p:txBody>
-      </p:sp>
-      <p:sp>
-        <p:nvSpPr>
-          <p:cNvPr id="7" name="Rounded Rectangle 6"/>
+              <a:t>Los quemadores de la cocina</a:t>
+            </a:r>
+          </a:p>
+        </p:txBody>
+      </p:sp>
+      <p:sp>
+        <p:nvSpPr>
+          <p:cNvPr id="7" name="Rectangle 6"/>
           <p:cNvSpPr/>
           <p:nvPr/>
         </p:nvSpPr>
@@ -8115,7 +9016,7 @@
             <a:off x="868680" y="1627632"/>
             <a:ext cx="2011680" cy="73152"/>
           </a:xfrm>
-          <a:prstGeom prst="roundRect">
+          <a:prstGeom prst="rect">
             <a:avLst/>
           </a:prstGeom>
           <a:solidFill>
@@ -8156,8 +9057,8 @@
         </p:nvSpPr>
         <p:spPr>
           <a:xfrm>
-            <a:off x="822960" y="1965960"/>
-            <a:ext cx="4983480" cy="4206240"/>
+            <a:off x="6355080" y="1965960"/>
+            <a:ext cx="5029200" cy="4206240"/>
           </a:xfrm>
           <a:prstGeom prst="rect">
             <a:avLst/>
@@ -8191,7 +9092,7 @@
                 </a:solidFill>
                 <a:latin typeface="Montserrat"/>
               </a:rPr>
-              <a:t>Sin conducto: se mide el CO del aire</a:t>
+              <a:t>AS-7: al pasar de máximo a mínimo, se apaga</a:t>
             </a:r>
           </a:p>
           <a:p>
@@ -8216,7 +9117,7 @@
                 </a:solidFill>
                 <a:latin typeface="Montserrat"/>
               </a:rPr>
-              <a:t>Sonda a 1,80 m, al menos cada 25 m²</a:t>
+              <a:t>Mínimo mal regulado deja salir gas</a:t>
             </a:r>
           </a:p>
           <a:p>
@@ -8241,46 +9142,21 @@
                 </a:solidFill>
                 <a:latin typeface="Montserrat"/>
               </a:rPr>
-              <a:t>15 minutos calentando antes de medir</a:t>
-            </a:r>
-          </a:p>
-          <a:p>
-            <a:pPr>
-              <a:spcAft>
-                <a:spcPts val="1100"/>
-              </a:spcAft>
-            </a:pPr>
-            <a:r>
-              <a:rPr sz="1600" b="1" i="0">
-                <a:solidFill>
-                  <a:srgbClr val="E8801A"/>
-                </a:solidFill>
-                <a:latin typeface="Montserrat"/>
-              </a:rPr>
-              <a:t>▸  </a:t>
-            </a:r>
-            <a:r>
-              <a:rPr sz="1600" b="0" i="0">
-                <a:solidFill>
-                  <a:srgbClr val="1B2330"/>
-                </a:solidFill>
-                <a:latin typeface="Montserrat"/>
-              </a:rPr>
-              <a:t>5 minutos en cada punto</a:t>
-            </a:r>
-          </a:p>
-        </p:txBody>
-      </p:sp>
-      <p:sp>
-        <p:nvSpPr>
-          <p:cNvPr id="9" name="imgph" descr="IMGQ:radiant heater suspended warehouse ceiling"/>
+              <a:t>AS-8: el quemador no va (roto, bloqueado)</a:t>
+            </a:r>
+          </a:p>
+        </p:txBody>
+      </p:sp>
+      <p:sp>
+        <p:nvSpPr>
+          <p:cNvPr id="9" name="imgph" descr="IMGQ:gas stove burner blue flame cooktop"/>
           <p:cNvSpPr/>
           <p:nvPr/>
         </p:nvSpPr>
         <p:spPr>
           <a:xfrm>
-            <a:off x="5806440" y="1051560"/>
-            <a:ext cx="5298947" cy="4629150"/>
+            <a:off x="822960" y="1965960"/>
+            <a:ext cx="5303520" cy="4572000"/>
           </a:xfrm>
           <a:prstGeom prst="roundRect">
             <a:avLst/>
@@ -8325,8 +9201,8 @@
         </p:nvSpPr>
         <p:spPr>
           <a:xfrm>
-            <a:off x="6080760" y="2726055"/>
-            <a:ext cx="4750307" cy="1280160"/>
+            <a:off x="1097280" y="3611880"/>
+            <a:ext cx="4754880" cy="1280160"/>
           </a:xfrm>
           <a:prstGeom prst="rect">
             <a:avLst/>
@@ -8347,7 +9223,7 @@
                 </a:solidFill>
                 <a:latin typeface="Montserrat"/>
               </a:rPr>
-              <a:t>IMAGEN REALISTA</a:t>
+              <a:t>IMAGEN</a:t>
             </a:r>
           </a:p>
           <a:p>
@@ -8359,7 +9235,7 @@
                 </a:solidFill>
                 <a:latin typeface="Montserrat"/>
               </a:rPr>
-              <a:t>radiant heater suspended warehouse ceiling</a:t>
+              <a:t>gas stove burner blue flame cooktop</a:t>
             </a:r>
           </a:p>
         </p:txBody>
@@ -8369,6 +9245,18 @@
   <p:clrMapOvr>
     <a:masterClrMapping/>
   </p:clrMapOvr>
+  <mc:AlternateContent xmlns:mc="http://schemas.openxmlformats.org/markup-compatibility/2006">
+    <mc:Choice xmlns:p14="http://schemas.microsoft.com/office/powerpoint/2010/main" Requires="p14">
+      <p:transition spd="med" p14:dur="700">
+        <p14:cube dir="r"/>
+      </p:transition>
+    </mc:Choice>
+    <mc:Fallback>
+      <p:transition spd="med">
+        <p:push dir="r"/>
+      </p:transition>
+    </mc:Fallback>
+  </mc:AlternateContent>
 </p:sld>
 </file>
 
@@ -8456,7 +9344,7 @@
                 </a:solidFill>
                 <a:latin typeface="Montserrat"/>
               </a:rPr>
-              <a:t>017 / 018</a:t>
+              <a:t>017 / 024</a:t>
             </a:r>
           </a:p>
         </p:txBody>
@@ -8524,7 +9412,7 @@
                 </a:solidFill>
                 <a:latin typeface="Montserrat"/>
               </a:rPr>
-              <a:t>PARTE 13 · EL PAPELEO</a:t>
+              <a:t>PARTE 13 · ANEXO A</a:t>
             </a:r>
           </a:p>
         </p:txBody>
@@ -8558,14 +9446,14 @@
                 </a:solidFill>
                 <a:latin typeface="Montserrat"/>
               </a:rPr>
-              <a:t>Documentar, avisar y el caso de salas</a:t>
-            </a:r>
-          </a:p>
-        </p:txBody>
-      </p:sp>
-      <p:sp>
-        <p:nvSpPr>
-          <p:cNvPr id="7" name="Rounded Rectangle 6"/>
+              <a:t>Toma de muestras de la combustión</a:t>
+            </a:r>
+          </a:p>
+        </p:txBody>
+      </p:sp>
+      <p:sp>
+        <p:nvSpPr>
+          <p:cNvPr id="7" name="Rectangle 6"/>
           <p:cNvSpPr/>
           <p:nvPr/>
         </p:nvSpPr>
@@ -8574,7 +9462,7 @@
             <a:off x="868680" y="1627632"/>
             <a:ext cx="2011680" cy="73152"/>
           </a:xfrm>
-          <a:prstGeom prst="roundRect">
+          <a:prstGeom prst="rect">
             <a:avLst/>
           </a:prstGeom>
           <a:solidFill>
@@ -8616,7 +9504,7 @@
         <p:spPr>
           <a:xfrm>
             <a:off x="822960" y="1965960"/>
-            <a:ext cx="4983480" cy="4206240"/>
+            <a:ext cx="5029200" cy="4206240"/>
           </a:xfrm>
           <a:prstGeom prst="rect">
             <a:avLst/>
@@ -8650,7 +9538,7 @@
                 </a:solidFill>
                 <a:latin typeface="Montserrat"/>
               </a:rPr>
-              <a:t>Favorable: certificado; con defectos: informe</a:t>
+              <a:t>Régimen estacionario, máxima potencia</a:t>
             </a:r>
           </a:p>
           <a:p>
@@ -8675,7 +9563,7 @@
                 </a:solidFill>
                 <a:latin typeface="Montserrat"/>
               </a:rPr>
-              <a:t>Al usuario; principales a la distribuidora</a:t>
+              <a:t>Orificio de diámetro mínimo 11 mm</a:t>
             </a:r>
           </a:p>
           <a:p>
@@ -8700,21 +9588,46 @@
                 </a:solidFill>
                 <a:latin typeface="Montserrat"/>
               </a:rPr>
-              <a:t>AS-5: acreditar mantenimiento en salas &gt; 70 kW</a:t>
-            </a:r>
-          </a:p>
-        </p:txBody>
-      </p:sp>
-      <p:sp>
-        <p:nvSpPr>
-          <p:cNvPr id="9" name="imgph" descr="IMGQ:gas installer paperwork report boiler room"/>
+              <a:t>Sonda perpendicular, en el eje del humo</a:t>
+            </a:r>
+          </a:p>
+          <a:p>
+            <a:pPr>
+              <a:spcAft>
+                <a:spcPts val="1100"/>
+              </a:spcAft>
+            </a:pPr>
+            <a:r>
+              <a:rPr sz="1600" b="1" i="0">
+                <a:solidFill>
+                  <a:srgbClr val="E8801A"/>
+                </a:solidFill>
+                <a:latin typeface="Montserrat"/>
+              </a:rPr>
+              <a:t>▸  </a:t>
+            </a:r>
+            <a:r>
+              <a:rPr sz="1600" b="0" i="0">
+                <a:solidFill>
+                  <a:srgbClr val="1B2330"/>
+                </a:solidFill>
+                <a:latin typeface="Montserrat"/>
+              </a:rPr>
+              <a:t>Al acabar, obturar con estanquidad</a:t>
+            </a:r>
+          </a:p>
+        </p:txBody>
+      </p:sp>
+      <p:sp>
+        <p:nvSpPr>
+          <p:cNvPr id="9" name="imgph" descr="IMGQ:sampling hole drilled in flue pipe probe"/>
           <p:cNvSpPr/>
           <p:nvPr/>
         </p:nvSpPr>
         <p:spPr>
           <a:xfrm>
-            <a:off x="5806440" y="1051560"/>
-            <a:ext cx="5298947" cy="4629150"/>
+            <a:off x="6080760" y="1965960"/>
+            <a:ext cx="5303520" cy="4572000"/>
           </a:xfrm>
           <a:prstGeom prst="roundRect">
             <a:avLst/>
@@ -8759,8 +9672,8 @@
         </p:nvSpPr>
         <p:spPr>
           <a:xfrm>
-            <a:off x="6080760" y="2726055"/>
-            <a:ext cx="4750307" cy="1280160"/>
+            <a:off x="6355080" y="3611880"/>
+            <a:ext cx="4754880" cy="1280160"/>
           </a:xfrm>
           <a:prstGeom prst="rect">
             <a:avLst/>
@@ -8781,7 +9694,7 @@
                 </a:solidFill>
                 <a:latin typeface="Montserrat"/>
               </a:rPr>
-              <a:t>IMAGEN REALISTA</a:t>
+              <a:t>IMAGEN</a:t>
             </a:r>
           </a:p>
           <a:p>
@@ -8793,7 +9706,7 @@
                 </a:solidFill>
                 <a:latin typeface="Montserrat"/>
               </a:rPr>
-              <a:t>gas installer paperwork report boiler room</a:t>
+              <a:t>sampling hole drilled in flue pipe probe</a:t>
             </a:r>
           </a:p>
         </p:txBody>
@@ -8803,6 +9716,18 @@
   <p:clrMapOvr>
     <a:masterClrMapping/>
   </p:clrMapOvr>
+  <mc:AlternateContent xmlns:mc="http://schemas.openxmlformats.org/markup-compatibility/2006">
+    <mc:Choice xmlns:p14="http://schemas.microsoft.com/office/powerpoint/2010/main" Requires="p14">
+      <p:transition spd="med" p14:dur="700">
+        <p14:cube dir="l"/>
+      </p:transition>
+    </mc:Choice>
+    <mc:Fallback>
+      <p:transition spd="med">
+        <p:push dir="l"/>
+      </p:transition>
+    </mc:Fallback>
+  </mc:AlternateContent>
 </p:sld>
 </file>
 
@@ -8831,7 +9756,7 @@
             <a:avLst/>
           </a:prstGeom>
           <a:solidFill>
-            <a:srgbClr val="1E2761"/>
+            <a:srgbClr val="FFFFFF"/>
           </a:solidFill>
           <a:ln>
             <a:noFill/>
@@ -8868,8 +9793,8 @@
         </p:nvSpPr>
         <p:spPr>
           <a:xfrm>
-            <a:off x="822960" y="640080"/>
-            <a:ext cx="10515600" cy="457200"/>
+            <a:off x="10607040" y="320040"/>
+            <a:ext cx="1371600" cy="365760"/>
           </a:xfrm>
           <a:prstGeom prst="rect">
             <a:avLst/>
@@ -8882,30 +9807,133 @@
           </a:bodyPr>
           <a:lstStyle/>
           <a:p>
-            <a:r>
-              <a:rPr sz="1400" b="1" i="0">
-                <a:solidFill>
-                  <a:srgbClr val="F4A24C"/>
-                </a:solidFill>
-                <a:latin typeface="Montserrat"/>
-              </a:rPr>
-              <a:t>LO QUE YA DOMINAS</a:t>
-            </a:r>
-          </a:p>
-        </p:txBody>
-      </p:sp>
-      <p:sp>
-        <p:nvSpPr>
-          <p:cNvPr id="4" name="Rounded Rectangle 3"/>
+            <a:pPr algn="r"/>
+            <a:r>
+              <a:rPr sz="1000" b="1" i="0">
+                <a:solidFill>
+                  <a:srgbClr val="64748B"/>
+                </a:solidFill>
+                <a:latin typeface="Montserrat"/>
+              </a:rPr>
+              <a:t>018 / 024</a:t>
+            </a:r>
+          </a:p>
+        </p:txBody>
+      </p:sp>
+      <p:sp>
+        <p:nvSpPr>
+          <p:cNvPr id="4" name="TextBox 3"/>
+          <p:cNvSpPr txBox="1"/>
+          <p:nvPr/>
+        </p:nvSpPr>
+        <p:spPr>
+          <a:xfrm>
+            <a:off x="457200" y="6419088"/>
+            <a:ext cx="8229600" cy="365760"/>
+          </a:xfrm>
+          <a:prstGeom prst="rect">
+            <a:avLst/>
+          </a:prstGeom>
+          <a:noFill/>
+        </p:spPr>
+        <p:txBody>
+          <a:bodyPr wrap="square">
+            <a:spAutoFit/>
+          </a:bodyPr>
+          <a:lstStyle/>
+          <a:p>
+            <a:r>
+              <a:rPr sz="900" b="0" i="0">
+                <a:solidFill>
+                  <a:srgbClr val="64748B"/>
+                </a:solidFill>
+                <a:latin typeface="Montserrat"/>
+              </a:rPr>
+              <a:t>Curso Gas B · Tema 16 · UNE 60670-11/12/13</a:t>
+            </a:r>
+          </a:p>
+        </p:txBody>
+      </p:sp>
+      <p:sp>
+        <p:nvSpPr>
+          <p:cNvPr id="5" name="TextBox 4"/>
+          <p:cNvSpPr txBox="1"/>
+          <p:nvPr/>
+        </p:nvSpPr>
+        <p:spPr>
+          <a:xfrm>
+            <a:off x="822960" y="457200"/>
+            <a:ext cx="10058400" cy="365760"/>
+          </a:xfrm>
+          <a:prstGeom prst="rect">
+            <a:avLst/>
+          </a:prstGeom>
+          <a:noFill/>
+        </p:spPr>
+        <p:txBody>
+          <a:bodyPr wrap="square">
+            <a:spAutoFit/>
+          </a:bodyPr>
+          <a:lstStyle/>
+          <a:p>
+            <a:r>
+              <a:rPr sz="1300" b="1" i="0">
+                <a:solidFill>
+                  <a:srgbClr val="E8801A"/>
+                </a:solidFill>
+                <a:latin typeface="Montserrat"/>
+              </a:rPr>
+              <a:t>PARTE 13 · ANEXO A</a:t>
+            </a:r>
+          </a:p>
+        </p:txBody>
+      </p:sp>
+      <p:sp>
+        <p:nvSpPr>
+          <p:cNvPr id="6" name="TextBox 5"/>
+          <p:cNvSpPr txBox="1"/>
+          <p:nvPr/>
+        </p:nvSpPr>
+        <p:spPr>
+          <a:xfrm>
+            <a:off x="822960" y="868680"/>
+            <a:ext cx="10515600" cy="914400"/>
+          </a:xfrm>
+          <a:prstGeom prst="rect">
+            <a:avLst/>
+          </a:prstGeom>
+          <a:noFill/>
+        </p:spPr>
+        <p:txBody>
+          <a:bodyPr wrap="square">
+            <a:spAutoFit/>
+          </a:bodyPr>
+          <a:lstStyle/>
+          <a:p>
+            <a:r>
+              <a:rPr sz="2800" b="1" i="0">
+                <a:solidFill>
+                  <a:srgbClr val="1E2761"/>
+                </a:solidFill>
+                <a:latin typeface="Montserrat"/>
+              </a:rPr>
+              <a:t>El O₂ te chiva si la medida es fiable</a:t>
+            </a:r>
+          </a:p>
+        </p:txBody>
+      </p:sp>
+      <p:sp>
+        <p:nvSpPr>
+          <p:cNvPr id="7" name="Rectangle 6"/>
           <p:cNvSpPr/>
           <p:nvPr/>
         </p:nvSpPr>
         <p:spPr>
           <a:xfrm>
-            <a:off x="868680" y="1051560"/>
-            <a:ext cx="1463040" cy="82296"/>
-          </a:xfrm>
-          <a:prstGeom prst="roundRect">
+            <a:off x="868680" y="1627632"/>
+            <a:ext cx="2011680" cy="73152"/>
+          </a:xfrm>
+          <a:prstGeom prst="rect">
             <a:avLst/>
           </a:prstGeom>
           <a:solidFill>
@@ -8940,14 +9968,14 @@
       </p:sp>
       <p:sp>
         <p:nvSpPr>
-          <p:cNvPr id="5" name="TextBox 4"/>
+          <p:cNvPr id="8" name="TextBox 7"/>
           <p:cNvSpPr txBox="1"/>
           <p:nvPr/>
         </p:nvSpPr>
         <p:spPr>
           <a:xfrm>
-            <a:off x="822960" y="1234440"/>
-            <a:ext cx="10515600" cy="1097280"/>
+            <a:off x="6355080" y="1965960"/>
+            <a:ext cx="5029200" cy="4206240"/>
           </a:xfrm>
           <a:prstGeom prst="rect">
             <a:avLst/>
@@ -8960,28 +9988,163 @@
           </a:bodyPr>
           <a:lstStyle/>
           <a:p>
-            <a:r>
-              <a:rPr sz="3400" b="1" i="0">
-                <a:solidFill>
-                  <a:srgbClr val="FFFFFF"/>
-                </a:solidFill>
-                <a:latin typeface="Montserrat"/>
-              </a:rPr>
-              <a:t>Ya plantas cara al enemigo invisible</a:t>
-            </a:r>
-          </a:p>
-        </p:txBody>
-      </p:sp>
-      <p:sp>
-        <p:nvSpPr>
-          <p:cNvPr id="6" name="TextBox 5"/>
+            <a:pPr>
+              <a:spcAft>
+                <a:spcPts val="1100"/>
+              </a:spcAft>
+            </a:pPr>
+            <a:r>
+              <a:rPr sz="1600" b="1" i="0">
+                <a:solidFill>
+                  <a:srgbClr val="E8801A"/>
+                </a:solidFill>
+                <a:latin typeface="Montserrat"/>
+              </a:rPr>
+              <a:t>▸  </a:t>
+            </a:r>
+            <a:r>
+              <a:rPr sz="1600" b="0" i="0">
+                <a:solidFill>
+                  <a:srgbClr val="1B2330"/>
+                </a:solidFill>
+                <a:latin typeface="Montserrat"/>
+              </a:rPr>
+              <a:t>Se mide también el O₂ simultáneo</a:t>
+            </a:r>
+          </a:p>
+          <a:p>
+            <a:pPr>
+              <a:spcAft>
+                <a:spcPts val="1100"/>
+              </a:spcAft>
+            </a:pPr>
+            <a:r>
+              <a:rPr sz="1600" b="1" i="0">
+                <a:solidFill>
+                  <a:srgbClr val="E8801A"/>
+                </a:solidFill>
+                <a:latin typeface="Montserrat"/>
+              </a:rPr>
+              <a:t>▸  </a:t>
+            </a:r>
+            <a:r>
+              <a:rPr sz="1600" b="0" i="0">
+                <a:solidFill>
+                  <a:srgbClr val="1B2330"/>
+                </a:solidFill>
+                <a:latin typeface="Montserrat"/>
+              </a:rPr>
+              <a:t>O₂ &gt; 10 %: sonda mal o tiro invertido</a:t>
+            </a:r>
+          </a:p>
+          <a:p>
+            <a:pPr>
+              <a:spcAft>
+                <a:spcPts val="1100"/>
+              </a:spcAft>
+            </a:pPr>
+            <a:r>
+              <a:rPr sz="1600" b="1" i="0">
+                <a:solidFill>
+                  <a:srgbClr val="E8801A"/>
+                </a:solidFill>
+                <a:latin typeface="Montserrat"/>
+              </a:rPr>
+              <a:t>▸  </a:t>
+            </a:r>
+            <a:r>
+              <a:rPr sz="1600" b="0" i="0">
+                <a:solidFill>
+                  <a:srgbClr val="1B2330"/>
+                </a:solidFill>
+                <a:latin typeface="Montserrat"/>
+              </a:rPr>
+              <a:t>Repetir; si hay inversión, medir más abajo</a:t>
+            </a:r>
+          </a:p>
+          <a:p>
+            <a:pPr>
+              <a:spcAft>
+                <a:spcPts val="1100"/>
+              </a:spcAft>
+            </a:pPr>
+            <a:r>
+              <a:rPr sz="1600" b="1" i="0">
+                <a:solidFill>
+                  <a:srgbClr val="E8801A"/>
+                </a:solidFill>
+                <a:latin typeface="Montserrat"/>
+              </a:rPr>
+              <a:t>▸  </a:t>
+            </a:r>
+            <a:r>
+              <a:rPr sz="1600" b="0" i="0">
+                <a:solidFill>
+                  <a:srgbClr val="1B2330"/>
+                </a:solidFill>
+                <a:latin typeface="Montserrat"/>
+              </a:rPr>
+              <a:t>Condensación: seguir al fabricante</a:t>
+            </a:r>
+          </a:p>
+        </p:txBody>
+      </p:sp>
+      <p:sp>
+        <p:nvSpPr>
+          <p:cNvPr id="9" name="imgph" descr="IMGQ:technician reading oxygen level flue gas analyzer"/>
+          <p:cNvSpPr/>
+          <p:nvPr/>
+        </p:nvSpPr>
+        <p:spPr>
+          <a:xfrm>
+            <a:off x="822960" y="1965960"/>
+            <a:ext cx="5303520" cy="4572000"/>
+          </a:xfrm>
+          <a:prstGeom prst="roundRect">
+            <a:avLst/>
+          </a:prstGeom>
+          <a:solidFill>
+            <a:srgbClr val="F3F6FB"/>
+          </a:solidFill>
+          <a:ln w="12700">
+            <a:solidFill>
+              <a:srgbClr val="C7D2E6"/>
+            </a:solidFill>
+          </a:ln>
+          <a:effectLst/>
+        </p:spPr>
+        <p:style>
+          <a:lnRef idx="1">
+            <a:schemeClr val="accent1"/>
+          </a:lnRef>
+          <a:fillRef idx="3">
+            <a:schemeClr val="accent1"/>
+          </a:fillRef>
+          <a:effectRef idx="2">
+            <a:schemeClr val="accent1"/>
+          </a:effectRef>
+          <a:fontRef idx="minor">
+            <a:schemeClr val="lt1"/>
+          </a:fontRef>
+        </p:style>
+        <p:txBody>
+          <a:bodyPr rtlCol="0" anchor="ctr"/>
+          <a:lstStyle/>
+          <a:p>
+            <a:pPr algn="ctr"/>
+          </a:p>
+        </p:txBody>
+      </p:sp>
+      <p:sp>
+        <p:nvSpPr>
+          <p:cNvPr id="10" name="TextBox 9"/>
           <p:cNvSpPr txBox="1"/>
           <p:nvPr/>
         </p:nvSpPr>
         <p:spPr>
           <a:xfrm>
-            <a:off x="822960" y="2606040"/>
-            <a:ext cx="10515600" cy="2743200"/>
+            <a:off x="1097280" y="3611880"/>
+            <a:ext cx="4754880" cy="1280160"/>
           </a:xfrm>
           <a:prstGeom prst="rect">
             <a:avLst/>
@@ -8994,119 +10157,254 @@
           </a:bodyPr>
           <a:lstStyle/>
           <a:p>
-            <a:pPr>
-              <a:spcAft>
-                <a:spcPts val="1200"/>
-              </a:spcAft>
-            </a:pPr>
-            <a:r>
-              <a:rPr sz="2000" b="1" i="0">
-                <a:solidFill>
-                  <a:srgbClr val="F4A24C"/>
-                </a:solidFill>
-                <a:latin typeface="Montserrat"/>
-              </a:rPr>
-              <a:t>✓  </a:t>
-            </a:r>
-            <a:r>
-              <a:rPr sz="1900" b="0" i="0">
-                <a:solidFill>
-                  <a:srgbClr val="FFFFFF"/>
-                </a:solidFill>
-                <a:latin typeface="Montserrat"/>
-              </a:rPr>
-              <a:t>CO-ambiente: 15, 50; CO en conducto: 500, 1000</a:t>
-            </a:r>
-          </a:p>
-          <a:p>
-            <a:pPr>
-              <a:spcAft>
-                <a:spcPts val="1200"/>
-              </a:spcAft>
-            </a:pPr>
-            <a:r>
-              <a:rPr sz="2000" b="1" i="0">
-                <a:solidFill>
-                  <a:srgbClr val="F4A24C"/>
-                </a:solidFill>
-                <a:latin typeface="Montserrat"/>
-              </a:rPr>
-              <a:t>✓  </a:t>
-            </a:r>
-            <a:r>
-              <a:rPr sz="1900" b="0" i="0">
-                <a:solidFill>
-                  <a:srgbClr val="FFFFFF"/>
-                </a:solidFill>
-                <a:latin typeface="Montserrat"/>
-              </a:rPr>
-              <a:t>Revoco: el humo que se devuelve al local</a:t>
-            </a:r>
-          </a:p>
-          <a:p>
-            <a:pPr>
-              <a:spcAft>
-                <a:spcPts val="1200"/>
-              </a:spcAft>
-            </a:pPr>
-            <a:r>
-              <a:rPr sz="2000" b="1" i="0">
-                <a:solidFill>
-                  <a:srgbClr val="F4A24C"/>
-                </a:solidFill>
-                <a:latin typeface="Montserrat"/>
-              </a:rPr>
-              <a:t>✓  </a:t>
-            </a:r>
-            <a:r>
-              <a:rPr sz="1900" b="0" i="0">
-                <a:solidFill>
-                  <a:srgbClr val="FFFFFF"/>
-                </a:solidFill>
-                <a:latin typeface="Montserrat"/>
-              </a:rPr>
-              <a:t>El analizador: 18 meses, 5 años, ± 5 %</a:t>
-            </a:r>
-          </a:p>
-          <a:p>
-            <a:pPr>
-              <a:spcAft>
-                <a:spcPts val="1200"/>
-              </a:spcAft>
-            </a:pPr>
-            <a:r>
-              <a:rPr sz="2000" b="1" i="0">
-                <a:solidFill>
-                  <a:srgbClr val="F4A24C"/>
-                </a:solidFill>
-                <a:latin typeface="Montserrat"/>
-              </a:rPr>
-              <a:t>✓  </a:t>
-            </a:r>
-            <a:r>
-              <a:rPr sz="1900" b="0" i="0">
-                <a:solidFill>
-                  <a:srgbClr val="FFFFFF"/>
-                </a:solidFill>
-                <a:latin typeface="Montserrat"/>
-              </a:rPr>
-              <a:t>Control periódico no es mantenimiento</a:t>
-            </a:r>
-          </a:p>
-        </p:txBody>
-      </p:sp>
-      <p:sp>
-        <p:nvSpPr>
-          <p:cNvPr id="7" name="Rounded Rectangle 6"/>
+            <a:pPr algn="ctr"/>
+            <a:r>
+              <a:rPr sz="1400" b="1" i="0">
+                <a:solidFill>
+                  <a:srgbClr val="64748B"/>
+                </a:solidFill>
+                <a:latin typeface="Montserrat"/>
+              </a:rPr>
+              <a:t>IMAGEN</a:t>
+            </a:r>
+          </a:p>
+          <a:p>
+            <a:pPr algn="ctr"/>
+            <a:r>
+              <a:rPr sz="1100" b="0" i="1">
+                <a:solidFill>
+                  <a:srgbClr val="64748B"/>
+                </a:solidFill>
+                <a:latin typeface="Montserrat"/>
+              </a:rPr>
+              <a:t>technician reading oxygen level flue gas analyzer</a:t>
+            </a:r>
+          </a:p>
+        </p:txBody>
+      </p:sp>
+    </p:spTree>
+  </p:cSld>
+  <p:clrMapOvr>
+    <a:masterClrMapping/>
+  </p:clrMapOvr>
+  <mc:AlternateContent xmlns:mc="http://schemas.openxmlformats.org/markup-compatibility/2006">
+    <mc:Choice xmlns:p14="http://schemas.microsoft.com/office/powerpoint/2010/main" Requires="p14">
+      <p:transition spd="med" p14:dur="700">
+        <p14:cube dir="r"/>
+      </p:transition>
+    </mc:Choice>
+    <mc:Fallback>
+      <p:transition spd="med">
+        <p:push dir="r"/>
+      </p:transition>
+    </mc:Fallback>
+  </mc:AlternateContent>
+</p:sld>
+</file>
+
+<file path=ppt/slides/slide19.xml><?xml version="1.0" encoding="utf-8"?>
+<p:sld xmlns:a="http://schemas.openxmlformats.org/drawingml/2006/main" xmlns:p="http://schemas.openxmlformats.org/presentationml/2006/main" xmlns:r="http://schemas.openxmlformats.org/officeDocument/2006/relationships">
+  <p:cSld>
+    <p:spTree>
+      <p:nvGrpSpPr>
+        <p:cNvPr id="1" name=""/>
+        <p:cNvGrpSpPr/>
+        <p:nvPr/>
+      </p:nvGrpSpPr>
+      <p:grpSpPr/>
+      <p:sp>
+        <p:nvSpPr>
+          <p:cNvPr id="2" name="Rectangle 1"/>
           <p:cNvSpPr/>
           <p:nvPr/>
         </p:nvSpPr>
         <p:spPr>
           <a:xfrm>
-            <a:off x="822960" y="5532120"/>
-            <a:ext cx="10515600" cy="822960"/>
-          </a:xfrm>
-          <a:prstGeom prst="roundRect">
+            <a:off x="0" y="0"/>
+            <a:ext cx="12191695" cy="6858000"/>
+          </a:xfrm>
+          <a:prstGeom prst="rect">
+            <a:avLst/>
+          </a:prstGeom>
+          <a:solidFill>
+            <a:srgbClr val="FFFFFF"/>
+          </a:solidFill>
+          <a:ln>
+            <a:noFill/>
+          </a:ln>
+          <a:effectLst/>
+        </p:spPr>
+        <p:style>
+          <a:lnRef idx="1">
+            <a:schemeClr val="accent1"/>
+          </a:lnRef>
+          <a:fillRef idx="3">
+            <a:schemeClr val="accent1"/>
+          </a:fillRef>
+          <a:effectRef idx="2">
+            <a:schemeClr val="accent1"/>
+          </a:effectRef>
+          <a:fontRef idx="minor">
+            <a:schemeClr val="lt1"/>
+          </a:fontRef>
+        </p:style>
+        <p:txBody>
+          <a:bodyPr rtlCol="0" anchor="ctr"/>
+          <a:lstStyle/>
+          <a:p>
+            <a:pPr algn="ctr"/>
+          </a:p>
+        </p:txBody>
+      </p:sp>
+      <p:sp>
+        <p:nvSpPr>
+          <p:cNvPr id="3" name="TextBox 2"/>
+          <p:cNvSpPr txBox="1"/>
+          <p:nvPr/>
+        </p:nvSpPr>
+        <p:spPr>
+          <a:xfrm>
+            <a:off x="10607040" y="320040"/>
+            <a:ext cx="1371600" cy="365760"/>
+          </a:xfrm>
+          <a:prstGeom prst="rect">
+            <a:avLst/>
+          </a:prstGeom>
+          <a:noFill/>
+        </p:spPr>
+        <p:txBody>
+          <a:bodyPr wrap="square">
+            <a:spAutoFit/>
+          </a:bodyPr>
+          <a:lstStyle/>
+          <a:p>
+            <a:pPr algn="r"/>
+            <a:r>
+              <a:rPr sz="1000" b="1" i="0">
+                <a:solidFill>
+                  <a:srgbClr val="64748B"/>
+                </a:solidFill>
+                <a:latin typeface="Montserrat"/>
+              </a:rPr>
+              <a:t>019 / 024</a:t>
+            </a:r>
+          </a:p>
+        </p:txBody>
+      </p:sp>
+      <p:sp>
+        <p:nvSpPr>
+          <p:cNvPr id="4" name="TextBox 3"/>
+          <p:cNvSpPr txBox="1"/>
+          <p:nvPr/>
+        </p:nvSpPr>
+        <p:spPr>
+          <a:xfrm>
+            <a:off x="457200" y="6419088"/>
+            <a:ext cx="8229600" cy="365760"/>
+          </a:xfrm>
+          <a:prstGeom prst="rect">
+            <a:avLst/>
+          </a:prstGeom>
+          <a:noFill/>
+        </p:spPr>
+        <p:txBody>
+          <a:bodyPr wrap="square">
+            <a:spAutoFit/>
+          </a:bodyPr>
+          <a:lstStyle/>
+          <a:p>
+            <a:r>
+              <a:rPr sz="900" b="0" i="0">
+                <a:solidFill>
+                  <a:srgbClr val="64748B"/>
+                </a:solidFill>
+                <a:latin typeface="Montserrat"/>
+              </a:rPr>
+              <a:t>Curso Gas B · Tema 16 · UNE 60670-11/12/13</a:t>
+            </a:r>
+          </a:p>
+        </p:txBody>
+      </p:sp>
+      <p:sp>
+        <p:nvSpPr>
+          <p:cNvPr id="5" name="TextBox 4"/>
+          <p:cNvSpPr txBox="1"/>
+          <p:nvPr/>
+        </p:nvSpPr>
+        <p:spPr>
+          <a:xfrm>
+            <a:off x="822960" y="457200"/>
+            <a:ext cx="10058400" cy="365760"/>
+          </a:xfrm>
+          <a:prstGeom prst="rect">
+            <a:avLst/>
+          </a:prstGeom>
+          <a:noFill/>
+        </p:spPr>
+        <p:txBody>
+          <a:bodyPr wrap="square">
+            <a:spAutoFit/>
+          </a:bodyPr>
+          <a:lstStyle/>
+          <a:p>
+            <a:r>
+              <a:rPr sz="1300" b="1" i="0">
+                <a:solidFill>
+                  <a:srgbClr val="E8801A"/>
+                </a:solidFill>
+                <a:latin typeface="Montserrat"/>
+              </a:rPr>
+              <a:t>PARTE 13 · ANEXO A · EQUIPOS</a:t>
+            </a:r>
+          </a:p>
+        </p:txBody>
+      </p:sp>
+      <p:sp>
+        <p:nvSpPr>
+          <p:cNvPr id="6" name="TextBox 5"/>
+          <p:cNvSpPr txBox="1"/>
+          <p:nvPr/>
+        </p:nvSpPr>
+        <p:spPr>
+          <a:xfrm>
+            <a:off x="822960" y="868680"/>
+            <a:ext cx="10515600" cy="914400"/>
+          </a:xfrm>
+          <a:prstGeom prst="rect">
+            <a:avLst/>
+          </a:prstGeom>
+          <a:noFill/>
+        </p:spPr>
+        <p:txBody>
+          <a:bodyPr wrap="square">
+            <a:spAutoFit/>
+          </a:bodyPr>
+          <a:lstStyle/>
+          <a:p>
+            <a:r>
+              <a:rPr sz="2800" b="1" i="0">
+                <a:solidFill>
+                  <a:srgbClr val="1E2761"/>
+                </a:solidFill>
+                <a:latin typeface="Montserrat"/>
+              </a:rPr>
+              <a:t>El analizador es tu testigo</a:t>
+            </a:r>
+          </a:p>
+        </p:txBody>
+      </p:sp>
+      <p:sp>
+        <p:nvSpPr>
+          <p:cNvPr id="7" name="Rectangle 6"/>
+          <p:cNvSpPr/>
+          <p:nvPr/>
+        </p:nvSpPr>
+        <p:spPr>
+          <a:xfrm>
+            <a:off x="868680" y="1627632"/>
+            <a:ext cx="2011680" cy="73152"/>
+          </a:xfrm>
+          <a:prstGeom prst="rect">
             <a:avLst/>
           </a:prstGeom>
           <a:solidFill>
@@ -9147,8 +10445,8 @@
         </p:nvSpPr>
         <p:spPr>
           <a:xfrm>
-            <a:off x="1051560" y="5623560"/>
-            <a:ext cx="10058400" cy="640080"/>
+            <a:off x="822960" y="1965960"/>
+            <a:ext cx="5029200" cy="4206240"/>
           </a:xfrm>
           <a:prstGeom prst="rect">
             <a:avLst/>
@@ -9161,14 +10459,196 @@
           </a:bodyPr>
           <a:lstStyle/>
           <a:p>
-            <a:r>
-              <a:rPr sz="1500" b="1" i="1">
-                <a:solidFill>
-                  <a:srgbClr val="1E2761"/>
-                </a:solidFill>
-                <a:latin typeface="Montserrat"/>
-              </a:rPr>
-              <a:t>Has cerrado el Tema 16. Sabes tocar, inspeccionar y medir: ya eres un gasista con oficio.</a:t>
+            <a:pPr>
+              <a:spcAft>
+                <a:spcPts val="1100"/>
+              </a:spcAft>
+            </a:pPr>
+            <a:r>
+              <a:rPr sz="1600" b="1" i="0">
+                <a:solidFill>
+                  <a:srgbClr val="E8801A"/>
+                </a:solidFill>
+                <a:latin typeface="Montserrat"/>
+              </a:rPr>
+              <a:t>▸  </a:t>
+            </a:r>
+            <a:r>
+              <a:rPr sz="1600" b="0" i="0">
+                <a:solidFill>
+                  <a:srgbClr val="1B2330"/>
+                </a:solidFill>
+                <a:latin typeface="Montserrat"/>
+              </a:rPr>
+              <a:t>Calibrar cada 18 meses como máximo</a:t>
+            </a:r>
+          </a:p>
+          <a:p>
+            <a:pPr>
+              <a:spcAft>
+                <a:spcPts val="1100"/>
+              </a:spcAft>
+            </a:pPr>
+            <a:r>
+              <a:rPr sz="1600" b="1" i="0">
+                <a:solidFill>
+                  <a:srgbClr val="E8801A"/>
+                </a:solidFill>
+                <a:latin typeface="Montserrat"/>
+              </a:rPr>
+              <a:t>▸  </a:t>
+            </a:r>
+            <a:r>
+              <a:rPr sz="1600" b="0" i="0">
+                <a:solidFill>
+                  <a:srgbClr val="1B2330"/>
+                </a:solidFill>
+                <a:latin typeface="Montserrat"/>
+              </a:rPr>
+              <a:t>Laboratorio acreditado UNE-EN ISO/IEC 17025</a:t>
+            </a:r>
+          </a:p>
+          <a:p>
+            <a:pPr>
+              <a:spcAft>
+                <a:spcPts val="1100"/>
+              </a:spcAft>
+            </a:pPr>
+            <a:r>
+              <a:rPr sz="1600" b="1" i="0">
+                <a:solidFill>
+                  <a:srgbClr val="E8801A"/>
+                </a:solidFill>
+                <a:latin typeface="Montserrat"/>
+              </a:rPr>
+              <a:t>▸  </a:t>
+            </a:r>
+            <a:r>
+              <a:rPr sz="1600" b="0" i="0">
+                <a:solidFill>
+                  <a:srgbClr val="1B2330"/>
+                </a:solidFill>
+                <a:latin typeface="Montserrat"/>
+              </a:rPr>
+              <a:t>Registro documental 5 años</a:t>
+            </a:r>
+          </a:p>
+          <a:p>
+            <a:pPr>
+              <a:spcAft>
+                <a:spcPts val="1100"/>
+              </a:spcAft>
+            </a:pPr>
+            <a:r>
+              <a:rPr sz="1600" b="1" i="0">
+                <a:solidFill>
+                  <a:srgbClr val="E8801A"/>
+                </a:solidFill>
+                <a:latin typeface="Montserrat"/>
+              </a:rPr>
+              <a:t>▸  </a:t>
+            </a:r>
+            <a:r>
+              <a:rPr sz="1600" b="0" i="0">
+                <a:solidFill>
+                  <a:srgbClr val="1B2330"/>
+                </a:solidFill>
+                <a:latin typeface="Montserrat"/>
+              </a:rPr>
+              <a:t>Incertidumbre no mayor de ± 5 %</a:t>
+            </a:r>
+          </a:p>
+        </p:txBody>
+      </p:sp>
+      <p:sp>
+        <p:nvSpPr>
+          <p:cNvPr id="9" name="imgph" descr="IMGQ:combustion analyzer calibration laboratory certificate"/>
+          <p:cNvSpPr/>
+          <p:nvPr/>
+        </p:nvSpPr>
+        <p:spPr>
+          <a:xfrm>
+            <a:off x="6080760" y="1965960"/>
+            <a:ext cx="5303520" cy="4572000"/>
+          </a:xfrm>
+          <a:prstGeom prst="roundRect">
+            <a:avLst/>
+          </a:prstGeom>
+          <a:solidFill>
+            <a:srgbClr val="F3F6FB"/>
+          </a:solidFill>
+          <a:ln w="12700">
+            <a:solidFill>
+              <a:srgbClr val="C7D2E6"/>
+            </a:solidFill>
+          </a:ln>
+          <a:effectLst/>
+        </p:spPr>
+        <p:style>
+          <a:lnRef idx="1">
+            <a:schemeClr val="accent1"/>
+          </a:lnRef>
+          <a:fillRef idx="3">
+            <a:schemeClr val="accent1"/>
+          </a:fillRef>
+          <a:effectRef idx="2">
+            <a:schemeClr val="accent1"/>
+          </a:effectRef>
+          <a:fontRef idx="minor">
+            <a:schemeClr val="lt1"/>
+          </a:fontRef>
+        </p:style>
+        <p:txBody>
+          <a:bodyPr rtlCol="0" anchor="ctr"/>
+          <a:lstStyle/>
+          <a:p>
+            <a:pPr algn="ctr"/>
+          </a:p>
+        </p:txBody>
+      </p:sp>
+      <p:sp>
+        <p:nvSpPr>
+          <p:cNvPr id="10" name="TextBox 9"/>
+          <p:cNvSpPr txBox="1"/>
+          <p:nvPr/>
+        </p:nvSpPr>
+        <p:spPr>
+          <a:xfrm>
+            <a:off x="6355080" y="3611880"/>
+            <a:ext cx="4754880" cy="1280160"/>
+          </a:xfrm>
+          <a:prstGeom prst="rect">
+            <a:avLst/>
+          </a:prstGeom>
+          <a:noFill/>
+        </p:spPr>
+        <p:txBody>
+          <a:bodyPr wrap="square">
+            <a:spAutoFit/>
+          </a:bodyPr>
+          <a:lstStyle/>
+          <a:p>
+            <a:pPr algn="ctr"/>
+            <a:r>
+              <a:rPr sz="1400" b="1" i="0">
+                <a:solidFill>
+                  <a:srgbClr val="64748B"/>
+                </a:solidFill>
+                <a:latin typeface="Montserrat"/>
+              </a:rPr>
+              <a:t>IMAGEN</a:t>
+            </a:r>
+          </a:p>
+          <a:p>
+            <a:pPr algn="ctr"/>
+            <a:r>
+              <a:rPr sz="1100" b="0" i="1">
+                <a:solidFill>
+                  <a:srgbClr val="64748B"/>
+                </a:solidFill>
+                <a:latin typeface="Montserrat"/>
+              </a:rPr>
+              <a:t>combustion analyzer calibration laboratory certificate</a:t>
             </a:r>
           </a:p>
         </p:txBody>
@@ -9178,6 +10658,18 @@
   <p:clrMapOvr>
     <a:masterClrMapping/>
   </p:clrMapOvr>
+  <mc:AlternateContent xmlns:mc="http://schemas.openxmlformats.org/markup-compatibility/2006">
+    <mc:Choice xmlns:p14="http://schemas.microsoft.com/office/powerpoint/2010/main" Requires="p14">
+      <p:transition spd="med" p14:dur="700">
+        <p14:cube dir="l"/>
+      </p:transition>
+    </mc:Choice>
+    <mc:Fallback>
+      <p:transition spd="med">
+        <p:push dir="l"/>
+      </p:transition>
+    </mc:Fallback>
+  </mc:AlternateContent>
 </p:sld>
 </file>
 
@@ -9265,7 +10757,7 @@
                 </a:solidFill>
                 <a:latin typeface="Montserrat"/>
               </a:rPr>
-              <a:t>002 / 018</a:t>
+              <a:t>002 / 024</a:t>
             </a:r>
           </a:p>
         </p:txBody>
@@ -9340,7 +10832,7 @@
       </p:sp>
       <p:sp>
         <p:nvSpPr>
-          <p:cNvPr id="6" name="Rounded Rectangle 5"/>
+          <p:cNvPr id="6" name="Rectangle 5"/>
           <p:cNvSpPr/>
           <p:nvPr/>
         </p:nvSpPr>
@@ -9349,7 +10841,7 @@
             <a:off x="868680" y="1234440"/>
             <a:ext cx="1463040" cy="73152"/>
           </a:xfrm>
-          <a:prstGeom prst="roundRect">
+          <a:prstGeom prst="rect">
             <a:avLst/>
           </a:prstGeom>
           <a:solidFill>
@@ -9430,14 +10922,58 @@
       </p:sp>
       <p:sp>
         <p:nvSpPr>
-          <p:cNvPr id="8" name="TextBox 7"/>
+          <p:cNvPr id="8" name="Rectangle 7"/>
+          <p:cNvSpPr/>
+          <p:nvPr/>
+        </p:nvSpPr>
+        <p:spPr>
+          <a:xfrm>
+            <a:off x="822960" y="2011680"/>
+            <a:ext cx="3017520" cy="128016"/>
+          </a:xfrm>
+          <a:prstGeom prst="rect">
+            <a:avLst/>
+          </a:prstGeom>
+          <a:solidFill>
+            <a:srgbClr val="E8801A"/>
+          </a:solidFill>
+          <a:ln>
+            <a:noFill/>
+          </a:ln>
+          <a:effectLst/>
+        </p:spPr>
+        <p:style>
+          <a:lnRef idx="1">
+            <a:schemeClr val="accent1"/>
+          </a:lnRef>
+          <a:fillRef idx="3">
+            <a:schemeClr val="accent1"/>
+          </a:fillRef>
+          <a:effectRef idx="2">
+            <a:schemeClr val="accent1"/>
+          </a:effectRef>
+          <a:fontRef idx="minor">
+            <a:schemeClr val="lt1"/>
+          </a:fontRef>
+        </p:style>
+        <p:txBody>
+          <a:bodyPr rtlCol="0" anchor="ctr"/>
+          <a:lstStyle/>
+          <a:p>
+            <a:pPr algn="ctr"/>
+          </a:p>
+        </p:txBody>
+      </p:sp>
+      <p:sp>
+        <p:nvSpPr>
+          <p:cNvPr id="9" name="TextBox 8"/>
           <p:cNvSpPr txBox="1"/>
           <p:nvPr/>
         </p:nvSpPr>
         <p:spPr>
           <a:xfrm>
-            <a:off x="822960" y="2331720"/>
-            <a:ext cx="3017520" cy="1463040"/>
+            <a:off x="822960" y="2377440"/>
+            <a:ext cx="3017520" cy="1371600"/>
           </a:xfrm>
           <a:prstGeom prst="rect">
             <a:avLst/>
@@ -9452,7 +10988,7 @@
           <a:p>
             <a:pPr algn="ctr"/>
             <a:r>
-              <a:rPr sz="6000" b="1" i="0">
+              <a:rPr sz="5800" b="1" i="0">
                 <a:solidFill>
                   <a:srgbClr val="1E2761"/>
                 </a:solidFill>
@@ -9465,13 +11001,13 @@
       </p:sp>
       <p:sp>
         <p:nvSpPr>
-          <p:cNvPr id="9" name="TextBox 8"/>
+          <p:cNvPr id="10" name="TextBox 9"/>
           <p:cNvSpPr txBox="1"/>
           <p:nvPr/>
         </p:nvSpPr>
         <p:spPr>
           <a:xfrm>
-            <a:off x="1051560" y="3611880"/>
+            <a:off x="1051560" y="3657600"/>
             <a:ext cx="2560320" cy="1005840"/>
           </a:xfrm>
           <a:prstGeom prst="rect">
@@ -9500,7 +11036,7 @@
       </p:sp>
       <p:sp>
         <p:nvSpPr>
-          <p:cNvPr id="10" name="Rounded Rectangle 9"/>
+          <p:cNvPr id="11" name="Rounded Rectangle 10"/>
           <p:cNvSpPr/>
           <p:nvPr/>
         </p:nvSpPr>
@@ -9546,14 +11082,58 @@
       </p:sp>
       <p:sp>
         <p:nvSpPr>
-          <p:cNvPr id="11" name="TextBox 10"/>
+          <p:cNvPr id="12" name="Rectangle 11"/>
+          <p:cNvSpPr/>
+          <p:nvPr/>
+        </p:nvSpPr>
+        <p:spPr>
+          <a:xfrm>
+            <a:off x="4617720" y="2011680"/>
+            <a:ext cx="3017520" cy="128016"/>
+          </a:xfrm>
+          <a:prstGeom prst="rect">
+            <a:avLst/>
+          </a:prstGeom>
+          <a:solidFill>
+            <a:srgbClr val="E8801A"/>
+          </a:solidFill>
+          <a:ln>
+            <a:noFill/>
+          </a:ln>
+          <a:effectLst/>
+        </p:spPr>
+        <p:style>
+          <a:lnRef idx="1">
+            <a:schemeClr val="accent1"/>
+          </a:lnRef>
+          <a:fillRef idx="3">
+            <a:schemeClr val="accent1"/>
+          </a:fillRef>
+          <a:effectRef idx="2">
+            <a:schemeClr val="accent1"/>
+          </a:effectRef>
+          <a:fontRef idx="minor">
+            <a:schemeClr val="lt1"/>
+          </a:fontRef>
+        </p:style>
+        <p:txBody>
+          <a:bodyPr rtlCol="0" anchor="ctr"/>
+          <a:lstStyle/>
+          <a:p>
+            <a:pPr algn="ctr"/>
+          </a:p>
+        </p:txBody>
+      </p:sp>
+      <p:sp>
+        <p:nvSpPr>
+          <p:cNvPr id="13" name="TextBox 12"/>
           <p:cNvSpPr txBox="1"/>
           <p:nvPr/>
         </p:nvSpPr>
         <p:spPr>
           <a:xfrm>
-            <a:off x="4617720" y="2331720"/>
-            <a:ext cx="3017520" cy="1463040"/>
+            <a:off x="4617720" y="2377440"/>
+            <a:ext cx="3017520" cy="1371600"/>
           </a:xfrm>
           <a:prstGeom prst="rect">
             <a:avLst/>
@@ -9568,7 +11148,7 @@
           <a:p>
             <a:pPr algn="ctr"/>
             <a:r>
-              <a:rPr sz="6000" b="1" i="0">
+              <a:rPr sz="5800" b="1" i="0">
                 <a:solidFill>
                   <a:srgbClr val="1E2761"/>
                 </a:solidFill>
@@ -9581,13 +11161,13 @@
       </p:sp>
       <p:sp>
         <p:nvSpPr>
-          <p:cNvPr id="12" name="TextBox 11"/>
+          <p:cNvPr id="14" name="TextBox 13"/>
           <p:cNvSpPr txBox="1"/>
           <p:nvPr/>
         </p:nvSpPr>
         <p:spPr>
           <a:xfrm>
-            <a:off x="4846320" y="3611880"/>
+            <a:off x="4846320" y="3657600"/>
             <a:ext cx="2560320" cy="1005840"/>
           </a:xfrm>
           <a:prstGeom prst="rect">
@@ -9616,7 +11196,7 @@
       </p:sp>
       <p:sp>
         <p:nvSpPr>
-          <p:cNvPr id="13" name="Rounded Rectangle 12"/>
+          <p:cNvPr id="15" name="Rounded Rectangle 14"/>
           <p:cNvSpPr/>
           <p:nvPr/>
         </p:nvSpPr>
@@ -9662,14 +11242,58 @@
       </p:sp>
       <p:sp>
         <p:nvSpPr>
-          <p:cNvPr id="14" name="TextBox 13"/>
+          <p:cNvPr id="16" name="Rectangle 15"/>
+          <p:cNvSpPr/>
+          <p:nvPr/>
+        </p:nvSpPr>
+        <p:spPr>
+          <a:xfrm>
+            <a:off x="8412480" y="2011680"/>
+            <a:ext cx="3017520" cy="128016"/>
+          </a:xfrm>
+          <a:prstGeom prst="rect">
+            <a:avLst/>
+          </a:prstGeom>
+          <a:solidFill>
+            <a:srgbClr val="E8801A"/>
+          </a:solidFill>
+          <a:ln>
+            <a:noFill/>
+          </a:ln>
+          <a:effectLst/>
+        </p:spPr>
+        <p:style>
+          <a:lnRef idx="1">
+            <a:schemeClr val="accent1"/>
+          </a:lnRef>
+          <a:fillRef idx="3">
+            <a:schemeClr val="accent1"/>
+          </a:fillRef>
+          <a:effectRef idx="2">
+            <a:schemeClr val="accent1"/>
+          </a:effectRef>
+          <a:fontRef idx="minor">
+            <a:schemeClr val="lt1"/>
+          </a:fontRef>
+        </p:style>
+        <p:txBody>
+          <a:bodyPr rtlCol="0" anchor="ctr"/>
+          <a:lstStyle/>
+          <a:p>
+            <a:pPr algn="ctr"/>
+          </a:p>
+        </p:txBody>
+      </p:sp>
+      <p:sp>
+        <p:nvSpPr>
+          <p:cNvPr id="17" name="TextBox 16"/>
           <p:cNvSpPr txBox="1"/>
           <p:nvPr/>
         </p:nvSpPr>
         <p:spPr>
           <a:xfrm>
-            <a:off x="8412480" y="2331720"/>
-            <a:ext cx="3017520" cy="1463040"/>
+            <a:off x="8412480" y="2377440"/>
+            <a:ext cx="3017520" cy="1371600"/>
           </a:xfrm>
           <a:prstGeom prst="rect">
             <a:avLst/>
@@ -9684,7 +11308,7 @@
           <a:p>
             <a:pPr algn="ctr"/>
             <a:r>
-              <a:rPr sz="6000" b="1" i="0">
+              <a:rPr sz="5800" b="1" i="0">
                 <a:solidFill>
                   <a:srgbClr val="1E2761"/>
                 </a:solidFill>
@@ -9697,13 +11321,13 @@
       </p:sp>
       <p:sp>
         <p:nvSpPr>
-          <p:cNvPr id="15" name="TextBox 14"/>
+          <p:cNvPr id="18" name="TextBox 17"/>
           <p:cNvSpPr txBox="1"/>
           <p:nvPr/>
         </p:nvSpPr>
         <p:spPr>
           <a:xfrm>
-            <a:off x="8641080" y="3611880"/>
+            <a:off x="8641080" y="3657600"/>
             <a:ext cx="2560320" cy="1005840"/>
           </a:xfrm>
           <a:prstGeom prst="rect">
@@ -9735,6 +11359,2600 @@
   <p:clrMapOvr>
     <a:masterClrMapping/>
   </p:clrMapOvr>
+  <mc:AlternateContent xmlns:mc="http://schemas.openxmlformats.org/markup-compatibility/2006">
+    <mc:Choice xmlns:p14="http://schemas.microsoft.com/office/powerpoint/2010/main" Requires="p14">
+      <p:transition spd="med" p14:dur="700">
+        <p14:cube dir="r"/>
+      </p:transition>
+    </mc:Choice>
+    <mc:Fallback>
+      <p:transition spd="med">
+        <p:push dir="r"/>
+      </p:transition>
+    </mc:Fallback>
+  </mc:AlternateContent>
+</p:sld>
+</file>
+
+<file path=ppt/slides/slide20.xml><?xml version="1.0" encoding="utf-8"?>
+<p:sld xmlns:a="http://schemas.openxmlformats.org/drawingml/2006/main" xmlns:p="http://schemas.openxmlformats.org/presentationml/2006/main" xmlns:r="http://schemas.openxmlformats.org/officeDocument/2006/relationships">
+  <p:cSld>
+    <p:spTree>
+      <p:nvGrpSpPr>
+        <p:cNvPr id="1" name=""/>
+        <p:cNvGrpSpPr/>
+        <p:nvPr/>
+      </p:nvGrpSpPr>
+      <p:grpSpPr/>
+      <p:sp>
+        <p:nvSpPr>
+          <p:cNvPr id="2" name="Rectangle 1"/>
+          <p:cNvSpPr/>
+          <p:nvPr/>
+        </p:nvSpPr>
+        <p:spPr>
+          <a:xfrm>
+            <a:off x="0" y="0"/>
+            <a:ext cx="12191695" cy="6858000"/>
+          </a:xfrm>
+          <a:prstGeom prst="rect">
+            <a:avLst/>
+          </a:prstGeom>
+          <a:solidFill>
+            <a:srgbClr val="FFFFFF"/>
+          </a:solidFill>
+          <a:ln>
+            <a:noFill/>
+          </a:ln>
+          <a:effectLst/>
+        </p:spPr>
+        <p:style>
+          <a:lnRef idx="1">
+            <a:schemeClr val="accent1"/>
+          </a:lnRef>
+          <a:fillRef idx="3">
+            <a:schemeClr val="accent1"/>
+          </a:fillRef>
+          <a:effectRef idx="2">
+            <a:schemeClr val="accent1"/>
+          </a:effectRef>
+          <a:fontRef idx="minor">
+            <a:schemeClr val="lt1"/>
+          </a:fontRef>
+        </p:style>
+        <p:txBody>
+          <a:bodyPr rtlCol="0" anchor="ctr"/>
+          <a:lstStyle/>
+          <a:p>
+            <a:pPr algn="ctr"/>
+          </a:p>
+        </p:txBody>
+      </p:sp>
+      <p:sp>
+        <p:nvSpPr>
+          <p:cNvPr id="3" name="TextBox 2"/>
+          <p:cNvSpPr txBox="1"/>
+          <p:nvPr/>
+        </p:nvSpPr>
+        <p:spPr>
+          <a:xfrm>
+            <a:off x="10607040" y="320040"/>
+            <a:ext cx="1371600" cy="365760"/>
+          </a:xfrm>
+          <a:prstGeom prst="rect">
+            <a:avLst/>
+          </a:prstGeom>
+          <a:noFill/>
+        </p:spPr>
+        <p:txBody>
+          <a:bodyPr wrap="square">
+            <a:spAutoFit/>
+          </a:bodyPr>
+          <a:lstStyle/>
+          <a:p>
+            <a:pPr algn="r"/>
+            <a:r>
+              <a:rPr sz="1000" b="1" i="0">
+                <a:solidFill>
+                  <a:srgbClr val="64748B"/>
+                </a:solidFill>
+                <a:latin typeface="Montserrat"/>
+              </a:rPr>
+              <a:t>020 / 024</a:t>
+            </a:r>
+          </a:p>
+        </p:txBody>
+      </p:sp>
+      <p:sp>
+        <p:nvSpPr>
+          <p:cNvPr id="4" name="TextBox 3"/>
+          <p:cNvSpPr txBox="1"/>
+          <p:nvPr/>
+        </p:nvSpPr>
+        <p:spPr>
+          <a:xfrm>
+            <a:off x="457200" y="6419088"/>
+            <a:ext cx="8229600" cy="365760"/>
+          </a:xfrm>
+          <a:prstGeom prst="rect">
+            <a:avLst/>
+          </a:prstGeom>
+          <a:noFill/>
+        </p:spPr>
+        <p:txBody>
+          <a:bodyPr wrap="square">
+            <a:spAutoFit/>
+          </a:bodyPr>
+          <a:lstStyle/>
+          <a:p>
+            <a:r>
+              <a:rPr sz="900" b="0" i="0">
+                <a:solidFill>
+                  <a:srgbClr val="64748B"/>
+                </a:solidFill>
+                <a:latin typeface="Montserrat"/>
+              </a:rPr>
+              <a:t>Curso Gas B · Tema 16 · UNE 60670-11/12/13</a:t>
+            </a:r>
+          </a:p>
+        </p:txBody>
+      </p:sp>
+      <p:sp>
+        <p:nvSpPr>
+          <p:cNvPr id="5" name="Rectangle 4"/>
+          <p:cNvSpPr/>
+          <p:nvPr/>
+        </p:nvSpPr>
+        <p:spPr>
+          <a:xfrm>
+            <a:off x="0" y="0"/>
+            <a:ext cx="12191695" cy="1143000"/>
+          </a:xfrm>
+          <a:prstGeom prst="rect">
+            <a:avLst/>
+          </a:prstGeom>
+          <a:solidFill>
+            <a:srgbClr val="E8801A"/>
+          </a:solidFill>
+          <a:ln>
+            <a:noFill/>
+          </a:ln>
+          <a:effectLst/>
+        </p:spPr>
+        <p:style>
+          <a:lnRef idx="1">
+            <a:schemeClr val="accent1"/>
+          </a:lnRef>
+          <a:fillRef idx="3">
+            <a:schemeClr val="accent1"/>
+          </a:fillRef>
+          <a:effectRef idx="2">
+            <a:schemeClr val="accent1"/>
+          </a:effectRef>
+          <a:fontRef idx="minor">
+            <a:schemeClr val="lt1"/>
+          </a:fontRef>
+        </p:style>
+        <p:txBody>
+          <a:bodyPr rtlCol="0" anchor="ctr"/>
+          <a:lstStyle/>
+          <a:p>
+            <a:pPr algn="ctr"/>
+          </a:p>
+        </p:txBody>
+      </p:sp>
+      <p:sp>
+        <p:nvSpPr>
+          <p:cNvPr id="6" name="TextBox 5"/>
+          <p:cNvSpPr txBox="1"/>
+          <p:nvPr/>
+        </p:nvSpPr>
+        <p:spPr>
+          <a:xfrm>
+            <a:off x="822960" y="274320"/>
+            <a:ext cx="10515600" cy="640080"/>
+          </a:xfrm>
+          <a:prstGeom prst="rect">
+            <a:avLst/>
+          </a:prstGeom>
+          <a:noFill/>
+        </p:spPr>
+        <p:txBody>
+          <a:bodyPr wrap="square">
+            <a:spAutoFit/>
+          </a:bodyPr>
+          <a:lstStyle/>
+          <a:p>
+            <a:r>
+              <a:rPr sz="2400" b="1" i="0">
+                <a:solidFill>
+                  <a:srgbClr val="FFFFFF"/>
+                </a:solidFill>
+                <a:latin typeface="Montserrat"/>
+              </a:rPr>
+              <a:t>⚡  PREGUNTA RÁPIDA</a:t>
+            </a:r>
+          </a:p>
+        </p:txBody>
+      </p:sp>
+      <p:sp>
+        <p:nvSpPr>
+          <p:cNvPr id="7" name="TextBox 6"/>
+          <p:cNvSpPr txBox="1"/>
+          <p:nvPr/>
+        </p:nvSpPr>
+        <p:spPr>
+          <a:xfrm>
+            <a:off x="822960" y="1508760"/>
+            <a:ext cx="10515600" cy="1371600"/>
+          </a:xfrm>
+          <a:prstGeom prst="rect">
+            <a:avLst/>
+          </a:prstGeom>
+          <a:noFill/>
+        </p:spPr>
+        <p:txBody>
+          <a:bodyPr wrap="square">
+            <a:spAutoFit/>
+          </a:bodyPr>
+          <a:lstStyle/>
+          <a:p>
+            <a:r>
+              <a:rPr sz="2400" b="1" i="0">
+                <a:solidFill>
+                  <a:srgbClr val="1E2761"/>
+                </a:solidFill>
+                <a:latin typeface="Montserrat"/>
+              </a:rPr>
+              <a:t>¿Cada cuánto tiempo, como máximo, hay que calibrar el analizador de combustión?</a:t>
+            </a:r>
+          </a:p>
+        </p:txBody>
+      </p:sp>
+      <p:sp>
+        <p:nvSpPr>
+          <p:cNvPr id="8" name="Rounded Rectangle 7"/>
+          <p:cNvSpPr/>
+          <p:nvPr/>
+        </p:nvSpPr>
+        <p:spPr>
+          <a:xfrm>
+            <a:off x="822960" y="3291840"/>
+            <a:ext cx="4983480" cy="1143000"/>
+          </a:xfrm>
+          <a:prstGeom prst="roundRect">
+            <a:avLst/>
+          </a:prstGeom>
+          <a:solidFill>
+            <a:srgbClr val="F3F6FB"/>
+          </a:solidFill>
+          <a:ln w="12700">
+            <a:solidFill>
+              <a:srgbClr val="C7D2E6"/>
+            </a:solidFill>
+          </a:ln>
+          <a:effectLst/>
+        </p:spPr>
+        <p:style>
+          <a:lnRef idx="1">
+            <a:schemeClr val="accent1"/>
+          </a:lnRef>
+          <a:fillRef idx="3">
+            <a:schemeClr val="accent1"/>
+          </a:fillRef>
+          <a:effectRef idx="2">
+            <a:schemeClr val="accent1"/>
+          </a:effectRef>
+          <a:fontRef idx="minor">
+            <a:schemeClr val="lt1"/>
+          </a:fontRef>
+        </p:style>
+        <p:txBody>
+          <a:bodyPr rtlCol="0" anchor="ctr"/>
+          <a:lstStyle/>
+          <a:p>
+            <a:pPr algn="ctr"/>
+          </a:p>
+        </p:txBody>
+      </p:sp>
+      <p:sp>
+        <p:nvSpPr>
+          <p:cNvPr id="9" name="Rectangle 8"/>
+          <p:cNvSpPr/>
+          <p:nvPr/>
+        </p:nvSpPr>
+        <p:spPr>
+          <a:xfrm>
+            <a:off x="822960" y="3291840"/>
+            <a:ext cx="640080" cy="1143000"/>
+          </a:xfrm>
+          <a:prstGeom prst="rect">
+            <a:avLst/>
+          </a:prstGeom>
+          <a:solidFill>
+            <a:srgbClr val="1E2761"/>
+          </a:solidFill>
+          <a:ln>
+            <a:noFill/>
+          </a:ln>
+          <a:effectLst/>
+        </p:spPr>
+        <p:style>
+          <a:lnRef idx="1">
+            <a:schemeClr val="accent1"/>
+          </a:lnRef>
+          <a:fillRef idx="3">
+            <a:schemeClr val="accent1"/>
+          </a:fillRef>
+          <a:effectRef idx="2">
+            <a:schemeClr val="accent1"/>
+          </a:effectRef>
+          <a:fontRef idx="minor">
+            <a:schemeClr val="lt1"/>
+          </a:fontRef>
+        </p:style>
+        <p:txBody>
+          <a:bodyPr rtlCol="0" anchor="ctr"/>
+          <a:lstStyle/>
+          <a:p>
+            <a:pPr algn="ctr"/>
+          </a:p>
+        </p:txBody>
+      </p:sp>
+      <p:sp>
+        <p:nvSpPr>
+          <p:cNvPr id="10" name="TextBox 9"/>
+          <p:cNvSpPr txBox="1"/>
+          <p:nvPr/>
+        </p:nvSpPr>
+        <p:spPr>
+          <a:xfrm>
+            <a:off x="822960" y="3611880"/>
+            <a:ext cx="640080" cy="548640"/>
+          </a:xfrm>
+          <a:prstGeom prst="rect">
+            <a:avLst/>
+          </a:prstGeom>
+          <a:noFill/>
+        </p:spPr>
+        <p:txBody>
+          <a:bodyPr wrap="square">
+            <a:spAutoFit/>
+          </a:bodyPr>
+          <a:lstStyle/>
+          <a:p>
+            <a:pPr algn="ctr"/>
+            <a:r>
+              <a:rPr sz="2200" b="1" i="0">
+                <a:solidFill>
+                  <a:srgbClr val="FFFFFF"/>
+                </a:solidFill>
+                <a:latin typeface="Montserrat"/>
+              </a:rPr>
+              <a:t>A</a:t>
+            </a:r>
+          </a:p>
+        </p:txBody>
+      </p:sp>
+      <p:sp>
+        <p:nvSpPr>
+          <p:cNvPr id="11" name="TextBox 10"/>
+          <p:cNvSpPr txBox="1"/>
+          <p:nvPr/>
+        </p:nvSpPr>
+        <p:spPr>
+          <a:xfrm>
+            <a:off x="1600200" y="3474720"/>
+            <a:ext cx="4114800" cy="868680"/>
+          </a:xfrm>
+          <a:prstGeom prst="rect">
+            <a:avLst/>
+          </a:prstGeom>
+          <a:noFill/>
+        </p:spPr>
+        <p:txBody>
+          <a:bodyPr wrap="square">
+            <a:spAutoFit/>
+          </a:bodyPr>
+          <a:lstStyle/>
+          <a:p>
+            <a:r>
+              <a:rPr sz="1400" b="0" i="0">
+                <a:solidFill>
+                  <a:srgbClr val="1B2330"/>
+                </a:solidFill>
+                <a:latin typeface="Montserrat"/>
+              </a:rPr>
+              <a:t>Cada seis meses</a:t>
+            </a:r>
+          </a:p>
+        </p:txBody>
+      </p:sp>
+      <p:sp>
+        <p:nvSpPr>
+          <p:cNvPr id="12" name="Rounded Rectangle 11"/>
+          <p:cNvSpPr/>
+          <p:nvPr/>
+        </p:nvSpPr>
+        <p:spPr>
+          <a:xfrm>
+            <a:off x="6355080" y="3291840"/>
+            <a:ext cx="4983480" cy="1143000"/>
+          </a:xfrm>
+          <a:prstGeom prst="roundRect">
+            <a:avLst/>
+          </a:prstGeom>
+          <a:solidFill>
+            <a:srgbClr val="F3F6FB"/>
+          </a:solidFill>
+          <a:ln w="12700">
+            <a:solidFill>
+              <a:srgbClr val="C7D2E6"/>
+            </a:solidFill>
+          </a:ln>
+          <a:effectLst/>
+        </p:spPr>
+        <p:style>
+          <a:lnRef idx="1">
+            <a:schemeClr val="accent1"/>
+          </a:lnRef>
+          <a:fillRef idx="3">
+            <a:schemeClr val="accent1"/>
+          </a:fillRef>
+          <a:effectRef idx="2">
+            <a:schemeClr val="accent1"/>
+          </a:effectRef>
+          <a:fontRef idx="minor">
+            <a:schemeClr val="lt1"/>
+          </a:fontRef>
+        </p:style>
+        <p:txBody>
+          <a:bodyPr rtlCol="0" anchor="ctr"/>
+          <a:lstStyle/>
+          <a:p>
+            <a:pPr algn="ctr"/>
+          </a:p>
+        </p:txBody>
+      </p:sp>
+      <p:sp>
+        <p:nvSpPr>
+          <p:cNvPr id="13" name="Rectangle 12"/>
+          <p:cNvSpPr/>
+          <p:nvPr/>
+        </p:nvSpPr>
+        <p:spPr>
+          <a:xfrm>
+            <a:off x="6355080" y="3291840"/>
+            <a:ext cx="640080" cy="1143000"/>
+          </a:xfrm>
+          <a:prstGeom prst="rect">
+            <a:avLst/>
+          </a:prstGeom>
+          <a:solidFill>
+            <a:srgbClr val="1E2761"/>
+          </a:solidFill>
+          <a:ln>
+            <a:noFill/>
+          </a:ln>
+          <a:effectLst/>
+        </p:spPr>
+        <p:style>
+          <a:lnRef idx="1">
+            <a:schemeClr val="accent1"/>
+          </a:lnRef>
+          <a:fillRef idx="3">
+            <a:schemeClr val="accent1"/>
+          </a:fillRef>
+          <a:effectRef idx="2">
+            <a:schemeClr val="accent1"/>
+          </a:effectRef>
+          <a:fontRef idx="minor">
+            <a:schemeClr val="lt1"/>
+          </a:fontRef>
+        </p:style>
+        <p:txBody>
+          <a:bodyPr rtlCol="0" anchor="ctr"/>
+          <a:lstStyle/>
+          <a:p>
+            <a:pPr algn="ctr"/>
+          </a:p>
+        </p:txBody>
+      </p:sp>
+      <p:sp>
+        <p:nvSpPr>
+          <p:cNvPr id="14" name="TextBox 13"/>
+          <p:cNvSpPr txBox="1"/>
+          <p:nvPr/>
+        </p:nvSpPr>
+        <p:spPr>
+          <a:xfrm>
+            <a:off x="6355080" y="3611880"/>
+            <a:ext cx="640080" cy="548640"/>
+          </a:xfrm>
+          <a:prstGeom prst="rect">
+            <a:avLst/>
+          </a:prstGeom>
+          <a:noFill/>
+        </p:spPr>
+        <p:txBody>
+          <a:bodyPr wrap="square">
+            <a:spAutoFit/>
+          </a:bodyPr>
+          <a:lstStyle/>
+          <a:p>
+            <a:pPr algn="ctr"/>
+            <a:r>
+              <a:rPr sz="2200" b="1" i="0">
+                <a:solidFill>
+                  <a:srgbClr val="FFFFFF"/>
+                </a:solidFill>
+                <a:latin typeface="Montserrat"/>
+              </a:rPr>
+              <a:t>B</a:t>
+            </a:r>
+          </a:p>
+        </p:txBody>
+      </p:sp>
+      <p:sp>
+        <p:nvSpPr>
+          <p:cNvPr id="15" name="TextBox 14"/>
+          <p:cNvSpPr txBox="1"/>
+          <p:nvPr/>
+        </p:nvSpPr>
+        <p:spPr>
+          <a:xfrm>
+            <a:off x="7132320" y="3474720"/>
+            <a:ext cx="4114800" cy="868680"/>
+          </a:xfrm>
+          <a:prstGeom prst="rect">
+            <a:avLst/>
+          </a:prstGeom>
+          <a:noFill/>
+        </p:spPr>
+        <p:txBody>
+          <a:bodyPr wrap="square">
+            <a:spAutoFit/>
+          </a:bodyPr>
+          <a:lstStyle/>
+          <a:p>
+            <a:r>
+              <a:rPr sz="1400" b="0" i="0">
+                <a:solidFill>
+                  <a:srgbClr val="1B2330"/>
+                </a:solidFill>
+                <a:latin typeface="Montserrat"/>
+              </a:rPr>
+              <a:t>Cada doce meses</a:t>
+            </a:r>
+          </a:p>
+        </p:txBody>
+      </p:sp>
+      <p:sp>
+        <p:nvSpPr>
+          <p:cNvPr id="16" name="Rounded Rectangle 15"/>
+          <p:cNvSpPr/>
+          <p:nvPr/>
+        </p:nvSpPr>
+        <p:spPr>
+          <a:xfrm>
+            <a:off x="822960" y="4617720"/>
+            <a:ext cx="4983480" cy="1143000"/>
+          </a:xfrm>
+          <a:prstGeom prst="roundRect">
+            <a:avLst/>
+          </a:prstGeom>
+          <a:solidFill>
+            <a:srgbClr val="F3F6FB"/>
+          </a:solidFill>
+          <a:ln w="12700">
+            <a:solidFill>
+              <a:srgbClr val="C7D2E6"/>
+            </a:solidFill>
+          </a:ln>
+          <a:effectLst/>
+        </p:spPr>
+        <p:style>
+          <a:lnRef idx="1">
+            <a:schemeClr val="accent1"/>
+          </a:lnRef>
+          <a:fillRef idx="3">
+            <a:schemeClr val="accent1"/>
+          </a:fillRef>
+          <a:effectRef idx="2">
+            <a:schemeClr val="accent1"/>
+          </a:effectRef>
+          <a:fontRef idx="minor">
+            <a:schemeClr val="lt1"/>
+          </a:fontRef>
+        </p:style>
+        <p:txBody>
+          <a:bodyPr rtlCol="0" anchor="ctr"/>
+          <a:lstStyle/>
+          <a:p>
+            <a:pPr algn="ctr"/>
+          </a:p>
+        </p:txBody>
+      </p:sp>
+      <p:sp>
+        <p:nvSpPr>
+          <p:cNvPr id="17" name="Rectangle 16"/>
+          <p:cNvSpPr/>
+          <p:nvPr/>
+        </p:nvSpPr>
+        <p:spPr>
+          <a:xfrm>
+            <a:off x="822960" y="4617720"/>
+            <a:ext cx="640080" cy="1143000"/>
+          </a:xfrm>
+          <a:prstGeom prst="rect">
+            <a:avLst/>
+          </a:prstGeom>
+          <a:solidFill>
+            <a:srgbClr val="1E2761"/>
+          </a:solidFill>
+          <a:ln>
+            <a:noFill/>
+          </a:ln>
+          <a:effectLst/>
+        </p:spPr>
+        <p:style>
+          <a:lnRef idx="1">
+            <a:schemeClr val="accent1"/>
+          </a:lnRef>
+          <a:fillRef idx="3">
+            <a:schemeClr val="accent1"/>
+          </a:fillRef>
+          <a:effectRef idx="2">
+            <a:schemeClr val="accent1"/>
+          </a:effectRef>
+          <a:fontRef idx="minor">
+            <a:schemeClr val="lt1"/>
+          </a:fontRef>
+        </p:style>
+        <p:txBody>
+          <a:bodyPr rtlCol="0" anchor="ctr"/>
+          <a:lstStyle/>
+          <a:p>
+            <a:pPr algn="ctr"/>
+          </a:p>
+        </p:txBody>
+      </p:sp>
+      <p:sp>
+        <p:nvSpPr>
+          <p:cNvPr id="18" name="TextBox 17"/>
+          <p:cNvSpPr txBox="1"/>
+          <p:nvPr/>
+        </p:nvSpPr>
+        <p:spPr>
+          <a:xfrm>
+            <a:off x="822960" y="4937760"/>
+            <a:ext cx="640080" cy="548640"/>
+          </a:xfrm>
+          <a:prstGeom prst="rect">
+            <a:avLst/>
+          </a:prstGeom>
+          <a:noFill/>
+        </p:spPr>
+        <p:txBody>
+          <a:bodyPr wrap="square">
+            <a:spAutoFit/>
+          </a:bodyPr>
+          <a:lstStyle/>
+          <a:p>
+            <a:pPr algn="ctr"/>
+            <a:r>
+              <a:rPr sz="2200" b="1" i="0">
+                <a:solidFill>
+                  <a:srgbClr val="FFFFFF"/>
+                </a:solidFill>
+                <a:latin typeface="Montserrat"/>
+              </a:rPr>
+              <a:t>C</a:t>
+            </a:r>
+          </a:p>
+        </p:txBody>
+      </p:sp>
+      <p:sp>
+        <p:nvSpPr>
+          <p:cNvPr id="19" name="TextBox 18"/>
+          <p:cNvSpPr txBox="1"/>
+          <p:nvPr/>
+        </p:nvSpPr>
+        <p:spPr>
+          <a:xfrm>
+            <a:off x="1600200" y="4800600"/>
+            <a:ext cx="4114800" cy="868680"/>
+          </a:xfrm>
+          <a:prstGeom prst="rect">
+            <a:avLst/>
+          </a:prstGeom>
+          <a:noFill/>
+        </p:spPr>
+        <p:txBody>
+          <a:bodyPr wrap="square">
+            <a:spAutoFit/>
+          </a:bodyPr>
+          <a:lstStyle/>
+          <a:p>
+            <a:r>
+              <a:rPr sz="1400" b="0" i="0">
+                <a:solidFill>
+                  <a:srgbClr val="1B2330"/>
+                </a:solidFill>
+                <a:latin typeface="Montserrat"/>
+              </a:rPr>
+              <a:t>Cada dieciocho meses</a:t>
+            </a:r>
+          </a:p>
+        </p:txBody>
+      </p:sp>
+      <p:sp>
+        <p:nvSpPr>
+          <p:cNvPr id="20" name="Rounded Rectangle 19"/>
+          <p:cNvSpPr/>
+          <p:nvPr/>
+        </p:nvSpPr>
+        <p:spPr>
+          <a:xfrm>
+            <a:off x="6355080" y="4617720"/>
+            <a:ext cx="4983480" cy="1143000"/>
+          </a:xfrm>
+          <a:prstGeom prst="roundRect">
+            <a:avLst/>
+          </a:prstGeom>
+          <a:solidFill>
+            <a:srgbClr val="F3F6FB"/>
+          </a:solidFill>
+          <a:ln w="12700">
+            <a:solidFill>
+              <a:srgbClr val="C7D2E6"/>
+            </a:solidFill>
+          </a:ln>
+          <a:effectLst/>
+        </p:spPr>
+        <p:style>
+          <a:lnRef idx="1">
+            <a:schemeClr val="accent1"/>
+          </a:lnRef>
+          <a:fillRef idx="3">
+            <a:schemeClr val="accent1"/>
+          </a:fillRef>
+          <a:effectRef idx="2">
+            <a:schemeClr val="accent1"/>
+          </a:effectRef>
+          <a:fontRef idx="minor">
+            <a:schemeClr val="lt1"/>
+          </a:fontRef>
+        </p:style>
+        <p:txBody>
+          <a:bodyPr rtlCol="0" anchor="ctr"/>
+          <a:lstStyle/>
+          <a:p>
+            <a:pPr algn="ctr"/>
+          </a:p>
+        </p:txBody>
+      </p:sp>
+      <p:sp>
+        <p:nvSpPr>
+          <p:cNvPr id="21" name="Rectangle 20"/>
+          <p:cNvSpPr/>
+          <p:nvPr/>
+        </p:nvSpPr>
+        <p:spPr>
+          <a:xfrm>
+            <a:off x="6355080" y="4617720"/>
+            <a:ext cx="640080" cy="1143000"/>
+          </a:xfrm>
+          <a:prstGeom prst="rect">
+            <a:avLst/>
+          </a:prstGeom>
+          <a:solidFill>
+            <a:srgbClr val="1E2761"/>
+          </a:solidFill>
+          <a:ln>
+            <a:noFill/>
+          </a:ln>
+          <a:effectLst/>
+        </p:spPr>
+        <p:style>
+          <a:lnRef idx="1">
+            <a:schemeClr val="accent1"/>
+          </a:lnRef>
+          <a:fillRef idx="3">
+            <a:schemeClr val="accent1"/>
+          </a:fillRef>
+          <a:effectRef idx="2">
+            <a:schemeClr val="accent1"/>
+          </a:effectRef>
+          <a:fontRef idx="minor">
+            <a:schemeClr val="lt1"/>
+          </a:fontRef>
+        </p:style>
+        <p:txBody>
+          <a:bodyPr rtlCol="0" anchor="ctr"/>
+          <a:lstStyle/>
+          <a:p>
+            <a:pPr algn="ctr"/>
+          </a:p>
+        </p:txBody>
+      </p:sp>
+      <p:sp>
+        <p:nvSpPr>
+          <p:cNvPr id="22" name="TextBox 21"/>
+          <p:cNvSpPr txBox="1"/>
+          <p:nvPr/>
+        </p:nvSpPr>
+        <p:spPr>
+          <a:xfrm>
+            <a:off x="6355080" y="4937760"/>
+            <a:ext cx="640080" cy="548640"/>
+          </a:xfrm>
+          <a:prstGeom prst="rect">
+            <a:avLst/>
+          </a:prstGeom>
+          <a:noFill/>
+        </p:spPr>
+        <p:txBody>
+          <a:bodyPr wrap="square">
+            <a:spAutoFit/>
+          </a:bodyPr>
+          <a:lstStyle/>
+          <a:p>
+            <a:pPr algn="ctr"/>
+            <a:r>
+              <a:rPr sz="2200" b="1" i="0">
+                <a:solidFill>
+                  <a:srgbClr val="FFFFFF"/>
+                </a:solidFill>
+                <a:latin typeface="Montserrat"/>
+              </a:rPr>
+              <a:t>D</a:t>
+            </a:r>
+          </a:p>
+        </p:txBody>
+      </p:sp>
+      <p:sp>
+        <p:nvSpPr>
+          <p:cNvPr id="23" name="TextBox 22"/>
+          <p:cNvSpPr txBox="1"/>
+          <p:nvPr/>
+        </p:nvSpPr>
+        <p:spPr>
+          <a:xfrm>
+            <a:off x="7132320" y="4800600"/>
+            <a:ext cx="4114800" cy="868680"/>
+          </a:xfrm>
+          <a:prstGeom prst="rect">
+            <a:avLst/>
+          </a:prstGeom>
+          <a:noFill/>
+        </p:spPr>
+        <p:txBody>
+          <a:bodyPr wrap="square">
+            <a:spAutoFit/>
+          </a:bodyPr>
+          <a:lstStyle/>
+          <a:p>
+            <a:r>
+              <a:rPr sz="1400" b="0" i="0">
+                <a:solidFill>
+                  <a:srgbClr val="1B2330"/>
+                </a:solidFill>
+                <a:latin typeface="Montserrat"/>
+              </a:rPr>
+              <a:t>Cada cinco años</a:t>
+            </a:r>
+          </a:p>
+        </p:txBody>
+      </p:sp>
+    </p:spTree>
+  </p:cSld>
+  <p:clrMapOvr>
+    <a:masterClrMapping/>
+  </p:clrMapOvr>
+  <mc:AlternateContent xmlns:mc="http://schemas.openxmlformats.org/markup-compatibility/2006">
+    <mc:Choice xmlns:p14="http://schemas.microsoft.com/office/powerpoint/2010/main" Requires="p14">
+      <p:transition spd="med" p14:dur="700">
+        <p14:cube dir="r"/>
+      </p:transition>
+    </mc:Choice>
+    <mc:Fallback>
+      <p:transition spd="med">
+        <p:push dir="r"/>
+      </p:transition>
+    </mc:Fallback>
+  </mc:AlternateContent>
+</p:sld>
+</file>
+
+<file path=ppt/slides/slide21.xml><?xml version="1.0" encoding="utf-8"?>
+<p:sld xmlns:a="http://schemas.openxmlformats.org/drawingml/2006/main" xmlns:p="http://schemas.openxmlformats.org/presentationml/2006/main" xmlns:r="http://schemas.openxmlformats.org/officeDocument/2006/relationships">
+  <p:cSld>
+    <p:spTree>
+      <p:nvGrpSpPr>
+        <p:cNvPr id="1" name=""/>
+        <p:cNvGrpSpPr/>
+        <p:nvPr/>
+      </p:nvGrpSpPr>
+      <p:grpSpPr/>
+      <p:sp>
+        <p:nvSpPr>
+          <p:cNvPr id="2" name="Rectangle 1"/>
+          <p:cNvSpPr/>
+          <p:nvPr/>
+        </p:nvSpPr>
+        <p:spPr>
+          <a:xfrm>
+            <a:off x="0" y="0"/>
+            <a:ext cx="12191695" cy="6858000"/>
+          </a:xfrm>
+          <a:prstGeom prst="rect">
+            <a:avLst/>
+          </a:prstGeom>
+          <a:solidFill>
+            <a:srgbClr val="FFFFFF"/>
+          </a:solidFill>
+          <a:ln>
+            <a:noFill/>
+          </a:ln>
+          <a:effectLst/>
+        </p:spPr>
+        <p:style>
+          <a:lnRef idx="1">
+            <a:schemeClr val="accent1"/>
+          </a:lnRef>
+          <a:fillRef idx="3">
+            <a:schemeClr val="accent1"/>
+          </a:fillRef>
+          <a:effectRef idx="2">
+            <a:schemeClr val="accent1"/>
+          </a:effectRef>
+          <a:fontRef idx="minor">
+            <a:schemeClr val="lt1"/>
+          </a:fontRef>
+        </p:style>
+        <p:txBody>
+          <a:bodyPr rtlCol="0" anchor="ctr"/>
+          <a:lstStyle/>
+          <a:p>
+            <a:pPr algn="ctr"/>
+          </a:p>
+        </p:txBody>
+      </p:sp>
+      <p:sp>
+        <p:nvSpPr>
+          <p:cNvPr id="3" name="TextBox 2"/>
+          <p:cNvSpPr txBox="1"/>
+          <p:nvPr/>
+        </p:nvSpPr>
+        <p:spPr>
+          <a:xfrm>
+            <a:off x="10607040" y="320040"/>
+            <a:ext cx="1371600" cy="365760"/>
+          </a:xfrm>
+          <a:prstGeom prst="rect">
+            <a:avLst/>
+          </a:prstGeom>
+          <a:noFill/>
+        </p:spPr>
+        <p:txBody>
+          <a:bodyPr wrap="square">
+            <a:spAutoFit/>
+          </a:bodyPr>
+          <a:lstStyle/>
+          <a:p>
+            <a:pPr algn="r"/>
+            <a:r>
+              <a:rPr sz="1000" b="1" i="0">
+                <a:solidFill>
+                  <a:srgbClr val="64748B"/>
+                </a:solidFill>
+                <a:latin typeface="Montserrat"/>
+              </a:rPr>
+              <a:t>021 / 024</a:t>
+            </a:r>
+          </a:p>
+        </p:txBody>
+      </p:sp>
+      <p:sp>
+        <p:nvSpPr>
+          <p:cNvPr id="4" name="TextBox 3"/>
+          <p:cNvSpPr txBox="1"/>
+          <p:nvPr/>
+        </p:nvSpPr>
+        <p:spPr>
+          <a:xfrm>
+            <a:off x="457200" y="6419088"/>
+            <a:ext cx="8229600" cy="365760"/>
+          </a:xfrm>
+          <a:prstGeom prst="rect">
+            <a:avLst/>
+          </a:prstGeom>
+          <a:noFill/>
+        </p:spPr>
+        <p:txBody>
+          <a:bodyPr wrap="square">
+            <a:spAutoFit/>
+          </a:bodyPr>
+          <a:lstStyle/>
+          <a:p>
+            <a:r>
+              <a:rPr sz="900" b="0" i="0">
+                <a:solidFill>
+                  <a:srgbClr val="64748B"/>
+                </a:solidFill>
+                <a:latin typeface="Montserrat"/>
+              </a:rPr>
+              <a:t>Curso Gas B · Tema 16 · UNE 60670-11/12/13</a:t>
+            </a:r>
+          </a:p>
+        </p:txBody>
+      </p:sp>
+      <p:sp>
+        <p:nvSpPr>
+          <p:cNvPr id="5" name="Rectangle 4"/>
+          <p:cNvSpPr/>
+          <p:nvPr/>
+        </p:nvSpPr>
+        <p:spPr>
+          <a:xfrm>
+            <a:off x="0" y="0"/>
+            <a:ext cx="12191695" cy="1143000"/>
+          </a:xfrm>
+          <a:prstGeom prst="rect">
+            <a:avLst/>
+          </a:prstGeom>
+          <a:solidFill>
+            <a:srgbClr val="1E8E4B"/>
+          </a:solidFill>
+          <a:ln>
+            <a:noFill/>
+          </a:ln>
+          <a:effectLst/>
+        </p:spPr>
+        <p:style>
+          <a:lnRef idx="1">
+            <a:schemeClr val="accent1"/>
+          </a:lnRef>
+          <a:fillRef idx="3">
+            <a:schemeClr val="accent1"/>
+          </a:fillRef>
+          <a:effectRef idx="2">
+            <a:schemeClr val="accent1"/>
+          </a:effectRef>
+          <a:fontRef idx="minor">
+            <a:schemeClr val="lt1"/>
+          </a:fontRef>
+        </p:style>
+        <p:txBody>
+          <a:bodyPr rtlCol="0" anchor="ctr"/>
+          <a:lstStyle/>
+          <a:p>
+            <a:pPr algn="ctr"/>
+          </a:p>
+        </p:txBody>
+      </p:sp>
+      <p:sp>
+        <p:nvSpPr>
+          <p:cNvPr id="6" name="TextBox 5"/>
+          <p:cNvSpPr txBox="1"/>
+          <p:nvPr/>
+        </p:nvSpPr>
+        <p:spPr>
+          <a:xfrm>
+            <a:off x="822960" y="274320"/>
+            <a:ext cx="10515600" cy="640080"/>
+          </a:xfrm>
+          <a:prstGeom prst="rect">
+            <a:avLst/>
+          </a:prstGeom>
+          <a:noFill/>
+        </p:spPr>
+        <p:txBody>
+          <a:bodyPr wrap="square">
+            <a:spAutoFit/>
+          </a:bodyPr>
+          <a:lstStyle/>
+          <a:p>
+            <a:r>
+              <a:rPr sz="2400" b="1" i="0">
+                <a:solidFill>
+                  <a:srgbClr val="FFFFFF"/>
+                </a:solidFill>
+                <a:latin typeface="Montserrat"/>
+              </a:rPr>
+              <a:t>✔  RESPUESTA:  C</a:t>
+            </a:r>
+          </a:p>
+        </p:txBody>
+      </p:sp>
+      <p:sp>
+        <p:nvSpPr>
+          <p:cNvPr id="7" name="TextBox 6"/>
+          <p:cNvSpPr txBox="1"/>
+          <p:nvPr/>
+        </p:nvSpPr>
+        <p:spPr>
+          <a:xfrm>
+            <a:off x="822960" y="1417320"/>
+            <a:ext cx="10515600" cy="914400"/>
+          </a:xfrm>
+          <a:prstGeom prst="rect">
+            <a:avLst/>
+          </a:prstGeom>
+          <a:noFill/>
+        </p:spPr>
+        <p:txBody>
+          <a:bodyPr wrap="square">
+            <a:spAutoFit/>
+          </a:bodyPr>
+          <a:lstStyle/>
+          <a:p>
+            <a:r>
+              <a:rPr sz="1800" b="1" i="0">
+                <a:solidFill>
+                  <a:srgbClr val="64748B"/>
+                </a:solidFill>
+                <a:latin typeface="Montserrat"/>
+              </a:rPr>
+              <a:t>¿Cada cuánto tiempo, como máximo, hay que calibrar el analizador de combustión?</a:t>
+            </a:r>
+          </a:p>
+        </p:txBody>
+      </p:sp>
+      <p:sp>
+        <p:nvSpPr>
+          <p:cNvPr id="8" name="Rounded Rectangle 7"/>
+          <p:cNvSpPr/>
+          <p:nvPr/>
+        </p:nvSpPr>
+        <p:spPr>
+          <a:xfrm>
+            <a:off x="822960" y="2514600"/>
+            <a:ext cx="10515600" cy="914400"/>
+          </a:xfrm>
+          <a:prstGeom prst="roundRect">
+            <a:avLst/>
+          </a:prstGeom>
+          <a:solidFill>
+            <a:srgbClr val="E9F6EE"/>
+          </a:solidFill>
+          <a:ln w="12700">
+            <a:solidFill>
+              <a:srgbClr val="1E8E4B"/>
+            </a:solidFill>
+          </a:ln>
+          <a:effectLst/>
+        </p:spPr>
+        <p:style>
+          <a:lnRef idx="1">
+            <a:schemeClr val="accent1"/>
+          </a:lnRef>
+          <a:fillRef idx="3">
+            <a:schemeClr val="accent1"/>
+          </a:fillRef>
+          <a:effectRef idx="2">
+            <a:schemeClr val="accent1"/>
+          </a:effectRef>
+          <a:fontRef idx="minor">
+            <a:schemeClr val="lt1"/>
+          </a:fontRef>
+        </p:style>
+        <p:txBody>
+          <a:bodyPr rtlCol="0" anchor="ctr"/>
+          <a:lstStyle/>
+          <a:p>
+            <a:pPr algn="ctr"/>
+          </a:p>
+        </p:txBody>
+      </p:sp>
+      <p:sp>
+        <p:nvSpPr>
+          <p:cNvPr id="9" name="TextBox 8"/>
+          <p:cNvSpPr txBox="1"/>
+          <p:nvPr/>
+        </p:nvSpPr>
+        <p:spPr>
+          <a:xfrm>
+            <a:off x="1097280" y="2697480"/>
+            <a:ext cx="10058400" cy="640080"/>
+          </a:xfrm>
+          <a:prstGeom prst="rect">
+            <a:avLst/>
+          </a:prstGeom>
+          <a:noFill/>
+        </p:spPr>
+        <p:txBody>
+          <a:bodyPr wrap="square">
+            <a:spAutoFit/>
+          </a:bodyPr>
+          <a:lstStyle/>
+          <a:p>
+            <a:r>
+              <a:rPr sz="1800" b="1" i="0">
+                <a:solidFill>
+                  <a:srgbClr val="1E8E4B"/>
+                </a:solidFill>
+                <a:latin typeface="Montserrat"/>
+              </a:rPr>
+              <a:t>C.  </a:t>
+            </a:r>
+            <a:r>
+              <a:rPr sz="1800" b="1" i="0">
+                <a:solidFill>
+                  <a:srgbClr val="1E2761"/>
+                </a:solidFill>
+                <a:latin typeface="Montserrat"/>
+              </a:rPr>
+              <a:t>Cada dieciocho meses</a:t>
+            </a:r>
+          </a:p>
+        </p:txBody>
+      </p:sp>
+      <p:sp>
+        <p:nvSpPr>
+          <p:cNvPr id="10" name="TextBox 9"/>
+          <p:cNvSpPr txBox="1"/>
+          <p:nvPr/>
+        </p:nvSpPr>
+        <p:spPr>
+          <a:xfrm>
+            <a:off x="822960" y="3749039"/>
+            <a:ext cx="10515600" cy="2194560"/>
+          </a:xfrm>
+          <a:prstGeom prst="rect">
+            <a:avLst/>
+          </a:prstGeom>
+          <a:noFill/>
+        </p:spPr>
+        <p:txBody>
+          <a:bodyPr wrap="square">
+            <a:spAutoFit/>
+          </a:bodyPr>
+          <a:lstStyle/>
+          <a:p>
+            <a:r>
+              <a:rPr sz="1500" b="1" i="0">
+                <a:solidFill>
+                  <a:srgbClr val="E8801A"/>
+                </a:solidFill>
+                <a:latin typeface="Montserrat"/>
+              </a:rPr>
+              <a:t>Por qué:  </a:t>
+            </a:r>
+            <a:r>
+              <a:rPr sz="1500" b="0" i="0">
+                <a:solidFill>
+                  <a:srgbClr val="1B2330"/>
+                </a:solidFill>
+                <a:latin typeface="Montserrat"/>
+              </a:rPr>
+              <a:t>El analizador se comprueba, por el fabricante o laboratorio acreditado, en periodos nunca superiores a dieciocho meses.</a:t>
+            </a:r>
+          </a:p>
+        </p:txBody>
+      </p:sp>
+    </p:spTree>
+  </p:cSld>
+  <p:clrMapOvr>
+    <a:masterClrMapping/>
+  </p:clrMapOvr>
+  <mc:AlternateContent xmlns:mc="http://schemas.openxmlformats.org/markup-compatibility/2006">
+    <mc:Choice xmlns:p14="http://schemas.microsoft.com/office/powerpoint/2010/main" Requires="p14">
+      <p:transition spd="med" p14:dur="700">
+        <p14:cube dir="l"/>
+      </p:transition>
+    </mc:Choice>
+    <mc:Fallback>
+      <p:transition spd="med">
+        <p:push dir="l"/>
+      </p:transition>
+    </mc:Fallback>
+  </mc:AlternateContent>
+</p:sld>
+</file>
+
+<file path=ppt/slides/slide22.xml><?xml version="1.0" encoding="utf-8"?>
+<p:sld xmlns:a="http://schemas.openxmlformats.org/drawingml/2006/main" xmlns:p="http://schemas.openxmlformats.org/presentationml/2006/main" xmlns:r="http://schemas.openxmlformats.org/officeDocument/2006/relationships">
+  <p:cSld>
+    <p:spTree>
+      <p:nvGrpSpPr>
+        <p:cNvPr id="1" name=""/>
+        <p:cNvGrpSpPr/>
+        <p:nvPr/>
+      </p:nvGrpSpPr>
+      <p:grpSpPr/>
+      <p:sp>
+        <p:nvSpPr>
+          <p:cNvPr id="2" name="Rectangle 1"/>
+          <p:cNvSpPr/>
+          <p:nvPr/>
+        </p:nvSpPr>
+        <p:spPr>
+          <a:xfrm>
+            <a:off x="0" y="0"/>
+            <a:ext cx="12191695" cy="6858000"/>
+          </a:xfrm>
+          <a:prstGeom prst="rect">
+            <a:avLst/>
+          </a:prstGeom>
+          <a:solidFill>
+            <a:srgbClr val="FFFFFF"/>
+          </a:solidFill>
+          <a:ln>
+            <a:noFill/>
+          </a:ln>
+          <a:effectLst/>
+        </p:spPr>
+        <p:style>
+          <a:lnRef idx="1">
+            <a:schemeClr val="accent1"/>
+          </a:lnRef>
+          <a:fillRef idx="3">
+            <a:schemeClr val="accent1"/>
+          </a:fillRef>
+          <a:effectRef idx="2">
+            <a:schemeClr val="accent1"/>
+          </a:effectRef>
+          <a:fontRef idx="minor">
+            <a:schemeClr val="lt1"/>
+          </a:fontRef>
+        </p:style>
+        <p:txBody>
+          <a:bodyPr rtlCol="0" anchor="ctr"/>
+          <a:lstStyle/>
+          <a:p>
+            <a:pPr algn="ctr"/>
+          </a:p>
+        </p:txBody>
+      </p:sp>
+      <p:sp>
+        <p:nvSpPr>
+          <p:cNvPr id="3" name="TextBox 2"/>
+          <p:cNvSpPr txBox="1"/>
+          <p:nvPr/>
+        </p:nvSpPr>
+        <p:spPr>
+          <a:xfrm>
+            <a:off x="10607040" y="320040"/>
+            <a:ext cx="1371600" cy="365760"/>
+          </a:xfrm>
+          <a:prstGeom prst="rect">
+            <a:avLst/>
+          </a:prstGeom>
+          <a:noFill/>
+        </p:spPr>
+        <p:txBody>
+          <a:bodyPr wrap="square">
+            <a:spAutoFit/>
+          </a:bodyPr>
+          <a:lstStyle/>
+          <a:p>
+            <a:pPr algn="r"/>
+            <a:r>
+              <a:rPr sz="1000" b="1" i="0">
+                <a:solidFill>
+                  <a:srgbClr val="64748B"/>
+                </a:solidFill>
+                <a:latin typeface="Montserrat"/>
+              </a:rPr>
+              <a:t>022 / 024</a:t>
+            </a:r>
+          </a:p>
+        </p:txBody>
+      </p:sp>
+      <p:sp>
+        <p:nvSpPr>
+          <p:cNvPr id="4" name="TextBox 3"/>
+          <p:cNvSpPr txBox="1"/>
+          <p:nvPr/>
+        </p:nvSpPr>
+        <p:spPr>
+          <a:xfrm>
+            <a:off x="457200" y="6419088"/>
+            <a:ext cx="8229600" cy="365760"/>
+          </a:xfrm>
+          <a:prstGeom prst="rect">
+            <a:avLst/>
+          </a:prstGeom>
+          <a:noFill/>
+        </p:spPr>
+        <p:txBody>
+          <a:bodyPr wrap="square">
+            <a:spAutoFit/>
+          </a:bodyPr>
+          <a:lstStyle/>
+          <a:p>
+            <a:r>
+              <a:rPr sz="900" b="0" i="0">
+                <a:solidFill>
+                  <a:srgbClr val="64748B"/>
+                </a:solidFill>
+                <a:latin typeface="Montserrat"/>
+              </a:rPr>
+              <a:t>Curso Gas B · Tema 16 · UNE 60670-11/12/13</a:t>
+            </a:r>
+          </a:p>
+        </p:txBody>
+      </p:sp>
+      <p:sp>
+        <p:nvSpPr>
+          <p:cNvPr id="5" name="TextBox 4"/>
+          <p:cNvSpPr txBox="1"/>
+          <p:nvPr/>
+        </p:nvSpPr>
+        <p:spPr>
+          <a:xfrm>
+            <a:off x="822960" y="457200"/>
+            <a:ext cx="10058400" cy="365760"/>
+          </a:xfrm>
+          <a:prstGeom prst="rect">
+            <a:avLst/>
+          </a:prstGeom>
+          <a:noFill/>
+        </p:spPr>
+        <p:txBody>
+          <a:bodyPr wrap="square">
+            <a:spAutoFit/>
+          </a:bodyPr>
+          <a:lstStyle/>
+          <a:p>
+            <a:r>
+              <a:rPr sz="1300" b="1" i="0">
+                <a:solidFill>
+                  <a:srgbClr val="E8801A"/>
+                </a:solidFill>
+                <a:latin typeface="Montserrat"/>
+              </a:rPr>
+              <a:t>PARTE 13 · ANEXO B</a:t>
+            </a:r>
+          </a:p>
+        </p:txBody>
+      </p:sp>
+      <p:sp>
+        <p:nvSpPr>
+          <p:cNvPr id="6" name="TextBox 5"/>
+          <p:cNvSpPr txBox="1"/>
+          <p:nvPr/>
+        </p:nvSpPr>
+        <p:spPr>
+          <a:xfrm>
+            <a:off x="822960" y="868680"/>
+            <a:ext cx="10515600" cy="914400"/>
+          </a:xfrm>
+          <a:prstGeom prst="rect">
+            <a:avLst/>
+          </a:prstGeom>
+          <a:noFill/>
+        </p:spPr>
+        <p:txBody>
+          <a:bodyPr wrap="square">
+            <a:spAutoFit/>
+          </a:bodyPr>
+          <a:lstStyle/>
+          <a:p>
+            <a:r>
+              <a:rPr sz="2800" b="1" i="0">
+                <a:solidFill>
+                  <a:srgbClr val="1E2761"/>
+                </a:solidFill>
+                <a:latin typeface="Montserrat"/>
+              </a:rPr>
+              <a:t>Aparatos de radiación tipo A (naves)</a:t>
+            </a:r>
+          </a:p>
+        </p:txBody>
+      </p:sp>
+      <p:sp>
+        <p:nvSpPr>
+          <p:cNvPr id="7" name="Rectangle 6"/>
+          <p:cNvSpPr/>
+          <p:nvPr/>
+        </p:nvSpPr>
+        <p:spPr>
+          <a:xfrm>
+            <a:off x="868680" y="1627632"/>
+            <a:ext cx="2011680" cy="73152"/>
+          </a:xfrm>
+          <a:prstGeom prst="rect">
+            <a:avLst/>
+          </a:prstGeom>
+          <a:solidFill>
+            <a:srgbClr val="E8801A"/>
+          </a:solidFill>
+          <a:ln>
+            <a:noFill/>
+          </a:ln>
+          <a:effectLst/>
+        </p:spPr>
+        <p:style>
+          <a:lnRef idx="1">
+            <a:schemeClr val="accent1"/>
+          </a:lnRef>
+          <a:fillRef idx="3">
+            <a:schemeClr val="accent1"/>
+          </a:fillRef>
+          <a:effectRef idx="2">
+            <a:schemeClr val="accent1"/>
+          </a:effectRef>
+          <a:fontRef idx="minor">
+            <a:schemeClr val="lt1"/>
+          </a:fontRef>
+        </p:style>
+        <p:txBody>
+          <a:bodyPr rtlCol="0" anchor="ctr"/>
+          <a:lstStyle/>
+          <a:p>
+            <a:pPr algn="ctr"/>
+          </a:p>
+        </p:txBody>
+      </p:sp>
+      <p:sp>
+        <p:nvSpPr>
+          <p:cNvPr id="8" name="TextBox 7"/>
+          <p:cNvSpPr txBox="1"/>
+          <p:nvPr/>
+        </p:nvSpPr>
+        <p:spPr>
+          <a:xfrm>
+            <a:off x="6355080" y="1965960"/>
+            <a:ext cx="5029200" cy="4206240"/>
+          </a:xfrm>
+          <a:prstGeom prst="rect">
+            <a:avLst/>
+          </a:prstGeom>
+          <a:noFill/>
+        </p:spPr>
+        <p:txBody>
+          <a:bodyPr wrap="square">
+            <a:spAutoFit/>
+          </a:bodyPr>
+          <a:lstStyle/>
+          <a:p>
+            <a:pPr>
+              <a:spcAft>
+                <a:spcPts val="1100"/>
+              </a:spcAft>
+            </a:pPr>
+            <a:r>
+              <a:rPr sz="1600" b="1" i="0">
+                <a:solidFill>
+                  <a:srgbClr val="E8801A"/>
+                </a:solidFill>
+                <a:latin typeface="Montserrat"/>
+              </a:rPr>
+              <a:t>▸  </a:t>
+            </a:r>
+            <a:r>
+              <a:rPr sz="1600" b="0" i="0">
+                <a:solidFill>
+                  <a:srgbClr val="1B2330"/>
+                </a:solidFill>
+                <a:latin typeface="Montserrat"/>
+              </a:rPr>
+              <a:t>Sin conducto: se mide el CO del aire</a:t>
+            </a:r>
+          </a:p>
+          <a:p>
+            <a:pPr>
+              <a:spcAft>
+                <a:spcPts val="1100"/>
+              </a:spcAft>
+            </a:pPr>
+            <a:r>
+              <a:rPr sz="1600" b="1" i="0">
+                <a:solidFill>
+                  <a:srgbClr val="E8801A"/>
+                </a:solidFill>
+                <a:latin typeface="Montserrat"/>
+              </a:rPr>
+              <a:t>▸  </a:t>
+            </a:r>
+            <a:r>
+              <a:rPr sz="1600" b="0" i="0">
+                <a:solidFill>
+                  <a:srgbClr val="1B2330"/>
+                </a:solidFill>
+                <a:latin typeface="Montserrat"/>
+              </a:rPr>
+              <a:t>Sonda a 1,80 m, al menos cada 25 m²</a:t>
+            </a:r>
+          </a:p>
+          <a:p>
+            <a:pPr>
+              <a:spcAft>
+                <a:spcPts val="1100"/>
+              </a:spcAft>
+            </a:pPr>
+            <a:r>
+              <a:rPr sz="1600" b="1" i="0">
+                <a:solidFill>
+                  <a:srgbClr val="E8801A"/>
+                </a:solidFill>
+                <a:latin typeface="Montserrat"/>
+              </a:rPr>
+              <a:t>▸  </a:t>
+            </a:r>
+            <a:r>
+              <a:rPr sz="1600" b="0" i="0">
+                <a:solidFill>
+                  <a:srgbClr val="1B2330"/>
+                </a:solidFill>
+                <a:latin typeface="Montserrat"/>
+              </a:rPr>
+              <a:t>15 minutos calentando antes de medir</a:t>
+            </a:r>
+          </a:p>
+          <a:p>
+            <a:pPr>
+              <a:spcAft>
+                <a:spcPts val="1100"/>
+              </a:spcAft>
+            </a:pPr>
+            <a:r>
+              <a:rPr sz="1600" b="1" i="0">
+                <a:solidFill>
+                  <a:srgbClr val="E8801A"/>
+                </a:solidFill>
+                <a:latin typeface="Montserrat"/>
+              </a:rPr>
+              <a:t>▸  </a:t>
+            </a:r>
+            <a:r>
+              <a:rPr sz="1600" b="0" i="0">
+                <a:solidFill>
+                  <a:srgbClr val="1B2330"/>
+                </a:solidFill>
+                <a:latin typeface="Montserrat"/>
+              </a:rPr>
+              <a:t>5 minutos en cada punto</a:t>
+            </a:r>
+          </a:p>
+        </p:txBody>
+      </p:sp>
+      <p:sp>
+        <p:nvSpPr>
+          <p:cNvPr id="9" name="imgph" descr="IMGQ:radiant heater suspended warehouse ceiling"/>
+          <p:cNvSpPr/>
+          <p:nvPr/>
+        </p:nvSpPr>
+        <p:spPr>
+          <a:xfrm>
+            <a:off x="822960" y="1965960"/>
+            <a:ext cx="5303520" cy="4572000"/>
+          </a:xfrm>
+          <a:prstGeom prst="roundRect">
+            <a:avLst/>
+          </a:prstGeom>
+          <a:solidFill>
+            <a:srgbClr val="F3F6FB"/>
+          </a:solidFill>
+          <a:ln w="12700">
+            <a:solidFill>
+              <a:srgbClr val="C7D2E6"/>
+            </a:solidFill>
+          </a:ln>
+          <a:effectLst/>
+        </p:spPr>
+        <p:style>
+          <a:lnRef idx="1">
+            <a:schemeClr val="accent1"/>
+          </a:lnRef>
+          <a:fillRef idx="3">
+            <a:schemeClr val="accent1"/>
+          </a:fillRef>
+          <a:effectRef idx="2">
+            <a:schemeClr val="accent1"/>
+          </a:effectRef>
+          <a:fontRef idx="minor">
+            <a:schemeClr val="lt1"/>
+          </a:fontRef>
+        </p:style>
+        <p:txBody>
+          <a:bodyPr rtlCol="0" anchor="ctr"/>
+          <a:lstStyle/>
+          <a:p>
+            <a:pPr algn="ctr"/>
+          </a:p>
+        </p:txBody>
+      </p:sp>
+      <p:sp>
+        <p:nvSpPr>
+          <p:cNvPr id="10" name="TextBox 9"/>
+          <p:cNvSpPr txBox="1"/>
+          <p:nvPr/>
+        </p:nvSpPr>
+        <p:spPr>
+          <a:xfrm>
+            <a:off x="1097280" y="3611880"/>
+            <a:ext cx="4754880" cy="1280160"/>
+          </a:xfrm>
+          <a:prstGeom prst="rect">
+            <a:avLst/>
+          </a:prstGeom>
+          <a:noFill/>
+        </p:spPr>
+        <p:txBody>
+          <a:bodyPr wrap="square">
+            <a:spAutoFit/>
+          </a:bodyPr>
+          <a:lstStyle/>
+          <a:p>
+            <a:pPr algn="ctr"/>
+            <a:r>
+              <a:rPr sz="1400" b="1" i="0">
+                <a:solidFill>
+                  <a:srgbClr val="64748B"/>
+                </a:solidFill>
+                <a:latin typeface="Montserrat"/>
+              </a:rPr>
+              <a:t>IMAGEN</a:t>
+            </a:r>
+          </a:p>
+          <a:p>
+            <a:pPr algn="ctr"/>
+            <a:r>
+              <a:rPr sz="1100" b="0" i="1">
+                <a:solidFill>
+                  <a:srgbClr val="64748B"/>
+                </a:solidFill>
+                <a:latin typeface="Montserrat"/>
+              </a:rPr>
+              <a:t>radiant heater suspended warehouse ceiling</a:t>
+            </a:r>
+          </a:p>
+        </p:txBody>
+      </p:sp>
+    </p:spTree>
+  </p:cSld>
+  <p:clrMapOvr>
+    <a:masterClrMapping/>
+  </p:clrMapOvr>
+  <mc:AlternateContent xmlns:mc="http://schemas.openxmlformats.org/markup-compatibility/2006">
+    <mc:Choice xmlns:p14="http://schemas.microsoft.com/office/powerpoint/2010/main" Requires="p14">
+      <p:transition spd="med" p14:dur="700">
+        <p14:cube dir="r"/>
+      </p:transition>
+    </mc:Choice>
+    <mc:Fallback>
+      <p:transition spd="med">
+        <p:push dir="r"/>
+      </p:transition>
+    </mc:Fallback>
+  </mc:AlternateContent>
+</p:sld>
+</file>
+
+<file path=ppt/slides/slide23.xml><?xml version="1.0" encoding="utf-8"?>
+<p:sld xmlns:a="http://schemas.openxmlformats.org/drawingml/2006/main" xmlns:p="http://schemas.openxmlformats.org/presentationml/2006/main" xmlns:r="http://schemas.openxmlformats.org/officeDocument/2006/relationships">
+  <p:cSld>
+    <p:spTree>
+      <p:nvGrpSpPr>
+        <p:cNvPr id="1" name=""/>
+        <p:cNvGrpSpPr/>
+        <p:nvPr/>
+      </p:nvGrpSpPr>
+      <p:grpSpPr/>
+      <p:sp>
+        <p:nvSpPr>
+          <p:cNvPr id="2" name="Rectangle 1"/>
+          <p:cNvSpPr/>
+          <p:nvPr/>
+        </p:nvSpPr>
+        <p:spPr>
+          <a:xfrm>
+            <a:off x="0" y="0"/>
+            <a:ext cx="12191695" cy="6858000"/>
+          </a:xfrm>
+          <a:prstGeom prst="rect">
+            <a:avLst/>
+          </a:prstGeom>
+          <a:solidFill>
+            <a:srgbClr val="FFFFFF"/>
+          </a:solidFill>
+          <a:ln>
+            <a:noFill/>
+          </a:ln>
+          <a:effectLst/>
+        </p:spPr>
+        <p:style>
+          <a:lnRef idx="1">
+            <a:schemeClr val="accent1"/>
+          </a:lnRef>
+          <a:fillRef idx="3">
+            <a:schemeClr val="accent1"/>
+          </a:fillRef>
+          <a:effectRef idx="2">
+            <a:schemeClr val="accent1"/>
+          </a:effectRef>
+          <a:fontRef idx="minor">
+            <a:schemeClr val="lt1"/>
+          </a:fontRef>
+        </p:style>
+        <p:txBody>
+          <a:bodyPr rtlCol="0" anchor="ctr"/>
+          <a:lstStyle/>
+          <a:p>
+            <a:pPr algn="ctr"/>
+          </a:p>
+        </p:txBody>
+      </p:sp>
+      <p:sp>
+        <p:nvSpPr>
+          <p:cNvPr id="3" name="TextBox 2"/>
+          <p:cNvSpPr txBox="1"/>
+          <p:nvPr/>
+        </p:nvSpPr>
+        <p:spPr>
+          <a:xfrm>
+            <a:off x="10607040" y="320040"/>
+            <a:ext cx="1371600" cy="365760"/>
+          </a:xfrm>
+          <a:prstGeom prst="rect">
+            <a:avLst/>
+          </a:prstGeom>
+          <a:noFill/>
+        </p:spPr>
+        <p:txBody>
+          <a:bodyPr wrap="square">
+            <a:spAutoFit/>
+          </a:bodyPr>
+          <a:lstStyle/>
+          <a:p>
+            <a:pPr algn="r"/>
+            <a:r>
+              <a:rPr sz="1000" b="1" i="0">
+                <a:solidFill>
+                  <a:srgbClr val="64748B"/>
+                </a:solidFill>
+                <a:latin typeface="Montserrat"/>
+              </a:rPr>
+              <a:t>023 / 024</a:t>
+            </a:r>
+          </a:p>
+        </p:txBody>
+      </p:sp>
+      <p:sp>
+        <p:nvSpPr>
+          <p:cNvPr id="4" name="TextBox 3"/>
+          <p:cNvSpPr txBox="1"/>
+          <p:nvPr/>
+        </p:nvSpPr>
+        <p:spPr>
+          <a:xfrm>
+            <a:off x="457200" y="6419088"/>
+            <a:ext cx="8229600" cy="365760"/>
+          </a:xfrm>
+          <a:prstGeom prst="rect">
+            <a:avLst/>
+          </a:prstGeom>
+          <a:noFill/>
+        </p:spPr>
+        <p:txBody>
+          <a:bodyPr wrap="square">
+            <a:spAutoFit/>
+          </a:bodyPr>
+          <a:lstStyle/>
+          <a:p>
+            <a:r>
+              <a:rPr sz="900" b="0" i="0">
+                <a:solidFill>
+                  <a:srgbClr val="64748B"/>
+                </a:solidFill>
+                <a:latin typeface="Montserrat"/>
+              </a:rPr>
+              <a:t>Curso Gas B · Tema 16 · UNE 60670-11/12/13</a:t>
+            </a:r>
+          </a:p>
+        </p:txBody>
+      </p:sp>
+      <p:sp>
+        <p:nvSpPr>
+          <p:cNvPr id="5" name="TextBox 4"/>
+          <p:cNvSpPr txBox="1"/>
+          <p:nvPr/>
+        </p:nvSpPr>
+        <p:spPr>
+          <a:xfrm>
+            <a:off x="822960" y="457200"/>
+            <a:ext cx="10058400" cy="365760"/>
+          </a:xfrm>
+          <a:prstGeom prst="rect">
+            <a:avLst/>
+          </a:prstGeom>
+          <a:noFill/>
+        </p:spPr>
+        <p:txBody>
+          <a:bodyPr wrap="square">
+            <a:spAutoFit/>
+          </a:bodyPr>
+          <a:lstStyle/>
+          <a:p>
+            <a:r>
+              <a:rPr sz="1300" b="1" i="0">
+                <a:solidFill>
+                  <a:srgbClr val="E8801A"/>
+                </a:solidFill>
+                <a:latin typeface="Montserrat"/>
+              </a:rPr>
+              <a:t>PARTE 13 · EL PAPELEO</a:t>
+            </a:r>
+          </a:p>
+        </p:txBody>
+      </p:sp>
+      <p:sp>
+        <p:nvSpPr>
+          <p:cNvPr id="6" name="TextBox 5"/>
+          <p:cNvSpPr txBox="1"/>
+          <p:nvPr/>
+        </p:nvSpPr>
+        <p:spPr>
+          <a:xfrm>
+            <a:off x="822960" y="868680"/>
+            <a:ext cx="10515600" cy="914400"/>
+          </a:xfrm>
+          <a:prstGeom prst="rect">
+            <a:avLst/>
+          </a:prstGeom>
+          <a:noFill/>
+        </p:spPr>
+        <p:txBody>
+          <a:bodyPr wrap="square">
+            <a:spAutoFit/>
+          </a:bodyPr>
+          <a:lstStyle/>
+          <a:p>
+            <a:r>
+              <a:rPr sz="2800" b="1" i="0">
+                <a:solidFill>
+                  <a:srgbClr val="1E2761"/>
+                </a:solidFill>
+                <a:latin typeface="Montserrat"/>
+              </a:rPr>
+              <a:t>Documentar, avisar y el caso de salas</a:t>
+            </a:r>
+          </a:p>
+        </p:txBody>
+      </p:sp>
+      <p:sp>
+        <p:nvSpPr>
+          <p:cNvPr id="7" name="Rectangle 6"/>
+          <p:cNvSpPr/>
+          <p:nvPr/>
+        </p:nvSpPr>
+        <p:spPr>
+          <a:xfrm>
+            <a:off x="868680" y="1627632"/>
+            <a:ext cx="2011680" cy="73152"/>
+          </a:xfrm>
+          <a:prstGeom prst="rect">
+            <a:avLst/>
+          </a:prstGeom>
+          <a:solidFill>
+            <a:srgbClr val="E8801A"/>
+          </a:solidFill>
+          <a:ln>
+            <a:noFill/>
+          </a:ln>
+          <a:effectLst/>
+        </p:spPr>
+        <p:style>
+          <a:lnRef idx="1">
+            <a:schemeClr val="accent1"/>
+          </a:lnRef>
+          <a:fillRef idx="3">
+            <a:schemeClr val="accent1"/>
+          </a:fillRef>
+          <a:effectRef idx="2">
+            <a:schemeClr val="accent1"/>
+          </a:effectRef>
+          <a:fontRef idx="minor">
+            <a:schemeClr val="lt1"/>
+          </a:fontRef>
+        </p:style>
+        <p:txBody>
+          <a:bodyPr rtlCol="0" anchor="ctr"/>
+          <a:lstStyle/>
+          <a:p>
+            <a:pPr algn="ctr"/>
+          </a:p>
+        </p:txBody>
+      </p:sp>
+      <p:sp>
+        <p:nvSpPr>
+          <p:cNvPr id="8" name="TextBox 7"/>
+          <p:cNvSpPr txBox="1"/>
+          <p:nvPr/>
+        </p:nvSpPr>
+        <p:spPr>
+          <a:xfrm>
+            <a:off x="822960" y="1965960"/>
+            <a:ext cx="5029200" cy="4206240"/>
+          </a:xfrm>
+          <a:prstGeom prst="rect">
+            <a:avLst/>
+          </a:prstGeom>
+          <a:noFill/>
+        </p:spPr>
+        <p:txBody>
+          <a:bodyPr wrap="square">
+            <a:spAutoFit/>
+          </a:bodyPr>
+          <a:lstStyle/>
+          <a:p>
+            <a:pPr>
+              <a:spcAft>
+                <a:spcPts val="1100"/>
+              </a:spcAft>
+            </a:pPr>
+            <a:r>
+              <a:rPr sz="1600" b="1" i="0">
+                <a:solidFill>
+                  <a:srgbClr val="E8801A"/>
+                </a:solidFill>
+                <a:latin typeface="Montserrat"/>
+              </a:rPr>
+              <a:t>▸  </a:t>
+            </a:r>
+            <a:r>
+              <a:rPr sz="1600" b="0" i="0">
+                <a:solidFill>
+                  <a:srgbClr val="1B2330"/>
+                </a:solidFill>
+                <a:latin typeface="Montserrat"/>
+              </a:rPr>
+              <a:t>Favorable: certificado; con defectos: informe</a:t>
+            </a:r>
+          </a:p>
+          <a:p>
+            <a:pPr>
+              <a:spcAft>
+                <a:spcPts val="1100"/>
+              </a:spcAft>
+            </a:pPr>
+            <a:r>
+              <a:rPr sz="1600" b="1" i="0">
+                <a:solidFill>
+                  <a:srgbClr val="E8801A"/>
+                </a:solidFill>
+                <a:latin typeface="Montserrat"/>
+              </a:rPr>
+              <a:t>▸  </a:t>
+            </a:r>
+            <a:r>
+              <a:rPr sz="1600" b="0" i="0">
+                <a:solidFill>
+                  <a:srgbClr val="1B2330"/>
+                </a:solidFill>
+                <a:latin typeface="Montserrat"/>
+              </a:rPr>
+              <a:t>Al usuario; principales a la distribuidora</a:t>
+            </a:r>
+          </a:p>
+          <a:p>
+            <a:pPr>
+              <a:spcAft>
+                <a:spcPts val="1100"/>
+              </a:spcAft>
+            </a:pPr>
+            <a:r>
+              <a:rPr sz="1600" b="1" i="0">
+                <a:solidFill>
+                  <a:srgbClr val="E8801A"/>
+                </a:solidFill>
+                <a:latin typeface="Montserrat"/>
+              </a:rPr>
+              <a:t>▸  </a:t>
+            </a:r>
+            <a:r>
+              <a:rPr sz="1600" b="0" i="0">
+                <a:solidFill>
+                  <a:srgbClr val="1B2330"/>
+                </a:solidFill>
+                <a:latin typeface="Montserrat"/>
+              </a:rPr>
+              <a:t>AS-5: acreditar mantenimiento en salas &gt; 70 kW</a:t>
+            </a:r>
+          </a:p>
+        </p:txBody>
+      </p:sp>
+      <p:sp>
+        <p:nvSpPr>
+          <p:cNvPr id="9" name="imgph" descr="IMGQ:gas installer paperwork report boiler room"/>
+          <p:cNvSpPr/>
+          <p:nvPr/>
+        </p:nvSpPr>
+        <p:spPr>
+          <a:xfrm>
+            <a:off x="6080760" y="1965960"/>
+            <a:ext cx="5303520" cy="4572000"/>
+          </a:xfrm>
+          <a:prstGeom prst="roundRect">
+            <a:avLst/>
+          </a:prstGeom>
+          <a:solidFill>
+            <a:srgbClr val="F3F6FB"/>
+          </a:solidFill>
+          <a:ln w="12700">
+            <a:solidFill>
+              <a:srgbClr val="C7D2E6"/>
+            </a:solidFill>
+          </a:ln>
+          <a:effectLst/>
+        </p:spPr>
+        <p:style>
+          <a:lnRef idx="1">
+            <a:schemeClr val="accent1"/>
+          </a:lnRef>
+          <a:fillRef idx="3">
+            <a:schemeClr val="accent1"/>
+          </a:fillRef>
+          <a:effectRef idx="2">
+            <a:schemeClr val="accent1"/>
+          </a:effectRef>
+          <a:fontRef idx="minor">
+            <a:schemeClr val="lt1"/>
+          </a:fontRef>
+        </p:style>
+        <p:txBody>
+          <a:bodyPr rtlCol="0" anchor="ctr"/>
+          <a:lstStyle/>
+          <a:p>
+            <a:pPr algn="ctr"/>
+          </a:p>
+        </p:txBody>
+      </p:sp>
+      <p:sp>
+        <p:nvSpPr>
+          <p:cNvPr id="10" name="TextBox 9"/>
+          <p:cNvSpPr txBox="1"/>
+          <p:nvPr/>
+        </p:nvSpPr>
+        <p:spPr>
+          <a:xfrm>
+            <a:off x="6355080" y="3611880"/>
+            <a:ext cx="4754880" cy="1280160"/>
+          </a:xfrm>
+          <a:prstGeom prst="rect">
+            <a:avLst/>
+          </a:prstGeom>
+          <a:noFill/>
+        </p:spPr>
+        <p:txBody>
+          <a:bodyPr wrap="square">
+            <a:spAutoFit/>
+          </a:bodyPr>
+          <a:lstStyle/>
+          <a:p>
+            <a:pPr algn="ctr"/>
+            <a:r>
+              <a:rPr sz="1400" b="1" i="0">
+                <a:solidFill>
+                  <a:srgbClr val="64748B"/>
+                </a:solidFill>
+                <a:latin typeface="Montserrat"/>
+              </a:rPr>
+              <a:t>IMAGEN</a:t>
+            </a:r>
+          </a:p>
+          <a:p>
+            <a:pPr algn="ctr"/>
+            <a:r>
+              <a:rPr sz="1100" b="0" i="1">
+                <a:solidFill>
+                  <a:srgbClr val="64748B"/>
+                </a:solidFill>
+                <a:latin typeface="Montserrat"/>
+              </a:rPr>
+              <a:t>gas installer paperwork report boiler room</a:t>
+            </a:r>
+          </a:p>
+        </p:txBody>
+      </p:sp>
+    </p:spTree>
+  </p:cSld>
+  <p:clrMapOvr>
+    <a:masterClrMapping/>
+  </p:clrMapOvr>
+  <mc:AlternateContent xmlns:mc="http://schemas.openxmlformats.org/markup-compatibility/2006">
+    <mc:Choice xmlns:p14="http://schemas.microsoft.com/office/powerpoint/2010/main" Requires="p14">
+      <p:transition spd="med" p14:dur="700">
+        <p14:cube dir="l"/>
+      </p:transition>
+    </mc:Choice>
+    <mc:Fallback>
+      <p:transition spd="med">
+        <p:push dir="l"/>
+      </p:transition>
+    </mc:Fallback>
+  </mc:AlternateContent>
+</p:sld>
+</file>
+
+<file path=ppt/slides/slide24.xml><?xml version="1.0" encoding="utf-8"?>
+<p:sld xmlns:a="http://schemas.openxmlformats.org/drawingml/2006/main" xmlns:p="http://schemas.openxmlformats.org/presentationml/2006/main" xmlns:r="http://schemas.openxmlformats.org/officeDocument/2006/relationships">
+  <p:cSld>
+    <p:spTree>
+      <p:nvGrpSpPr>
+        <p:cNvPr id="1" name=""/>
+        <p:cNvGrpSpPr/>
+        <p:nvPr/>
+      </p:nvGrpSpPr>
+      <p:grpSpPr/>
+      <p:sp>
+        <p:nvSpPr>
+          <p:cNvPr id="2" name="Rectangle 1"/>
+          <p:cNvSpPr/>
+          <p:nvPr/>
+        </p:nvSpPr>
+        <p:spPr>
+          <a:xfrm>
+            <a:off x="0" y="0"/>
+            <a:ext cx="12191695" cy="6858000"/>
+          </a:xfrm>
+          <a:prstGeom prst="rect">
+            <a:avLst/>
+          </a:prstGeom>
+          <a:solidFill>
+            <a:srgbClr val="1E2761"/>
+          </a:solidFill>
+          <a:ln>
+            <a:noFill/>
+          </a:ln>
+          <a:effectLst/>
+        </p:spPr>
+        <p:style>
+          <a:lnRef idx="1">
+            <a:schemeClr val="accent1"/>
+          </a:lnRef>
+          <a:fillRef idx="3">
+            <a:schemeClr val="accent1"/>
+          </a:fillRef>
+          <a:effectRef idx="2">
+            <a:schemeClr val="accent1"/>
+          </a:effectRef>
+          <a:fontRef idx="minor">
+            <a:schemeClr val="lt1"/>
+          </a:fontRef>
+        </p:style>
+        <p:txBody>
+          <a:bodyPr rtlCol="0" anchor="ctr"/>
+          <a:lstStyle/>
+          <a:p>
+            <a:pPr algn="ctr"/>
+          </a:p>
+        </p:txBody>
+      </p:sp>
+      <p:sp>
+        <p:nvSpPr>
+          <p:cNvPr id="3" name="TextBox 2"/>
+          <p:cNvSpPr txBox="1"/>
+          <p:nvPr/>
+        </p:nvSpPr>
+        <p:spPr>
+          <a:xfrm>
+            <a:off x="822960" y="640080"/>
+            <a:ext cx="10515600" cy="457200"/>
+          </a:xfrm>
+          <a:prstGeom prst="rect">
+            <a:avLst/>
+          </a:prstGeom>
+          <a:noFill/>
+        </p:spPr>
+        <p:txBody>
+          <a:bodyPr wrap="square">
+            <a:spAutoFit/>
+          </a:bodyPr>
+          <a:lstStyle/>
+          <a:p>
+            <a:r>
+              <a:rPr sz="1400" b="1" i="0">
+                <a:solidFill>
+                  <a:srgbClr val="F4A24C"/>
+                </a:solidFill>
+                <a:latin typeface="Montserrat"/>
+              </a:rPr>
+              <a:t>LO QUE YA DOMINAS</a:t>
+            </a:r>
+          </a:p>
+        </p:txBody>
+      </p:sp>
+      <p:sp>
+        <p:nvSpPr>
+          <p:cNvPr id="4" name="Rectangle 3"/>
+          <p:cNvSpPr/>
+          <p:nvPr/>
+        </p:nvSpPr>
+        <p:spPr>
+          <a:xfrm>
+            <a:off x="868680" y="1051560"/>
+            <a:ext cx="1463040" cy="82296"/>
+          </a:xfrm>
+          <a:prstGeom prst="rect">
+            <a:avLst/>
+          </a:prstGeom>
+          <a:solidFill>
+            <a:srgbClr val="E8801A"/>
+          </a:solidFill>
+          <a:ln>
+            <a:noFill/>
+          </a:ln>
+          <a:effectLst/>
+        </p:spPr>
+        <p:style>
+          <a:lnRef idx="1">
+            <a:schemeClr val="accent1"/>
+          </a:lnRef>
+          <a:fillRef idx="3">
+            <a:schemeClr val="accent1"/>
+          </a:fillRef>
+          <a:effectRef idx="2">
+            <a:schemeClr val="accent1"/>
+          </a:effectRef>
+          <a:fontRef idx="minor">
+            <a:schemeClr val="lt1"/>
+          </a:fontRef>
+        </p:style>
+        <p:txBody>
+          <a:bodyPr rtlCol="0" anchor="ctr"/>
+          <a:lstStyle/>
+          <a:p>
+            <a:pPr algn="ctr"/>
+          </a:p>
+        </p:txBody>
+      </p:sp>
+      <p:sp>
+        <p:nvSpPr>
+          <p:cNvPr id="5" name="TextBox 4"/>
+          <p:cNvSpPr txBox="1"/>
+          <p:nvPr/>
+        </p:nvSpPr>
+        <p:spPr>
+          <a:xfrm>
+            <a:off x="822960" y="1234440"/>
+            <a:ext cx="10515600" cy="1097280"/>
+          </a:xfrm>
+          <a:prstGeom prst="rect">
+            <a:avLst/>
+          </a:prstGeom>
+          <a:noFill/>
+        </p:spPr>
+        <p:txBody>
+          <a:bodyPr wrap="square">
+            <a:spAutoFit/>
+          </a:bodyPr>
+          <a:lstStyle/>
+          <a:p>
+            <a:r>
+              <a:rPr sz="3400" b="1" i="0">
+                <a:solidFill>
+                  <a:srgbClr val="FFFFFF"/>
+                </a:solidFill>
+                <a:latin typeface="Montserrat"/>
+              </a:rPr>
+              <a:t>Ya plantas cara al enemigo invisible</a:t>
+            </a:r>
+          </a:p>
+        </p:txBody>
+      </p:sp>
+      <p:sp>
+        <p:nvSpPr>
+          <p:cNvPr id="6" name="TextBox 5"/>
+          <p:cNvSpPr txBox="1"/>
+          <p:nvPr/>
+        </p:nvSpPr>
+        <p:spPr>
+          <a:xfrm>
+            <a:off x="822960" y="2606040"/>
+            <a:ext cx="10515600" cy="2743200"/>
+          </a:xfrm>
+          <a:prstGeom prst="rect">
+            <a:avLst/>
+          </a:prstGeom>
+          <a:noFill/>
+        </p:spPr>
+        <p:txBody>
+          <a:bodyPr wrap="square">
+            <a:spAutoFit/>
+          </a:bodyPr>
+          <a:lstStyle/>
+          <a:p>
+            <a:pPr>
+              <a:spcAft>
+                <a:spcPts val="1200"/>
+              </a:spcAft>
+            </a:pPr>
+            <a:r>
+              <a:rPr sz="2000" b="1" i="0">
+                <a:solidFill>
+                  <a:srgbClr val="F4A24C"/>
+                </a:solidFill>
+                <a:latin typeface="Montserrat"/>
+              </a:rPr>
+              <a:t>✓  </a:t>
+            </a:r>
+            <a:r>
+              <a:rPr sz="1900" b="0" i="0">
+                <a:solidFill>
+                  <a:srgbClr val="FFFFFF"/>
+                </a:solidFill>
+                <a:latin typeface="Montserrat"/>
+              </a:rPr>
+              <a:t>CO-ambiente: 15, 50; CO en conducto: 500, 1000</a:t>
+            </a:r>
+          </a:p>
+          <a:p>
+            <a:pPr>
+              <a:spcAft>
+                <a:spcPts val="1200"/>
+              </a:spcAft>
+            </a:pPr>
+            <a:r>
+              <a:rPr sz="2000" b="1" i="0">
+                <a:solidFill>
+                  <a:srgbClr val="F4A24C"/>
+                </a:solidFill>
+                <a:latin typeface="Montserrat"/>
+              </a:rPr>
+              <a:t>✓  </a:t>
+            </a:r>
+            <a:r>
+              <a:rPr sz="1900" b="0" i="0">
+                <a:solidFill>
+                  <a:srgbClr val="FFFFFF"/>
+                </a:solidFill>
+                <a:latin typeface="Montserrat"/>
+              </a:rPr>
+              <a:t>Revoco: el humo que se devuelve al local</a:t>
+            </a:r>
+          </a:p>
+          <a:p>
+            <a:pPr>
+              <a:spcAft>
+                <a:spcPts val="1200"/>
+              </a:spcAft>
+            </a:pPr>
+            <a:r>
+              <a:rPr sz="2000" b="1" i="0">
+                <a:solidFill>
+                  <a:srgbClr val="F4A24C"/>
+                </a:solidFill>
+                <a:latin typeface="Montserrat"/>
+              </a:rPr>
+              <a:t>✓  </a:t>
+            </a:r>
+            <a:r>
+              <a:rPr sz="1900" b="0" i="0">
+                <a:solidFill>
+                  <a:srgbClr val="FFFFFF"/>
+                </a:solidFill>
+                <a:latin typeface="Montserrat"/>
+              </a:rPr>
+              <a:t>El analizador: 18 meses, 5 años, ± 5 %</a:t>
+            </a:r>
+          </a:p>
+          <a:p>
+            <a:pPr>
+              <a:spcAft>
+                <a:spcPts val="1200"/>
+              </a:spcAft>
+            </a:pPr>
+            <a:r>
+              <a:rPr sz="2000" b="1" i="0">
+                <a:solidFill>
+                  <a:srgbClr val="F4A24C"/>
+                </a:solidFill>
+                <a:latin typeface="Montserrat"/>
+              </a:rPr>
+              <a:t>✓  </a:t>
+            </a:r>
+            <a:r>
+              <a:rPr sz="1900" b="0" i="0">
+                <a:solidFill>
+                  <a:srgbClr val="FFFFFF"/>
+                </a:solidFill>
+                <a:latin typeface="Montserrat"/>
+              </a:rPr>
+              <a:t>Control periódico no es mantenimiento</a:t>
+            </a:r>
+          </a:p>
+        </p:txBody>
+      </p:sp>
+      <p:sp>
+        <p:nvSpPr>
+          <p:cNvPr id="7" name="Rounded Rectangle 6"/>
+          <p:cNvSpPr/>
+          <p:nvPr/>
+        </p:nvSpPr>
+        <p:spPr>
+          <a:xfrm>
+            <a:off x="822960" y="5532120"/>
+            <a:ext cx="10515600" cy="822960"/>
+          </a:xfrm>
+          <a:prstGeom prst="roundRect">
+            <a:avLst/>
+          </a:prstGeom>
+          <a:solidFill>
+            <a:srgbClr val="E8801A"/>
+          </a:solidFill>
+          <a:ln>
+            <a:noFill/>
+          </a:ln>
+          <a:effectLst/>
+        </p:spPr>
+        <p:style>
+          <a:lnRef idx="1">
+            <a:schemeClr val="accent1"/>
+          </a:lnRef>
+          <a:fillRef idx="3">
+            <a:schemeClr val="accent1"/>
+          </a:fillRef>
+          <a:effectRef idx="2">
+            <a:schemeClr val="accent1"/>
+          </a:effectRef>
+          <a:fontRef idx="minor">
+            <a:schemeClr val="lt1"/>
+          </a:fontRef>
+        </p:style>
+        <p:txBody>
+          <a:bodyPr rtlCol="0" anchor="ctr"/>
+          <a:lstStyle/>
+          <a:p>
+            <a:pPr algn="ctr"/>
+          </a:p>
+        </p:txBody>
+      </p:sp>
+      <p:sp>
+        <p:nvSpPr>
+          <p:cNvPr id="8" name="TextBox 7"/>
+          <p:cNvSpPr txBox="1"/>
+          <p:nvPr/>
+        </p:nvSpPr>
+        <p:spPr>
+          <a:xfrm>
+            <a:off x="1051560" y="5623560"/>
+            <a:ext cx="10058400" cy="640080"/>
+          </a:xfrm>
+          <a:prstGeom prst="rect">
+            <a:avLst/>
+          </a:prstGeom>
+          <a:noFill/>
+        </p:spPr>
+        <p:txBody>
+          <a:bodyPr wrap="square">
+            <a:spAutoFit/>
+          </a:bodyPr>
+          <a:lstStyle/>
+          <a:p>
+            <a:r>
+              <a:rPr sz="1500" b="1" i="1">
+                <a:solidFill>
+                  <a:srgbClr val="1E2761"/>
+                </a:solidFill>
+                <a:latin typeface="Montserrat"/>
+              </a:rPr>
+              <a:t>Has cerrado el Tema 16. Sabes tocar, inspeccionar y medir: ya eres un gasista con oficio.</a:t>
+            </a:r>
+          </a:p>
+        </p:txBody>
+      </p:sp>
+    </p:spTree>
+  </p:cSld>
+  <p:clrMapOvr>
+    <a:masterClrMapping/>
+  </p:clrMapOvr>
+  <mc:AlternateContent xmlns:mc="http://schemas.openxmlformats.org/markup-compatibility/2006">
+    <mc:Choice xmlns:p14="http://schemas.microsoft.com/office/powerpoint/2010/main" Requires="p14">
+      <p:transition spd="med" p14:dur="700">
+        <p14:cube dir="r"/>
+      </p:transition>
+    </mc:Choice>
+    <mc:Fallback>
+      <p:transition spd="med">
+        <p:push dir="r"/>
+      </p:transition>
+    </mc:Fallback>
+  </mc:AlternateContent>
 </p:sld>
 </file>
 
@@ -9822,7 +14040,7 @@
                 </a:solidFill>
                 <a:latin typeface="Montserrat"/>
               </a:rPr>
-              <a:t>003 / 018</a:t>
+              <a:t>003 / 024</a:t>
             </a:r>
           </a:p>
         </p:txBody>
@@ -9931,7 +14149,7 @@
       </p:sp>
       <p:sp>
         <p:nvSpPr>
-          <p:cNvPr id="7" name="Rounded Rectangle 6"/>
+          <p:cNvPr id="7" name="Rectangle 6"/>
           <p:cNvSpPr/>
           <p:nvPr/>
         </p:nvSpPr>
@@ -9940,7 +14158,7 @@
             <a:off x="868680" y="1627632"/>
             <a:ext cx="2011680" cy="73152"/>
           </a:xfrm>
-          <a:prstGeom prst="roundRect">
+          <a:prstGeom prst="rect">
             <a:avLst/>
           </a:prstGeom>
           <a:solidFill>
@@ -9982,7 +14200,7 @@
         <p:spPr>
           <a:xfrm>
             <a:off x="822960" y="1965960"/>
-            <a:ext cx="4983480" cy="4206240"/>
+            <a:ext cx="5029200" cy="4206240"/>
           </a:xfrm>
           <a:prstGeom prst="rect">
             <a:avLst/>
@@ -10104,8 +14322,8 @@
         </p:nvSpPr>
         <p:spPr>
           <a:xfrm>
-            <a:off x="5806440" y="1051560"/>
-            <a:ext cx="5298947" cy="4629150"/>
+            <a:off x="6080760" y="1965960"/>
+            <a:ext cx="5303520" cy="4572000"/>
           </a:xfrm>
           <a:prstGeom prst="roundRect">
             <a:avLst/>
@@ -10150,8 +14368,8 @@
         </p:nvSpPr>
         <p:spPr>
           <a:xfrm>
-            <a:off x="6080760" y="2726055"/>
-            <a:ext cx="4750307" cy="1280160"/>
+            <a:off x="6355080" y="3611880"/>
+            <a:ext cx="4754880" cy="1280160"/>
           </a:xfrm>
           <a:prstGeom prst="rect">
             <a:avLst/>
@@ -10172,7 +14390,7 @@
                 </a:solidFill>
                 <a:latin typeface="Montserrat"/>
               </a:rPr>
-              <a:t>IMAGEN REALISTA</a:t>
+              <a:t>IMAGEN</a:t>
             </a:r>
           </a:p>
           <a:p>
@@ -10194,6 +14412,18 @@
   <p:clrMapOvr>
     <a:masterClrMapping/>
   </p:clrMapOvr>
+  <mc:AlternateContent xmlns:mc="http://schemas.openxmlformats.org/markup-compatibility/2006">
+    <mc:Choice xmlns:p14="http://schemas.microsoft.com/office/powerpoint/2010/main" Requires="p14">
+      <p:transition spd="med" p14:dur="700">
+        <p14:cube dir="l"/>
+      </p:transition>
+    </mc:Choice>
+    <mc:Fallback>
+      <p:transition spd="med">
+        <p:push dir="l"/>
+      </p:transition>
+    </mc:Fallback>
+  </mc:AlternateContent>
 </p:sld>
 </file>
 
@@ -10281,7 +14511,7 @@
                 </a:solidFill>
                 <a:latin typeface="Montserrat"/>
               </a:rPr>
-              <a:t>004 / 018</a:t>
+              <a:t>004 / 024</a:t>
             </a:r>
           </a:p>
         </p:txBody>
@@ -10390,7 +14620,7 @@
       </p:sp>
       <p:sp>
         <p:nvSpPr>
-          <p:cNvPr id="7" name="Rounded Rectangle 6"/>
+          <p:cNvPr id="7" name="Rectangle 6"/>
           <p:cNvSpPr/>
           <p:nvPr/>
         </p:nvSpPr>
@@ -10399,7 +14629,7 @@
             <a:off x="868680" y="1627632"/>
             <a:ext cx="2011680" cy="73152"/>
           </a:xfrm>
-          <a:prstGeom prst="roundRect">
+          <a:prstGeom prst="rect">
             <a:avLst/>
           </a:prstGeom>
           <a:solidFill>
@@ -10440,8 +14670,8 @@
         </p:nvSpPr>
         <p:spPr>
           <a:xfrm>
-            <a:off x="822960" y="1965960"/>
-            <a:ext cx="4983480" cy="4206240"/>
+            <a:off x="6355080" y="1965960"/>
+            <a:ext cx="5029200" cy="4206240"/>
           </a:xfrm>
           <a:prstGeom prst="rect">
             <a:avLst/>
@@ -10563,8 +14793,8 @@
         </p:nvSpPr>
         <p:spPr>
           <a:xfrm>
-            <a:off x="5806440" y="1051560"/>
-            <a:ext cx="5298947" cy="4629150"/>
+            <a:off x="822960" y="1965960"/>
+            <a:ext cx="5303520" cy="4572000"/>
           </a:xfrm>
           <a:prstGeom prst="roundRect">
             <a:avLst/>
@@ -10609,8 +14839,8 @@
         </p:nvSpPr>
         <p:spPr>
           <a:xfrm>
-            <a:off x="6080760" y="2726055"/>
-            <a:ext cx="4750307" cy="1280160"/>
+            <a:off x="1097280" y="3611880"/>
+            <a:ext cx="4754880" cy="1280160"/>
           </a:xfrm>
           <a:prstGeom prst="rect">
             <a:avLst/>
@@ -10631,7 +14861,7 @@
                 </a:solidFill>
                 <a:latin typeface="Montserrat"/>
               </a:rPr>
-              <a:t>IMAGEN REALISTA</a:t>
+              <a:t>IMAGEN</a:t>
             </a:r>
           </a:p>
           <a:p>
@@ -10653,6 +14883,18 @@
   <p:clrMapOvr>
     <a:masterClrMapping/>
   </p:clrMapOvr>
+  <mc:AlternateContent xmlns:mc="http://schemas.openxmlformats.org/markup-compatibility/2006">
+    <mc:Choice xmlns:p14="http://schemas.microsoft.com/office/powerpoint/2010/main" Requires="p14">
+      <p:transition spd="med" p14:dur="700">
+        <p14:cube dir="r"/>
+      </p:transition>
+    </mc:Choice>
+    <mc:Fallback>
+      <p:transition spd="med">
+        <p:push dir="r"/>
+      </p:transition>
+    </mc:Fallback>
+  </mc:AlternateContent>
 </p:sld>
 </file>
 
@@ -10740,7 +14982,7 @@
                 </a:solidFill>
                 <a:latin typeface="Montserrat"/>
               </a:rPr>
-              <a:t>005 / 018</a:t>
+              <a:t>005 / 024</a:t>
             </a:r>
           </a:p>
         </p:txBody>
@@ -10849,7 +15091,7 @@
       </p:sp>
       <p:sp>
         <p:nvSpPr>
-          <p:cNvPr id="7" name="Rounded Rectangle 6"/>
+          <p:cNvPr id="7" name="Rectangle 6"/>
           <p:cNvSpPr/>
           <p:nvPr/>
         </p:nvSpPr>
@@ -10858,7 +15100,7 @@
             <a:off x="868680" y="1627632"/>
             <a:ext cx="2011680" cy="73152"/>
           </a:xfrm>
-          <a:prstGeom prst="roundRect">
+          <a:prstGeom prst="rect">
             <a:avLst/>
           </a:prstGeom>
           <a:solidFill>
@@ -10900,7 +15142,7 @@
         <p:spPr>
           <a:xfrm>
             <a:off x="822960" y="1965960"/>
-            <a:ext cx="4983480" cy="4206240"/>
+            <a:ext cx="5029200" cy="4206240"/>
           </a:xfrm>
           <a:prstGeom prst="rect">
             <a:avLst/>
@@ -11022,8 +15264,8 @@
         </p:nvSpPr>
         <p:spPr>
           <a:xfrm>
-            <a:off x="5806440" y="1051560"/>
-            <a:ext cx="5298947" cy="4629150"/>
+            <a:off x="6080760" y="1965960"/>
+            <a:ext cx="5303520" cy="4572000"/>
           </a:xfrm>
           <a:prstGeom prst="roundRect">
             <a:avLst/>
@@ -11068,8 +15310,8 @@
         </p:nvSpPr>
         <p:spPr>
           <a:xfrm>
-            <a:off x="6080760" y="2726055"/>
-            <a:ext cx="4750307" cy="1280160"/>
+            <a:off x="6355080" y="3611880"/>
+            <a:ext cx="4754880" cy="1280160"/>
           </a:xfrm>
           <a:prstGeom prst="rect">
             <a:avLst/>
@@ -11090,7 +15332,7 @@
                 </a:solidFill>
                 <a:latin typeface="Montserrat"/>
               </a:rPr>
-              <a:t>IMAGEN REALISTA</a:t>
+              <a:t>IMAGEN</a:t>
             </a:r>
           </a:p>
           <a:p>
@@ -11112,6 +15354,18 @@
   <p:clrMapOvr>
     <a:masterClrMapping/>
   </p:clrMapOvr>
+  <mc:AlternateContent xmlns:mc="http://schemas.openxmlformats.org/markup-compatibility/2006">
+    <mc:Choice xmlns:p14="http://schemas.microsoft.com/office/powerpoint/2010/main" Requires="p14">
+      <p:transition spd="med" p14:dur="700">
+        <p14:cube dir="l"/>
+      </p:transition>
+    </mc:Choice>
+    <mc:Fallback>
+      <p:transition spd="med">
+        <p:push dir="l"/>
+      </p:transition>
+    </mc:Fallback>
+  </mc:AlternateContent>
 </p:sld>
 </file>
 
@@ -11199,7 +15453,7 @@
                 </a:solidFill>
                 <a:latin typeface="Montserrat"/>
               </a:rPr>
-              <a:t>006 / 018</a:t>
+              <a:t>006 / 024</a:t>
             </a:r>
           </a:p>
         </p:txBody>
@@ -11308,7 +15562,7 @@
       </p:sp>
       <p:sp>
         <p:nvSpPr>
-          <p:cNvPr id="7" name="Rounded Rectangle 6"/>
+          <p:cNvPr id="7" name="Rectangle 6"/>
           <p:cNvSpPr/>
           <p:nvPr/>
         </p:nvSpPr>
@@ -11317,7 +15571,7 @@
             <a:off x="868680" y="1627632"/>
             <a:ext cx="2011680" cy="73152"/>
           </a:xfrm>
-          <a:prstGeom prst="roundRect">
+          <a:prstGeom prst="rect">
             <a:avLst/>
           </a:prstGeom>
           <a:solidFill>
@@ -11358,8 +15612,8 @@
         </p:nvSpPr>
         <p:spPr>
           <a:xfrm>
-            <a:off x="822960" y="1965960"/>
-            <a:ext cx="4983480" cy="4206240"/>
+            <a:off x="6355080" y="1965960"/>
+            <a:ext cx="5029200" cy="4206240"/>
           </a:xfrm>
           <a:prstGeom prst="rect">
             <a:avLst/>
@@ -11481,8 +15735,8 @@
         </p:nvSpPr>
         <p:spPr>
           <a:xfrm>
-            <a:off x="5806440" y="1051560"/>
-            <a:ext cx="5298947" cy="4629150"/>
+            <a:off x="822960" y="1965960"/>
+            <a:ext cx="5303520" cy="4572000"/>
           </a:xfrm>
           <a:prstGeom prst="roundRect">
             <a:avLst/>
@@ -11527,8 +15781,8 @@
         </p:nvSpPr>
         <p:spPr>
           <a:xfrm>
-            <a:off x="6080760" y="2726055"/>
-            <a:ext cx="4750307" cy="1280160"/>
+            <a:off x="1097280" y="3611880"/>
+            <a:ext cx="4754880" cy="1280160"/>
           </a:xfrm>
           <a:prstGeom prst="rect">
             <a:avLst/>
@@ -11549,7 +15803,7 @@
                 </a:solidFill>
                 <a:latin typeface="Montserrat"/>
               </a:rPr>
-              <a:t>IMAGEN REALISTA</a:t>
+              <a:t>IMAGEN</a:t>
             </a:r>
           </a:p>
           <a:p>
@@ -11571,6 +15825,18 @@
   <p:clrMapOvr>
     <a:masterClrMapping/>
   </p:clrMapOvr>
+  <mc:AlternateContent xmlns:mc="http://schemas.openxmlformats.org/markup-compatibility/2006">
+    <mc:Choice xmlns:p14="http://schemas.microsoft.com/office/powerpoint/2010/main" Requires="p14">
+      <p:transition spd="med" p14:dur="700">
+        <p14:cube dir="r"/>
+      </p:transition>
+    </mc:Choice>
+    <mc:Fallback>
+      <p:transition spd="med">
+        <p:push dir="r"/>
+      </p:transition>
+    </mc:Fallback>
+  </mc:AlternateContent>
 </p:sld>
 </file>
 
@@ -11658,7 +15924,7 @@
                 </a:solidFill>
                 <a:latin typeface="Montserrat"/>
               </a:rPr>
-              <a:t>007 / 018</a:t>
+              <a:t>007 / 024</a:t>
             </a:r>
           </a:p>
         </p:txBody>
@@ -11699,84 +15965,16 @@
       </p:sp>
       <p:sp>
         <p:nvSpPr>
-          <p:cNvPr id="5" name="TextBox 4"/>
-          <p:cNvSpPr txBox="1"/>
-          <p:nvPr/>
-        </p:nvSpPr>
-        <p:spPr>
-          <a:xfrm>
-            <a:off x="822960" y="457200"/>
-            <a:ext cx="10058400" cy="365760"/>
-          </a:xfrm>
-          <a:prstGeom prst="rect">
-            <a:avLst/>
-          </a:prstGeom>
-          <a:noFill/>
-        </p:spPr>
-        <p:txBody>
-          <a:bodyPr wrap="square">
-            <a:spAutoFit/>
-          </a:bodyPr>
-          <a:lstStyle/>
-          <a:p>
-            <a:r>
-              <a:rPr sz="1300" b="1" i="0">
-                <a:solidFill>
-                  <a:srgbClr val="E8801A"/>
-                </a:solidFill>
-                <a:latin typeface="Montserrat"/>
-              </a:rPr>
-              <a:t>PARTE 13 · AP-2 Y AP-3</a:t>
-            </a:r>
-          </a:p>
-        </p:txBody>
-      </p:sp>
-      <p:sp>
-        <p:nvSpPr>
-          <p:cNvPr id="6" name="TextBox 5"/>
-          <p:cNvSpPr txBox="1"/>
-          <p:nvPr/>
-        </p:nvSpPr>
-        <p:spPr>
-          <a:xfrm>
-            <a:off x="822960" y="868680"/>
-            <a:ext cx="10515600" cy="914400"/>
-          </a:xfrm>
-          <a:prstGeom prst="rect">
-            <a:avLst/>
-          </a:prstGeom>
-          <a:noFill/>
-        </p:spPr>
-        <p:txBody>
-          <a:bodyPr wrap="square">
-            <a:spAutoFit/>
-          </a:bodyPr>
-          <a:lstStyle/>
-          <a:p>
-            <a:r>
-              <a:rPr sz="2800" b="1" i="0">
-                <a:solidFill>
-                  <a:srgbClr val="1E2761"/>
-                </a:solidFill>
-                <a:latin typeface="Montserrat"/>
-              </a:rPr>
-              <a:t>Combustión no higiénica y falta de AS</a:t>
-            </a:r>
-          </a:p>
-        </p:txBody>
-      </p:sp>
-      <p:sp>
-        <p:nvSpPr>
-          <p:cNvPr id="7" name="Rounded Rectangle 6"/>
+          <p:cNvPr id="5" name="Rectangle 4"/>
           <p:cNvSpPr/>
           <p:nvPr/>
         </p:nvSpPr>
         <p:spPr>
           <a:xfrm>
-            <a:off x="868680" y="1627632"/>
-            <a:ext cx="2011680" cy="73152"/>
-          </a:xfrm>
-          <a:prstGeom prst="roundRect">
+            <a:off x="0" y="0"/>
+            <a:ext cx="12191695" cy="1143000"/>
+          </a:xfrm>
+          <a:prstGeom prst="rect">
             <a:avLst/>
           </a:prstGeom>
           <a:solidFill>
@@ -11811,14 +16009,14 @@
       </p:sp>
       <p:sp>
         <p:nvSpPr>
-          <p:cNvPr id="8" name="TextBox 7"/>
+          <p:cNvPr id="6" name="TextBox 5"/>
           <p:cNvSpPr txBox="1"/>
           <p:nvPr/>
         </p:nvSpPr>
         <p:spPr>
           <a:xfrm>
-            <a:off x="822960" y="1965960"/>
-            <a:ext cx="4983480" cy="4206240"/>
+            <a:off x="822960" y="274320"/>
+            <a:ext cx="10515600" cy="640080"/>
           </a:xfrm>
           <a:prstGeom prst="rect">
             <a:avLst/>
@@ -11831,117 +16029,62 @@
           </a:bodyPr>
           <a:lstStyle/>
           <a:p>
-            <a:pPr>
-              <a:spcAft>
-                <a:spcPts val="1100"/>
-              </a:spcAft>
-            </a:pPr>
-            <a:r>
-              <a:rPr sz="1600" b="1" i="0">
-                <a:solidFill>
-                  <a:srgbClr val="E8801A"/>
-                </a:solidFill>
-                <a:latin typeface="Montserrat"/>
-              </a:rPr>
-              <a:t>▸  </a:t>
-            </a:r>
-            <a:r>
-              <a:rPr sz="1600" b="0" i="0">
-                <a:solidFill>
-                  <a:srgbClr val="1B2330"/>
-                </a:solidFill>
-                <a:latin typeface="Montserrat"/>
-              </a:rPr>
-              <a:t>CO en el conducto (CO-PdC) &gt; 1000 ppm</a:t>
-            </a:r>
-          </a:p>
-          <a:p>
-            <a:pPr>
-              <a:spcAft>
-                <a:spcPts val="1100"/>
-              </a:spcAft>
-            </a:pPr>
-            <a:r>
-              <a:rPr sz="1600" b="1" i="0">
-                <a:solidFill>
-                  <a:srgbClr val="E8801A"/>
-                </a:solidFill>
-                <a:latin typeface="Montserrat"/>
-              </a:rPr>
-              <a:t>▸  </a:t>
-            </a:r>
-            <a:r>
-              <a:rPr sz="1600" b="0" i="0">
-                <a:solidFill>
-                  <a:srgbClr val="1B2330"/>
-                </a:solidFill>
-                <a:latin typeface="Montserrat"/>
-              </a:rPr>
-              <a:t>Combustión no higiénica: principal AP-2</a:t>
-            </a:r>
-          </a:p>
-          <a:p>
-            <a:pPr>
-              <a:spcAft>
-                <a:spcPts val="1100"/>
-              </a:spcAft>
-            </a:pPr>
-            <a:r>
-              <a:rPr sz="1600" b="1" i="0">
-                <a:solidFill>
-                  <a:srgbClr val="E8801A"/>
-                </a:solidFill>
-                <a:latin typeface="Montserrat"/>
-              </a:rPr>
-              <a:t>▸  </a:t>
-            </a:r>
-            <a:r>
-              <a:rPr sz="1600" b="0" i="0">
-                <a:solidFill>
-                  <a:srgbClr val="1B2330"/>
-                </a:solidFill>
-                <a:latin typeface="Montserrat"/>
-              </a:rPr>
-              <a:t>Procedimiento del anexo A</a:t>
-            </a:r>
-          </a:p>
-          <a:p>
-            <a:pPr>
-              <a:spcAft>
-                <a:spcPts val="1100"/>
-              </a:spcAft>
-            </a:pPr>
-            <a:r>
-              <a:rPr sz="1600" b="1" i="0">
-                <a:solidFill>
-                  <a:srgbClr val="E8801A"/>
-                </a:solidFill>
-                <a:latin typeface="Montserrat"/>
-              </a:rPr>
-              <a:t>▸  </a:t>
-            </a:r>
-            <a:r>
-              <a:rPr sz="1600" b="0" i="0">
-                <a:solidFill>
-                  <a:srgbClr val="1B2330"/>
-                </a:solidFill>
-                <a:latin typeface="Montserrat"/>
-              </a:rPr>
-              <a:t>Falta del dispositivo de atmósfera: AP-3</a:t>
-            </a:r>
-          </a:p>
-        </p:txBody>
-      </p:sp>
-      <p:sp>
-        <p:nvSpPr>
-          <p:cNvPr id="9" name="imgph" descr="IMGQ:flue gas analyzer measuring boiler exhaust"/>
+            <a:r>
+              <a:rPr sz="2400" b="1" i="0">
+                <a:solidFill>
+                  <a:srgbClr val="FFFFFF"/>
+                </a:solidFill>
+                <a:latin typeface="Montserrat"/>
+              </a:rPr>
+              <a:t>⚡  PREGUNTA RÁPIDA</a:t>
+            </a:r>
+          </a:p>
+        </p:txBody>
+      </p:sp>
+      <p:sp>
+        <p:nvSpPr>
+          <p:cNvPr id="7" name="TextBox 6"/>
+          <p:cNvSpPr txBox="1"/>
+          <p:nvPr/>
+        </p:nvSpPr>
+        <p:spPr>
+          <a:xfrm>
+            <a:off x="822960" y="1508760"/>
+            <a:ext cx="10515600" cy="1371600"/>
+          </a:xfrm>
+          <a:prstGeom prst="rect">
+            <a:avLst/>
+          </a:prstGeom>
+          <a:noFill/>
+        </p:spPr>
+        <p:txBody>
+          <a:bodyPr wrap="square">
+            <a:spAutoFit/>
+          </a:bodyPr>
+          <a:lstStyle/>
+          <a:p>
+            <a:r>
+              <a:rPr sz="2400" b="1" i="0">
+                <a:solidFill>
+                  <a:srgbClr val="1E2761"/>
+                </a:solidFill>
+                <a:latin typeface="Montserrat"/>
+              </a:rPr>
+              <a:t>¿En qué condiciones se mide el CO-ambiente de un local?</a:t>
+            </a:r>
+          </a:p>
+        </p:txBody>
+      </p:sp>
+      <p:sp>
+        <p:nvSpPr>
+          <p:cNvPr id="8" name="Rounded Rectangle 7"/>
           <p:cNvSpPr/>
           <p:nvPr/>
         </p:nvSpPr>
         <p:spPr>
           <a:xfrm>
-            <a:off x="5806440" y="1051560"/>
-            <a:ext cx="5298947" cy="4629150"/>
+            <a:off x="822960" y="3291840"/>
+            <a:ext cx="4983480" cy="1143000"/>
           </a:xfrm>
           <a:prstGeom prst="roundRect">
             <a:avLst/>
@@ -11980,14 +16123,58 @@
       </p:sp>
       <p:sp>
         <p:nvSpPr>
+          <p:cNvPr id="9" name="Rectangle 8"/>
+          <p:cNvSpPr/>
+          <p:nvPr/>
+        </p:nvSpPr>
+        <p:spPr>
+          <a:xfrm>
+            <a:off x="822960" y="3291840"/>
+            <a:ext cx="640080" cy="1143000"/>
+          </a:xfrm>
+          <a:prstGeom prst="rect">
+            <a:avLst/>
+          </a:prstGeom>
+          <a:solidFill>
+            <a:srgbClr val="1E2761"/>
+          </a:solidFill>
+          <a:ln>
+            <a:noFill/>
+          </a:ln>
+          <a:effectLst/>
+        </p:spPr>
+        <p:style>
+          <a:lnRef idx="1">
+            <a:schemeClr val="accent1"/>
+          </a:lnRef>
+          <a:fillRef idx="3">
+            <a:schemeClr val="accent1"/>
+          </a:fillRef>
+          <a:effectRef idx="2">
+            <a:schemeClr val="accent1"/>
+          </a:effectRef>
+          <a:fontRef idx="minor">
+            <a:schemeClr val="lt1"/>
+          </a:fontRef>
+        </p:style>
+        <p:txBody>
+          <a:bodyPr rtlCol="0" anchor="ctr"/>
+          <a:lstStyle/>
+          <a:p>
+            <a:pPr algn="ctr"/>
+          </a:p>
+        </p:txBody>
+      </p:sp>
+      <p:sp>
+        <p:nvSpPr>
           <p:cNvPr id="10" name="TextBox 9"/>
           <p:cNvSpPr txBox="1"/>
           <p:nvPr/>
         </p:nvSpPr>
         <p:spPr>
           <a:xfrm>
-            <a:off x="6080760" y="2726055"/>
-            <a:ext cx="4750307" cy="1280160"/>
+            <a:off x="822960" y="3611880"/>
+            <a:ext cx="640080" cy="548640"/>
           </a:xfrm>
           <a:prstGeom prst="rect">
             <a:avLst/>
@@ -12002,25 +16189,524 @@
           <a:p>
             <a:pPr algn="ctr"/>
             <a:r>
-              <a:rPr sz="1400" b="1" i="0">
-                <a:solidFill>
-                  <a:srgbClr val="64748B"/>
-                </a:solidFill>
-                <a:latin typeface="Montserrat"/>
-              </a:rPr>
-              <a:t>IMAGEN REALISTA</a:t>
-            </a:r>
-          </a:p>
+              <a:rPr sz="2200" b="1" i="0">
+                <a:solidFill>
+                  <a:srgbClr val="FFFFFF"/>
+                </a:solidFill>
+                <a:latin typeface="Montserrat"/>
+              </a:rPr>
+              <a:t>A</a:t>
+            </a:r>
+          </a:p>
+        </p:txBody>
+      </p:sp>
+      <p:sp>
+        <p:nvSpPr>
+          <p:cNvPr id="11" name="TextBox 10"/>
+          <p:cNvSpPr txBox="1"/>
+          <p:nvPr/>
+        </p:nvSpPr>
+        <p:spPr>
+          <a:xfrm>
+            <a:off x="1600200" y="3474720"/>
+            <a:ext cx="4114800" cy="868680"/>
+          </a:xfrm>
+          <a:prstGeom prst="rect">
+            <a:avLst/>
+          </a:prstGeom>
+          <a:noFill/>
+        </p:spPr>
+        <p:txBody>
+          <a:bodyPr wrap="square">
+            <a:spAutoFit/>
+          </a:bodyPr>
+          <a:lstStyle/>
+          <a:p>
+            <a:r>
+              <a:rPr sz="1400" b="0" i="0">
+                <a:solidFill>
+                  <a:srgbClr val="1B2330"/>
+                </a:solidFill>
+                <a:latin typeface="Montserrat"/>
+              </a:rPr>
+              <a:t>Con puertas y ventanas abiertas y campana encendida</a:t>
+            </a:r>
+          </a:p>
+        </p:txBody>
+      </p:sp>
+      <p:sp>
+        <p:nvSpPr>
+          <p:cNvPr id="12" name="Rounded Rectangle 11"/>
+          <p:cNvSpPr/>
+          <p:nvPr/>
+        </p:nvSpPr>
+        <p:spPr>
+          <a:xfrm>
+            <a:off x="6355080" y="3291840"/>
+            <a:ext cx="4983480" cy="1143000"/>
+          </a:xfrm>
+          <a:prstGeom prst="roundRect">
+            <a:avLst/>
+          </a:prstGeom>
+          <a:solidFill>
+            <a:srgbClr val="F3F6FB"/>
+          </a:solidFill>
+          <a:ln w="12700">
+            <a:solidFill>
+              <a:srgbClr val="C7D2E6"/>
+            </a:solidFill>
+          </a:ln>
+          <a:effectLst/>
+        </p:spPr>
+        <p:style>
+          <a:lnRef idx="1">
+            <a:schemeClr val="accent1"/>
+          </a:lnRef>
+          <a:fillRef idx="3">
+            <a:schemeClr val="accent1"/>
+          </a:fillRef>
+          <a:effectRef idx="2">
+            <a:schemeClr val="accent1"/>
+          </a:effectRef>
+          <a:fontRef idx="minor">
+            <a:schemeClr val="lt1"/>
+          </a:fontRef>
+        </p:style>
+        <p:txBody>
+          <a:bodyPr rtlCol="0" anchor="ctr"/>
+          <a:lstStyle/>
           <a:p>
             <a:pPr algn="ctr"/>
-            <a:r>
-              <a:rPr sz="1100" b="0" i="1">
-                <a:solidFill>
-                  <a:srgbClr val="64748B"/>
-                </a:solidFill>
-                <a:latin typeface="Montserrat"/>
-              </a:rPr>
-              <a:t>flue gas analyzer measuring boiler exhaust</a:t>
+          </a:p>
+        </p:txBody>
+      </p:sp>
+      <p:sp>
+        <p:nvSpPr>
+          <p:cNvPr id="13" name="Rectangle 12"/>
+          <p:cNvSpPr/>
+          <p:nvPr/>
+        </p:nvSpPr>
+        <p:spPr>
+          <a:xfrm>
+            <a:off x="6355080" y="3291840"/>
+            <a:ext cx="640080" cy="1143000"/>
+          </a:xfrm>
+          <a:prstGeom prst="rect">
+            <a:avLst/>
+          </a:prstGeom>
+          <a:solidFill>
+            <a:srgbClr val="1E2761"/>
+          </a:solidFill>
+          <a:ln>
+            <a:noFill/>
+          </a:ln>
+          <a:effectLst/>
+        </p:spPr>
+        <p:style>
+          <a:lnRef idx="1">
+            <a:schemeClr val="accent1"/>
+          </a:lnRef>
+          <a:fillRef idx="3">
+            <a:schemeClr val="accent1"/>
+          </a:fillRef>
+          <a:effectRef idx="2">
+            <a:schemeClr val="accent1"/>
+          </a:effectRef>
+          <a:fontRef idx="minor">
+            <a:schemeClr val="lt1"/>
+          </a:fontRef>
+        </p:style>
+        <p:txBody>
+          <a:bodyPr rtlCol="0" anchor="ctr"/>
+          <a:lstStyle/>
+          <a:p>
+            <a:pPr algn="ctr"/>
+          </a:p>
+        </p:txBody>
+      </p:sp>
+      <p:sp>
+        <p:nvSpPr>
+          <p:cNvPr id="14" name="TextBox 13"/>
+          <p:cNvSpPr txBox="1"/>
+          <p:nvPr/>
+        </p:nvSpPr>
+        <p:spPr>
+          <a:xfrm>
+            <a:off x="6355080" y="3611880"/>
+            <a:ext cx="640080" cy="548640"/>
+          </a:xfrm>
+          <a:prstGeom prst="rect">
+            <a:avLst/>
+          </a:prstGeom>
+          <a:noFill/>
+        </p:spPr>
+        <p:txBody>
+          <a:bodyPr wrap="square">
+            <a:spAutoFit/>
+          </a:bodyPr>
+          <a:lstStyle/>
+          <a:p>
+            <a:pPr algn="ctr"/>
+            <a:r>
+              <a:rPr sz="2200" b="1" i="0">
+                <a:solidFill>
+                  <a:srgbClr val="FFFFFF"/>
+                </a:solidFill>
+                <a:latin typeface="Montserrat"/>
+              </a:rPr>
+              <a:t>B</a:t>
+            </a:r>
+          </a:p>
+        </p:txBody>
+      </p:sp>
+      <p:sp>
+        <p:nvSpPr>
+          <p:cNvPr id="15" name="TextBox 14"/>
+          <p:cNvSpPr txBox="1"/>
+          <p:nvPr/>
+        </p:nvSpPr>
+        <p:spPr>
+          <a:xfrm>
+            <a:off x="7132320" y="3474720"/>
+            <a:ext cx="4114800" cy="868680"/>
+          </a:xfrm>
+          <a:prstGeom prst="rect">
+            <a:avLst/>
+          </a:prstGeom>
+          <a:noFill/>
+        </p:spPr>
+        <p:txBody>
+          <a:bodyPr wrap="square">
+            <a:spAutoFit/>
+          </a:bodyPr>
+          <a:lstStyle/>
+          <a:p>
+            <a:r>
+              <a:rPr sz="1400" b="0" i="0">
+                <a:solidFill>
+                  <a:srgbClr val="1B2330"/>
+                </a:solidFill>
+                <a:latin typeface="Montserrat"/>
+              </a:rPr>
+              <a:t>Con puertas y ventanas cerradas y campana apagada</a:t>
+            </a:r>
+          </a:p>
+        </p:txBody>
+      </p:sp>
+      <p:sp>
+        <p:nvSpPr>
+          <p:cNvPr id="16" name="Rounded Rectangle 15"/>
+          <p:cNvSpPr/>
+          <p:nvPr/>
+        </p:nvSpPr>
+        <p:spPr>
+          <a:xfrm>
+            <a:off x="822960" y="4617720"/>
+            <a:ext cx="4983480" cy="1143000"/>
+          </a:xfrm>
+          <a:prstGeom prst="roundRect">
+            <a:avLst/>
+          </a:prstGeom>
+          <a:solidFill>
+            <a:srgbClr val="F3F6FB"/>
+          </a:solidFill>
+          <a:ln w="12700">
+            <a:solidFill>
+              <a:srgbClr val="C7D2E6"/>
+            </a:solidFill>
+          </a:ln>
+          <a:effectLst/>
+        </p:spPr>
+        <p:style>
+          <a:lnRef idx="1">
+            <a:schemeClr val="accent1"/>
+          </a:lnRef>
+          <a:fillRef idx="3">
+            <a:schemeClr val="accent1"/>
+          </a:fillRef>
+          <a:effectRef idx="2">
+            <a:schemeClr val="accent1"/>
+          </a:effectRef>
+          <a:fontRef idx="minor">
+            <a:schemeClr val="lt1"/>
+          </a:fontRef>
+        </p:style>
+        <p:txBody>
+          <a:bodyPr rtlCol="0" anchor="ctr"/>
+          <a:lstStyle/>
+          <a:p>
+            <a:pPr algn="ctr"/>
+          </a:p>
+        </p:txBody>
+      </p:sp>
+      <p:sp>
+        <p:nvSpPr>
+          <p:cNvPr id="17" name="Rectangle 16"/>
+          <p:cNvSpPr/>
+          <p:nvPr/>
+        </p:nvSpPr>
+        <p:spPr>
+          <a:xfrm>
+            <a:off x="822960" y="4617720"/>
+            <a:ext cx="640080" cy="1143000"/>
+          </a:xfrm>
+          <a:prstGeom prst="rect">
+            <a:avLst/>
+          </a:prstGeom>
+          <a:solidFill>
+            <a:srgbClr val="1E2761"/>
+          </a:solidFill>
+          <a:ln>
+            <a:noFill/>
+          </a:ln>
+          <a:effectLst/>
+        </p:spPr>
+        <p:style>
+          <a:lnRef idx="1">
+            <a:schemeClr val="accent1"/>
+          </a:lnRef>
+          <a:fillRef idx="3">
+            <a:schemeClr val="accent1"/>
+          </a:fillRef>
+          <a:effectRef idx="2">
+            <a:schemeClr val="accent1"/>
+          </a:effectRef>
+          <a:fontRef idx="minor">
+            <a:schemeClr val="lt1"/>
+          </a:fontRef>
+        </p:style>
+        <p:txBody>
+          <a:bodyPr rtlCol="0" anchor="ctr"/>
+          <a:lstStyle/>
+          <a:p>
+            <a:pPr algn="ctr"/>
+          </a:p>
+        </p:txBody>
+      </p:sp>
+      <p:sp>
+        <p:nvSpPr>
+          <p:cNvPr id="18" name="TextBox 17"/>
+          <p:cNvSpPr txBox="1"/>
+          <p:nvPr/>
+        </p:nvSpPr>
+        <p:spPr>
+          <a:xfrm>
+            <a:off x="822960" y="4937760"/>
+            <a:ext cx="640080" cy="548640"/>
+          </a:xfrm>
+          <a:prstGeom prst="rect">
+            <a:avLst/>
+          </a:prstGeom>
+          <a:noFill/>
+        </p:spPr>
+        <p:txBody>
+          <a:bodyPr wrap="square">
+            <a:spAutoFit/>
+          </a:bodyPr>
+          <a:lstStyle/>
+          <a:p>
+            <a:pPr algn="ctr"/>
+            <a:r>
+              <a:rPr sz="2200" b="1" i="0">
+                <a:solidFill>
+                  <a:srgbClr val="FFFFFF"/>
+                </a:solidFill>
+                <a:latin typeface="Montserrat"/>
+              </a:rPr>
+              <a:t>C</a:t>
+            </a:r>
+          </a:p>
+        </p:txBody>
+      </p:sp>
+      <p:sp>
+        <p:nvSpPr>
+          <p:cNvPr id="19" name="TextBox 18"/>
+          <p:cNvSpPr txBox="1"/>
+          <p:nvPr/>
+        </p:nvSpPr>
+        <p:spPr>
+          <a:xfrm>
+            <a:off x="1600200" y="4800600"/>
+            <a:ext cx="4114800" cy="868680"/>
+          </a:xfrm>
+          <a:prstGeom prst="rect">
+            <a:avLst/>
+          </a:prstGeom>
+          <a:noFill/>
+        </p:spPr>
+        <p:txBody>
+          <a:bodyPr wrap="square">
+            <a:spAutoFit/>
+          </a:bodyPr>
+          <a:lstStyle/>
+          <a:p>
+            <a:r>
+              <a:rPr sz="1400" b="0" i="0">
+                <a:solidFill>
+                  <a:srgbClr val="1B2330"/>
+                </a:solidFill>
+                <a:latin typeface="Montserrat"/>
+              </a:rPr>
+              <a:t>Solo con la ventana del baño abierta</a:t>
+            </a:r>
+          </a:p>
+        </p:txBody>
+      </p:sp>
+      <p:sp>
+        <p:nvSpPr>
+          <p:cNvPr id="20" name="Rounded Rectangle 19"/>
+          <p:cNvSpPr/>
+          <p:nvPr/>
+        </p:nvSpPr>
+        <p:spPr>
+          <a:xfrm>
+            <a:off x="6355080" y="4617720"/>
+            <a:ext cx="4983480" cy="1143000"/>
+          </a:xfrm>
+          <a:prstGeom prst="roundRect">
+            <a:avLst/>
+          </a:prstGeom>
+          <a:solidFill>
+            <a:srgbClr val="F3F6FB"/>
+          </a:solidFill>
+          <a:ln w="12700">
+            <a:solidFill>
+              <a:srgbClr val="C7D2E6"/>
+            </a:solidFill>
+          </a:ln>
+          <a:effectLst/>
+        </p:spPr>
+        <p:style>
+          <a:lnRef idx="1">
+            <a:schemeClr val="accent1"/>
+          </a:lnRef>
+          <a:fillRef idx="3">
+            <a:schemeClr val="accent1"/>
+          </a:fillRef>
+          <a:effectRef idx="2">
+            <a:schemeClr val="accent1"/>
+          </a:effectRef>
+          <a:fontRef idx="minor">
+            <a:schemeClr val="lt1"/>
+          </a:fontRef>
+        </p:style>
+        <p:txBody>
+          <a:bodyPr rtlCol="0" anchor="ctr"/>
+          <a:lstStyle/>
+          <a:p>
+            <a:pPr algn="ctr"/>
+          </a:p>
+        </p:txBody>
+      </p:sp>
+      <p:sp>
+        <p:nvSpPr>
+          <p:cNvPr id="21" name="Rectangle 20"/>
+          <p:cNvSpPr/>
+          <p:nvPr/>
+        </p:nvSpPr>
+        <p:spPr>
+          <a:xfrm>
+            <a:off x="6355080" y="4617720"/>
+            <a:ext cx="640080" cy="1143000"/>
+          </a:xfrm>
+          <a:prstGeom prst="rect">
+            <a:avLst/>
+          </a:prstGeom>
+          <a:solidFill>
+            <a:srgbClr val="1E2761"/>
+          </a:solidFill>
+          <a:ln>
+            <a:noFill/>
+          </a:ln>
+          <a:effectLst/>
+        </p:spPr>
+        <p:style>
+          <a:lnRef idx="1">
+            <a:schemeClr val="accent1"/>
+          </a:lnRef>
+          <a:fillRef idx="3">
+            <a:schemeClr val="accent1"/>
+          </a:fillRef>
+          <a:effectRef idx="2">
+            <a:schemeClr val="accent1"/>
+          </a:effectRef>
+          <a:fontRef idx="minor">
+            <a:schemeClr val="lt1"/>
+          </a:fontRef>
+        </p:style>
+        <p:txBody>
+          <a:bodyPr rtlCol="0" anchor="ctr"/>
+          <a:lstStyle/>
+          <a:p>
+            <a:pPr algn="ctr"/>
+          </a:p>
+        </p:txBody>
+      </p:sp>
+      <p:sp>
+        <p:nvSpPr>
+          <p:cNvPr id="22" name="TextBox 21"/>
+          <p:cNvSpPr txBox="1"/>
+          <p:nvPr/>
+        </p:nvSpPr>
+        <p:spPr>
+          <a:xfrm>
+            <a:off x="6355080" y="4937760"/>
+            <a:ext cx="640080" cy="548640"/>
+          </a:xfrm>
+          <a:prstGeom prst="rect">
+            <a:avLst/>
+          </a:prstGeom>
+          <a:noFill/>
+        </p:spPr>
+        <p:txBody>
+          <a:bodyPr wrap="square">
+            <a:spAutoFit/>
+          </a:bodyPr>
+          <a:lstStyle/>
+          <a:p>
+            <a:pPr algn="ctr"/>
+            <a:r>
+              <a:rPr sz="2200" b="1" i="0">
+                <a:solidFill>
+                  <a:srgbClr val="FFFFFF"/>
+                </a:solidFill>
+                <a:latin typeface="Montserrat"/>
+              </a:rPr>
+              <a:t>D</a:t>
+            </a:r>
+          </a:p>
+        </p:txBody>
+      </p:sp>
+      <p:sp>
+        <p:nvSpPr>
+          <p:cNvPr id="23" name="TextBox 22"/>
+          <p:cNvSpPr txBox="1"/>
+          <p:nvPr/>
+        </p:nvSpPr>
+        <p:spPr>
+          <a:xfrm>
+            <a:off x="7132320" y="4800600"/>
+            <a:ext cx="4114800" cy="868680"/>
+          </a:xfrm>
+          <a:prstGeom prst="rect">
+            <a:avLst/>
+          </a:prstGeom>
+          <a:noFill/>
+        </p:spPr>
+        <p:txBody>
+          <a:bodyPr wrap="square">
+            <a:spAutoFit/>
+          </a:bodyPr>
+          <a:lstStyle/>
+          <a:p>
+            <a:r>
+              <a:rPr sz="1400" b="0" i="0">
+                <a:solidFill>
+                  <a:srgbClr val="1B2330"/>
+                </a:solidFill>
+                <a:latin typeface="Montserrat"/>
+              </a:rPr>
+              <a:t>Da igual, la lectura no cambia</a:t>
             </a:r>
           </a:p>
         </p:txBody>
@@ -12030,6 +16716,18 @@
   <p:clrMapOvr>
     <a:masterClrMapping/>
   </p:clrMapOvr>
+  <mc:AlternateContent xmlns:mc="http://schemas.openxmlformats.org/markup-compatibility/2006">
+    <mc:Choice xmlns:p14="http://schemas.microsoft.com/office/powerpoint/2010/main" Requires="p14">
+      <p:transition spd="med" p14:dur="700">
+        <p14:cube dir="l"/>
+      </p:transition>
+    </mc:Choice>
+    <mc:Fallback>
+      <p:transition spd="med">
+        <p:push dir="l"/>
+      </p:transition>
+    </mc:Fallback>
+  </mc:AlternateContent>
 </p:sld>
 </file>
 
@@ -12117,7 +16815,7 @@
                 </a:solidFill>
                 <a:latin typeface="Montserrat"/>
               </a:rPr>
-              <a:t>008 / 018</a:t>
+              <a:t>008 / 024</a:t>
             </a:r>
           </a:p>
         </p:txBody>
@@ -12158,88 +16856,20 @@
       </p:sp>
       <p:sp>
         <p:nvSpPr>
-          <p:cNvPr id="5" name="TextBox 4"/>
-          <p:cNvSpPr txBox="1"/>
-          <p:nvPr/>
-        </p:nvSpPr>
-        <p:spPr>
-          <a:xfrm>
-            <a:off x="822960" y="457200"/>
-            <a:ext cx="10058400" cy="365760"/>
-          </a:xfrm>
-          <a:prstGeom prst="rect">
-            <a:avLst/>
-          </a:prstGeom>
-          <a:noFill/>
-        </p:spPr>
-        <p:txBody>
-          <a:bodyPr wrap="square">
-            <a:spAutoFit/>
-          </a:bodyPr>
-          <a:lstStyle/>
-          <a:p>
-            <a:r>
-              <a:rPr sz="1300" b="1" i="0">
-                <a:solidFill>
-                  <a:srgbClr val="E8801A"/>
-                </a:solidFill>
-                <a:latin typeface="Montserrat"/>
-              </a:rPr>
-              <a:t>PARTE 13 · AP-4</a:t>
-            </a:r>
-          </a:p>
-        </p:txBody>
-      </p:sp>
-      <p:sp>
-        <p:nvSpPr>
-          <p:cNvPr id="6" name="TextBox 5"/>
-          <p:cNvSpPr txBox="1"/>
-          <p:nvPr/>
-        </p:nvSpPr>
-        <p:spPr>
-          <a:xfrm>
-            <a:off x="822960" y="868680"/>
-            <a:ext cx="10515600" cy="914400"/>
-          </a:xfrm>
-          <a:prstGeom prst="rect">
-            <a:avLst/>
-          </a:prstGeom>
-          <a:noFill/>
-        </p:spPr>
-        <p:txBody>
-          <a:bodyPr wrap="square">
-            <a:spAutoFit/>
-          </a:bodyPr>
-          <a:lstStyle/>
-          <a:p>
-            <a:r>
-              <a:rPr sz="2800" b="1" i="0">
-                <a:solidFill>
-                  <a:srgbClr val="1E2761"/>
-                </a:solidFill>
-                <a:latin typeface="Montserrat"/>
-              </a:rPr>
-              <a:t>La campana que roba el tiro</a:t>
-            </a:r>
-          </a:p>
-        </p:txBody>
-      </p:sp>
-      <p:sp>
-        <p:nvSpPr>
-          <p:cNvPr id="7" name="Rounded Rectangle 6"/>
+          <p:cNvPr id="5" name="Rectangle 4"/>
           <p:cNvSpPr/>
           <p:nvPr/>
         </p:nvSpPr>
         <p:spPr>
           <a:xfrm>
-            <a:off x="868680" y="1627632"/>
-            <a:ext cx="2011680" cy="73152"/>
-          </a:xfrm>
-          <a:prstGeom prst="roundRect">
+            <a:off x="0" y="0"/>
+            <a:ext cx="12191695" cy="1143000"/>
+          </a:xfrm>
+          <a:prstGeom prst="rect">
             <a:avLst/>
           </a:prstGeom>
           <a:solidFill>
-            <a:srgbClr val="E8801A"/>
+            <a:srgbClr val="1E8E4B"/>
           </a:solidFill>
           <a:ln>
             <a:noFill/>
@@ -12270,14 +16900,14 @@
       </p:sp>
       <p:sp>
         <p:nvSpPr>
-          <p:cNvPr id="8" name="TextBox 7"/>
+          <p:cNvPr id="6" name="TextBox 5"/>
           <p:cNvSpPr txBox="1"/>
           <p:nvPr/>
         </p:nvSpPr>
         <p:spPr>
           <a:xfrm>
-            <a:off x="822960" y="1965960"/>
-            <a:ext cx="4983480" cy="4206240"/>
+            <a:off x="822960" y="274320"/>
+            <a:ext cx="10515600" cy="640080"/>
           </a:xfrm>
           <a:prstGeom prst="rect">
             <a:avLst/>
@@ -12290,127 +16920,72 @@
           </a:bodyPr>
           <a:lstStyle/>
           <a:p>
-            <a:pPr>
-              <a:spcAft>
-                <a:spcPts val="1100"/>
-              </a:spcAft>
-            </a:pPr>
-            <a:r>
-              <a:rPr sz="1600" b="1" i="0">
-                <a:solidFill>
-                  <a:srgbClr val="E8801A"/>
-                </a:solidFill>
-                <a:latin typeface="Montserrat"/>
-              </a:rPr>
-              <a:t>▸  </a:t>
-            </a:r>
-            <a:r>
-              <a:rPr sz="1600" b="0" i="0">
-                <a:solidFill>
-                  <a:srgbClr val="1B2330"/>
-                </a:solidFill>
-                <a:latin typeface="Montserrat"/>
-              </a:rPr>
-              <a:t>Tipo B tiro natural junto a campana potente</a:t>
-            </a:r>
-          </a:p>
-          <a:p>
-            <a:pPr>
-              <a:spcAft>
-                <a:spcPts val="1100"/>
-              </a:spcAft>
-            </a:pPr>
-            <a:r>
-              <a:rPr sz="1600" b="1" i="0">
-                <a:solidFill>
-                  <a:srgbClr val="E8801A"/>
-                </a:solidFill>
-                <a:latin typeface="Montserrat"/>
-              </a:rPr>
-              <a:t>▸  </a:t>
-            </a:r>
-            <a:r>
-              <a:rPr sz="1600" b="0" i="0">
-                <a:solidFill>
-                  <a:srgbClr val="1B2330"/>
-                </a:solidFill>
-                <a:latin typeface="Montserrat"/>
-              </a:rPr>
-              <a:t>Sin enclavamiento ni detector de CO</a:t>
-            </a:r>
-          </a:p>
-          <a:p>
-            <a:pPr>
-              <a:spcAft>
-                <a:spcPts val="1100"/>
-              </a:spcAft>
-            </a:pPr>
-            <a:r>
-              <a:rPr sz="1600" b="1" i="0">
-                <a:solidFill>
-                  <a:srgbClr val="E8801A"/>
-                </a:solidFill>
-                <a:latin typeface="Montserrat"/>
-              </a:rPr>
-              <a:t>▸  </a:t>
-            </a:r>
-            <a:r>
-              <a:rPr sz="1600" b="0" i="0">
-                <a:solidFill>
-                  <a:srgbClr val="1B2330"/>
-                </a:solidFill>
-                <a:latin typeface="Montserrat"/>
-              </a:rPr>
-              <a:t>Con campana a tope: revoco o CO &gt; 50 ppm</a:t>
-            </a:r>
-          </a:p>
-          <a:p>
-            <a:pPr>
-              <a:spcAft>
-                <a:spcPts val="1100"/>
-              </a:spcAft>
-            </a:pPr>
-            <a:r>
-              <a:rPr sz="1600" b="1" i="0">
-                <a:solidFill>
-                  <a:srgbClr val="E8801A"/>
-                </a:solidFill>
-                <a:latin typeface="Montserrat"/>
-              </a:rPr>
-              <a:t>▸  </a:t>
-            </a:r>
-            <a:r>
-              <a:rPr sz="1600" b="0" i="0">
-                <a:solidFill>
-                  <a:srgbClr val="1B2330"/>
-                </a:solidFill>
-                <a:latin typeface="Montserrat"/>
-              </a:rPr>
-              <a:t>Interferencia grave: principal AP-4</a:t>
-            </a:r>
-          </a:p>
-        </p:txBody>
-      </p:sp>
-      <p:sp>
-        <p:nvSpPr>
-          <p:cNvPr id="9" name="imgph" descr="IMGQ:kitchen extractor hood over gas cooktop"/>
+            <a:r>
+              <a:rPr sz="2400" b="1" i="0">
+                <a:solidFill>
+                  <a:srgbClr val="FFFFFF"/>
+                </a:solidFill>
+                <a:latin typeface="Montserrat"/>
+              </a:rPr>
+              <a:t>✔  RESPUESTA:  B</a:t>
+            </a:r>
+          </a:p>
+        </p:txBody>
+      </p:sp>
+      <p:sp>
+        <p:nvSpPr>
+          <p:cNvPr id="7" name="TextBox 6"/>
+          <p:cNvSpPr txBox="1"/>
+          <p:nvPr/>
+        </p:nvSpPr>
+        <p:spPr>
+          <a:xfrm>
+            <a:off x="822960" y="1417320"/>
+            <a:ext cx="10515600" cy="914400"/>
+          </a:xfrm>
+          <a:prstGeom prst="rect">
+            <a:avLst/>
+          </a:prstGeom>
+          <a:noFill/>
+        </p:spPr>
+        <p:txBody>
+          <a:bodyPr wrap="square">
+            <a:spAutoFit/>
+          </a:bodyPr>
+          <a:lstStyle/>
+          <a:p>
+            <a:r>
+              <a:rPr sz="1800" b="1" i="0">
+                <a:solidFill>
+                  <a:srgbClr val="64748B"/>
+                </a:solidFill>
+                <a:latin typeface="Montserrat"/>
+              </a:rPr>
+              <a:t>¿En qué condiciones se mide el CO-ambiente de un local?</a:t>
+            </a:r>
+          </a:p>
+        </p:txBody>
+      </p:sp>
+      <p:sp>
+        <p:nvSpPr>
+          <p:cNvPr id="8" name="Rounded Rectangle 7"/>
           <p:cNvSpPr/>
           <p:nvPr/>
         </p:nvSpPr>
         <p:spPr>
           <a:xfrm>
-            <a:off x="5806440" y="1051560"/>
-            <a:ext cx="5298947" cy="4629150"/>
+            <a:off x="822960" y="2514600"/>
+            <a:ext cx="10515600" cy="914400"/>
           </a:xfrm>
           <a:prstGeom prst="roundRect">
             <a:avLst/>
           </a:prstGeom>
           <a:solidFill>
-            <a:srgbClr val="F3F6FB"/>
+            <a:srgbClr val="E9F6EE"/>
           </a:solidFill>
           <a:ln w="12700">
             <a:solidFill>
-              <a:srgbClr val="C7D2E6"/>
+              <a:srgbClr val="1E8E4B"/>
             </a:solidFill>
           </a:ln>
           <a:effectLst/>
@@ -12439,14 +17014,14 @@
       </p:sp>
       <p:sp>
         <p:nvSpPr>
-          <p:cNvPr id="10" name="TextBox 9"/>
+          <p:cNvPr id="9" name="TextBox 8"/>
           <p:cNvSpPr txBox="1"/>
           <p:nvPr/>
         </p:nvSpPr>
         <p:spPr>
           <a:xfrm>
-            <a:off x="6080760" y="2726055"/>
-            <a:ext cx="4750307" cy="1280160"/>
+            <a:off x="1097280" y="2697480"/>
+            <a:ext cx="10058400" cy="640080"/>
           </a:xfrm>
           <a:prstGeom prst="rect">
             <a:avLst/>
@@ -12459,27 +17034,66 @@
           </a:bodyPr>
           <a:lstStyle/>
           <a:p>
-            <a:pPr algn="ctr"/>
-            <a:r>
-              <a:rPr sz="1400" b="1" i="0">
-                <a:solidFill>
-                  <a:srgbClr val="64748B"/>
-                </a:solidFill>
-                <a:latin typeface="Montserrat"/>
-              </a:rPr>
-              <a:t>IMAGEN REALISTA</a:t>
-            </a:r>
-          </a:p>
-          <a:p>
-            <a:pPr algn="ctr"/>
-            <a:r>
-              <a:rPr sz="1100" b="0" i="1">
-                <a:solidFill>
-                  <a:srgbClr val="64748B"/>
-                </a:solidFill>
-                <a:latin typeface="Montserrat"/>
-              </a:rPr>
-              <a:t>kitchen extractor hood over gas cooktop</a:t>
+            <a:r>
+              <a:rPr sz="1800" b="1" i="0">
+                <a:solidFill>
+                  <a:srgbClr val="1E8E4B"/>
+                </a:solidFill>
+                <a:latin typeface="Montserrat"/>
+              </a:rPr>
+              <a:t>B.  </a:t>
+            </a:r>
+            <a:r>
+              <a:rPr sz="1800" b="1" i="0">
+                <a:solidFill>
+                  <a:srgbClr val="1E2761"/>
+                </a:solidFill>
+                <a:latin typeface="Montserrat"/>
+              </a:rPr>
+              <a:t>Con puertas y ventanas cerradas y campana apagada</a:t>
+            </a:r>
+          </a:p>
+        </p:txBody>
+      </p:sp>
+      <p:sp>
+        <p:nvSpPr>
+          <p:cNvPr id="10" name="TextBox 9"/>
+          <p:cNvSpPr txBox="1"/>
+          <p:nvPr/>
+        </p:nvSpPr>
+        <p:spPr>
+          <a:xfrm>
+            <a:off x="822960" y="3749039"/>
+            <a:ext cx="10515600" cy="2194560"/>
+          </a:xfrm>
+          <a:prstGeom prst="rect">
+            <a:avLst/>
+          </a:prstGeom>
+          <a:noFill/>
+        </p:spPr>
+        <p:txBody>
+          <a:bodyPr wrap="square">
+            <a:spAutoFit/>
+          </a:bodyPr>
+          <a:lstStyle/>
+          <a:p>
+            <a:r>
+              <a:rPr sz="1500" b="1" i="0">
+                <a:solidFill>
+                  <a:srgbClr val="E8801A"/>
+                </a:solidFill>
+                <a:latin typeface="Montserrat"/>
+              </a:rPr>
+              <a:t>Por qué:  </a:t>
+            </a:r>
+            <a:r>
+              <a:rPr sz="1500" b="0" i="0">
+                <a:solidFill>
+                  <a:srgbClr val="1B2330"/>
+                </a:solidFill>
+                <a:latin typeface="Montserrat"/>
+              </a:rPr>
+              <a:t>Se mide en el caso más desfavorable: puertas y ventanas cerradas y campana apagada, para no diluir el monóxido con aire limpio.</a:t>
             </a:r>
           </a:p>
         </p:txBody>
@@ -12489,6 +17103,18 @@
   <p:clrMapOvr>
     <a:masterClrMapping/>
   </p:clrMapOvr>
+  <mc:AlternateContent xmlns:mc="http://schemas.openxmlformats.org/markup-compatibility/2006">
+    <mc:Choice xmlns:p14="http://schemas.microsoft.com/office/powerpoint/2010/main" Requires="p14">
+      <p:transition spd="med" p14:dur="700">
+        <p14:cube dir="r"/>
+      </p:transition>
+    </mc:Choice>
+    <mc:Fallback>
+      <p:transition spd="med">
+        <p:push dir="r"/>
+      </p:transition>
+    </mc:Fallback>
+  </mc:AlternateContent>
 </p:sld>
 </file>
 
@@ -12576,7 +17202,7 @@
                 </a:solidFill>
                 <a:latin typeface="Montserrat"/>
               </a:rPr>
-              <a:t>009 / 018</a:t>
+              <a:t>009 / 024</a:t>
             </a:r>
           </a:p>
         </p:txBody>
@@ -12644,7 +17270,7 @@
                 </a:solidFill>
                 <a:latin typeface="Montserrat"/>
               </a:rPr>
-              <a:t>PARTE 13 · AS-1 Y AS-2</a:t>
+              <a:t>PARTE 13 · AP-2 Y AP-3</a:t>
             </a:r>
           </a:p>
         </p:txBody>
@@ -12678,14 +17304,14 @@
                 </a:solidFill>
                 <a:latin typeface="Montserrat"/>
               </a:rPr>
-              <a:t>Revoco e interferencia moderados</a:t>
-            </a:r>
-          </a:p>
-        </p:txBody>
-      </p:sp>
-      <p:sp>
-        <p:nvSpPr>
-          <p:cNvPr id="7" name="Rounded Rectangle 6"/>
+              <a:t>Combustión no higiénica y falta de AS</a:t>
+            </a:r>
+          </a:p>
+        </p:txBody>
+      </p:sp>
+      <p:sp>
+        <p:nvSpPr>
+          <p:cNvPr id="7" name="Rectangle 6"/>
           <p:cNvSpPr/>
           <p:nvPr/>
         </p:nvSpPr>
@@ -12694,7 +17320,7 @@
             <a:off x="868680" y="1627632"/>
             <a:ext cx="2011680" cy="73152"/>
           </a:xfrm>
-          <a:prstGeom prst="roundRect">
+          <a:prstGeom prst="rect">
             <a:avLst/>
           </a:prstGeom>
           <a:solidFill>
@@ -12736,7 +17362,7 @@
         <p:spPr>
           <a:xfrm>
             <a:off x="822960" y="1965960"/>
-            <a:ext cx="4983480" cy="4206240"/>
+            <a:ext cx="5029200" cy="4206240"/>
           </a:xfrm>
           <a:prstGeom prst="rect">
             <a:avLst/>
@@ -12770,7 +17396,7 @@
                 </a:solidFill>
                 <a:latin typeface="Montserrat"/>
               </a:rPr>
-              <a:t>CO-ambiente entre 15 y 50 ppm: moderado</a:t>
+              <a:t>CO en el conducto (CO-PdC) &gt; 1000 ppm</a:t>
             </a:r>
           </a:p>
           <a:p>
@@ -12795,7 +17421,7 @@
                 </a:solidFill>
                 <a:latin typeface="Montserrat"/>
               </a:rPr>
-              <a:t>Por CO₂: entre 2500 y 5000 ppm</a:t>
+              <a:t>Combustión no higiénica: principal AP-2</a:t>
             </a:r>
           </a:p>
           <a:p>
@@ -12820,7 +17446,7 @@
                 </a:solidFill>
                 <a:latin typeface="Montserrat"/>
               </a:rPr>
-              <a:t>AS-1 revoco; AS-2 campana</a:t>
+              <a:t>Procedimiento del anexo A</a:t>
             </a:r>
           </a:p>
           <a:p>
@@ -12845,21 +17471,21 @@
                 </a:solidFill>
                 <a:latin typeface="Montserrat"/>
               </a:rPr>
-              <a:t>AS-2: instrucciones escritas de no usar a la vez</a:t>
-            </a:r>
-          </a:p>
-        </p:txBody>
-      </p:sp>
-      <p:sp>
-        <p:nvSpPr>
-          <p:cNvPr id="9" name="imgph" descr="IMGQ:written safety instructions note kitchen appliance"/>
+              <a:t>Falta del dispositivo de atmósfera: AP-3</a:t>
+            </a:r>
+          </a:p>
+        </p:txBody>
+      </p:sp>
+      <p:sp>
+        <p:nvSpPr>
+          <p:cNvPr id="9" name="imgph" descr="IMGQ:flue gas analyzer measuring boiler exhaust"/>
           <p:cNvSpPr/>
           <p:nvPr/>
         </p:nvSpPr>
         <p:spPr>
           <a:xfrm>
-            <a:off x="5806440" y="1051560"/>
-            <a:ext cx="5298947" cy="4629150"/>
+            <a:off x="6080760" y="1965960"/>
+            <a:ext cx="5303520" cy="4572000"/>
           </a:xfrm>
           <a:prstGeom prst="roundRect">
             <a:avLst/>
@@ -12904,8 +17530,8 @@
         </p:nvSpPr>
         <p:spPr>
           <a:xfrm>
-            <a:off x="6080760" y="2726055"/>
-            <a:ext cx="4750307" cy="1280160"/>
+            <a:off x="6355080" y="3611880"/>
+            <a:ext cx="4754880" cy="1280160"/>
           </a:xfrm>
           <a:prstGeom prst="rect">
             <a:avLst/>
@@ -12926,7 +17552,7 @@
                 </a:solidFill>
                 <a:latin typeface="Montserrat"/>
               </a:rPr>
-              <a:t>IMAGEN REALISTA</a:t>
+              <a:t>IMAGEN</a:t>
             </a:r>
           </a:p>
           <a:p>
@@ -12938,7 +17564,7 @@
                 </a:solidFill>
                 <a:latin typeface="Montserrat"/>
               </a:rPr>
-              <a:t>written safety instructions note kitchen appliance</a:t>
+              <a:t>flue gas analyzer measuring boiler exhaust</a:t>
             </a:r>
           </a:p>
         </p:txBody>
@@ -12948,6 +17574,18 @@
   <p:clrMapOvr>
     <a:masterClrMapping/>
   </p:clrMapOvr>
+  <mc:AlternateContent xmlns:mc="http://schemas.openxmlformats.org/markup-compatibility/2006">
+    <mc:Choice xmlns:p14="http://schemas.microsoft.com/office/powerpoint/2010/main" Requires="p14">
+      <p:transition spd="med" p14:dur="700">
+        <p14:cube dir="l"/>
+      </p:transition>
+    </mc:Choice>
+    <mc:Fallback>
+      <p:transition spd="med">
+        <p:push dir="l"/>
+      </p:transition>
+    </mc:Fallback>
+  </mc:AlternateContent>
 </p:sld>
 </file>
 

--- a/Curso Gas B/16 - UNE 60670 - Instalaciones en servicio y control periodico/16 - UNE 60670 - Instalaciones en servicio y control periodico - Vídeo 4.pptx
+++ b/Curso Gas B/16 - UNE 60670 - Instalaciones en servicio y control periodico/16 - UNE 60670 - Instalaciones en servicio y control periodico - Vídeo 4.pptx
@@ -865,7 +865,7 @@
           <a:lstStyle/>
           <a:p>
             <a:r>
-              <a:t>N1: La trampa estrella del vídeo. Mil partes por millón de monóxido: ¿de dónde es ese número?</a:t>
+              <a:t>N1: La trampa estrella del vídeo. Escucha la pregunta y las cuatro opciones. Mil partes por millón de monóxido de carbono, ¿a qué medida corresponde ese límite? Opción A, al CO del aire del local, el CO-ambiente; opción B, al CO medido dentro del conducto de humos; opción C, al dióxido de carbono ambiente; opción D, al oxígeno de la vena de humos. Tómate un segundo.</a:t>
             </a:r>
           </a:p>
           <a:p>
@@ -940,12 +940,12 @@
           <a:lstStyle/>
           <a:p>
             <a:r>
-              <a:t>N1: ¿Por qué del conducto y no del aire del local?</a:t>
-            </a:r>
-          </a:p>
-          <a:p>
-            <a:r>
-              <a:t>N2: Porque son dos escaleras distintas que no puedes mezclar. Cincuenta es el CO-ambiente, el del aire del local. Quinientas y mil son el CO dentro del conducto de humos: por encima de mil, combustión no higiénica, principal. Ten clavados los tres números y colocas cualquier medida en su sitio.</a:t>
+              <a:t>N2: La respuesta correcta es la opción B: al CO medido dentro del conducto de humos. Son dos escaleras distintas que no puedes mezclar: cincuenta es el CO-ambiente, el del aire del local; quinientas y mil son el CO dentro del conducto, y por encima de mil ya es combustión no higiénica, principal. Ten clavados esos tres números y colocas cualquier medida en su sitio.</a:t>
+            </a:r>
+          </a:p>
+          <a:p>
+            <a:r>
+              <a:t>N1: Mil es del conducto; cincuenta, del aire del local.</a:t>
             </a:r>
           </a:p>
         </p:txBody>
@@ -1515,7 +1515,7 @@
           <a:lstStyle/>
           <a:p>
             <a:r>
-              <a:t>N1: De cifras del anexo, que caen tal cual. ¿Cada cuánto se calibra el analizador de combustión?</a:t>
+              <a:t>N1: De cifras del anexo, que caen tal cual. Escucha la pregunta y las cuatro opciones. ¿Cada cuánto tiempo, como máximo, hay que calibrar el analizador de combustión? Opción A, cada seis meses; opción B, cada doce meses; opción C, cada dieciocho meses; opción D, cada cinco años. Piénsalo un momento.</a:t>
             </a:r>
           </a:p>
           <a:p>
@@ -1590,12 +1590,12 @@
           <a:lstStyle/>
           <a:p>
             <a:r>
-              <a:t>N1: ¿Por qué dieciocho meses?</a:t>
-            </a:r>
-          </a:p>
-          <a:p>
-            <a:r>
-              <a:t>N2: Porque un analizador descalibrado te da una medida falsa y firmarías como bueno un aparato peligroso. Por eso se comprueba, por el fabricante o por un laboratorio acreditado, en periodos que nunca superen los dieciocho meses. No lo confundas con los cinco años, que es cuánto se guarda el registro documental.</a:t>
+              <a:t>N2: La respuesta correcta es la opción C: cada dieciocho meses. Un analizador descalibrado te da una medida falsa y firmarías como bueno un aparato peligroso, por eso se comprueba, por el fabricante o por un laboratorio acreditado, en periodos que nunca superen los dieciocho meses. No lo confundas con los cinco años, que es lo que se guarda el registro documental.</a:t>
+            </a:r>
+          </a:p>
+          <a:p>
+            <a:r>
+              <a:t>N1: Dieciocho meses la calibración; cinco años, el papel.</a:t>
             </a:r>
           </a:p>
         </p:txBody>
@@ -2260,7 +2260,7 @@
           <a:lstStyle/>
           <a:p>
             <a:r>
-              <a:t>N1: De procedimiento fino. ¿Con qué condiciones de puertas, ventanas y campana se mide el CO del aire del local?</a:t>
+              <a:t>N1: De procedimiento fino. Escucha la pregunta y las cuatro opciones. ¿En qué condiciones se mide el CO-ambiente de un local, es decir, el monóxido del aire? Opción A, con puertas y ventanas abiertas y campana encendida; opción B, con puertas y ventanas cerradas y campana apagada; opción C, solo con la ventana del baño abierta; opción D, da igual, la lectura no cambia. Piénsalo un momento.</a:t>
             </a:r>
           </a:p>
           <a:p>
@@ -2335,12 +2335,12 @@
           <a:lstStyle/>
           <a:p>
             <a:r>
-              <a:t>N1: ¿Por qué con todo cerrado?</a:t>
-            </a:r>
-          </a:p>
-          <a:p>
-            <a:r>
-              <a:t>N2: Porque queremos el peor escenario. Con las ventanas abiertas, el aire limpio diluiría el monóxido y te daría una lectura falsamente buena. Cerrado y con la campana apagada compruebas qué pasa cuando la familia tiene la cocina cerrada en invierno, que es cuando hay riesgo de verdad.</a:t>
+              <a:t>N2: La respuesta correcta es la opción B: con puertas y ventanas cerradas y campana apagada. Se mide en el peor escenario: con las ventanas abiertas, el aire limpio diluiría el monóxido y te daría una lectura falsamente buena. Cerrado y con la campana apagada compruebas qué pasa cuando la familia tiene la cocina cerrada en invierno, que es cuando hay riesgo de verdad.</a:t>
+            </a:r>
+          </a:p>
+          <a:p>
+            <a:r>
+              <a:t>N1: Todo cerrado: así ves el caso más desfavorable.</a:t>
             </a:r>
           </a:p>
         </p:txBody>
